--- a/evidence/2026-08-22-demo-day/Nahui - Pitch Demo Day v2.pptx
+++ b/evidence/2026-08-22-demo-day/Nahui - Pitch Demo Day v2.pptx
@@ -15,6 +15,7 @@
     <p:sldId id="263" r:id="rId15"/>
     <p:sldId id="264" r:id="rId16"/>
     <p:sldId id="265" r:id="rId17"/>
+    <p:sldId id="266" r:id="rId18"/>
   </p:sldIdLst>
   <p:sldSz cx="12192000" cy="6858000" type="screen4x3"/>
   <p:notesSz cx="6858000" cy="9144000"/>
@@ -593,13 +594,89 @@
           <a:lstStyle/>
           <a:p>
             <a:r>
-              <a:t>Esto es Nahui hoy: un prototipo real, funcionando, probado, con una campaña real detrás que nos enseñó que el alcance no es el problema, la adopción sí. Y con un equipo de agentes que revisa, corrige y vuelve a comprobar cada cosa antes de darla por buena.</a:t>
+              <a:t>Esta línea de tiempo no es una lista de entregables. Cada punto existe porque resolvió un problema real que apareció en el camino, no porque estuviera planeado desde el inicio.</a:t>
             </a:r>
           </a:p>
           <a:p/>
           <a:p>
             <a:r>
-              <a:t>Todavía no lo tenemos todo resuelto, y está bien decirlo así. Ahí les dejo el demo y el repositorio. Gracias.</a:t>
+              <a:t>Y aquí quiero ser clara sobre algo: no soy experta en sistemas agénticos de inteligencia artificial, no sé optimizar el consumo de tokens con precisión técnica. Varias decisiones técnicas del camino tampoco las tomé sola, cambié de herramienta de diseño por recomendación directa de la maestra, y usar un equipo de agentes especializados en vez de una sola IA generalista fue algo que ella mencionó como mejor práctica. Entender cómo funciona realmente de fondo lo aprendí después, trabajando con mi propio equipo.</a:t>
+            </a:r>
+          </a:p>
+        </p:txBody>
+      </p:sp>
+      <p:sp>
+        <p:nvSpPr>
+          <p:cNvPr id="4" name="Slide Number Placeholder 3"/>
+          <p:cNvSpPr>
+            <a:spLocks noGrp="1"/>
+          </p:cNvSpPr>
+          <p:nvPr>
+            <p:ph type="sldNum" idx="5" sz="quarter"/>
+          </p:nvPr>
+        </p:nvSpPr>
+        <p:spPr/>
+      </p:sp>
+    </p:spTree>
+  </p:cSld>
+  <p:clrMapOvr>
+    <a:masterClrMapping/>
+  </p:clrMapOvr>
+</p:notes>
+</file>
+
+<file path=ppt/notesSlides/notesSlide11.xml><?xml version="1.0" encoding="utf-8"?>
+<p:notes xmlns:a="http://schemas.openxmlformats.org/drawingml/2006/main" xmlns:p="http://schemas.openxmlformats.org/presentationml/2006/main" xmlns:r="http://schemas.openxmlformats.org/officeDocument/2006/relationships">
+  <p:cSld>
+    <p:spTree>
+      <p:nvGrpSpPr>
+        <p:cNvPr id="1" name=""/>
+        <p:cNvGrpSpPr/>
+        <p:nvPr/>
+      </p:nvGrpSpPr>
+      <p:grpSpPr>
+        <a:xfrm>
+          <a:off x="0" y="0"/>
+          <a:ext cx="0" cy="0"/>
+          <a:chOff x="0" y="0"/>
+          <a:chExt cx="0" cy="0"/>
+        </a:xfrm>
+      </p:grpSpPr>
+      <p:sp>
+        <p:nvSpPr>
+          <p:cNvPr id="2" name="Slide Image Placeholder 1"/>
+          <p:cNvSpPr>
+            <a:spLocks noGrp="1"/>
+          </p:cNvSpPr>
+          <p:nvPr>
+            <p:ph type="sldImg" idx="2"/>
+          </p:nvPr>
+        </p:nvSpPr>
+        <p:spPr/>
+      </p:sp>
+      <p:sp>
+        <p:nvSpPr>
+          <p:cNvPr id="3" name="Notes Placeholder 2"/>
+          <p:cNvSpPr>
+            <a:spLocks noGrp="1"/>
+          </p:cNvSpPr>
+          <p:nvPr>
+            <p:ph type="body" idx="3" sz="quarter"/>
+          </p:nvPr>
+        </p:nvSpPr>
+        <p:spPr/>
+        <p:txBody>
+          <a:bodyPr/>
+          <a:lstStyle/>
+          <a:p>
+            <a:r>
+              <a:t>Esto es Nahui hoy: un prototipo real, funcionando, probado, con una campaña real detrás que nos enseñó que el alcance no es el problema, la adopción sí, y que esa lección la aprendimos a mitad de camino, no de entrada. Y un equipo de agentes que revisa, corrige y vuelve a comprobar cada cosa antes de darla por buena.</a:t>
+            </a:r>
+          </a:p>
+          <a:p/>
+          <a:p>
+            <a:r>
+              <a:t>Todavía no lo tenemos todo resuelto, y está bien decirlo así, con esas palabras exactas. Ahí les dejo el demo y el repositorio, ambos están en el documento que les compartí. Gracias.</a:t>
             </a:r>
           </a:p>
         </p:txBody>
@@ -754,6 +831,12 @@
               <a:t>Esto que ven aquí no es un mockup, es el prototipo real, funcionando, probado con Ana en persona. Este es el estado inicial: venta rápida, con las categorías que ella misma usa, playeras y blusas.</a:t>
             </a:r>
           </a:p>
+          <a:p/>
+          <a:p>
+            <a:r>
+              <a:t>Así se registra una venta. Un toque por producto. El total se arma solo, en el momento exacto de la venta, sin que Ana tenga que hacer cuentas ni pausar para anotar nada.</a:t>
+            </a:r>
+          </a:p>
         </p:txBody>
       </p:sp>
       <p:sp>
@@ -821,7 +904,7 @@
           <a:lstStyle/>
           <a:p>
             <a:r>
-              <a:t>Así se registra una venta. Un toque por producto. El total se arma solo, en el momento exacto de la venta, sin que Ana tenga que hacer cuentas ni pausar para anotar nada.</a:t>
+              <a:t>Y aquí queda guardada. Recibo digital, venta finalizada, total confirmado. Nunca más se pierde el registro de una venta, aunque llegue el siguiente cliente sin avisar, que es exactamente lo que pasa todo el tiempo en un bazar real.</a:t>
             </a:r>
           </a:p>
         </p:txBody>
@@ -891,7 +974,25 @@
           <a:lstStyle/>
           <a:p>
             <a:r>
-              <a:t>Y aquí queda guardada. Recibo digital, venta finalizada, total confirmado. Nunca más se pierde el registro de una venta, aunque llegue el siguiente cliente sin avisar, que es exactamente lo que pasa todo el tiempo en un bazar real.</a:t>
+              <a:t>Esta es la diapositiva más difícil de todas, y también la más útil.</a:t>
+            </a:r>
+          </a:p>
+          <a:p/>
+          <a:p>
+            <a:r>
+              <a:t>Corrimos una campaña real de Meta del 17 al 20 de agosto, tres días, 569 pesos gastados, 731 visitas a la página a 78 centavos cada una. El alcance funciona, y es barato.</a:t>
+            </a:r>
+          </a:p>
+          <a:p/>
+          <a:p>
+            <a:r>
+              <a:t>Pero Vercel confirmó algo distinto: 583 visitantes reales llegaron al sitio, y solo 2 de ellos dispararon algún evento del recorrido del demo, registro, verificación, cuestionario. Eso es 0.34 por ciento.</a:t>
+            </a:r>
+          </a:p>
+          <a:p/>
+          <a:p>
+            <a:r>
+              <a:t>No lo descubrimos el primer día de campaña. La instrumentación para medir esto se terminó de construir a mitad del camino. De esos 583, solamente 227 llegaron ya con el recorrido completo midiéndose. Y ni siquiera con eso, la aguja se movió. El alcance no es el problema. La adopción real, todavía no la tenemos resuelta, y la causa exacta, todavía no está confirmada.</a:t>
             </a:r>
           </a:p>
         </p:txBody>
@@ -961,25 +1062,19 @@
           <a:lstStyle/>
           <a:p>
             <a:r>
-              <a:t>Esta es la diapositiva más difícil de todas, y también la más útil.</a:t>
+              <a:t>Ahora quiero hablarles de algo muy concreto: cuánto cuesta esto en realidad, y qué tan lista está la base técnica.</a:t>
             </a:r>
           </a:p>
           <a:p/>
           <a:p>
             <a:r>
-              <a:t>Corrimos una campaña real de Meta del 17 al 20 de agosto, tres días, 569 pesos gastados, 731 visitas a la página a 78 centavos cada una. El alcance funciona, y es barato.</a:t>
+              <a:t>El modelo de dominio ya está congelado, ventas, productos, sesiones, eventos, negocio, no hay nada nuevo que inventar, solo persistirlo en una base real. La infraestructura ya está decidida: React y TypeScript en Vercel, con Supabase de backend, un solo proveedor en vez de varios, justo para esta escala de piloto. El NFC, que era mi mayor duda técnica, también quedó resuelto: en Android funciona directo dentro de la misma aplicación, y en iOS lo resolví con un shell nativo delgado, solo para esa función, no una segunda app completa. Lo que le importa a Ana, nunca tener que comprar un lector aparte, queda cubierto en los dos casos.</a:t>
             </a:r>
           </a:p>
           <a:p/>
           <a:p>
             <a:r>
-              <a:t>Pero Vercel confirmó algo distinto: 583 visitantes reales llegaron al sitio, y solo 2 de ellos dispararon algún evento del recorrido del demo, registro, verificación, cuestionario. Eso es 0.34 por ciento.</a:t>
-            </a:r>
-          </a:p>
-          <a:p/>
-          <a:p>
-            <a:r>
-              <a:t>No lo descubrimos el primer día. La instrumentación para medir esto se terminó de construir a mitad de la campaña. El alcance no es el problema. La adopción real, todavía no la tenemos, y la causa exacta todavía no está confirmada.</a:t>
+              <a:t>Y los números que sí duelen un poco: hasta hoy he invertido, en un solo pago, unos 626 pesos. La herramienta con la que construyo junto a mi equipo de agentes cuesta 100 dólares al mes, cerca de 1,850 pesos, gasto real y recurrente. Operar esto en producción me costaría alrededor de 830 pesos al mes, todavía una cotización, no un gasto real. Y el costo por venta registrada, calculado sobre un supuesto de tres comerciantes y 180 ventas al mes, ronda los 3.90 pesos, un número que no he validado con datos reales todavía. Lo que no les puedo dar hoy es un retorno esperado, porque no tengo un precio decidido, solo principios: sin comisión por transacción, precio fijo o estacional.</a:t>
             </a:r>
           </a:p>
         </p:txBody>
@@ -1049,19 +1144,19 @@
           <a:lstStyle/>
           <a:p>
             <a:r>
-              <a:t>Nahui no la construyo yo sola escribiendo código. La construye un equipo de agentes de inteligencia artificial especializados, no una sola IA generalista.</a:t>
+              <a:t>Y ahora la pregunta que cualquier panel debería hacerme: qué puede detener esto.</a:t>
             </a:r>
           </a:p>
           <a:p/>
           <a:p>
             <a:r>
-              <a:t>Cada uno tiene una sola función y su propio límite de autoridad. Architect solo lee y opina sobre el modelo del negocio. Ux-designer y ui-designer diseñan y construyen. Ux-critic y reviewer revisan antes de que algo se dé por bueno.</a:t>
+              <a:t>Tengo cinco riesgos identificados, y se los doy tal como los clasifiqué, sin suavizarlos. Depender de un solo proveedor de infraestructura, Supabase y Vercel, probabilidad alta, impacto alto. Exponer datos sensibles de comerciantes o de sus clientes, hoy la probabilidad es baja porque no hay datos reales en producción, pero el impacto sigue siendo alto. Que la adopción real no se confirme, y este es el que ya está pasando, alta probabilidad, alto impacto. No tener todavía un modelo de precios decidido, media a alta. Y, mirando más adelante, sesgo en las recomendaciones que Nahui algún día haga de forma proactiva, hoy es baja probabilidad porque esa función ni siquiera existe todavía, pero el impacto sería alto.</a:t>
             </a:r>
           </a:p>
           <a:p/>
           <a:p>
             <a:r>
-              <a:t>Y merchant-user-tester, el más importante de todos para mí, no tiene acceso a ningún archivo del proyecto, solo puede navegar el producto como lo haría una vendedora real que nunca lo ha visto. Main coordina y persiste todo esto, pero nunca decide en lugar de los demás.</a:t>
+              <a:t>Cada uno de estos ya tiene quién lo levanta y cómo se traduce en acción. La exposición de datos la resuelve un aviso de privacidad explícito antes de recolectar cualquier dato, con asesoría legal real. La dependencia de un solo proveedor se resuelve exportando los datos periódicamente antes de comprometerme más allá del piloto. El precio sin decidir se resuelve investigando precios comparables de otras herramientas para pequeños comerciantes en México. Y la adopción no confirmada, ese no es un bloqueo externo, me toca resolverlo a mí, y el piloto Concierge que les mencioné es justo esa respuesta, ya en marcha.</a:t>
             </a:r>
           </a:p>
         </p:txBody>
@@ -1131,13 +1226,19 @@
           <a:lstStyle/>
           <a:p>
             <a:r>
-              <a:t>Nada en Nahui se da por cerrado sin comprobarlo contra el producto real. Diseñamos, revisamos, construimos, y ahí es donde entra lo que de verdad importa: el hallazgo real. No una suposición, un hallazgo real, de una prueba con Ana o de una campaña de verdad.</a:t>
+              <a:t>Nahui no la construyo yo sola escribiendo código. La construye un equipo de agentes de inteligencia artificial especializados, no una sola IA generalista.</a:t>
             </a:r>
           </a:p>
           <a:p/>
           <a:p>
             <a:r>
-              <a:t>Ese hallazgo dispara una corrección, y la corrección se vuelve a validar contra el producto real antes de darse por cerrada. Nunca se confía sin comprobar.</a:t>
+              <a:t>Cada uno tiene una sola función y su propio límite de autoridad. Architect solo lee y opina sobre el modelo del negocio. Ux-designer y ui-designer diseñan y construyen. Ux-critic y reviewer revisan antes de que algo se dé por bueno.</a:t>
+            </a:r>
+          </a:p>
+          <a:p/>
+          <a:p>
+            <a:r>
+              <a:t>Y merchant-user-tester, el más importante de todos para mí, no tiene acceso a ningún archivo del proyecto, solo puede navegar el producto como lo haría una vendedora real que nunca lo ha visto. Main coordina y persiste todo esto, pero nunca decide en lugar de los demás.</a:t>
             </a:r>
           </a:p>
         </p:txBody>
@@ -1207,13 +1308,13 @@
           <a:lstStyle/>
           <a:p>
             <a:r>
-              <a:t>Esta línea de tiempo no es una lista de entregables. Cada punto existe porque resolvió un problema real que apareció en el camino, no porque estuviera planeado desde el inicio.</a:t>
+              <a:t>Nada en Nahui se da por cerrado sin comprobarlo contra el producto real. Diseñamos, revisamos, construimos, y ahí es donde entra lo que de verdad importa: el hallazgo real. No una suposición, un hallazgo real, de una prueba con Ana o de una campaña de verdad.</a:t>
             </a:r>
           </a:p>
           <a:p/>
           <a:p>
             <a:r>
-              <a:t>Y aquí quiero ser clara sobre algo: no soy experta en sistemas agénticos de inteligencia artificial, no sé optimizar el consumo de tokens con precisión técnica. Varias decisiones técnicas del camino tampoco las tomé sola, cambié de herramienta de diseño por recomendación directa de la maestra, y usar un equipo de agentes especializados en vez de una sola IA generalista fue algo que ella mencionó como mejor práctica. Entender cómo funciona realmente de fondo lo aprendí después, trabajando con mi propio equipo.</a:t>
+              <a:t>Ese hallazgo dispara una corrección, y la corrección se vuelve a validar contra el producto real antes de darse por cerrada. Nunca se confía sin comprobar.</a:t>
             </a:r>
           </a:p>
         </p:txBody>
@@ -4425,7 +4526,7 @@
             <a:avLst/>
           </a:prstGeom>
           <a:solidFill>
-            <a:srgbClr val="141413"/>
+            <a:srgbClr val="FAF9F5"/>
           </a:solidFill>
           <a:ln>
             <a:noFill/>
@@ -4454,48 +4555,30 @@
           </a:p>
         </p:txBody>
       </p:sp>
-      <p:sp>
-        <p:nvSpPr>
-          <p:cNvPr id="3" name="TextBox 2"/>
-          <p:cNvSpPr txBox="1"/>
+      <p:pic>
+        <p:nvPicPr>
+          <p:cNvPr id="3" name="Picture 2" descr="timeline-v2.png"/>
+          <p:cNvPicPr>
+            <a:picLocks noChangeAspect="1"/>
+          </p:cNvPicPr>
           <p:nvPr/>
-        </p:nvSpPr>
+        </p:nvPicPr>
+        <p:blipFill>
+          <a:blip r:embed="rId2"/>
+          <a:stretch>
+            <a:fillRect/>
+          </a:stretch>
+        </p:blipFill>
         <p:spPr>
           <a:xfrm>
-            <a:off x="1981200" y="2788920"/>
-            <a:ext cx="8229600" cy="1280160"/>
+            <a:off x="109728" y="61722"/>
+            <a:ext cx="11972544" cy="6734556"/>
           </a:xfrm>
           <a:prstGeom prst="rect">
             <a:avLst/>
           </a:prstGeom>
-          <a:noFill/>
         </p:spPr>
-        <p:txBody>
-          <a:bodyPr wrap="square" anchor="t" lIns="0" rIns="0" tIns="0" bIns="0">
-            <a:spAutoFit/>
-          </a:bodyPr>
-          <a:lstStyle/>
-          <a:p>
-            <a:pPr algn="ctr">
-              <a:spcBef>
-                <a:spcPts val="0"/>
-              </a:spcBef>
-              <a:spcAft>
-                <a:spcPts val="0"/>
-              </a:spcAft>
-            </a:pPr>
-            <a:r>
-              <a:rPr sz="7200" b="1" i="0">
-                <a:solidFill>
-                  <a:srgbClr val="FFFFFF"/>
-                </a:solidFill>
-                <a:latin typeface="Fredoka"/>
-              </a:rPr>
-              <a:t>Gracias.</a:t>
-            </a:r>
-          </a:p>
-        </p:txBody>
-      </p:sp>
+      </p:pic>
     </p:spTree>
   </p:cSld>
   <p:clrMapOvr>
@@ -4504,7 +4587,7 @@
 </p:sld>
 </file>
 
-<file path=ppt/slides/slide2.xml><?xml version="1.0" encoding="utf-8"?>
+<file path=ppt/slides/slide11.xml><?xml version="1.0" encoding="utf-8"?>
 <p:sld xmlns:a="http://schemas.openxmlformats.org/drawingml/2006/main" xmlns:p="http://schemas.openxmlformats.org/presentationml/2006/main" xmlns:r="http://schemas.openxmlformats.org/officeDocument/2006/relationships">
   <p:cSld>
     <p:spTree>
@@ -4566,6 +4649,110 @@
         </p:nvSpPr>
         <p:spPr>
           <a:xfrm>
+            <a:off x="1981200" y="2788920"/>
+            <a:ext cx="8229600" cy="1280160"/>
+          </a:xfrm>
+          <a:prstGeom prst="rect">
+            <a:avLst/>
+          </a:prstGeom>
+          <a:noFill/>
+        </p:spPr>
+        <p:txBody>
+          <a:bodyPr wrap="square" anchor="t" lIns="0" rIns="0" tIns="0" bIns="0">
+            <a:spAutoFit/>
+          </a:bodyPr>
+          <a:lstStyle/>
+          <a:p>
+            <a:pPr algn="ctr">
+              <a:spcBef>
+                <a:spcPts val="0"/>
+              </a:spcBef>
+              <a:spcAft>
+                <a:spcPts val="0"/>
+              </a:spcAft>
+            </a:pPr>
+            <a:r>
+              <a:rPr sz="7200" b="1" i="0">
+                <a:solidFill>
+                  <a:srgbClr val="FFFFFF"/>
+                </a:solidFill>
+                <a:latin typeface="Fredoka"/>
+              </a:rPr>
+              <a:t>Gracias.</a:t>
+            </a:r>
+          </a:p>
+        </p:txBody>
+      </p:sp>
+    </p:spTree>
+  </p:cSld>
+  <p:clrMapOvr>
+    <a:masterClrMapping/>
+  </p:clrMapOvr>
+</p:sld>
+</file>
+
+<file path=ppt/slides/slide2.xml><?xml version="1.0" encoding="utf-8"?>
+<p:sld xmlns:a="http://schemas.openxmlformats.org/drawingml/2006/main" xmlns:p="http://schemas.openxmlformats.org/presentationml/2006/main" xmlns:r="http://schemas.openxmlformats.org/officeDocument/2006/relationships">
+  <p:cSld>
+    <p:spTree>
+      <p:nvGrpSpPr>
+        <p:cNvPr id="1" name=""/>
+        <p:cNvGrpSpPr/>
+        <p:nvPr/>
+      </p:nvGrpSpPr>
+      <p:grpSpPr/>
+      <p:sp>
+        <p:nvSpPr>
+          <p:cNvPr id="2" name="Rectangle 1"/>
+          <p:cNvSpPr/>
+          <p:nvPr/>
+        </p:nvSpPr>
+        <p:spPr>
+          <a:xfrm>
+            <a:off x="0" y="0"/>
+            <a:ext cx="12192000" cy="6858000"/>
+          </a:xfrm>
+          <a:prstGeom prst="rect">
+            <a:avLst/>
+          </a:prstGeom>
+          <a:solidFill>
+            <a:srgbClr val="141413"/>
+          </a:solidFill>
+          <a:ln>
+            <a:noFill/>
+          </a:ln>
+          <a:effectLst/>
+        </p:spPr>
+        <p:style>
+          <a:lnRef idx="1">
+            <a:schemeClr val="accent1"/>
+          </a:lnRef>
+          <a:fillRef idx="3">
+            <a:schemeClr val="accent1"/>
+          </a:fillRef>
+          <a:effectRef idx="2">
+            <a:schemeClr val="accent1"/>
+          </a:effectRef>
+          <a:fontRef idx="minor">
+            <a:schemeClr val="lt1"/>
+          </a:fontRef>
+        </p:style>
+        <p:txBody>
+          <a:bodyPr rtlCol="0" anchor="ctr"/>
+          <a:lstStyle/>
+          <a:p>
+            <a:pPr algn="ctr"/>
+          </a:p>
+        </p:txBody>
+      </p:sp>
+      <p:sp>
+        <p:nvSpPr>
+          <p:cNvPr id="3" name="TextBox 2"/>
+          <p:cNvSpPr txBox="1"/>
+          <p:nvPr/>
+        </p:nvSpPr>
+        <p:spPr>
+          <a:xfrm>
             <a:off x="822960" y="1005840"/>
             <a:ext cx="10500000" cy="2194560"/>
           </a:xfrm>
@@ -4740,8 +4927,8 @@
         </p:nvSpPr>
         <p:spPr>
           <a:xfrm>
-            <a:off x="822960" y="1463040"/>
-            <a:ext cx="3931920" cy="2194560"/>
+            <a:off x="822960" y="411480"/>
+            <a:ext cx="10546080" cy="1400000"/>
           </a:xfrm>
           <a:prstGeom prst="rect">
             <a:avLst/>
@@ -4756,7 +4943,7 @@
           <a:p>
             <a:pPr algn="l">
               <a:lnSpc>
-                <a:spcPct val="102000"/>
+                <a:spcPct val="104000"/>
               </a:lnSpc>
               <a:spcBef>
                 <a:spcPts val="0"/>
@@ -4766,19 +4953,19 @@
               </a:spcAft>
             </a:pPr>
             <a:r>
-              <a:rPr sz="5200" b="1" i="0">
+              <a:rPr sz="4400" b="1" i="0">
                 <a:solidFill>
                   <a:srgbClr val="141413"/>
                 </a:solidFill>
                 <a:latin typeface="Fredoka"/>
               </a:rPr>
-              <a:t>Así se ve</a:t>
+              <a:t>Así se ve hoy,</a:t>
             </a:r>
           </a:p>
           <a:p>
             <a:pPr algn="l">
               <a:lnSpc>
-                <a:spcPct val="102000"/>
+                <a:spcPct val="104000"/>
               </a:lnSpc>
               <a:spcBef>
                 <a:spcPts val="0"/>
@@ -4788,13 +4975,13 @@
               </a:spcAft>
             </a:pPr>
             <a:r>
-              <a:rPr sz="5200" b="1" i="0">
+              <a:rPr sz="4400" b="1" i="0">
                 <a:solidFill>
                   <a:srgbClr val="141413"/>
                 </a:solidFill>
                 <a:latin typeface="Fredoka"/>
               </a:rPr>
-              <a:t>hoy.</a:t>
+              <a:t>y en menos de 3 segundos.</a:t>
             </a:r>
           </a:p>
         </p:txBody>
@@ -4807,8 +4994,8 @@
         </p:nvSpPr>
         <p:spPr>
           <a:xfrm>
-            <a:off x="868680" y="3383280"/>
-            <a:ext cx="3840480" cy="1097280"/>
+            <a:off x="868680" y="1800000"/>
+            <a:ext cx="10230000" cy="500000"/>
           </a:xfrm>
           <a:prstGeom prst="rect">
             <a:avLst/>
@@ -4839,14 +5026,98 @@
                 </a:solidFill>
                 <a:latin typeface="Inter"/>
               </a:rPr>
-              <a:t>Prototipo real, funcional, probado con una vendedora real.</a:t>
+              <a:t>Prototipo real, funcional, probado con Ana. Un toque por producto: el total se arma solo, en el momento exacto de la venta.</a:t>
+            </a:r>
+          </a:p>
+        </p:txBody>
+      </p:sp>
+      <p:sp>
+        <p:nvSpPr>
+          <p:cNvPr id="5" name="TextBox 4"/>
+          <p:cNvSpPr txBox="1"/>
+          <p:nvPr/>
+        </p:nvSpPr>
+        <p:spPr>
+          <a:xfrm>
+            <a:off x="822960" y="2540000"/>
+            <a:ext cx="4498217" cy="280000"/>
+          </a:xfrm>
+          <a:prstGeom prst="rect">
+            <a:avLst/>
+          </a:prstGeom>
+          <a:noFill/>
+        </p:spPr>
+        <p:txBody>
+          <a:bodyPr wrap="square" anchor="t" lIns="0" rIns="0" tIns="0" bIns="0">
+            <a:spAutoFit/>
+          </a:bodyPr>
+          <a:lstStyle/>
+          <a:p>
+            <a:pPr algn="ctr">
+              <a:spcBef>
+                <a:spcPts val="0"/>
+              </a:spcBef>
+              <a:spcAft>
+                <a:spcPts val="0"/>
+              </a:spcAft>
+            </a:pPr>
+            <a:r>
+              <a:rPr sz="1300" b="1" i="0">
+                <a:solidFill>
+                  <a:srgbClr val="C13F26"/>
+                </a:solidFill>
+                <a:latin typeface="Inter"/>
+              </a:rPr>
+              <a:t>A N T E S</a:t>
+            </a:r>
+          </a:p>
+        </p:txBody>
+      </p:sp>
+      <p:sp>
+        <p:nvSpPr>
+          <p:cNvPr id="6" name="TextBox 5"/>
+          <p:cNvSpPr txBox="1"/>
+          <p:nvPr/>
+        </p:nvSpPr>
+        <p:spPr>
+          <a:xfrm>
+            <a:off x="5971177" y="2540000"/>
+            <a:ext cx="5397860" cy="280000"/>
+          </a:xfrm>
+          <a:prstGeom prst="rect">
+            <a:avLst/>
+          </a:prstGeom>
+          <a:noFill/>
+        </p:spPr>
+        <p:txBody>
+          <a:bodyPr wrap="square" anchor="t" lIns="0" rIns="0" tIns="0" bIns="0">
+            <a:spAutoFit/>
+          </a:bodyPr>
+          <a:lstStyle/>
+          <a:p>
+            <a:pPr algn="ctr">
+              <a:spcBef>
+                <a:spcPts val="0"/>
+              </a:spcBef>
+              <a:spcAft>
+                <a:spcPts val="0"/>
+              </a:spcAft>
+            </a:pPr>
+            <a:r>
+              <a:rPr sz="1300" b="1" i="0">
+                <a:solidFill>
+                  <a:srgbClr val="C13F26"/>
+                </a:solidFill>
+                <a:latin typeface="Inter"/>
+              </a:rPr>
+              <a:t>D E S P U É S</a:t>
             </a:r>
           </a:p>
         </p:txBody>
       </p:sp>
       <p:pic>
         <p:nvPicPr>
-          <p:cNvPr id="5" name="Picture 4" descr="slide3-home-crop.png"/>
+          <p:cNvPr id="7" name="Picture 6" descr="slide3-home-crop.png"/>
           <p:cNvPicPr>
             <a:picLocks noChangeAspect="1"/>
           </p:cNvPicPr>
@@ -4860,8 +5131,8 @@
         </p:blipFill>
         <p:spPr>
           <a:xfrm>
-            <a:off x="5654040" y="1419447"/>
-            <a:ext cx="5760720" cy="4019106"/>
+            <a:off x="822960" y="2860000"/>
+            <a:ext cx="4498217" cy="3138291"/>
           </a:xfrm>
           <a:prstGeom prst="rect">
             <a:avLst/>
@@ -4875,133 +5146,24 @@
           </a:effectLst>
         </p:spPr>
       </p:pic>
-    </p:spTree>
-  </p:cSld>
-  <p:clrMapOvr>
-    <a:masterClrMapping/>
-  </p:clrMapOvr>
-  <p:transition spd="slow">
-    <p:fade thruBlk="1"/>
-  </p:transition>
-</p:sld>
-</file>
-
-<file path=ppt/slides/slide4.xml><?xml version="1.0" encoding="utf-8"?>
-<p:sld xmlns:a="http://schemas.openxmlformats.org/drawingml/2006/main" xmlns:p="http://schemas.openxmlformats.org/presentationml/2006/main" xmlns:r="http://schemas.openxmlformats.org/officeDocument/2006/relationships">
-  <p:cSld>
-    <p:spTree>
-      <p:nvGrpSpPr>
-        <p:cNvPr id="1" name=""/>
-        <p:cNvGrpSpPr/>
-        <p:nvPr/>
-      </p:nvGrpSpPr>
-      <p:grpSpPr/>
-      <p:sp>
-        <p:nvSpPr>
-          <p:cNvPr id="2" name="Rectangle 1"/>
-          <p:cNvSpPr/>
-          <p:nvPr/>
-        </p:nvSpPr>
-        <p:spPr>
-          <a:xfrm>
-            <a:off x="0" y="0"/>
-            <a:ext cx="7924800" cy="6858000"/>
-          </a:xfrm>
-          <a:prstGeom prst="rect">
-            <a:avLst/>
-          </a:prstGeom>
-          <a:solidFill>
-            <a:srgbClr val="141413"/>
-          </a:solidFill>
-          <a:ln>
-            <a:noFill/>
-          </a:ln>
-          <a:effectLst/>
-        </p:spPr>
-        <p:style>
-          <a:lnRef idx="1">
-            <a:schemeClr val="accent1"/>
-          </a:lnRef>
-          <a:fillRef idx="3">
-            <a:schemeClr val="accent1"/>
-          </a:fillRef>
-          <a:effectRef idx="2">
-            <a:schemeClr val="accent1"/>
-          </a:effectRef>
-          <a:fontRef idx="minor">
-            <a:schemeClr val="lt1"/>
-          </a:fontRef>
-        </p:style>
-        <p:txBody>
-          <a:bodyPr rtlCol="0" anchor="ctr"/>
-          <a:lstStyle/>
-          <a:p>
-            <a:pPr algn="ctr"/>
-          </a:p>
-        </p:txBody>
-      </p:sp>
-      <p:sp>
-        <p:nvSpPr>
-          <p:cNvPr id="3" name="Rectangle 2"/>
-          <p:cNvSpPr/>
-          <p:nvPr/>
-        </p:nvSpPr>
-        <p:spPr>
-          <a:xfrm>
-            <a:off x="7924800" y="0"/>
-            <a:ext cx="4267200" cy="6858000"/>
-          </a:xfrm>
-          <a:prstGeom prst="rect">
-            <a:avLst/>
-          </a:prstGeom>
-          <a:solidFill>
-            <a:srgbClr val="C13F26"/>
-          </a:solidFill>
-          <a:ln>
-            <a:noFill/>
-          </a:ln>
-          <a:effectLst/>
-        </p:spPr>
-        <p:style>
-          <a:lnRef idx="1">
-            <a:schemeClr val="accent1"/>
-          </a:lnRef>
-          <a:fillRef idx="3">
-            <a:schemeClr val="accent1"/>
-          </a:fillRef>
-          <a:effectRef idx="2">
-            <a:schemeClr val="accent1"/>
-          </a:effectRef>
-          <a:fontRef idx="minor">
-            <a:schemeClr val="lt1"/>
-          </a:fontRef>
-        </p:style>
-        <p:txBody>
-          <a:bodyPr rtlCol="0" anchor="ctr"/>
-          <a:lstStyle/>
-          <a:p>
-            <a:pPr algn="ctr"/>
-          </a:p>
-        </p:txBody>
-      </p:sp>
       <p:pic>
         <p:nvPicPr>
-          <p:cNvPr id="4" name="Picture 3" descr="slide4-selling-zoom.png"/>
+          <p:cNvPr id="8" name="Picture 7" descr="slide4-selling-zoom.png"/>
           <p:cNvPicPr>
             <a:picLocks noChangeAspect="1"/>
           </p:cNvPicPr>
           <p:nvPr/>
         </p:nvPicPr>
         <p:blipFill>
-          <a:blip r:embed="rId2"/>
+          <a:blip r:embed="rId3"/>
           <a:stretch>
             <a:fillRect/>
           </a:stretch>
         </p:blipFill>
         <p:spPr>
           <a:xfrm>
-            <a:off x="862400" y="1626675"/>
-            <a:ext cx="6200000" cy="3604651"/>
+            <a:off x="5971177" y="2860000"/>
+            <a:ext cx="5397860" cy="3138291"/>
           </a:xfrm>
           <a:prstGeom prst="rect">
             <a:avLst/>
@@ -5017,58 +5179,14 @@
       </p:pic>
       <p:sp>
         <p:nvSpPr>
-          <p:cNvPr id="5" name="Oval 4"/>
-          <p:cNvSpPr/>
+          <p:cNvPr id="9" name="TextBox 8"/>
+          <p:cNvSpPr txBox="1"/>
           <p:nvPr/>
         </p:nvSpPr>
         <p:spPr>
           <a:xfrm>
-            <a:off x="1890927" y="3477062"/>
-            <a:ext cx="447177" cy="360465"/>
-          </a:xfrm>
-          <a:prstGeom prst="ellipse">
-            <a:avLst/>
-          </a:prstGeom>
-          <a:noFill/>
-          <a:ln w="22225">
-            <a:solidFill>
-              <a:srgbClr val="FFFFFF"/>
-            </a:solidFill>
-          </a:ln>
-          <a:effectLst/>
-        </p:spPr>
-        <p:style>
-          <a:lnRef idx="1">
-            <a:schemeClr val="accent1"/>
-          </a:lnRef>
-          <a:fillRef idx="3">
-            <a:schemeClr val="accent1"/>
-          </a:fillRef>
-          <a:effectRef idx="2">
-            <a:schemeClr val="accent1"/>
-          </a:effectRef>
-          <a:fontRef idx="minor">
-            <a:schemeClr val="lt1"/>
-          </a:fontRef>
-        </p:style>
-        <p:txBody>
-          <a:bodyPr rtlCol="0" anchor="ctr"/>
-          <a:lstStyle/>
-          <a:p>
-            <a:pPr algn="ctr"/>
-          </a:p>
-        </p:txBody>
-      </p:sp>
-      <p:sp>
-        <p:nvSpPr>
-          <p:cNvPr id="6" name="TextBox 5"/>
-          <p:cNvSpPr txBox="1"/>
-          <p:nvPr/>
-        </p:nvSpPr>
-        <p:spPr>
-          <a:xfrm>
-            <a:off x="8374800" y="4200000"/>
-            <a:ext cx="3367200" cy="1200000"/>
+            <a:off x="5346177" y="4169145"/>
+            <a:ext cx="600000" cy="420000"/>
           </a:xfrm>
           <a:prstGeom prst="rect">
             <a:avLst/>
@@ -5081,10 +5199,7 @@
           </a:bodyPr>
           <a:lstStyle/>
           <a:p>
-            <a:pPr algn="l">
-              <a:lnSpc>
-                <a:spcPct val="102000"/>
-              </a:lnSpc>
+            <a:pPr algn="ctr">
               <a:spcBef>
                 <a:spcPts val="0"/>
               </a:spcBef>
@@ -5093,49 +5208,27 @@
               </a:spcAft>
             </a:pPr>
             <a:r>
-              <a:rPr sz="3400" b="1" i="0">
+              <a:rPr sz="4000" b="1" i="0">
                 <a:solidFill>
-                  <a:srgbClr val="FFFFFF"/>
+                  <a:srgbClr val="C13F26"/>
                 </a:solidFill>
                 <a:latin typeface="Fredoka"/>
               </a:rPr>
-              <a:t>Menos de</a:t>
-            </a:r>
-          </a:p>
-          <a:p>
-            <a:pPr algn="l">
-              <a:lnSpc>
-                <a:spcPct val="102000"/>
-              </a:lnSpc>
-              <a:spcBef>
-                <a:spcPts val="0"/>
-              </a:spcBef>
-              <a:spcAft>
-                <a:spcPts val="0"/>
-              </a:spcAft>
-            </a:pPr>
-            <a:r>
-              <a:rPr sz="3400" b="1" i="0">
-                <a:solidFill>
-                  <a:srgbClr val="FFFFFF"/>
-                </a:solidFill>
-                <a:latin typeface="Fredoka"/>
-              </a:rPr>
-              <a:t>3 segundos.</a:t>
-            </a:r>
-          </a:p>
-        </p:txBody>
-      </p:sp>
-      <p:sp>
-        <p:nvSpPr>
-          <p:cNvPr id="7" name="TextBox 6"/>
+              <a:t>→</a:t>
+            </a:r>
+          </a:p>
+        </p:txBody>
+      </p:sp>
+      <p:sp>
+        <p:nvSpPr>
+          <p:cNvPr id="10" name="TextBox 9"/>
           <p:cNvSpPr txBox="1"/>
           <p:nvPr/>
         </p:nvSpPr>
         <p:spPr>
           <a:xfrm>
-            <a:off x="8374800" y="5500000"/>
-            <a:ext cx="3367200" cy="900000"/>
+            <a:off x="5246177" y="4599145"/>
+            <a:ext cx="800000" cy="280000"/>
           </a:xfrm>
           <a:prstGeom prst="rect">
             <a:avLst/>
@@ -5148,10 +5241,7 @@
           </a:bodyPr>
           <a:lstStyle/>
           <a:p>
-            <a:pPr algn="l">
-              <a:lnSpc>
-                <a:spcPct val="120000"/>
-              </a:lnSpc>
+            <a:pPr algn="ctr">
               <a:spcBef>
                 <a:spcPts val="0"/>
               </a:spcBef>
@@ -5160,13 +5250,13 @@
               </a:spcAft>
             </a:pPr>
             <a:r>
-              <a:rPr sz="1400" b="0" i="0">
+              <a:rPr sz="1200" b="1" i="0">
                 <a:solidFill>
-                  <a:srgbClr val="F3D9D1"/>
+                  <a:srgbClr val="6B6B67"/>
                 </a:solidFill>
                 <a:latin typeface="Inter"/>
               </a:rPr>
-              <a:t>Un toque por producto. El total se arma solo, en el momento exacto de la venta.</a:t>
+              <a:t>1 toque</a:t>
             </a:r>
           </a:p>
         </p:txBody>
@@ -5176,10 +5266,13 @@
   <p:clrMapOvr>
     <a:masterClrMapping/>
   </p:clrMapOvr>
+  <p:transition spd="med">
+    <p:fade/>
+  </p:transition>
 </p:sld>
 </file>
 
-<file path=ppt/slides/slide5.xml><?xml version="1.0" encoding="utf-8"?>
+<file path=ppt/slides/slide4.xml><?xml version="1.0" encoding="utf-8"?>
 <p:sld xmlns:a="http://schemas.openxmlformats.org/drawingml/2006/main" xmlns:p="http://schemas.openxmlformats.org/presentationml/2006/main" xmlns:r="http://schemas.openxmlformats.org/officeDocument/2006/relationships">
   <p:cSld>
     <p:spTree>
@@ -5533,7 +5626,7 @@
 </p:sld>
 </file>
 
-<file path=ppt/slides/slide6.xml><?xml version="1.0" encoding="utf-8"?>
+<file path=ppt/slides/slide5.xml><?xml version="1.0" encoding="utf-8"?>
 <p:sld xmlns:a="http://schemas.openxmlformats.org/drawingml/2006/main" xmlns:p="http://schemas.openxmlformats.org/presentationml/2006/main" xmlns:r="http://schemas.openxmlformats.org/officeDocument/2006/relationships">
   <p:cSld>
     <p:spTree>
@@ -5858,8 +5951,8 @@
         </p:blipFill>
         <p:spPr>
           <a:xfrm>
-            <a:off x="1093960" y="3520440"/>
-            <a:ext cx="5040588" cy="1850000"/>
+            <a:off x="1093960" y="3310128"/>
+            <a:ext cx="5040588" cy="1620000"/>
           </a:xfrm>
           <a:prstGeom prst="rect">
             <a:avLst/>
@@ -5882,8 +5975,8 @@
         </p:blipFill>
         <p:spPr>
           <a:xfrm>
-            <a:off x="6434548" y="3520440"/>
-            <a:ext cx="4663186" cy="1850000"/>
+            <a:off x="6434548" y="3310128"/>
+            <a:ext cx="4663186" cy="1620000"/>
           </a:xfrm>
           <a:prstGeom prst="rect">
             <a:avLst/>
@@ -5898,8 +5991,8 @@
         </p:nvSpPr>
         <p:spPr>
           <a:xfrm>
-            <a:off x="868680" y="5577840"/>
-            <a:ext cx="9601200" cy="1005840"/>
+            <a:off x="868680" y="5138928"/>
+            <a:ext cx="9601200" cy="777240"/>
           </a:xfrm>
           <a:prstGeom prst="rect">
             <a:avLst/>
@@ -5914,7 +6007,7 @@
           <a:p>
             <a:pPr algn="l">
               <a:lnSpc>
-                <a:spcPct val="110000"/>
+                <a:spcPct val="108000"/>
               </a:lnSpc>
               <a:spcBef>
                 <a:spcPts val="0"/>
@@ -5924,13 +6017,58 @@
               </a:spcAft>
             </a:pPr>
             <a:r>
-              <a:rPr sz="2200" b="1" i="0">
+              <a:rPr sz="2000" b="1" i="0">
                 <a:solidFill>
                   <a:srgbClr val="FFFFFF"/>
                 </a:solidFill>
                 <a:latin typeface="Fredoka"/>
               </a:rPr>
               <a:t>El alcance funciona. La adopción real todavía no, y no lo descubrí el día 1, sino a mitad de campaña.</a:t>
+            </a:r>
+          </a:p>
+        </p:txBody>
+      </p:sp>
+      <p:sp>
+        <p:nvSpPr>
+          <p:cNvPr id="12" name="TextBox 11"/>
+          <p:cNvSpPr txBox="1"/>
+          <p:nvPr/>
+        </p:nvSpPr>
+        <p:spPr>
+          <a:xfrm>
+            <a:off x="868680" y="5870448"/>
+            <a:ext cx="9601200" cy="502920"/>
+          </a:xfrm>
+          <a:prstGeom prst="rect">
+            <a:avLst/>
+          </a:prstGeom>
+          <a:noFill/>
+        </p:spPr>
+        <p:txBody>
+          <a:bodyPr wrap="square" anchor="t" lIns="0" rIns="0" tIns="0" bIns="0">
+            <a:spAutoFit/>
+          </a:bodyPr>
+          <a:lstStyle/>
+          <a:p>
+            <a:pPr algn="l">
+              <a:lnSpc>
+                <a:spcPct val="110000"/>
+              </a:lnSpc>
+              <a:spcBef>
+                <a:spcPts val="0"/>
+              </a:spcBef>
+              <a:spcAft>
+                <a:spcPts val="0"/>
+              </a:spcAft>
+            </a:pPr>
+            <a:r>
+              <a:rPr sz="1400" b="0" i="0">
+                <a:solidFill>
+                  <a:srgbClr val="FAEEEA"/>
+                </a:solidFill>
+                <a:latin typeface="Inter"/>
+              </a:rPr>
+              <a:t>De esos 583, solamente 227 llegaron con el recorrido completo midiéndose. Y ni siquiera con eso, la aguja se movió.</a:t>
             </a:r>
           </a:p>
         </p:txBody>
@@ -5943,7 +6081,2306 @@
 </p:sld>
 </file>
 
+<file path=ppt/slides/slide6.xml><?xml version="1.0" encoding="utf-8"?>
+<p:sld xmlns:a="http://schemas.openxmlformats.org/drawingml/2006/main" xmlns:p="http://schemas.openxmlformats.org/presentationml/2006/main" xmlns:r="http://schemas.openxmlformats.org/officeDocument/2006/relationships">
+  <p:cSld>
+    <p:spTree>
+      <p:nvGrpSpPr>
+        <p:cNvPr id="1" name=""/>
+        <p:cNvGrpSpPr/>
+        <p:nvPr/>
+      </p:nvGrpSpPr>
+      <p:grpSpPr/>
+      <p:sp>
+        <p:nvSpPr>
+          <p:cNvPr id="2" name="Rectangle 1"/>
+          <p:cNvSpPr/>
+          <p:nvPr/>
+        </p:nvSpPr>
+        <p:spPr>
+          <a:xfrm>
+            <a:off x="0" y="0"/>
+            <a:ext cx="12192000" cy="6858000"/>
+          </a:xfrm>
+          <a:prstGeom prst="rect">
+            <a:avLst/>
+          </a:prstGeom>
+          <a:solidFill>
+            <a:srgbClr val="FAF9F5"/>
+          </a:solidFill>
+          <a:ln>
+            <a:noFill/>
+          </a:ln>
+          <a:effectLst/>
+        </p:spPr>
+        <p:style>
+          <a:lnRef idx="1">
+            <a:schemeClr val="accent1"/>
+          </a:lnRef>
+          <a:fillRef idx="3">
+            <a:schemeClr val="accent1"/>
+          </a:fillRef>
+          <a:effectRef idx="2">
+            <a:schemeClr val="accent1"/>
+          </a:effectRef>
+          <a:fontRef idx="minor">
+            <a:schemeClr val="lt1"/>
+          </a:fontRef>
+        </p:style>
+        <p:txBody>
+          <a:bodyPr rtlCol="0" anchor="ctr"/>
+          <a:lstStyle/>
+          <a:p>
+            <a:pPr algn="ctr"/>
+          </a:p>
+        </p:txBody>
+      </p:sp>
+      <p:sp>
+        <p:nvSpPr>
+          <p:cNvPr id="3" name="TextBox 2"/>
+          <p:cNvSpPr txBox="1"/>
+          <p:nvPr/>
+        </p:nvSpPr>
+        <p:spPr>
+          <a:xfrm>
+            <a:off x="822960" y="411480"/>
+            <a:ext cx="8000000" cy="700000"/>
+          </a:xfrm>
+          <a:prstGeom prst="rect">
+            <a:avLst/>
+          </a:prstGeom>
+          <a:noFill/>
+        </p:spPr>
+        <p:txBody>
+          <a:bodyPr wrap="square" anchor="t" lIns="0" rIns="0" tIns="0" bIns="0">
+            <a:spAutoFit/>
+          </a:bodyPr>
+          <a:lstStyle/>
+          <a:p>
+            <a:pPr algn="l">
+              <a:spcBef>
+                <a:spcPts val="0"/>
+              </a:spcBef>
+              <a:spcAft>
+                <a:spcPts val="0"/>
+              </a:spcAft>
+            </a:pPr>
+            <a:r>
+              <a:rPr sz="4400" b="1" i="0">
+                <a:solidFill>
+                  <a:srgbClr val="141413"/>
+                </a:solidFill>
+                <a:latin typeface="Fredoka"/>
+              </a:rPr>
+              <a:t>Viabilidad.</a:t>
+            </a:r>
+          </a:p>
+        </p:txBody>
+      </p:sp>
+      <p:sp>
+        <p:nvSpPr>
+          <p:cNvPr id="4" name="TextBox 3"/>
+          <p:cNvSpPr txBox="1"/>
+          <p:nvPr/>
+        </p:nvSpPr>
+        <p:spPr>
+          <a:xfrm>
+            <a:off x="868680" y="1080000"/>
+            <a:ext cx="10230000" cy="450000"/>
+          </a:xfrm>
+          <a:prstGeom prst="rect">
+            <a:avLst/>
+          </a:prstGeom>
+          <a:noFill/>
+        </p:spPr>
+        <p:txBody>
+          <a:bodyPr wrap="square" anchor="t" lIns="0" rIns="0" tIns="0" bIns="0">
+            <a:spAutoFit/>
+          </a:bodyPr>
+          <a:lstStyle/>
+          <a:p>
+            <a:pPr algn="l">
+              <a:lnSpc>
+                <a:spcPct val="120000"/>
+              </a:lnSpc>
+              <a:spcBef>
+                <a:spcPts val="0"/>
+              </a:spcBef>
+              <a:spcAft>
+                <a:spcPts val="0"/>
+              </a:spcAft>
+            </a:pPr>
+            <a:r>
+              <a:rPr sz="1600" b="0" i="0">
+                <a:solidFill>
+                  <a:srgbClr val="6B6B67"/>
+                </a:solidFill>
+                <a:latin typeface="Inter"/>
+              </a:rPr>
+              <a:t>Cuánto cuesta esto en realidad, y qué tan lista está la base técnica.</a:t>
+            </a:r>
+          </a:p>
+        </p:txBody>
+      </p:sp>
+      <p:sp>
+        <p:nvSpPr>
+          <p:cNvPr id="5" name="TextBox 4"/>
+          <p:cNvSpPr txBox="1"/>
+          <p:nvPr/>
+        </p:nvSpPr>
+        <p:spPr>
+          <a:xfrm>
+            <a:off x="822960" y="1780000"/>
+            <a:ext cx="4550000" cy="320000"/>
+          </a:xfrm>
+          <a:prstGeom prst="rect">
+            <a:avLst/>
+          </a:prstGeom>
+          <a:noFill/>
+        </p:spPr>
+        <p:txBody>
+          <a:bodyPr wrap="square" anchor="t" lIns="0" rIns="0" tIns="0" bIns="0">
+            <a:spAutoFit/>
+          </a:bodyPr>
+          <a:lstStyle/>
+          <a:p>
+            <a:pPr algn="l">
+              <a:spcBef>
+                <a:spcPts val="0"/>
+              </a:spcBef>
+              <a:spcAft>
+                <a:spcPts val="0"/>
+              </a:spcAft>
+            </a:pPr>
+            <a:r>
+              <a:rPr sz="1200" b="1" i="0">
+                <a:solidFill>
+                  <a:srgbClr val="C13F26"/>
+                </a:solidFill>
+                <a:latin typeface="Inter"/>
+              </a:rPr>
+              <a:t>B A S E   T É C N I C A</a:t>
+            </a:r>
+          </a:p>
+        </p:txBody>
+      </p:sp>
+      <p:sp>
+        <p:nvSpPr>
+          <p:cNvPr id="6" name="TextBox 5"/>
+          <p:cNvSpPr txBox="1"/>
+          <p:nvPr/>
+        </p:nvSpPr>
+        <p:spPr>
+          <a:xfrm>
+            <a:off x="822960" y="2200000"/>
+            <a:ext cx="4550000" cy="940000"/>
+          </a:xfrm>
+          <a:prstGeom prst="rect">
+            <a:avLst/>
+          </a:prstGeom>
+          <a:noFill/>
+        </p:spPr>
+        <p:txBody>
+          <a:bodyPr wrap="square" anchor="t" lIns="0" rIns="0" tIns="0" bIns="0">
+            <a:spAutoFit/>
+          </a:bodyPr>
+          <a:lstStyle/>
+          <a:p>
+            <a:pPr algn="l">
+              <a:lnSpc>
+                <a:spcPct val="110000"/>
+              </a:lnSpc>
+              <a:spcBef>
+                <a:spcPts val="0"/>
+              </a:spcBef>
+              <a:spcAft>
+                <a:spcPts val="0"/>
+              </a:spcAft>
+            </a:pPr>
+            <a:r>
+              <a:rPr sz="1500" b="1" i="0">
+                <a:solidFill>
+                  <a:srgbClr val="141413"/>
+                </a:solidFill>
+                <a:latin typeface="Fredoka"/>
+              </a:rPr>
+              <a:t>Datos</a:t>
+            </a:r>
+          </a:p>
+          <a:p>
+            <a:pPr algn="l">
+              <a:lnSpc>
+                <a:spcPct val="118000"/>
+              </a:lnSpc>
+              <a:spcBef>
+                <a:spcPts val="200"/>
+              </a:spcBef>
+              <a:spcAft>
+                <a:spcPts val="0"/>
+              </a:spcAft>
+            </a:pPr>
+            <a:r>
+              <a:rPr sz="1250" b="0" i="0">
+                <a:solidFill>
+                  <a:srgbClr val="6B6B67"/>
+                </a:solidFill>
+                <a:latin typeface="Inter"/>
+              </a:rPr>
+              <a:t>Modelo de dominio ya congelado: Sale, SaleItem, Session, Event, Product, Business. Solo falta persistirlo.</a:t>
+            </a:r>
+          </a:p>
+        </p:txBody>
+      </p:sp>
+      <p:sp>
+        <p:nvSpPr>
+          <p:cNvPr id="7" name="TextBox 6"/>
+          <p:cNvSpPr txBox="1"/>
+          <p:nvPr/>
+        </p:nvSpPr>
+        <p:spPr>
+          <a:xfrm>
+            <a:off x="822960" y="3140000"/>
+            <a:ext cx="4550000" cy="940000"/>
+          </a:xfrm>
+          <a:prstGeom prst="rect">
+            <a:avLst/>
+          </a:prstGeom>
+          <a:noFill/>
+        </p:spPr>
+        <p:txBody>
+          <a:bodyPr wrap="square" anchor="t" lIns="0" rIns="0" tIns="0" bIns="0">
+            <a:spAutoFit/>
+          </a:bodyPr>
+          <a:lstStyle/>
+          <a:p>
+            <a:pPr algn="l">
+              <a:lnSpc>
+                <a:spcPct val="110000"/>
+              </a:lnSpc>
+              <a:spcBef>
+                <a:spcPts val="0"/>
+              </a:spcBef>
+              <a:spcAft>
+                <a:spcPts val="0"/>
+              </a:spcAft>
+            </a:pPr>
+            <a:r>
+              <a:rPr sz="1500" b="1" i="0">
+                <a:solidFill>
+                  <a:srgbClr val="141413"/>
+                </a:solidFill>
+                <a:latin typeface="Fredoka"/>
+              </a:rPr>
+              <a:t>Infraestructura</a:t>
+            </a:r>
+          </a:p>
+          <a:p>
+            <a:pPr algn="l">
+              <a:lnSpc>
+                <a:spcPct val="118000"/>
+              </a:lnSpc>
+              <a:spcBef>
+                <a:spcPts val="200"/>
+              </a:spcBef>
+              <a:spcAft>
+                <a:spcPts val="0"/>
+              </a:spcAft>
+            </a:pPr>
+            <a:r>
+              <a:rPr sz="1250" b="0" i="0">
+                <a:solidFill>
+                  <a:srgbClr val="6B6B67"/>
+                </a:solidFill>
+                <a:latin typeface="Inter"/>
+              </a:rPr>
+              <a:t>React + TypeScript en Vercel. Backend en Supabase, un solo proveedor a esta escala piloto.</a:t>
+            </a:r>
+          </a:p>
+        </p:txBody>
+      </p:sp>
+      <p:sp>
+        <p:nvSpPr>
+          <p:cNvPr id="8" name="TextBox 7"/>
+          <p:cNvSpPr txBox="1"/>
+          <p:nvPr/>
+        </p:nvSpPr>
+        <p:spPr>
+          <a:xfrm>
+            <a:off x="822960" y="4080000"/>
+            <a:ext cx="4550000" cy="940000"/>
+          </a:xfrm>
+          <a:prstGeom prst="rect">
+            <a:avLst/>
+          </a:prstGeom>
+          <a:noFill/>
+        </p:spPr>
+        <p:txBody>
+          <a:bodyPr wrap="square" anchor="t" lIns="0" rIns="0" tIns="0" bIns="0">
+            <a:spAutoFit/>
+          </a:bodyPr>
+          <a:lstStyle/>
+          <a:p>
+            <a:pPr algn="l">
+              <a:lnSpc>
+                <a:spcPct val="110000"/>
+              </a:lnSpc>
+              <a:spcBef>
+                <a:spcPts val="0"/>
+              </a:spcBef>
+              <a:spcAft>
+                <a:spcPts val="0"/>
+              </a:spcAft>
+            </a:pPr>
+            <a:r>
+              <a:rPr sz="1500" b="1" i="0">
+                <a:solidFill>
+                  <a:srgbClr val="141413"/>
+                </a:solidFill>
+                <a:latin typeface="Fredoka"/>
+              </a:rPr>
+              <a:t>NFC</a:t>
+            </a:r>
+          </a:p>
+          <a:p>
+            <a:pPr algn="l">
+              <a:lnSpc>
+                <a:spcPct val="118000"/>
+              </a:lnSpc>
+              <a:spcBef>
+                <a:spcPts val="200"/>
+              </a:spcBef>
+              <a:spcAft>
+                <a:spcPts val="0"/>
+              </a:spcAft>
+            </a:pPr>
+            <a:r>
+              <a:rPr sz="1250" b="0" i="0">
+                <a:solidFill>
+                  <a:srgbClr val="6B6B67"/>
+                </a:solidFill>
+                <a:latin typeface="Inter"/>
+              </a:rPr>
+              <a:t>Android: Web NFC, sin cambios. iOS: shell nativo delgado con Core NFC. Ana nunca compra un lector aparte.</a:t>
+            </a:r>
+          </a:p>
+        </p:txBody>
+      </p:sp>
+      <p:sp>
+        <p:nvSpPr>
+          <p:cNvPr id="9" name="TextBox 8"/>
+          <p:cNvSpPr txBox="1"/>
+          <p:nvPr/>
+        </p:nvSpPr>
+        <p:spPr>
+          <a:xfrm>
+            <a:off x="822960" y="5020000"/>
+            <a:ext cx="4550000" cy="940000"/>
+          </a:xfrm>
+          <a:prstGeom prst="rect">
+            <a:avLst/>
+          </a:prstGeom>
+          <a:noFill/>
+        </p:spPr>
+        <p:txBody>
+          <a:bodyPr wrap="square" anchor="t" lIns="0" rIns="0" tIns="0" bIns="0">
+            <a:spAutoFit/>
+          </a:bodyPr>
+          <a:lstStyle/>
+          <a:p>
+            <a:pPr algn="l">
+              <a:lnSpc>
+                <a:spcPct val="110000"/>
+              </a:lnSpc>
+              <a:spcBef>
+                <a:spcPts val="0"/>
+              </a:spcBef>
+              <a:spcAft>
+                <a:spcPts val="0"/>
+              </a:spcAft>
+            </a:pPr>
+            <a:r>
+              <a:rPr sz="1500" b="1" i="0">
+                <a:solidFill>
+                  <a:srgbClr val="141413"/>
+                </a:solidFill>
+                <a:latin typeface="Fredoka"/>
+              </a:rPr>
+              <a:t>Equipo humano</a:t>
+            </a:r>
+          </a:p>
+          <a:p>
+            <a:pPr algn="l">
+              <a:lnSpc>
+                <a:spcPct val="118000"/>
+              </a:lnSpc>
+              <a:spcBef>
+                <a:spcPts val="200"/>
+              </a:spcBef>
+              <a:spcAft>
+                <a:spcPts val="0"/>
+              </a:spcAft>
+            </a:pPr>
+            <a:r>
+              <a:rPr sz="1250" b="0" i="0">
+                <a:solidFill>
+                  <a:srgbClr val="6B6B67"/>
+                </a:solidFill>
+                <a:latin typeface="Inter"/>
+              </a:rPr>
+              <a:t>Una persona con dominio de React/TypeScript. Arquitectura completamente gestionada, sin operador adicional.</a:t>
+            </a:r>
+          </a:p>
+        </p:txBody>
+      </p:sp>
+      <p:sp>
+        <p:nvSpPr>
+          <p:cNvPr id="10" name="TextBox 9"/>
+          <p:cNvSpPr txBox="1"/>
+          <p:nvPr/>
+        </p:nvSpPr>
+        <p:spPr>
+          <a:xfrm>
+            <a:off x="5872960" y="1780000"/>
+            <a:ext cx="5496080" cy="320000"/>
+          </a:xfrm>
+          <a:prstGeom prst="rect">
+            <a:avLst/>
+          </a:prstGeom>
+          <a:noFill/>
+        </p:spPr>
+        <p:txBody>
+          <a:bodyPr wrap="square" anchor="t" lIns="0" rIns="0" tIns="0" bIns="0">
+            <a:spAutoFit/>
+          </a:bodyPr>
+          <a:lstStyle/>
+          <a:p>
+            <a:pPr algn="l">
+              <a:spcBef>
+                <a:spcPts val="0"/>
+              </a:spcBef>
+              <a:spcAft>
+                <a:spcPts val="0"/>
+              </a:spcAft>
+            </a:pPr>
+            <a:r>
+              <a:rPr sz="1200" b="1" i="0">
+                <a:solidFill>
+                  <a:srgbClr val="C13F26"/>
+                </a:solidFill>
+                <a:latin typeface="Inter"/>
+              </a:rPr>
+              <a:t>B U S I N E S S   C A S E</a:t>
+            </a:r>
+          </a:p>
+        </p:txBody>
+      </p:sp>
+      <p:graphicFrame>
+        <p:nvGraphicFramePr>
+          <p:cNvPr id="11" name="Table 10"/>
+          <p:cNvGraphicFramePr>
+            <a:graphicFrameLocks noGrp="1"/>
+          </p:cNvGraphicFramePr>
+          <p:nvPr/>
+        </p:nvGraphicFramePr>
+        <p:xfrm>
+          <a:off x="5872960" y="2200000"/>
+          <a:ext cx="5496079" cy="3020000"/>
+        </p:xfrm>
+        <a:graphic>
+          <a:graphicData uri="http://schemas.openxmlformats.org/drawingml/2006/table">
+            <a:tbl>
+              <a:tblPr>
+                <a:tableStyleId>{5C22544A-7EE6-4342-B048-85BDC9FD1C3A}</a:tableStyleId>
+              </a:tblPr>
+              <a:tblGrid>
+                <a:gridCol w="2308353"/>
+                <a:gridCol w="1718667"/>
+                <a:gridCol w="1469059"/>
+              </a:tblGrid>
+              <a:tr h="460000">
+                <a:tc>
+                  <a:txBody>
+                    <a:bodyPr wrap="square"/>
+                    <a:lstStyle/>
+                    <a:p>
+                      <a:pPr algn="l">
+                        <a:lnSpc>
+                          <a:spcPct val="105000"/>
+                        </a:lnSpc>
+                        <a:spcBef>
+                          <a:spcPts val="0"/>
+                        </a:spcBef>
+                        <a:spcAft>
+                          <a:spcPts val="0"/>
+                        </a:spcAft>
+                      </a:pPr>
+                      <a:r>
+                        <a:rPr sz="1400" b="1" i="0">
+                          <a:solidFill>
+                            <a:srgbClr val="FFFFFF"/>
+                          </a:solidFill>
+                          <a:latin typeface="Inter"/>
+                        </a:rPr>
+                        <a:t>Concepto</a:t>
+                      </a:r>
+                    </a:p>
+                  </a:txBody>
+                  <a:tcPr anchor="ctr" marL="76200" marR="76200" marT="50800" marB="50800">
+                    <a:solidFill>
+                      <a:srgbClr val="C13F26"/>
+                    </a:solidFill>
+                  </a:tcPr>
+                </a:tc>
+                <a:tc>
+                  <a:txBody>
+                    <a:bodyPr wrap="square"/>
+                    <a:lstStyle/>
+                    <a:p>
+                      <a:pPr algn="l">
+                        <a:lnSpc>
+                          <a:spcPct val="105000"/>
+                        </a:lnSpc>
+                        <a:spcBef>
+                          <a:spcPts val="0"/>
+                        </a:spcBef>
+                        <a:spcAft>
+                          <a:spcPts val="0"/>
+                        </a:spcAft>
+                      </a:pPr>
+                      <a:r>
+                        <a:rPr sz="1400" b="1" i="0">
+                          <a:solidFill>
+                            <a:srgbClr val="FFFFFF"/>
+                          </a:solidFill>
+                          <a:latin typeface="Inter"/>
+                        </a:rPr>
+                        <a:t>Cifra</a:t>
+                      </a:r>
+                    </a:p>
+                  </a:txBody>
+                  <a:tcPr anchor="ctr" marL="76200" marR="76200" marT="50800" marB="50800">
+                    <a:solidFill>
+                      <a:srgbClr val="C13F26"/>
+                    </a:solidFill>
+                  </a:tcPr>
+                </a:tc>
+                <a:tc>
+                  <a:txBody>
+                    <a:bodyPr wrap="square"/>
+                    <a:lstStyle/>
+                    <a:p>
+                      <a:pPr algn="l">
+                        <a:lnSpc>
+                          <a:spcPct val="105000"/>
+                        </a:lnSpc>
+                        <a:spcBef>
+                          <a:spcPts val="0"/>
+                        </a:spcBef>
+                        <a:spcAft>
+                          <a:spcPts val="0"/>
+                        </a:spcAft>
+                      </a:pPr>
+                      <a:r>
+                        <a:rPr sz="1400" b="1" i="0">
+                          <a:solidFill>
+                            <a:srgbClr val="FFFFFF"/>
+                          </a:solidFill>
+                          <a:latin typeface="Inter"/>
+                        </a:rPr>
+                        <a:t>Tipo</a:t>
+                      </a:r>
+                    </a:p>
+                  </a:txBody>
+                  <a:tcPr anchor="ctr" marL="76200" marR="76200" marT="50800" marB="50800">
+                    <a:solidFill>
+                      <a:srgbClr val="C13F26"/>
+                    </a:solidFill>
+                  </a:tcPr>
+                </a:tc>
+              </a:tr>
+              <a:tr h="640000">
+                <a:tc>
+                  <a:txBody>
+                    <a:bodyPr wrap="square"/>
+                    <a:lstStyle/>
+                    <a:p>
+                      <a:pPr algn="l">
+                        <a:lnSpc>
+                          <a:spcPct val="105000"/>
+                        </a:lnSpc>
+                        <a:spcBef>
+                          <a:spcPts val="0"/>
+                        </a:spcBef>
+                        <a:spcAft>
+                          <a:spcPts val="0"/>
+                        </a:spcAft>
+                      </a:pPr>
+                      <a:r>
+                        <a:rPr sz="1400" b="0" i="0">
+                          <a:solidFill>
+                            <a:srgbClr val="141413"/>
+                          </a:solidFill>
+                          <a:latin typeface="Inter"/>
+                        </a:rPr>
+                        <a:t>Inversión inicial de un solo pago</a:t>
+                      </a:r>
+                    </a:p>
+                  </a:txBody>
+                  <a:tcPr anchor="ctr" marL="76200" marR="76200" marT="50800" marB="50800">
+                    <a:solidFill>
+                      <a:srgbClr val="FFFFFF"/>
+                    </a:solidFill>
+                  </a:tcPr>
+                </a:tc>
+                <a:tc>
+                  <a:txBody>
+                    <a:bodyPr wrap="square"/>
+                    <a:lstStyle/>
+                    <a:p>
+                      <a:pPr algn="l">
+                        <a:lnSpc>
+                          <a:spcPct val="105000"/>
+                        </a:lnSpc>
+                        <a:spcBef>
+                          <a:spcPts val="0"/>
+                        </a:spcBef>
+                        <a:spcAft>
+                          <a:spcPts val="0"/>
+                        </a:spcAft>
+                      </a:pPr>
+                      <a:r>
+                        <a:rPr sz="1400" b="1" i="0">
+                          <a:solidFill>
+                            <a:srgbClr val="C13F26"/>
+                          </a:solidFill>
+                          <a:latin typeface="Inter"/>
+                        </a:rPr>
+                        <a:t>aprox. $626 MXN</a:t>
+                      </a:r>
+                    </a:p>
+                  </a:txBody>
+                  <a:tcPr anchor="ctr" marL="76200" marR="76200" marT="50800" marB="50800">
+                    <a:solidFill>
+                      <a:srgbClr val="FFFFFF"/>
+                    </a:solidFill>
+                  </a:tcPr>
+                </a:tc>
+                <a:tc>
+                  <a:txBody>
+                    <a:bodyPr wrap="square"/>
+                    <a:lstStyle/>
+                    <a:p>
+                      <a:pPr algn="l">
+                        <a:lnSpc>
+                          <a:spcPct val="105000"/>
+                        </a:lnSpc>
+                        <a:spcBef>
+                          <a:spcPts val="0"/>
+                        </a:spcBef>
+                        <a:spcAft>
+                          <a:spcPts val="0"/>
+                        </a:spcAft>
+                      </a:pPr>
+                      <a:r>
+                        <a:rPr sz="1400" b="0" i="0">
+                          <a:solidFill>
+                            <a:srgbClr val="6B6B67"/>
+                          </a:solidFill>
+                          <a:latin typeface="Inter"/>
+                        </a:rPr>
+                        <a:t>Real, ya pagado</a:t>
+                      </a:r>
+                    </a:p>
+                  </a:txBody>
+                  <a:tcPr anchor="ctr" marL="76200" marR="76200" marT="50800" marB="50800">
+                    <a:solidFill>
+                      <a:srgbClr val="FFFFFF"/>
+                    </a:solidFill>
+                  </a:tcPr>
+                </a:tc>
+              </a:tr>
+              <a:tr h="640000">
+                <a:tc>
+                  <a:txBody>
+                    <a:bodyPr wrap="square"/>
+                    <a:lstStyle/>
+                    <a:p>
+                      <a:pPr algn="l">
+                        <a:lnSpc>
+                          <a:spcPct val="105000"/>
+                        </a:lnSpc>
+                        <a:spcBef>
+                          <a:spcPts val="0"/>
+                        </a:spcBef>
+                        <a:spcAft>
+                          <a:spcPts val="0"/>
+                        </a:spcAft>
+                      </a:pPr>
+                      <a:r>
+                        <a:rPr sz="1400" b="0" i="0">
+                          <a:solidFill>
+                            <a:srgbClr val="141413"/>
+                          </a:solidFill>
+                          <a:latin typeface="Inter"/>
+                        </a:rPr>
+                        <a:t>Herramienta de desarrollo (Claude Code Max)</a:t>
+                      </a:r>
+                    </a:p>
+                  </a:txBody>
+                  <a:tcPr anchor="ctr" marL="76200" marR="76200" marT="50800" marB="50800">
+                    <a:solidFill>
+                      <a:srgbClr val="F0EEE8"/>
+                    </a:solidFill>
+                  </a:tcPr>
+                </a:tc>
+                <a:tc>
+                  <a:txBody>
+                    <a:bodyPr wrap="square"/>
+                    <a:lstStyle/>
+                    <a:p>
+                      <a:pPr algn="l">
+                        <a:lnSpc>
+                          <a:spcPct val="105000"/>
+                        </a:lnSpc>
+                        <a:spcBef>
+                          <a:spcPts val="0"/>
+                        </a:spcBef>
+                        <a:spcAft>
+                          <a:spcPts val="0"/>
+                        </a:spcAft>
+                      </a:pPr>
+                      <a:r>
+                        <a:rPr sz="1400" b="1" i="0">
+                          <a:solidFill>
+                            <a:srgbClr val="C13F26"/>
+                          </a:solidFill>
+                          <a:latin typeface="Inter"/>
+                        </a:rPr>
+                        <a:t>$100 USD/mes (aprox. $1,850 MXN/mes)</a:t>
+                      </a:r>
+                    </a:p>
+                  </a:txBody>
+                  <a:tcPr anchor="ctr" marL="76200" marR="76200" marT="50800" marB="50800">
+                    <a:solidFill>
+                      <a:srgbClr val="F0EEE8"/>
+                    </a:solidFill>
+                  </a:tcPr>
+                </a:tc>
+                <a:tc>
+                  <a:txBody>
+                    <a:bodyPr wrap="square"/>
+                    <a:lstStyle/>
+                    <a:p>
+                      <a:pPr algn="l">
+                        <a:lnSpc>
+                          <a:spcPct val="105000"/>
+                        </a:lnSpc>
+                        <a:spcBef>
+                          <a:spcPts val="0"/>
+                        </a:spcBef>
+                        <a:spcAft>
+                          <a:spcPts val="0"/>
+                        </a:spcAft>
+                      </a:pPr>
+                      <a:r>
+                        <a:rPr sz="1400" b="0" i="0">
+                          <a:solidFill>
+                            <a:srgbClr val="6B6B67"/>
+                          </a:solidFill>
+                          <a:latin typeface="Inter"/>
+                        </a:rPr>
+                        <a:t>Real, recurrente</a:t>
+                      </a:r>
+                    </a:p>
+                  </a:txBody>
+                  <a:tcPr anchor="ctr" marL="76200" marR="76200" marT="50800" marB="50800">
+                    <a:solidFill>
+                      <a:srgbClr val="F0EEE8"/>
+                    </a:solidFill>
+                  </a:tcPr>
+                </a:tc>
+              </a:tr>
+              <a:tr h="640000">
+                <a:tc>
+                  <a:txBody>
+                    <a:bodyPr wrap="square"/>
+                    <a:lstStyle/>
+                    <a:p>
+                      <a:pPr algn="l">
+                        <a:lnSpc>
+                          <a:spcPct val="105000"/>
+                        </a:lnSpc>
+                        <a:spcBef>
+                          <a:spcPts val="0"/>
+                        </a:spcBef>
+                        <a:spcAft>
+                          <a:spcPts val="0"/>
+                        </a:spcAft>
+                      </a:pPr>
+                      <a:r>
+                        <a:rPr sz="1400" b="0" i="0">
+                          <a:solidFill>
+                            <a:srgbClr val="141413"/>
+                          </a:solidFill>
+                          <a:latin typeface="Inter"/>
+                        </a:rPr>
+                        <a:t>Operación mensual (Supabase + Vercel)</a:t>
+                      </a:r>
+                    </a:p>
+                  </a:txBody>
+                  <a:tcPr anchor="ctr" marL="76200" marR="76200" marT="50800" marB="50800">
+                    <a:solidFill>
+                      <a:srgbClr val="FFFFFF"/>
+                    </a:solidFill>
+                  </a:tcPr>
+                </a:tc>
+                <a:tc>
+                  <a:txBody>
+                    <a:bodyPr wrap="square"/>
+                    <a:lstStyle/>
+                    <a:p>
+                      <a:pPr algn="l">
+                        <a:lnSpc>
+                          <a:spcPct val="105000"/>
+                        </a:lnSpc>
+                        <a:spcBef>
+                          <a:spcPts val="0"/>
+                        </a:spcBef>
+                        <a:spcAft>
+                          <a:spcPts val="0"/>
+                        </a:spcAft>
+                      </a:pPr>
+                      <a:r>
+                        <a:rPr sz="1400" b="1" i="0">
+                          <a:solidFill>
+                            <a:srgbClr val="C13F26"/>
+                          </a:solidFill>
+                          <a:latin typeface="Inter"/>
+                        </a:rPr>
+                        <a:t>aprox. $830 MXN/mes</a:t>
+                      </a:r>
+                    </a:p>
+                  </a:txBody>
+                  <a:tcPr anchor="ctr" marL="76200" marR="76200" marT="50800" marB="50800">
+                    <a:solidFill>
+                      <a:srgbClr val="FFFFFF"/>
+                    </a:solidFill>
+                  </a:tcPr>
+                </a:tc>
+                <a:tc>
+                  <a:txBody>
+                    <a:bodyPr wrap="square"/>
+                    <a:lstStyle/>
+                    <a:p>
+                      <a:pPr algn="l">
+                        <a:lnSpc>
+                          <a:spcPct val="105000"/>
+                        </a:lnSpc>
+                        <a:spcBef>
+                          <a:spcPts val="0"/>
+                        </a:spcBef>
+                        <a:spcAft>
+                          <a:spcPts val="0"/>
+                        </a:spcAft>
+                      </a:pPr>
+                      <a:r>
+                        <a:rPr sz="1400" b="0" i="0">
+                          <a:solidFill>
+                            <a:srgbClr val="6B6B67"/>
+                          </a:solidFill>
+                          <a:latin typeface="Inter"/>
+                        </a:rPr>
+                        <a:t>Proyectado · ago. 2026</a:t>
+                      </a:r>
+                    </a:p>
+                  </a:txBody>
+                  <a:tcPr anchor="ctr" marL="76200" marR="76200" marT="50800" marB="50800">
+                    <a:solidFill>
+                      <a:srgbClr val="FFFFFF"/>
+                    </a:solidFill>
+                  </a:tcPr>
+                </a:tc>
+              </a:tr>
+              <a:tr h="640000">
+                <a:tc>
+                  <a:txBody>
+                    <a:bodyPr wrap="square"/>
+                    <a:lstStyle/>
+                    <a:p>
+                      <a:pPr algn="l">
+                        <a:lnSpc>
+                          <a:spcPct val="105000"/>
+                        </a:lnSpc>
+                        <a:spcBef>
+                          <a:spcPts val="0"/>
+                        </a:spcBef>
+                        <a:spcAft>
+                          <a:spcPts val="0"/>
+                        </a:spcAft>
+                      </a:pPr>
+                      <a:r>
+                        <a:rPr sz="1400" b="0" i="0">
+                          <a:solidFill>
+                            <a:srgbClr val="141413"/>
+                          </a:solidFill>
+                          <a:latin typeface="Inter"/>
+                        </a:rPr>
+                        <a:t>Costo por venta</a:t>
+                      </a:r>
+                    </a:p>
+                  </a:txBody>
+                  <a:tcPr anchor="ctr" marL="76200" marR="76200" marT="50800" marB="50800">
+                    <a:solidFill>
+                      <a:srgbClr val="F0EEE8"/>
+                    </a:solidFill>
+                  </a:tcPr>
+                </a:tc>
+                <a:tc>
+                  <a:txBody>
+                    <a:bodyPr wrap="square"/>
+                    <a:lstStyle/>
+                    <a:p>
+                      <a:pPr algn="l">
+                        <a:lnSpc>
+                          <a:spcPct val="105000"/>
+                        </a:lnSpc>
+                        <a:spcBef>
+                          <a:spcPts val="0"/>
+                        </a:spcBef>
+                        <a:spcAft>
+                          <a:spcPts val="0"/>
+                        </a:spcAft>
+                      </a:pPr>
+                      <a:r>
+                        <a:rPr sz="1400" b="1" i="0">
+                          <a:solidFill>
+                            <a:srgbClr val="C13F26"/>
+                          </a:solidFill>
+                          <a:latin typeface="Inter"/>
+                        </a:rPr>
+                        <a:t>aprox. $3.90 MXN por venta</a:t>
+                      </a:r>
+                    </a:p>
+                  </a:txBody>
+                  <a:tcPr anchor="ctr" marL="76200" marR="76200" marT="50800" marB="50800">
+                    <a:solidFill>
+                      <a:srgbClr val="F0EEE8"/>
+                    </a:solidFill>
+                  </a:tcPr>
+                </a:tc>
+                <a:tc>
+                  <a:txBody>
+                    <a:bodyPr wrap="square"/>
+                    <a:lstStyle/>
+                    <a:p>
+                      <a:pPr algn="l">
+                        <a:lnSpc>
+                          <a:spcPct val="105000"/>
+                        </a:lnSpc>
+                        <a:spcBef>
+                          <a:spcPts val="0"/>
+                        </a:spcBef>
+                        <a:spcAft>
+                          <a:spcPts val="0"/>
+                        </a:spcAft>
+                      </a:pPr>
+                      <a:r>
+                        <a:rPr sz="1400" b="0" i="0">
+                          <a:solidFill>
+                            <a:srgbClr val="6B6B67"/>
+                          </a:solidFill>
+                          <a:latin typeface="Inter"/>
+                        </a:rPr>
+                        <a:t>Calculado · supuesto de volumen</a:t>
+                      </a:r>
+                    </a:p>
+                  </a:txBody>
+                  <a:tcPr anchor="ctr" marL="76200" marR="76200" marT="50800" marB="50800">
+                    <a:solidFill>
+                      <a:srgbClr val="F0EEE8"/>
+                    </a:solidFill>
+                  </a:tcPr>
+                </a:tc>
+              </a:tr>
+            </a:tbl>
+          </a:graphicData>
+        </a:graphic>
+      </p:graphicFrame>
+      <p:sp>
+        <p:nvSpPr>
+          <p:cNvPr id="12" name="TextBox 11"/>
+          <p:cNvSpPr txBox="1"/>
+          <p:nvPr/>
+        </p:nvSpPr>
+        <p:spPr>
+          <a:xfrm>
+            <a:off x="5872960" y="5700000"/>
+            <a:ext cx="5496080" cy="700000"/>
+          </a:xfrm>
+          <a:prstGeom prst="rect">
+            <a:avLst/>
+          </a:prstGeom>
+          <a:noFill/>
+        </p:spPr>
+        <p:txBody>
+          <a:bodyPr wrap="square" anchor="t" lIns="0" rIns="0" tIns="0" bIns="0">
+            <a:spAutoFit/>
+          </a:bodyPr>
+          <a:lstStyle/>
+          <a:p>
+            <a:pPr algn="l">
+              <a:lnSpc>
+                <a:spcPct val="120000"/>
+              </a:lnSpc>
+              <a:spcBef>
+                <a:spcPts val="0"/>
+              </a:spcBef>
+              <a:spcAft>
+                <a:spcPts val="0"/>
+              </a:spcAft>
+            </a:pPr>
+            <a:r>
+              <a:rPr sz="1150" b="0" i="1">
+                <a:solidFill>
+                  <a:srgbClr val="6B6B67"/>
+                </a:solidFill>
+                <a:latin typeface="Inter"/>
+              </a:rPr>
+              <a:t>Retorno esperado: todavía no calculable de forma defendible. Sin precio decidido, solo principios: sin comisión por transacción, precio fijo o estacional.</a:t>
+            </a:r>
+          </a:p>
+        </p:txBody>
+      </p:sp>
+    </p:spTree>
+  </p:cSld>
+  <p:clrMapOvr>
+    <a:masterClrMapping/>
+  </p:clrMapOvr>
+  <p:transition spd="med">
+    <p:wipe dir="l"/>
+  </p:transition>
+</p:sld>
+</file>
+
 <file path=ppt/slides/slide7.xml><?xml version="1.0" encoding="utf-8"?>
+<p:sld xmlns:a="http://schemas.openxmlformats.org/drawingml/2006/main" xmlns:p="http://schemas.openxmlformats.org/presentationml/2006/main" xmlns:r="http://schemas.openxmlformats.org/officeDocument/2006/relationships">
+  <p:cSld>
+    <p:spTree>
+      <p:nvGrpSpPr>
+        <p:cNvPr id="1" name=""/>
+        <p:cNvGrpSpPr/>
+        <p:nvPr/>
+      </p:nvGrpSpPr>
+      <p:grpSpPr/>
+      <p:sp>
+        <p:nvSpPr>
+          <p:cNvPr id="2" name="Rectangle 1"/>
+          <p:cNvSpPr/>
+          <p:nvPr/>
+        </p:nvSpPr>
+        <p:spPr>
+          <a:xfrm>
+            <a:off x="0" y="0"/>
+            <a:ext cx="12192000" cy="6858000"/>
+          </a:xfrm>
+          <a:prstGeom prst="rect">
+            <a:avLst/>
+          </a:prstGeom>
+          <a:solidFill>
+            <a:srgbClr val="141413"/>
+          </a:solidFill>
+          <a:ln>
+            <a:noFill/>
+          </a:ln>
+          <a:effectLst/>
+        </p:spPr>
+        <p:style>
+          <a:lnRef idx="1">
+            <a:schemeClr val="accent1"/>
+          </a:lnRef>
+          <a:fillRef idx="3">
+            <a:schemeClr val="accent1"/>
+          </a:fillRef>
+          <a:effectRef idx="2">
+            <a:schemeClr val="accent1"/>
+          </a:effectRef>
+          <a:fontRef idx="minor">
+            <a:schemeClr val="lt1"/>
+          </a:fontRef>
+        </p:style>
+        <p:txBody>
+          <a:bodyPr rtlCol="0" anchor="ctr"/>
+          <a:lstStyle/>
+          <a:p>
+            <a:pPr algn="ctr"/>
+          </a:p>
+        </p:txBody>
+      </p:sp>
+      <p:sp>
+        <p:nvSpPr>
+          <p:cNvPr id="3" name="TextBox 2"/>
+          <p:cNvSpPr txBox="1"/>
+          <p:nvPr/>
+        </p:nvSpPr>
+        <p:spPr>
+          <a:xfrm>
+            <a:off x="822960" y="411480"/>
+            <a:ext cx="8000000" cy="700000"/>
+          </a:xfrm>
+          <a:prstGeom prst="rect">
+            <a:avLst/>
+          </a:prstGeom>
+          <a:noFill/>
+        </p:spPr>
+        <p:txBody>
+          <a:bodyPr wrap="square" anchor="t" lIns="0" rIns="0" tIns="0" bIns="0">
+            <a:spAutoFit/>
+          </a:bodyPr>
+          <a:lstStyle/>
+          <a:p>
+            <a:pPr algn="l">
+              <a:spcBef>
+                <a:spcPts val="0"/>
+              </a:spcBef>
+              <a:spcAft>
+                <a:spcPts val="0"/>
+              </a:spcAft>
+            </a:pPr>
+            <a:r>
+              <a:rPr sz="4400" b="1" i="0">
+                <a:solidFill>
+                  <a:srgbClr val="FFFFFF"/>
+                </a:solidFill>
+                <a:latin typeface="Fredoka"/>
+              </a:rPr>
+              <a:t>Riesgos y bloqueos.</a:t>
+            </a:r>
+          </a:p>
+        </p:txBody>
+      </p:sp>
+      <p:sp>
+        <p:nvSpPr>
+          <p:cNvPr id="4" name="TextBox 3"/>
+          <p:cNvSpPr txBox="1"/>
+          <p:nvPr/>
+        </p:nvSpPr>
+        <p:spPr>
+          <a:xfrm>
+            <a:off x="868680" y="1080000"/>
+            <a:ext cx="10230000" cy="450000"/>
+          </a:xfrm>
+          <a:prstGeom prst="rect">
+            <a:avLst/>
+          </a:prstGeom>
+          <a:noFill/>
+        </p:spPr>
+        <p:txBody>
+          <a:bodyPr wrap="square" anchor="t" lIns="0" rIns="0" tIns="0" bIns="0">
+            <a:spAutoFit/>
+          </a:bodyPr>
+          <a:lstStyle/>
+          <a:p>
+            <a:pPr algn="l">
+              <a:lnSpc>
+                <a:spcPct val="120000"/>
+              </a:lnSpc>
+              <a:spcBef>
+                <a:spcPts val="0"/>
+              </a:spcBef>
+              <a:spcAft>
+                <a:spcPts val="0"/>
+              </a:spcAft>
+            </a:pPr>
+            <a:r>
+              <a:rPr sz="1600" b="0" i="0">
+                <a:solidFill>
+                  <a:srgbClr val="C7C5C0"/>
+                </a:solidFill>
+                <a:latin typeface="Inter"/>
+              </a:rPr>
+              <a:t>Qué puede detener esto, y quién lo resuelve.</a:t>
+            </a:r>
+          </a:p>
+        </p:txBody>
+      </p:sp>
+      <p:sp>
+        <p:nvSpPr>
+          <p:cNvPr id="5" name="TextBox 4"/>
+          <p:cNvSpPr txBox="1"/>
+          <p:nvPr/>
+        </p:nvSpPr>
+        <p:spPr>
+          <a:xfrm>
+            <a:off x="822960" y="1780000"/>
+            <a:ext cx="6900000" cy="320000"/>
+          </a:xfrm>
+          <a:prstGeom prst="rect">
+            <a:avLst/>
+          </a:prstGeom>
+          <a:noFill/>
+        </p:spPr>
+        <p:txBody>
+          <a:bodyPr wrap="square" anchor="t" lIns="0" rIns="0" tIns="0" bIns="0">
+            <a:spAutoFit/>
+          </a:bodyPr>
+          <a:lstStyle/>
+          <a:p>
+            <a:pPr algn="l">
+              <a:spcBef>
+                <a:spcPts val="0"/>
+              </a:spcBef>
+              <a:spcAft>
+                <a:spcPts val="0"/>
+              </a:spcAft>
+            </a:pPr>
+            <a:r>
+              <a:rPr sz="1200" b="1" i="0">
+                <a:solidFill>
+                  <a:srgbClr val="C13F26"/>
+                </a:solidFill>
+                <a:latin typeface="Inter"/>
+              </a:rPr>
+              <a:t>C I N C O   R I E S G O S</a:t>
+            </a:r>
+          </a:p>
+        </p:txBody>
+      </p:sp>
+      <p:graphicFrame>
+        <p:nvGraphicFramePr>
+          <p:cNvPr id="6" name="Table 5"/>
+          <p:cNvGraphicFramePr>
+            <a:graphicFrameLocks noGrp="1"/>
+          </p:cNvGraphicFramePr>
+          <p:nvPr/>
+        </p:nvGraphicFramePr>
+        <p:xfrm>
+          <a:off x="822960" y="2200000"/>
+          <a:ext cx="6900000" cy="4420000"/>
+        </p:xfrm>
+        <a:graphic>
+          <a:graphicData uri="http://schemas.openxmlformats.org/drawingml/2006/table">
+            <a:tbl>
+              <a:tblPr>
+                <a:tableStyleId>{5C22544A-7EE6-4342-B048-85BDC9FD1C3A}</a:tableStyleId>
+              </a:tblPr>
+              <a:tblGrid>
+                <a:gridCol w="3564000"/>
+                <a:gridCol w="1668000"/>
+                <a:gridCol w="1668000"/>
+              </a:tblGrid>
+              <a:tr h="520000">
+                <a:tc>
+                  <a:txBody>
+                    <a:bodyPr wrap="square"/>
+                    <a:lstStyle/>
+                    <a:p>
+                      <a:pPr algn="l">
+                        <a:lnSpc>
+                          <a:spcPct val="105000"/>
+                        </a:lnSpc>
+                        <a:spcBef>
+                          <a:spcPts val="0"/>
+                        </a:spcBef>
+                        <a:spcAft>
+                          <a:spcPts val="0"/>
+                        </a:spcAft>
+                      </a:pPr>
+                      <a:r>
+                        <a:rPr sz="1400" b="1" i="0">
+                          <a:solidFill>
+                            <a:srgbClr val="C7C5C0"/>
+                          </a:solidFill>
+                          <a:latin typeface="Inter"/>
+                        </a:rPr>
+                        <a:t>Riesgo</a:t>
+                      </a:r>
+                    </a:p>
+                  </a:txBody>
+                  <a:tcPr anchor="ctr" marL="76200" marR="76200" marT="50800" marB="50800">
+                    <a:solidFill>
+                      <a:srgbClr val="1D1D1B"/>
+                    </a:solidFill>
+                  </a:tcPr>
+                </a:tc>
+                <a:tc>
+                  <a:txBody>
+                    <a:bodyPr wrap="square"/>
+                    <a:lstStyle/>
+                    <a:p>
+                      <a:pPr algn="l">
+                        <a:lnSpc>
+                          <a:spcPct val="105000"/>
+                        </a:lnSpc>
+                        <a:spcBef>
+                          <a:spcPts val="0"/>
+                        </a:spcBef>
+                        <a:spcAft>
+                          <a:spcPts val="0"/>
+                        </a:spcAft>
+                      </a:pPr>
+                      <a:r>
+                        <a:rPr sz="1400" b="1" i="0">
+                          <a:solidFill>
+                            <a:srgbClr val="C7C5C0"/>
+                          </a:solidFill>
+                          <a:latin typeface="Inter"/>
+                        </a:rPr>
+                        <a:t>Probabilidad</a:t>
+                      </a:r>
+                    </a:p>
+                  </a:txBody>
+                  <a:tcPr anchor="ctr" marL="76200" marR="76200" marT="50800" marB="50800">
+                    <a:solidFill>
+                      <a:srgbClr val="1D1D1B"/>
+                    </a:solidFill>
+                  </a:tcPr>
+                </a:tc>
+                <a:tc>
+                  <a:txBody>
+                    <a:bodyPr wrap="square"/>
+                    <a:lstStyle/>
+                    <a:p>
+                      <a:pPr algn="l">
+                        <a:lnSpc>
+                          <a:spcPct val="105000"/>
+                        </a:lnSpc>
+                        <a:spcBef>
+                          <a:spcPts val="0"/>
+                        </a:spcBef>
+                        <a:spcAft>
+                          <a:spcPts val="0"/>
+                        </a:spcAft>
+                      </a:pPr>
+                      <a:r>
+                        <a:rPr sz="1400" b="1" i="0">
+                          <a:solidFill>
+                            <a:srgbClr val="C7C5C0"/>
+                          </a:solidFill>
+                          <a:latin typeface="Inter"/>
+                        </a:rPr>
+                        <a:t>Impacto</a:t>
+                      </a:r>
+                    </a:p>
+                  </a:txBody>
+                  <a:tcPr anchor="ctr" marL="76200" marR="76200" marT="50800" marB="50800">
+                    <a:solidFill>
+                      <a:srgbClr val="1D1D1B"/>
+                    </a:solidFill>
+                  </a:tcPr>
+                </a:tc>
+              </a:tr>
+              <a:tr h="780000">
+                <a:tc>
+                  <a:txBody>
+                    <a:bodyPr wrap="square"/>
+                    <a:lstStyle/>
+                    <a:p>
+                      <a:pPr algn="l">
+                        <a:lnSpc>
+                          <a:spcPct val="110000"/>
+                        </a:lnSpc>
+                        <a:spcBef>
+                          <a:spcPts val="0"/>
+                        </a:spcBef>
+                        <a:spcAft>
+                          <a:spcPts val="0"/>
+                        </a:spcAft>
+                      </a:pPr>
+                      <a:r>
+                        <a:rPr sz="1400" b="1" i="0">
+                          <a:solidFill>
+                            <a:srgbClr val="C13F26"/>
+                          </a:solidFill>
+                          <a:latin typeface="Fredoka"/>
+                        </a:rPr>
+                        <a:t>A  </a:t>
+                      </a:r>
+                      <a:r>
+                        <a:rPr sz="1400" b="0" i="0">
+                          <a:solidFill>
+                            <a:srgbClr val="FFFFFF"/>
+                          </a:solidFill>
+                          <a:latin typeface="Inter"/>
+                        </a:rPr>
+                        <a:t>Dependencia de un solo proveedor de infraestructura (Supabase + Vercel)</a:t>
+                      </a:r>
+                    </a:p>
+                  </a:txBody>
+                  <a:tcPr anchor="ctr" marL="76200" marR="76200" marT="50800" marB="50800">
+                    <a:solidFill>
+                      <a:srgbClr val="141413"/>
+                    </a:solidFill>
+                  </a:tcPr>
+                </a:tc>
+                <a:tc>
+                  <a:txBody>
+                    <a:bodyPr wrap="square"/>
+                    <a:lstStyle/>
+                    <a:p>
+                      <a:pPr algn="ctr">
+                        <a:lnSpc>
+                          <a:spcPct val="105000"/>
+                        </a:lnSpc>
+                        <a:spcBef>
+                          <a:spcPts val="0"/>
+                        </a:spcBef>
+                        <a:spcAft>
+                          <a:spcPts val="0"/>
+                        </a:spcAft>
+                      </a:pPr>
+                      <a:r>
+                        <a:rPr sz="1400" b="1" i="0">
+                          <a:solidFill>
+                            <a:srgbClr val="FFFFFF"/>
+                          </a:solidFill>
+                          <a:latin typeface="Inter"/>
+                        </a:rPr>
+                        <a:t>Alta</a:t>
+                      </a:r>
+                    </a:p>
+                  </a:txBody>
+                  <a:tcPr anchor="ctr" marL="76200" marR="76200" marT="50800" marB="50800">
+                    <a:solidFill>
+                      <a:srgbClr val="A72C2C"/>
+                    </a:solidFill>
+                  </a:tcPr>
+                </a:tc>
+                <a:tc>
+                  <a:txBody>
+                    <a:bodyPr wrap="square"/>
+                    <a:lstStyle/>
+                    <a:p>
+                      <a:pPr algn="ctr">
+                        <a:lnSpc>
+                          <a:spcPct val="105000"/>
+                        </a:lnSpc>
+                        <a:spcBef>
+                          <a:spcPts val="0"/>
+                        </a:spcBef>
+                        <a:spcAft>
+                          <a:spcPts val="0"/>
+                        </a:spcAft>
+                      </a:pPr>
+                      <a:r>
+                        <a:rPr sz="1400" b="1" i="0">
+                          <a:solidFill>
+                            <a:srgbClr val="FFFFFF"/>
+                          </a:solidFill>
+                          <a:latin typeface="Inter"/>
+                        </a:rPr>
+                        <a:t>Alta</a:t>
+                      </a:r>
+                    </a:p>
+                  </a:txBody>
+                  <a:tcPr anchor="ctr" marL="76200" marR="76200" marT="50800" marB="50800">
+                    <a:solidFill>
+                      <a:srgbClr val="A72C2C"/>
+                    </a:solidFill>
+                  </a:tcPr>
+                </a:tc>
+              </a:tr>
+              <a:tr h="780000">
+                <a:tc>
+                  <a:txBody>
+                    <a:bodyPr wrap="square"/>
+                    <a:lstStyle/>
+                    <a:p>
+                      <a:pPr algn="l">
+                        <a:lnSpc>
+                          <a:spcPct val="110000"/>
+                        </a:lnSpc>
+                        <a:spcBef>
+                          <a:spcPts val="0"/>
+                        </a:spcBef>
+                        <a:spcAft>
+                          <a:spcPts val="0"/>
+                        </a:spcAft>
+                      </a:pPr>
+                      <a:r>
+                        <a:rPr sz="1400" b="1" i="0">
+                          <a:solidFill>
+                            <a:srgbClr val="C13F26"/>
+                          </a:solidFill>
+                          <a:latin typeface="Fredoka"/>
+                        </a:rPr>
+                        <a:t>B  </a:t>
+                      </a:r>
+                      <a:r>
+                        <a:rPr sz="1400" b="0" i="0">
+                          <a:solidFill>
+                            <a:srgbClr val="FFFFFF"/>
+                          </a:solidFill>
+                          <a:latin typeface="Inter"/>
+                        </a:rPr>
+                        <a:t>Datos sensibles de comerciantes y clientes expuestos</a:t>
+                      </a:r>
+                    </a:p>
+                  </a:txBody>
+                  <a:tcPr anchor="ctr" marL="76200" marR="76200" marT="50800" marB="50800">
+                    <a:solidFill>
+                      <a:srgbClr val="1D1D1B"/>
+                    </a:solidFill>
+                  </a:tcPr>
+                </a:tc>
+                <a:tc>
+                  <a:txBody>
+                    <a:bodyPr wrap="square"/>
+                    <a:lstStyle/>
+                    <a:p>
+                      <a:pPr algn="ctr">
+                        <a:lnSpc>
+                          <a:spcPct val="105000"/>
+                        </a:lnSpc>
+                        <a:spcBef>
+                          <a:spcPts val="0"/>
+                        </a:spcBef>
+                        <a:spcAft>
+                          <a:spcPts val="0"/>
+                        </a:spcAft>
+                      </a:pPr>
+                      <a:r>
+                        <a:rPr sz="1400" b="1" i="0">
+                          <a:solidFill>
+                            <a:srgbClr val="FFFFFF"/>
+                          </a:solidFill>
+                          <a:latin typeface="Inter"/>
+                        </a:rPr>
+                        <a:t>Baja hoy</a:t>
+                      </a:r>
+                    </a:p>
+                  </a:txBody>
+                  <a:tcPr anchor="ctr" marL="76200" marR="76200" marT="50800" marB="50800">
+                    <a:solidFill>
+                      <a:srgbClr val="2E7D46"/>
+                    </a:solidFill>
+                  </a:tcPr>
+                </a:tc>
+                <a:tc>
+                  <a:txBody>
+                    <a:bodyPr wrap="square"/>
+                    <a:lstStyle/>
+                    <a:p>
+                      <a:pPr algn="ctr">
+                        <a:lnSpc>
+                          <a:spcPct val="105000"/>
+                        </a:lnSpc>
+                        <a:spcBef>
+                          <a:spcPts val="0"/>
+                        </a:spcBef>
+                        <a:spcAft>
+                          <a:spcPts val="0"/>
+                        </a:spcAft>
+                      </a:pPr>
+                      <a:r>
+                        <a:rPr sz="1400" b="1" i="0">
+                          <a:solidFill>
+                            <a:srgbClr val="FFFFFF"/>
+                          </a:solidFill>
+                          <a:latin typeface="Inter"/>
+                        </a:rPr>
+                        <a:t>Alta</a:t>
+                      </a:r>
+                    </a:p>
+                  </a:txBody>
+                  <a:tcPr anchor="ctr" marL="76200" marR="76200" marT="50800" marB="50800">
+                    <a:solidFill>
+                      <a:srgbClr val="A72C2C"/>
+                    </a:solidFill>
+                  </a:tcPr>
+                </a:tc>
+              </a:tr>
+              <a:tr h="780000">
+                <a:tc>
+                  <a:txBody>
+                    <a:bodyPr wrap="square"/>
+                    <a:lstStyle/>
+                    <a:p>
+                      <a:pPr algn="l">
+                        <a:lnSpc>
+                          <a:spcPct val="110000"/>
+                        </a:lnSpc>
+                        <a:spcBef>
+                          <a:spcPts val="0"/>
+                        </a:spcBef>
+                        <a:spcAft>
+                          <a:spcPts val="0"/>
+                        </a:spcAft>
+                      </a:pPr>
+                      <a:r>
+                        <a:rPr sz="1400" b="1" i="0">
+                          <a:solidFill>
+                            <a:srgbClr val="C13F26"/>
+                          </a:solidFill>
+                          <a:latin typeface="Fredoka"/>
+                        </a:rPr>
+                        <a:t>C  </a:t>
+                      </a:r>
+                      <a:r>
+                        <a:rPr sz="1400" b="0" i="0">
+                          <a:solidFill>
+                            <a:srgbClr val="FFFFFF"/>
+                          </a:solidFill>
+                          <a:latin typeface="Inter"/>
+                        </a:rPr>
+                        <a:t>Adopción real no confirmada, el embudo de validación no está resuelto</a:t>
+                      </a:r>
+                    </a:p>
+                  </a:txBody>
+                  <a:tcPr anchor="ctr" marL="76200" marR="76200" marT="50800" marB="50800">
+                    <a:solidFill>
+                      <a:srgbClr val="141413"/>
+                    </a:solidFill>
+                  </a:tcPr>
+                </a:tc>
+                <a:tc>
+                  <a:txBody>
+                    <a:bodyPr wrap="square"/>
+                    <a:lstStyle/>
+                    <a:p>
+                      <a:pPr algn="ctr">
+                        <a:lnSpc>
+                          <a:spcPct val="105000"/>
+                        </a:lnSpc>
+                        <a:spcBef>
+                          <a:spcPts val="0"/>
+                        </a:spcBef>
+                        <a:spcAft>
+                          <a:spcPts val="0"/>
+                        </a:spcAft>
+                      </a:pPr>
+                      <a:r>
+                        <a:rPr sz="1400" b="1" i="0">
+                          <a:solidFill>
+                            <a:srgbClr val="FFFFFF"/>
+                          </a:solidFill>
+                          <a:latin typeface="Inter"/>
+                        </a:rPr>
+                        <a:t>Alta (ya está ocurriendo)</a:t>
+                      </a:r>
+                    </a:p>
+                  </a:txBody>
+                  <a:tcPr anchor="ctr" marL="76200" marR="76200" marT="50800" marB="50800">
+                    <a:solidFill>
+                      <a:srgbClr val="A72C2C"/>
+                    </a:solidFill>
+                  </a:tcPr>
+                </a:tc>
+                <a:tc>
+                  <a:txBody>
+                    <a:bodyPr wrap="square"/>
+                    <a:lstStyle/>
+                    <a:p>
+                      <a:pPr algn="ctr">
+                        <a:lnSpc>
+                          <a:spcPct val="105000"/>
+                        </a:lnSpc>
+                        <a:spcBef>
+                          <a:spcPts val="0"/>
+                        </a:spcBef>
+                        <a:spcAft>
+                          <a:spcPts val="0"/>
+                        </a:spcAft>
+                      </a:pPr>
+                      <a:r>
+                        <a:rPr sz="1400" b="1" i="0">
+                          <a:solidFill>
+                            <a:srgbClr val="FFFFFF"/>
+                          </a:solidFill>
+                          <a:latin typeface="Inter"/>
+                        </a:rPr>
+                        <a:t>Alta</a:t>
+                      </a:r>
+                    </a:p>
+                  </a:txBody>
+                  <a:tcPr anchor="ctr" marL="76200" marR="76200" marT="50800" marB="50800">
+                    <a:solidFill>
+                      <a:srgbClr val="A72C2C"/>
+                    </a:solidFill>
+                  </a:tcPr>
+                </a:tc>
+              </a:tr>
+              <a:tr h="780000">
+                <a:tc>
+                  <a:txBody>
+                    <a:bodyPr wrap="square"/>
+                    <a:lstStyle/>
+                    <a:p>
+                      <a:pPr algn="l">
+                        <a:lnSpc>
+                          <a:spcPct val="110000"/>
+                        </a:lnSpc>
+                        <a:spcBef>
+                          <a:spcPts val="0"/>
+                        </a:spcBef>
+                        <a:spcAft>
+                          <a:spcPts val="0"/>
+                        </a:spcAft>
+                      </a:pPr>
+                      <a:r>
+                        <a:rPr sz="1400" b="1" i="0">
+                          <a:solidFill>
+                            <a:srgbClr val="C13F26"/>
+                          </a:solidFill>
+                          <a:latin typeface="Fredoka"/>
+                        </a:rPr>
+                        <a:t>D  </a:t>
+                      </a:r>
+                      <a:r>
+                        <a:rPr sz="1400" b="0" i="0">
+                          <a:solidFill>
+                            <a:srgbClr val="FFFFFF"/>
+                          </a:solidFill>
+                          <a:latin typeface="Inter"/>
+                        </a:rPr>
+                        <a:t>Modelo de precios todavía no decidido</a:t>
+                      </a:r>
+                    </a:p>
+                  </a:txBody>
+                  <a:tcPr anchor="ctr" marL="76200" marR="76200" marT="50800" marB="50800">
+                    <a:solidFill>
+                      <a:srgbClr val="1D1D1B"/>
+                    </a:solidFill>
+                  </a:tcPr>
+                </a:tc>
+                <a:tc>
+                  <a:txBody>
+                    <a:bodyPr wrap="square"/>
+                    <a:lstStyle/>
+                    <a:p>
+                      <a:pPr algn="ctr">
+                        <a:lnSpc>
+                          <a:spcPct val="105000"/>
+                        </a:lnSpc>
+                        <a:spcBef>
+                          <a:spcPts val="0"/>
+                        </a:spcBef>
+                        <a:spcAft>
+                          <a:spcPts val="0"/>
+                        </a:spcAft>
+                      </a:pPr>
+                      <a:r>
+                        <a:rPr sz="1400" b="1" i="0">
+                          <a:solidFill>
+                            <a:srgbClr val="FFFFFF"/>
+                          </a:solidFill>
+                          <a:latin typeface="Inter"/>
+                        </a:rPr>
+                        <a:t>Media</a:t>
+                      </a:r>
+                    </a:p>
+                  </a:txBody>
+                  <a:tcPr anchor="ctr" marL="76200" marR="76200" marT="50800" marB="50800">
+                    <a:solidFill>
+                      <a:srgbClr val="C8811A"/>
+                    </a:solidFill>
+                  </a:tcPr>
+                </a:tc>
+                <a:tc>
+                  <a:txBody>
+                    <a:bodyPr wrap="square"/>
+                    <a:lstStyle/>
+                    <a:p>
+                      <a:pPr algn="ctr">
+                        <a:lnSpc>
+                          <a:spcPct val="105000"/>
+                        </a:lnSpc>
+                        <a:spcBef>
+                          <a:spcPts val="0"/>
+                        </a:spcBef>
+                        <a:spcAft>
+                          <a:spcPts val="0"/>
+                        </a:spcAft>
+                      </a:pPr>
+                      <a:r>
+                        <a:rPr sz="1400" b="1" i="0">
+                          <a:solidFill>
+                            <a:srgbClr val="FFFFFF"/>
+                          </a:solidFill>
+                          <a:latin typeface="Inter"/>
+                        </a:rPr>
+                        <a:t>Media a Alta</a:t>
+                      </a:r>
+                    </a:p>
+                  </a:txBody>
+                  <a:tcPr anchor="ctr" marL="76200" marR="76200" marT="50800" marB="50800">
+                    <a:solidFill>
+                      <a:srgbClr val="C8811A"/>
+                    </a:solidFill>
+                  </a:tcPr>
+                </a:tc>
+              </a:tr>
+              <a:tr h="780000">
+                <a:tc>
+                  <a:txBody>
+                    <a:bodyPr wrap="square"/>
+                    <a:lstStyle/>
+                    <a:p>
+                      <a:pPr algn="l">
+                        <a:lnSpc>
+                          <a:spcPct val="110000"/>
+                        </a:lnSpc>
+                        <a:spcBef>
+                          <a:spcPts val="0"/>
+                        </a:spcBef>
+                        <a:spcAft>
+                          <a:spcPts val="0"/>
+                        </a:spcAft>
+                      </a:pPr>
+                      <a:r>
+                        <a:rPr sz="1400" b="1" i="0">
+                          <a:solidFill>
+                            <a:srgbClr val="C13F26"/>
+                          </a:solidFill>
+                          <a:latin typeface="Fredoka"/>
+                        </a:rPr>
+                        <a:t>E  </a:t>
+                      </a:r>
+                      <a:r>
+                        <a:rPr sz="1400" b="0" i="0">
+                          <a:solidFill>
+                            <a:srgbClr val="FFFFFF"/>
+                          </a:solidFill>
+                          <a:latin typeface="Inter"/>
+                        </a:rPr>
+                        <a:t>Sesgo en futuras recomendaciones proactivas (visión de largo plazo, aún no construida)</a:t>
+                      </a:r>
+                    </a:p>
+                  </a:txBody>
+                  <a:tcPr anchor="ctr" marL="76200" marR="76200" marT="50800" marB="50800">
+                    <a:solidFill>
+                      <a:srgbClr val="141413"/>
+                    </a:solidFill>
+                  </a:tcPr>
+                </a:tc>
+                <a:tc>
+                  <a:txBody>
+                    <a:bodyPr wrap="square"/>
+                    <a:lstStyle/>
+                    <a:p>
+                      <a:pPr algn="ctr">
+                        <a:lnSpc>
+                          <a:spcPct val="105000"/>
+                        </a:lnSpc>
+                        <a:spcBef>
+                          <a:spcPts val="0"/>
+                        </a:spcBef>
+                        <a:spcAft>
+                          <a:spcPts val="0"/>
+                        </a:spcAft>
+                      </a:pPr>
+                      <a:r>
+                        <a:rPr sz="1400" b="1" i="0">
+                          <a:solidFill>
+                            <a:srgbClr val="FFFFFF"/>
+                          </a:solidFill>
+                          <a:latin typeface="Inter"/>
+                        </a:rPr>
+                        <a:t>Baja (aún no existe)</a:t>
+                      </a:r>
+                    </a:p>
+                  </a:txBody>
+                  <a:tcPr anchor="ctr" marL="76200" marR="76200" marT="50800" marB="50800">
+                    <a:solidFill>
+                      <a:srgbClr val="2E7D46"/>
+                    </a:solidFill>
+                  </a:tcPr>
+                </a:tc>
+                <a:tc>
+                  <a:txBody>
+                    <a:bodyPr wrap="square"/>
+                    <a:lstStyle/>
+                    <a:p>
+                      <a:pPr algn="ctr">
+                        <a:lnSpc>
+                          <a:spcPct val="105000"/>
+                        </a:lnSpc>
+                        <a:spcBef>
+                          <a:spcPts val="0"/>
+                        </a:spcBef>
+                        <a:spcAft>
+                          <a:spcPts val="0"/>
+                        </a:spcAft>
+                      </a:pPr>
+                      <a:r>
+                        <a:rPr sz="1400" b="1" i="0">
+                          <a:solidFill>
+                            <a:srgbClr val="FFFFFF"/>
+                          </a:solidFill>
+                          <a:latin typeface="Inter"/>
+                        </a:rPr>
+                        <a:t>Alta</a:t>
+                      </a:r>
+                    </a:p>
+                  </a:txBody>
+                  <a:tcPr anchor="ctr" marL="76200" marR="76200" marT="50800" marB="50800">
+                    <a:solidFill>
+                      <a:srgbClr val="A72C2C"/>
+                    </a:solidFill>
+                  </a:tcPr>
+                </a:tc>
+              </a:tr>
+            </a:tbl>
+          </a:graphicData>
+        </a:graphic>
+      </p:graphicFrame>
+      <p:sp>
+        <p:nvSpPr>
+          <p:cNvPr id="7" name="TextBox 6"/>
+          <p:cNvSpPr txBox="1"/>
+          <p:nvPr/>
+        </p:nvSpPr>
+        <p:spPr>
+          <a:xfrm>
+            <a:off x="8172960" y="1780000"/>
+            <a:ext cx="3196080" cy="320000"/>
+          </a:xfrm>
+          <a:prstGeom prst="rect">
+            <a:avLst/>
+          </a:prstGeom>
+          <a:noFill/>
+        </p:spPr>
+        <p:txBody>
+          <a:bodyPr wrap="square" anchor="t" lIns="0" rIns="0" tIns="0" bIns="0">
+            <a:spAutoFit/>
+          </a:bodyPr>
+          <a:lstStyle/>
+          <a:p>
+            <a:pPr algn="l">
+              <a:spcBef>
+                <a:spcPts val="0"/>
+              </a:spcBef>
+              <a:spcAft>
+                <a:spcPts val="0"/>
+              </a:spcAft>
+            </a:pPr>
+            <a:r>
+              <a:rPr sz="1200" b="1" i="0">
+                <a:solidFill>
+                  <a:srgbClr val="C13F26"/>
+                </a:solidFill>
+                <a:latin typeface="Inter"/>
+              </a:rPr>
+              <a:t>B L O Q U E O S</a:t>
+            </a:r>
+          </a:p>
+        </p:txBody>
+      </p:sp>
+      <p:sp>
+        <p:nvSpPr>
+          <p:cNvPr id="8" name="TextBox 7"/>
+          <p:cNvSpPr txBox="1"/>
+          <p:nvPr/>
+        </p:nvSpPr>
+        <p:spPr>
+          <a:xfrm>
+            <a:off x="8172960" y="2200000"/>
+            <a:ext cx="3196080" cy="900000"/>
+          </a:xfrm>
+          <a:prstGeom prst="rect">
+            <a:avLst/>
+          </a:prstGeom>
+          <a:noFill/>
+        </p:spPr>
+        <p:txBody>
+          <a:bodyPr wrap="square" anchor="t" lIns="0" rIns="0" tIns="0" bIns="0">
+            <a:spAutoFit/>
+          </a:bodyPr>
+          <a:lstStyle/>
+          <a:p>
+            <a:pPr algn="l">
+              <a:lnSpc>
+                <a:spcPct val="115000"/>
+              </a:lnSpc>
+              <a:spcBef>
+                <a:spcPts val="0"/>
+              </a:spcBef>
+              <a:spcAft>
+                <a:spcPts val="0"/>
+              </a:spcAft>
+            </a:pPr>
+            <a:r>
+              <a:rPr sz="1400" b="1" i="0">
+                <a:solidFill>
+                  <a:srgbClr val="C13F26"/>
+                </a:solidFill>
+                <a:latin typeface="Fredoka"/>
+              </a:rPr>
+              <a:t>(B) </a:t>
+            </a:r>
+            <a:r>
+              <a:rPr sz="1400" b="1" i="0">
+                <a:solidFill>
+                  <a:srgbClr val="FFFFFF"/>
+                </a:solidFill>
+                <a:latin typeface="Fredoka"/>
+              </a:rPr>
+              <a:t>Legal y cumplimiento</a:t>
+            </a:r>
+          </a:p>
+          <a:p>
+            <a:pPr algn="l">
+              <a:lnSpc>
+                <a:spcPct val="120000"/>
+              </a:lnSpc>
+              <a:spcBef>
+                <a:spcPts val="200"/>
+              </a:spcBef>
+              <a:spcAft>
+                <a:spcPts val="0"/>
+              </a:spcAft>
+            </a:pPr>
+            <a:r>
+              <a:rPr sz="1400" b="0" i="0">
+                <a:solidFill>
+                  <a:srgbClr val="C7C5C0"/>
+                </a:solidFill>
+                <a:latin typeface="Inter"/>
+              </a:rPr>
+              <a:t>Aviso de privacidad explícito antes de recolectar cualquier dato de clientes.</a:t>
+            </a:r>
+          </a:p>
+        </p:txBody>
+      </p:sp>
+      <p:sp>
+        <p:nvSpPr>
+          <p:cNvPr id="9" name="TextBox 8"/>
+          <p:cNvSpPr txBox="1"/>
+          <p:nvPr/>
+        </p:nvSpPr>
+        <p:spPr>
+          <a:xfrm>
+            <a:off x="8172960" y="3280000"/>
+            <a:ext cx="3196080" cy="900000"/>
+          </a:xfrm>
+          <a:prstGeom prst="rect">
+            <a:avLst/>
+          </a:prstGeom>
+          <a:noFill/>
+        </p:spPr>
+        <p:txBody>
+          <a:bodyPr wrap="square" anchor="t" lIns="0" rIns="0" tIns="0" bIns="0">
+            <a:spAutoFit/>
+          </a:bodyPr>
+          <a:lstStyle/>
+          <a:p>
+            <a:pPr algn="l">
+              <a:lnSpc>
+                <a:spcPct val="115000"/>
+              </a:lnSpc>
+              <a:spcBef>
+                <a:spcPts val="0"/>
+              </a:spcBef>
+              <a:spcAft>
+                <a:spcPts val="0"/>
+              </a:spcAft>
+            </a:pPr>
+            <a:r>
+              <a:rPr sz="1400" b="1" i="0">
+                <a:solidFill>
+                  <a:srgbClr val="C13F26"/>
+                </a:solidFill>
+                <a:latin typeface="Fredoka"/>
+              </a:rPr>
+              <a:t>(A) </a:t>
+            </a:r>
+            <a:r>
+              <a:rPr sz="1400" b="1" i="0">
+                <a:solidFill>
+                  <a:srgbClr val="FFFFFF"/>
+                </a:solidFill>
+                <a:latin typeface="Fredoka"/>
+              </a:rPr>
+              <a:t>TI y seguridad</a:t>
+            </a:r>
+          </a:p>
+          <a:p>
+            <a:pPr algn="l">
+              <a:lnSpc>
+                <a:spcPct val="120000"/>
+              </a:lnSpc>
+              <a:spcBef>
+                <a:spcPts val="200"/>
+              </a:spcBef>
+              <a:spcAft>
+                <a:spcPts val="0"/>
+              </a:spcAft>
+            </a:pPr>
+            <a:r>
+              <a:rPr sz="1400" b="0" i="0">
+                <a:solidFill>
+                  <a:srgbClr val="C7C5C0"/>
+                </a:solidFill>
+                <a:latin typeface="Inter"/>
+              </a:rPr>
+              <a:t>Exportación periódica de datos fuera de Supabase, antes de comprometerme más allá del piloto.</a:t>
+            </a:r>
+          </a:p>
+        </p:txBody>
+      </p:sp>
+      <p:sp>
+        <p:nvSpPr>
+          <p:cNvPr id="10" name="TextBox 9"/>
+          <p:cNvSpPr txBox="1"/>
+          <p:nvPr/>
+        </p:nvSpPr>
+        <p:spPr>
+          <a:xfrm>
+            <a:off x="8172960" y="4360000"/>
+            <a:ext cx="3196080" cy="900000"/>
+          </a:xfrm>
+          <a:prstGeom prst="rect">
+            <a:avLst/>
+          </a:prstGeom>
+          <a:noFill/>
+        </p:spPr>
+        <p:txBody>
+          <a:bodyPr wrap="square" anchor="t" lIns="0" rIns="0" tIns="0" bIns="0">
+            <a:spAutoFit/>
+          </a:bodyPr>
+          <a:lstStyle/>
+          <a:p>
+            <a:pPr algn="l">
+              <a:lnSpc>
+                <a:spcPct val="115000"/>
+              </a:lnSpc>
+              <a:spcBef>
+                <a:spcPts val="0"/>
+              </a:spcBef>
+              <a:spcAft>
+                <a:spcPts val="0"/>
+              </a:spcAft>
+            </a:pPr>
+            <a:r>
+              <a:rPr sz="1400" b="1" i="0">
+                <a:solidFill>
+                  <a:srgbClr val="C13F26"/>
+                </a:solidFill>
+                <a:latin typeface="Fredoka"/>
+              </a:rPr>
+              <a:t>(D) </a:t>
+            </a:r>
+            <a:r>
+              <a:rPr sz="1400" b="1" i="0">
+                <a:solidFill>
+                  <a:srgbClr val="FFFFFF"/>
+                </a:solidFill>
+                <a:latin typeface="Fredoka"/>
+              </a:rPr>
+              <a:t>Finanzas</a:t>
+            </a:r>
+          </a:p>
+          <a:p>
+            <a:pPr algn="l">
+              <a:lnSpc>
+                <a:spcPct val="120000"/>
+              </a:lnSpc>
+              <a:spcBef>
+                <a:spcPts val="200"/>
+              </a:spcBef>
+              <a:spcAft>
+                <a:spcPts val="0"/>
+              </a:spcAft>
+            </a:pPr>
+            <a:r>
+              <a:rPr sz="1400" b="0" i="0">
+                <a:solidFill>
+                  <a:srgbClr val="C7C5C0"/>
+                </a:solidFill>
+                <a:latin typeface="Inter"/>
+              </a:rPr>
+              <a:t>Investigación de precios comparables de SaaS para pequeños comerciantes en México.</a:t>
+            </a:r>
+          </a:p>
+        </p:txBody>
+      </p:sp>
+      <p:sp>
+        <p:nvSpPr>
+          <p:cNvPr id="11" name="TextBox 10"/>
+          <p:cNvSpPr txBox="1"/>
+          <p:nvPr/>
+        </p:nvSpPr>
+        <p:spPr>
+          <a:xfrm>
+            <a:off x="8172960" y="5440000"/>
+            <a:ext cx="3196080" cy="900000"/>
+          </a:xfrm>
+          <a:prstGeom prst="rect">
+            <a:avLst/>
+          </a:prstGeom>
+          <a:noFill/>
+        </p:spPr>
+        <p:txBody>
+          <a:bodyPr wrap="square" anchor="t" lIns="0" rIns="0" tIns="0" bIns="0">
+            <a:spAutoFit/>
+          </a:bodyPr>
+          <a:lstStyle/>
+          <a:p>
+            <a:pPr algn="l">
+              <a:lnSpc>
+                <a:spcPct val="115000"/>
+              </a:lnSpc>
+              <a:spcBef>
+                <a:spcPts val="0"/>
+              </a:spcBef>
+              <a:spcAft>
+                <a:spcPts val="0"/>
+              </a:spcAft>
+            </a:pPr>
+            <a:r>
+              <a:rPr sz="1400" b="1" i="0">
+                <a:solidFill>
+                  <a:srgbClr val="C13F26"/>
+                </a:solidFill>
+                <a:latin typeface="Fredoka"/>
+              </a:rPr>
+              <a:t>(C) </a:t>
+            </a:r>
+            <a:r>
+              <a:rPr sz="1400" b="1" i="0">
+                <a:solidFill>
+                  <a:srgbClr val="FFFFFF"/>
+                </a:solidFill>
+                <a:latin typeface="Fredoka"/>
+              </a:rPr>
+              <a:t>No es un bloqueo externo</a:t>
+            </a:r>
+          </a:p>
+          <a:p>
+            <a:pPr algn="l">
+              <a:lnSpc>
+                <a:spcPct val="120000"/>
+              </a:lnSpc>
+              <a:spcBef>
+                <a:spcPts val="200"/>
+              </a:spcBef>
+              <a:spcAft>
+                <a:spcPts val="0"/>
+              </a:spcAft>
+            </a:pPr>
+            <a:r>
+              <a:rPr sz="1400" b="0" i="0">
+                <a:solidFill>
+                  <a:srgbClr val="C7C5C0"/>
+                </a:solidFill>
+                <a:latin typeface="Inter"/>
+              </a:rPr>
+              <a:t>Me corresponde a mí resolverlo. El piloto Concierge/DM ya está en marcha.</a:t>
+            </a:r>
+          </a:p>
+        </p:txBody>
+      </p:sp>
+    </p:spTree>
+  </p:cSld>
+  <p:clrMapOvr>
+    <a:masterClrMapping/>
+  </p:clrMapOvr>
+  <p:transition spd="med">
+    <p:cut/>
+  </p:transition>
+</p:sld>
+</file>
+
+<file path=ppt/slides/slide8.xml><?xml version="1.0" encoding="utf-8"?>
 <p:sld xmlns:a="http://schemas.openxmlformats.org/drawingml/2006/main" xmlns:p="http://schemas.openxmlformats.org/presentationml/2006/main" xmlns:r="http://schemas.openxmlformats.org/officeDocument/2006/relationships">
   <p:cSld>
     <p:spTree>
@@ -6032,7 +8469,7 @@
 </p:sld>
 </file>
 
-<file path=ppt/slides/slide8.xml><?xml version="1.0" encoding="utf-8"?>
+<file path=ppt/slides/slide9.xml><?xml version="1.0" encoding="utf-8"?>
 <p:sld xmlns:a="http://schemas.openxmlformats.org/drawingml/2006/main" xmlns:p="http://schemas.openxmlformats.org/presentationml/2006/main" xmlns:r="http://schemas.openxmlformats.org/officeDocument/2006/relationships">
   <p:cSld>
     <p:spTree>
@@ -6118,92 +8555,6 @@
   <p:transition spd="med">
     <p:push dir="u"/>
   </p:transition>
-</p:sld>
-</file>
-
-<file path=ppt/slides/slide9.xml><?xml version="1.0" encoding="utf-8"?>
-<p:sld xmlns:a="http://schemas.openxmlformats.org/drawingml/2006/main" xmlns:p="http://schemas.openxmlformats.org/presentationml/2006/main" xmlns:r="http://schemas.openxmlformats.org/officeDocument/2006/relationships">
-  <p:cSld>
-    <p:spTree>
-      <p:nvGrpSpPr>
-        <p:cNvPr id="1" name=""/>
-        <p:cNvGrpSpPr/>
-        <p:nvPr/>
-      </p:nvGrpSpPr>
-      <p:grpSpPr/>
-      <p:sp>
-        <p:nvSpPr>
-          <p:cNvPr id="2" name="Rectangle 1"/>
-          <p:cNvSpPr/>
-          <p:nvPr/>
-        </p:nvSpPr>
-        <p:spPr>
-          <a:xfrm>
-            <a:off x="0" y="0"/>
-            <a:ext cx="12192000" cy="6858000"/>
-          </a:xfrm>
-          <a:prstGeom prst="rect">
-            <a:avLst/>
-          </a:prstGeom>
-          <a:solidFill>
-            <a:srgbClr val="FAF9F5"/>
-          </a:solidFill>
-          <a:ln>
-            <a:noFill/>
-          </a:ln>
-          <a:effectLst/>
-        </p:spPr>
-        <p:style>
-          <a:lnRef idx="1">
-            <a:schemeClr val="accent1"/>
-          </a:lnRef>
-          <a:fillRef idx="3">
-            <a:schemeClr val="accent1"/>
-          </a:fillRef>
-          <a:effectRef idx="2">
-            <a:schemeClr val="accent1"/>
-          </a:effectRef>
-          <a:fontRef idx="minor">
-            <a:schemeClr val="lt1"/>
-          </a:fontRef>
-        </p:style>
-        <p:txBody>
-          <a:bodyPr rtlCol="0" anchor="ctr"/>
-          <a:lstStyle/>
-          <a:p>
-            <a:pPr algn="ctr"/>
-          </a:p>
-        </p:txBody>
-      </p:sp>
-      <p:pic>
-        <p:nvPicPr>
-          <p:cNvPr id="3" name="Picture 2" descr="timeline-v2.png"/>
-          <p:cNvPicPr>
-            <a:picLocks noChangeAspect="1"/>
-          </p:cNvPicPr>
-          <p:nvPr/>
-        </p:nvPicPr>
-        <p:blipFill>
-          <a:blip r:embed="rId2"/>
-          <a:stretch>
-            <a:fillRect/>
-          </a:stretch>
-        </p:blipFill>
-        <p:spPr>
-          <a:xfrm>
-            <a:off x="109728" y="61722"/>
-            <a:ext cx="11972544" cy="6734556"/>
-          </a:xfrm>
-          <a:prstGeom prst="rect">
-            <a:avLst/>
-          </a:prstGeom>
-        </p:spPr>
-      </p:pic>
-    </p:spTree>
-  </p:cSld>
-  <p:clrMapOvr>
-    <a:masterClrMapping/>
-  </p:clrMapOvr>
 </p:sld>
 </file>
 

--- a/evidence/2026-08-22-demo-day/Nahui - Pitch Demo Day v2.pptx
+++ b/evidence/2026-08-22-demo-day/Nahui - Pitch Demo Day v2.pptx
@@ -4,20 +4,18 @@
   <p:sldMasterIdLst>
     <p:sldMasterId id="2147483648" r:id="rId1"/>
   </p:sldMasterIdLst>
+  <p:notesMasterIdLst>
+    <p:notesMasterId r:id="rId8"/>
+  </p:notesMasterIdLst>
   <p:sldIdLst>
-    <p:sldId id="256" r:id="rId7"/>
-    <p:sldId id="257" r:id="rId9"/>
-    <p:sldId id="258" r:id="rId10"/>
-    <p:sldId id="259" r:id="rId11"/>
-    <p:sldId id="260" r:id="rId12"/>
-    <p:sldId id="261" r:id="rId13"/>
-    <p:sldId id="262" r:id="rId14"/>
-    <p:sldId id="263" r:id="rId15"/>
-    <p:sldId id="264" r:id="rId16"/>
-    <p:sldId id="265" r:id="rId17"/>
-    <p:sldId id="266" r:id="rId18"/>
+    <p:sldId id="256" r:id="rId2"/>
+    <p:sldId id="257" r:id="rId3"/>
+    <p:sldId id="267" r:id="rId4"/>
+    <p:sldId id="260" r:id="rId5"/>
+    <p:sldId id="268" r:id="rId6"/>
+    <p:sldId id="266" r:id="rId7"/>
   </p:sldIdLst>
-  <p:sldSz cx="12192000" cy="6858000" type="screen4x3"/>
+  <p:sldSz cx="12192000" cy="6858000"/>
   <p:notesSz cx="6858000" cy="9144000"/>
   <p:defaultTextStyle>
     <a:defPPr>
@@ -114,11 +112,27 @@
       </a:defRPr>
     </a:lvl9pPr>
   </p:defaultTextStyle>
+  <p:extLst>
+    <p:ext uri="{EFAFB233-063F-42B5-8137-9DF3F51BA10A}">
+      <p15:sldGuideLst xmlns:p15="http://schemas.microsoft.com/office/powerpoint/2012/main">
+        <p15:guide id="1" orient="horz" pos="2160">
+          <p15:clr>
+            <a:srgbClr val="A4A3A4"/>
+          </p15:clr>
+        </p15:guide>
+        <p15:guide id="2" pos="2880">
+          <p15:clr>
+            <a:srgbClr val="A4A3A4"/>
+          </p15:clr>
+        </p15:guide>
+      </p15:sldGuideLst>
+    </p:ext>
+  </p:extLst>
 </p:presentation>
 </file>
 
 <file path=ppt/notesMasters/notesMaster1.xml><?xml version="1.0" encoding="utf-8"?>
-<p:notesMaster xmlns:a="http://schemas.openxmlformats.org/drawingml/2006/main" xmlns:p="http://schemas.openxmlformats.org/presentationml/2006/main" xmlns:r="http://schemas.openxmlformats.org/officeDocument/2006/relationships">
+<p:notesMaster xmlns:a="http://schemas.openxmlformats.org/drawingml/2006/main" xmlns:r="http://schemas.openxmlformats.org/officeDocument/2006/relationships" xmlns:p="http://schemas.openxmlformats.org/presentationml/2006/main">
   <p:cSld>
     <p:bg>
       <p:bgRef idx="1001">
@@ -139,241 +153,16 @@
           <a:chExt cx="0" cy="0"/>
         </a:xfrm>
       </p:grpSpPr>
-      <p:sp>
-        <p:nvSpPr>
-          <p:cNvPr id="2" name="Header Placeholder 1"/>
-          <p:cNvSpPr>
-            <a:spLocks noGrp="1"/>
-          </p:cNvSpPr>
-          <p:nvPr>
-            <p:ph type="hdr" sz="quarter"/>
-          </p:nvPr>
-        </p:nvSpPr>
-        <p:spPr>
-          <a:xfrm>
-            <a:off x="0" y="0"/>
-            <a:ext cx="2971800" cy="457200"/>
-          </a:xfrm>
-          <a:prstGeom prst="rect">
-            <a:avLst/>
-          </a:prstGeom>
-        </p:spPr>
-        <p:txBody>
-          <a:bodyPr vert="horz" lIns="91440" tIns="45720" rIns="91440" bIns="45720" rtlCol="0"/>
-          <a:lstStyle>
-            <a:lvl1pPr algn="l">
-              <a:defRPr sz="1200"/>
-            </a:lvl1pPr>
-          </a:lstStyle>
-          <a:p>
-            <a:endParaRPr lang="en-US"/>
-          </a:p>
-        </p:txBody>
-      </p:sp>
-      <p:sp>
-        <p:nvSpPr>
-          <p:cNvPr id="3" name="Date Placeholder 2"/>
-          <p:cNvSpPr>
-            <a:spLocks noGrp="1"/>
-          </p:cNvSpPr>
-          <p:nvPr>
-            <p:ph type="dt" idx="1"/>
-          </p:nvPr>
-        </p:nvSpPr>
-        <p:spPr>
-          <a:xfrm>
-            <a:off x="3884613" y="0"/>
-            <a:ext cx="2971800" cy="457200"/>
-          </a:xfrm>
-          <a:prstGeom prst="rect">
-            <a:avLst/>
-          </a:prstGeom>
-        </p:spPr>
-        <p:txBody>
-          <a:bodyPr vert="horz" lIns="91440" tIns="45720" rIns="91440" bIns="45720" rtlCol="0"/>
-          <a:lstStyle>
-            <a:lvl1pPr algn="r">
-              <a:defRPr sz="1200"/>
-            </a:lvl1pPr>
-          </a:lstStyle>
-          <a:p>
-            <a:fld id="{0F89C1C7-3DCD-1040-A9CF-14679D8B5DDD}" type="datetimeFigureOut">
-              <a:rPr lang="en-US" smtClean="0"/>
-              <a:t>10/17/16</a:t>
-            </a:fld>
-            <a:endParaRPr lang="en-US"/>
-          </a:p>
-        </p:txBody>
-      </p:sp>
-      <p:sp>
-        <p:nvSpPr>
-          <p:cNvPr id="4" name="Slide Image Placeholder 3"/>
-          <p:cNvSpPr>
-            <a:spLocks noGrp="1" noRot="1" noChangeAspect="1"/>
-          </p:cNvSpPr>
-          <p:nvPr>
-            <p:ph type="sldImg" idx="2"/>
-          </p:nvPr>
-        </p:nvSpPr>
-        <p:spPr>
-          <a:xfrm>
-            <a:off x="1143000" y="685800"/>
-            <a:ext cx="4572000" cy="3429000"/>
-          </a:xfrm>
-          <a:prstGeom prst="rect">
-            <a:avLst/>
-          </a:prstGeom>
-          <a:noFill/>
-          <a:ln w="12700">
-            <a:solidFill>
-              <a:prstClr val="black"/>
-            </a:solidFill>
-          </a:ln>
-        </p:spPr>
-        <p:txBody>
-          <a:bodyPr vert="horz" lIns="91440" tIns="45720" rIns="91440" bIns="45720" rtlCol="0" anchor="ctr"/>
-          <a:lstStyle/>
-          <a:p>
-            <a:endParaRPr lang="en-US"/>
-          </a:p>
-        </p:txBody>
-      </p:sp>
-      <p:sp>
-        <p:nvSpPr>
-          <p:cNvPr id="5" name="Notes Placeholder 4"/>
-          <p:cNvSpPr>
-            <a:spLocks noGrp="1"/>
-          </p:cNvSpPr>
-          <p:nvPr>
-            <p:ph type="body" sz="quarter" idx="3"/>
-          </p:nvPr>
-        </p:nvSpPr>
-        <p:spPr>
-          <a:xfrm>
-            <a:off x="685800" y="4343400"/>
-            <a:ext cx="5486400" cy="4114800"/>
-          </a:xfrm>
-          <a:prstGeom prst="rect">
-            <a:avLst/>
-          </a:prstGeom>
-        </p:spPr>
-        <p:txBody>
-          <a:bodyPr vert="horz" lIns="91440" tIns="45720" rIns="91440" bIns="45720" rtlCol="0"/>
-          <a:lstStyle/>
-          <a:p>
-            <a:pPr lvl="0"/>
-            <a:r>
-              <a:rPr lang="en-US" smtClean="0"/>
-              <a:t>Click to edit Master text styles</a:t>
-            </a:r>
-          </a:p>
-          <a:p>
-            <a:pPr lvl="1"/>
-            <a:r>
-              <a:rPr lang="en-US" smtClean="0"/>
-              <a:t>Second level</a:t>
-            </a:r>
-          </a:p>
-          <a:p>
-            <a:pPr lvl="2"/>
-            <a:r>
-              <a:rPr lang="en-US" smtClean="0"/>
-              <a:t>Third level</a:t>
-            </a:r>
-          </a:p>
-          <a:p>
-            <a:pPr lvl="3"/>
-            <a:r>
-              <a:rPr lang="en-US" smtClean="0"/>
-              <a:t>Fourth level</a:t>
-            </a:r>
-          </a:p>
-          <a:p>
-            <a:pPr lvl="4"/>
-            <a:r>
-              <a:rPr lang="en-US" smtClean="0"/>
-              <a:t>Fifth level</a:t>
-            </a:r>
-            <a:endParaRPr lang="en-US"/>
-          </a:p>
-        </p:txBody>
-      </p:sp>
-      <p:sp>
-        <p:nvSpPr>
-          <p:cNvPr id="6" name="Footer Placeholder 5"/>
-          <p:cNvSpPr>
-            <a:spLocks noGrp="1"/>
-          </p:cNvSpPr>
-          <p:nvPr>
-            <p:ph type="ftr" sz="quarter" idx="4"/>
-          </p:nvPr>
-        </p:nvSpPr>
-        <p:spPr>
-          <a:xfrm>
-            <a:off x="0" y="8685213"/>
-            <a:ext cx="2971800" cy="457200"/>
-          </a:xfrm>
-          <a:prstGeom prst="rect">
-            <a:avLst/>
-          </a:prstGeom>
-        </p:spPr>
-        <p:txBody>
-          <a:bodyPr vert="horz" lIns="91440" tIns="45720" rIns="91440" bIns="45720" rtlCol="0" anchor="b"/>
-          <a:lstStyle>
-            <a:lvl1pPr algn="l">
-              <a:defRPr sz="1200"/>
-            </a:lvl1pPr>
-          </a:lstStyle>
-          <a:p>
-            <a:endParaRPr lang="en-US"/>
-          </a:p>
-        </p:txBody>
-      </p:sp>
-      <p:sp>
-        <p:nvSpPr>
-          <p:cNvPr id="7" name="Slide Number Placeholder 6"/>
-          <p:cNvSpPr>
-            <a:spLocks noGrp="1"/>
-          </p:cNvSpPr>
-          <p:nvPr>
-            <p:ph type="sldNum" sz="quarter" idx="5"/>
-          </p:nvPr>
-        </p:nvSpPr>
-        <p:spPr>
-          <a:xfrm>
-            <a:off x="3884613" y="8685213"/>
-            <a:ext cx="2971800" cy="457200"/>
-          </a:xfrm>
-          <a:prstGeom prst="rect">
-            <a:avLst/>
-          </a:prstGeom>
-        </p:spPr>
-        <p:txBody>
-          <a:bodyPr vert="horz" lIns="91440" tIns="45720" rIns="91440" bIns="45720" rtlCol="0" anchor="b"/>
-          <a:lstStyle>
-            <a:lvl1pPr algn="r">
-              <a:defRPr sz="1200"/>
-            </a:lvl1pPr>
-          </a:lstStyle>
-          <a:p>
-            <a:fld id="{BB5E49A5-4136-284D-997B-48E1D791AD67}" type="slidenum">
-              <a:rPr lang="en-US" smtClean="0"/>
-              <a:t>‹#›</a:t>
-            </a:fld>
-            <a:endParaRPr lang="en-US"/>
-          </a:p>
-        </p:txBody>
-      </p:sp>
     </p:spTree>
     <p:extLst>
       <p:ext uri="{BB962C8B-B14F-4D97-AF65-F5344CB8AC3E}">
-        <p14:creationId xmlns:p14="http://schemas.microsoft.com/office/powerpoint/2010/main" val="2623252185"/>
+        <p14:creationId xmlns:p14="http://schemas.microsoft.com/office/powerpoint/2010/main" val="2033372187"/>
       </p:ext>
     </p:extLst>
   </p:cSld>
   <p:clrMap bg1="lt1" tx1="dk1" bg2="lt2" tx2="dk2" accent1="accent1" accent2="accent2" accent3="accent3" accent4="accent4" accent5="accent5" accent6="accent6" hlink="hlink" folHlink="folHlink"/>
   <p:notesStyle>
-    <a:lvl1pPr marL="0" algn="l" defTabSz="457200" rtl="0" eaLnBrk="1" latinLnBrk="0" hangingPunct="1">
+    <a:lvl1pPr marL="0" algn="l" defTabSz="914400" rtl="0" eaLnBrk="1" latinLnBrk="0" hangingPunct="1">
       <a:defRPr sz="1200" kern="1200">
         <a:solidFill>
           <a:schemeClr val="tx1"/>
@@ -383,7 +172,7 @@
         <a:cs typeface="+mn-cs"/>
       </a:defRPr>
     </a:lvl1pPr>
-    <a:lvl2pPr marL="457200" algn="l" defTabSz="457200" rtl="0" eaLnBrk="1" latinLnBrk="0" hangingPunct="1">
+    <a:lvl2pPr marL="457200" algn="l" defTabSz="914400" rtl="0" eaLnBrk="1" latinLnBrk="0" hangingPunct="1">
       <a:defRPr sz="1200" kern="1200">
         <a:solidFill>
           <a:schemeClr val="tx1"/>
@@ -393,7 +182,7 @@
         <a:cs typeface="+mn-cs"/>
       </a:defRPr>
     </a:lvl2pPr>
-    <a:lvl3pPr marL="914400" algn="l" defTabSz="457200" rtl="0" eaLnBrk="1" latinLnBrk="0" hangingPunct="1">
+    <a:lvl3pPr marL="914400" algn="l" defTabSz="914400" rtl="0" eaLnBrk="1" latinLnBrk="0" hangingPunct="1">
       <a:defRPr sz="1200" kern="1200">
         <a:solidFill>
           <a:schemeClr val="tx1"/>
@@ -403,7 +192,7 @@
         <a:cs typeface="+mn-cs"/>
       </a:defRPr>
     </a:lvl3pPr>
-    <a:lvl4pPr marL="1371600" algn="l" defTabSz="457200" rtl="0" eaLnBrk="1" latinLnBrk="0" hangingPunct="1">
+    <a:lvl4pPr marL="1371600" algn="l" defTabSz="914400" rtl="0" eaLnBrk="1" latinLnBrk="0" hangingPunct="1">
       <a:defRPr sz="1200" kern="1200">
         <a:solidFill>
           <a:schemeClr val="tx1"/>
@@ -413,7 +202,7 @@
         <a:cs typeface="+mn-cs"/>
       </a:defRPr>
     </a:lvl4pPr>
-    <a:lvl5pPr marL="1828800" algn="l" defTabSz="457200" rtl="0" eaLnBrk="1" latinLnBrk="0" hangingPunct="1">
+    <a:lvl5pPr marL="1828800" algn="l" defTabSz="914400" rtl="0" eaLnBrk="1" latinLnBrk="0" hangingPunct="1">
       <a:defRPr sz="1200" kern="1200">
         <a:solidFill>
           <a:schemeClr val="tx1"/>
@@ -423,7 +212,7 @@
         <a:cs typeface="+mn-cs"/>
       </a:defRPr>
     </a:lvl5pPr>
-    <a:lvl6pPr marL="2286000" algn="l" defTabSz="457200" rtl="0" eaLnBrk="1" latinLnBrk="0" hangingPunct="1">
+    <a:lvl6pPr marL="2286000" algn="l" defTabSz="914400" rtl="0" eaLnBrk="1" latinLnBrk="0" hangingPunct="1">
       <a:defRPr sz="1200" kern="1200">
         <a:solidFill>
           <a:schemeClr val="tx1"/>
@@ -433,7 +222,7 @@
         <a:cs typeface="+mn-cs"/>
       </a:defRPr>
     </a:lvl6pPr>
-    <a:lvl7pPr marL="2743200" algn="l" defTabSz="457200" rtl="0" eaLnBrk="1" latinLnBrk="0" hangingPunct="1">
+    <a:lvl7pPr marL="2743200" algn="l" defTabSz="914400" rtl="0" eaLnBrk="1" latinLnBrk="0" hangingPunct="1">
       <a:defRPr sz="1200" kern="1200">
         <a:solidFill>
           <a:schemeClr val="tx1"/>
@@ -443,7 +232,7 @@
         <a:cs typeface="+mn-cs"/>
       </a:defRPr>
     </a:lvl7pPr>
-    <a:lvl8pPr marL="3200400" algn="l" defTabSz="457200" rtl="0" eaLnBrk="1" latinLnBrk="0" hangingPunct="1">
+    <a:lvl8pPr marL="3200400" algn="l" defTabSz="914400" rtl="0" eaLnBrk="1" latinLnBrk="0" hangingPunct="1">
       <a:defRPr sz="1200" kern="1200">
         <a:solidFill>
           <a:schemeClr val="tx1"/>
@@ -453,7 +242,7 @@
         <a:cs typeface="+mn-cs"/>
       </a:defRPr>
     </a:lvl8pPr>
-    <a:lvl9pPr marL="3657600" algn="l" defTabSz="457200" rtl="0" eaLnBrk="1" latinLnBrk="0" hangingPunct="1">
+    <a:lvl9pPr marL="3657600" algn="l" defTabSz="914400" rtl="0" eaLnBrk="1" latinLnBrk="0" hangingPunct="1">
       <a:defRPr sz="1200" kern="1200">
         <a:solidFill>
           <a:schemeClr val="tx1"/>
@@ -468,7 +257,7 @@
 </file>
 
 <file path=ppt/notesSlides/notesSlide1.xml><?xml version="1.0" encoding="utf-8"?>
-<p:notes xmlns:a="http://schemas.openxmlformats.org/drawingml/2006/main" xmlns:p="http://schemas.openxmlformats.org/presentationml/2006/main" xmlns:r="http://schemas.openxmlformats.org/officeDocument/2006/relationships">
+<p:notes xmlns:a="http://schemas.openxmlformats.org/drawingml/2006/main" xmlns:r="http://schemas.openxmlformats.org/officeDocument/2006/relationships" xmlns:p="http://schemas.openxmlformats.org/presentationml/2006/main">
   <p:cSld>
     <p:spTree>
       <p:nvGrpSpPr>
@@ -488,7 +277,7 @@
         <p:nvSpPr>
           <p:cNvPr id="2" name="Slide Image Placeholder 1"/>
           <p:cNvSpPr>
-            <a:spLocks noGrp="1"/>
+            <a:spLocks noGrp="1" noRot="1" noChangeAspect="1"/>
           </p:cNvSpPr>
           <p:nvPr>
             <p:ph type="sldImg" idx="2"/>
@@ -503,7 +292,7 @@
             <a:spLocks noGrp="1"/>
           </p:cNvSpPr>
           <p:nvPr>
-            <p:ph type="body" idx="3" sz="quarter"/>
+            <p:ph type="body" sz="quarter" idx="3"/>
           </p:nvPr>
         </p:nvSpPr>
         <p:spPr/>
@@ -512,19 +301,7 @@
           <a:lstStyle/>
           <a:p>
             <a:r>
-              <a:t>Buenas tardes, soy Claudia y esto es Nahui.</a:t>
-            </a:r>
-          </a:p>
-          <a:p/>
-          <a:p>
-            <a:r>
-              <a:t>Nahui es una app de registro de ventas e inteligencia de negocio para vendedoras ambulantes en México. La piloteamos con Ana, que vende ropa en bazares privados en el Estado de México.</a:t>
-            </a:r>
-          </a:p>
-          <a:p/>
-          <a:p>
-            <a:r>
-              <a:t>La promesa es simple: registrar una venta en menos de 3 segundos, sin perder el control del negocio. Les voy a enseñar qué tan real es esto hoy, y qué tan lejos estamos todavía.</a:t>
+              <a:t>(Sin texto hablado asignado — la portada es puramente visual: nombre, promesa, y los enlaces al prototipo en vivo y al repositorio, visibles sin contraseña.)</a:t>
             </a:r>
           </a:p>
         </p:txBody>
@@ -536,7 +313,7 @@
             <a:spLocks noGrp="1"/>
           </p:cNvSpPr>
           <p:nvPr>
-            <p:ph type="sldNum" idx="5" sz="quarter"/>
+            <p:ph type="sldNum" sz="quarter" idx="5"/>
           </p:nvPr>
         </p:nvSpPr>
         <p:spPr/>
@@ -549,8 +326,8 @@
 </p:notes>
 </file>
 
-<file path=ppt/notesSlides/notesSlide10.xml><?xml version="1.0" encoding="utf-8"?>
-<p:notes xmlns:a="http://schemas.openxmlformats.org/drawingml/2006/main" xmlns:p="http://schemas.openxmlformats.org/presentationml/2006/main" xmlns:r="http://schemas.openxmlformats.org/officeDocument/2006/relationships">
+<file path=ppt/notesSlides/notesSlide2.xml><?xml version="1.0" encoding="utf-8"?>
+<p:notes xmlns:a="http://schemas.openxmlformats.org/drawingml/2006/main" xmlns:r="http://schemas.openxmlformats.org/officeDocument/2006/relationships" xmlns:p="http://schemas.openxmlformats.org/presentationml/2006/main">
   <p:cSld>
     <p:spTree>
       <p:nvGrpSpPr>
@@ -570,7 +347,7 @@
         <p:nvSpPr>
           <p:cNvPr id="2" name="Slide Image Placeholder 1"/>
           <p:cNvSpPr>
-            <a:spLocks noGrp="1"/>
+            <a:spLocks noGrp="1" noRot="1" noChangeAspect="1"/>
           </p:cNvSpPr>
           <p:nvPr>
             <p:ph type="sldImg" idx="2"/>
@@ -585,7 +362,7 @@
             <a:spLocks noGrp="1"/>
           </p:cNvSpPr>
           <p:nvPr>
-            <p:ph type="body" idx="3" sz="quarter"/>
+            <p:ph type="body" sz="quarter" idx="3"/>
           </p:nvPr>
         </p:nvSpPr>
         <p:spPr/>
@@ -594,13 +371,23 @@
           <a:lstStyle/>
           <a:p>
             <a:r>
-              <a:t>Esta línea de tiempo no es una lista de entregables. Cada punto existe porque resolvió un problema real que apareció en el camino, no porque estuviera planeado desde el inicio.</a:t>
-            </a:r>
-          </a:p>
-          <a:p/>
-          <a:p>
-            <a:r>
-              <a:t>Y aquí quiero ser clara sobre algo: no soy experta en sistemas agénticos de inteligencia artificial, no sé optimizar el consumo de tokens con precisión técnica. Varias decisiones técnicas del camino tampoco las tomé sola, cambié de herramienta de diseño por recomendación directa de la maestra, y usar un equipo de agentes especializados en vez de una sola IA generalista fue algo que ella mencionó como mejor práctica. Entender cómo funciona realmente de fondo lo aprendí después, trabajando con mi propio equipo.</a:t>
+              <a:t>Buenas tardes. Me llamo Claudia y esto es Nahui, una aplicación de registro de ventas e inteligencia de negocio para vendedoras ambulantes en bazares de México. La construyo junto con Ana, que vende ropa en bazares privados en el Estado de México, mi piloto real desde el día uno.</a:t>
+            </a:r>
+          </a:p>
+          <a:p>
+            <a:endParaRPr/>
+          </a:p>
+          <a:p>
+            <a:r>
+              <a:t>El problema es simple de decir y muy real de vivir: en un bazar, el flujo de clientes es impredecible. Puede no llegar nadie en quince minutos, y de pronto llegan tres personas juntas. Si registrar una venta le toma a Ana más de unos segundos, ese tiempo no sale de la nada, sale de atender al siguiente cliente. Y casi siempre gana el cliente que tiene enfrente, no el registro. Por eso, durante años, ella limitó su propio catálogo, menos productos son más fáciles de llevar en la cabeza, y eso limitó cuánto podía crecer su negocio.</a:t>
+            </a:r>
+          </a:p>
+          <a:p>
+            <a:endParaRPr/>
+          </a:p>
+          <a:p>
+            <a:r>
+              <a:t>Pero quiero ser clara: resolver el registro rápido no es el objetivo final, es el punto de partida. Lo que realmente queremos es que Ana tome decisiones informadas sobre su negocio, y eso necesita datos que hoy no existen si ella no registra su día a día. No es solo sacarle la cuenta, para eso ya hay calculadoras. Es que cada venta registrada se convierta, con el tiempo, en inteligencia real sobre su negocio. Se la voy a demostrar en vivo, no solo a contar.</a:t>
             </a:r>
           </a:p>
         </p:txBody>
@@ -612,7 +399,7 @@
             <a:spLocks noGrp="1"/>
           </p:cNvSpPr>
           <p:nvPr>
-            <p:ph type="sldNum" idx="5" sz="quarter"/>
+            <p:ph type="sldNum" sz="quarter" idx="5"/>
           </p:nvPr>
         </p:nvSpPr>
         <p:spPr/>
@@ -625,8 +412,8 @@
 </p:notes>
 </file>
 
-<file path=ppt/notesSlides/notesSlide11.xml><?xml version="1.0" encoding="utf-8"?>
-<p:notes xmlns:a="http://schemas.openxmlformats.org/drawingml/2006/main" xmlns:p="http://schemas.openxmlformats.org/presentationml/2006/main" xmlns:r="http://schemas.openxmlformats.org/officeDocument/2006/relationships">
+<file path=ppt/notesSlides/notesSlide3.xml><?xml version="1.0" encoding="utf-8"?>
+<p:notes xmlns:a="http://schemas.openxmlformats.org/drawingml/2006/main" xmlns:r="http://schemas.openxmlformats.org/officeDocument/2006/relationships" xmlns:p="http://schemas.openxmlformats.org/presentationml/2006/main">
   <p:cSld>
     <p:spTree>
       <p:nvGrpSpPr>
@@ -646,7 +433,7 @@
         <p:nvSpPr>
           <p:cNvPr id="2" name="Slide Image Placeholder 1"/>
           <p:cNvSpPr>
-            <a:spLocks noGrp="1"/>
+            <a:spLocks noGrp="1" noRot="1" noChangeAspect="1"/>
           </p:cNvSpPr>
           <p:nvPr>
             <p:ph type="sldImg" idx="2"/>
@@ -661,7 +448,7 @@
             <a:spLocks noGrp="1"/>
           </p:cNvSpPr>
           <p:nvPr>
-            <p:ph type="body" idx="3" sz="quarter"/>
+            <p:ph type="body" sz="quarter" idx="3"/>
           </p:nvPr>
         </p:nvSpPr>
         <p:spPr/>
@@ -670,13 +457,63 @@
           <a:lstStyle/>
           <a:p>
             <a:r>
-              <a:t>Esto es Nahui hoy: un prototipo real, funcionando, probado, con una campaña real detrás que nos enseñó que el alcance no es el problema, la adopción sí, y que esa lección la aprendimos a mitad de camino, no de entrada. Y un equipo de agentes que revisa, corrige y vuelve a comprobar cada cosa antes de darla por buena.</a:t>
-            </a:r>
-          </a:p>
-          <a:p/>
-          <a:p>
-            <a:r>
-              <a:t>Todavía no lo tenemos todo resuelto, y está bien decirlo así, con esas palabras exactas. Ahí les dejo el demo y el repositorio, ambos están en el documento que les compartí. Gracias.</a:t>
+              <a:t>[Cambia a la pantalla, demo.nahui.app en vivo]</a:t>
+            </a:r>
+          </a:p>
+          <a:p>
+            <a:endParaRPr/>
+          </a:p>
+          <a:p>
+            <a:r>
+              <a:t>Esto que van a ver no es un mockup, es el prototipo real, funcionando, probado en persona con Ana. Aquí está el estado inicial: venta rápida, con las categorías que ella misma definió.</a:t>
+            </a:r>
+          </a:p>
+          <a:p>
+            <a:endParaRPr/>
+          </a:p>
+          <a:p>
+            <a:r>
+              <a:t>[Registra una venta en vivo: toca un par de productos]</a:t>
+            </a:r>
+          </a:p>
+          <a:p>
+            <a:endParaRPr/>
+          </a:p>
+          <a:p>
+            <a:r>
+              <a:t>Un toque por producto. El total se arma solo, en el momento exacto de la venta, sin que Ana tenga que hacer cuentas ni pausar para anotar nada. Menos de tres segundos.</a:t>
+            </a:r>
+          </a:p>
+          <a:p>
+            <a:endParaRPr/>
+          </a:p>
+          <a:p>
+            <a:r>
+              <a:t>[Finaliza la venta, muestra el recibo]</a:t>
+            </a:r>
+          </a:p>
+          <a:p>
+            <a:endParaRPr/>
+          </a:p>
+          <a:p>
+            <a:r>
+              <a:t>Y aquí queda guardada para siempre. Nunca más se pierde el registro de una venta, aunque llegue el siguiente cliente sin avisar, que es justo lo que pasa todo el tiempo en un bazar real.</a:t>
+            </a:r>
+          </a:p>
+          <a:p>
+            <a:endParaRPr/>
+          </a:p>
+          <a:p>
+            <a:r>
+              <a:t>Y aquí empieza lo que de verdad importa: esa venta no es solo un recibo, es un dato. Uno solo no dice mucho, pero cien ventas registradas ya le muestran a Ana patrones que hoy no puede ver, qué le vende más, qué días le va mejor. Por eso el registro rápido no es el producto, es lo que hace posible el producto.</a:t>
+            </a:r>
+          </a:p>
+          <a:p>
+            <a:endParaRPr/>
+          </a:p>
+          <a:p>
+            <a:r>
+              <a:t>(Nota: el texto hablado aquí es deliberadamente ligero, sobra tiempo a propósito para la interacción real con la app. Practica la demo por separado para saber cuánto tiempo real toma, y ajusta las pausas habladas, no al revés.)</a:t>
             </a:r>
           </a:p>
         </p:txBody>
@@ -688,7 +525,7 @@
             <a:spLocks noGrp="1"/>
           </p:cNvSpPr>
           <p:nvPr>
-            <p:ph type="sldNum" idx="5" sz="quarter"/>
+            <p:ph type="sldNum" sz="quarter" idx="5"/>
           </p:nvPr>
         </p:nvSpPr>
         <p:spPr/>
@@ -701,8 +538,8 @@
 </p:notes>
 </file>
 
-<file path=ppt/notesSlides/notesSlide2.xml><?xml version="1.0" encoding="utf-8"?>
-<p:notes xmlns:a="http://schemas.openxmlformats.org/drawingml/2006/main" xmlns:p="http://schemas.openxmlformats.org/presentationml/2006/main" xmlns:r="http://schemas.openxmlformats.org/officeDocument/2006/relationships">
+<file path=ppt/notesSlides/notesSlide4.xml><?xml version="1.0" encoding="utf-8"?>
+<p:notes xmlns:a="http://schemas.openxmlformats.org/drawingml/2006/main" xmlns:r="http://schemas.openxmlformats.org/officeDocument/2006/relationships" xmlns:p="http://schemas.openxmlformats.org/presentationml/2006/main">
   <p:cSld>
     <p:spTree>
       <p:nvGrpSpPr>
@@ -722,7 +559,7 @@
         <p:nvSpPr>
           <p:cNvPr id="2" name="Slide Image Placeholder 1"/>
           <p:cNvSpPr>
-            <a:spLocks noGrp="1"/>
+            <a:spLocks noGrp="1" noRot="1" noChangeAspect="1"/>
           </p:cNvSpPr>
           <p:nvPr>
             <p:ph type="sldImg" idx="2"/>
@@ -737,7 +574,7 @@
             <a:spLocks noGrp="1"/>
           </p:cNvSpPr>
           <p:nvPr>
-            <p:ph type="body" idx="3" sz="quarter"/>
+            <p:ph type="body" sz="quarter" idx="3"/>
           </p:nvPr>
         </p:nvSpPr>
         <p:spPr/>
@@ -746,19 +583,15 @@
           <a:lstStyle/>
           <a:p>
             <a:r>
-              <a:t>El problema no es abstracto, es el de Ana. En un bazar el flujo de clientes es impredecible. Si registrar una venta le toma más de unos segundos, ese tiempo compite directamente con atender al cliente que sigue, y casi siempre pierde el registro, no el cliente.</a:t>
-            </a:r>
-          </a:p>
-          <a:p/>
-          <a:p>
-            <a:r>
-              <a:t>Esa fricción no es exclusiva de Ana, se repite en cualquier vendedora que atiende de pie, sin caja registradora, sin tiempo muerto entre un cliente y el siguiente.</a:t>
-            </a:r>
-          </a:p>
-          <a:p/>
-          <a:p>
-            <a:r>
-              <a:t>Por eso Ana limita su propio catálogo, para mantener control mental de lo que tiene. Y eso limita cuánto puede crecer.</a:t>
+              <a:t>Ahora la parte más honesta. Corrimos una campaña real de Meta, del 17 al 20 de agosto: 569 pesos gastados, casi 20 mil personas de alcance, 731 visitas a la página. Conseguir atención barata no es el problema.</a:t>
+            </a:r>
+          </a:p>
+          <a:p>
+            <a:endParaRPr/>
+          </a:p>
+          <a:p>
+            <a:r>
+              <a:t>Pero de 227 visitantes reales confirmados, con el embudo completo midiéndose desde el 19 de agosto, solo 2 llegaron a verificación. Cero comerciantes externos completaron el recorrido. La causa exacta todavía no está confirmada, por eso diseñé un piloto pequeño y controlado de conversación directa para averiguarlo, en marcha ahora mismo.</a:t>
             </a:r>
           </a:p>
         </p:txBody>
@@ -770,7 +603,7 @@
             <a:spLocks noGrp="1"/>
           </p:cNvSpPr>
           <p:nvPr>
-            <p:ph type="sldNum" idx="5" sz="quarter"/>
+            <p:ph type="sldNum" sz="quarter" idx="5"/>
           </p:nvPr>
         </p:nvSpPr>
         <p:spPr/>
@@ -783,8 +616,8 @@
 </p:notes>
 </file>
 
-<file path=ppt/notesSlides/notesSlide3.xml><?xml version="1.0" encoding="utf-8"?>
-<p:notes xmlns:a="http://schemas.openxmlformats.org/drawingml/2006/main" xmlns:p="http://schemas.openxmlformats.org/presentationml/2006/main" xmlns:r="http://schemas.openxmlformats.org/officeDocument/2006/relationships">
+<file path=ppt/notesSlides/notesSlide5.xml><?xml version="1.0" encoding="utf-8"?>
+<p:notes xmlns:a="http://schemas.openxmlformats.org/drawingml/2006/main" xmlns:r="http://schemas.openxmlformats.org/officeDocument/2006/relationships" xmlns:p="http://schemas.openxmlformats.org/presentationml/2006/main">
   <p:cSld>
     <p:spTree>
       <p:nvGrpSpPr>
@@ -804,7 +637,7 @@
         <p:nvSpPr>
           <p:cNvPr id="2" name="Slide Image Placeholder 1"/>
           <p:cNvSpPr>
-            <a:spLocks noGrp="1"/>
+            <a:spLocks noGrp="1" noRot="1" noChangeAspect="1"/>
           </p:cNvSpPr>
           <p:nvPr>
             <p:ph type="sldImg" idx="2"/>
@@ -819,7 +652,7 @@
             <a:spLocks noGrp="1"/>
           </p:cNvSpPr>
           <p:nvPr>
-            <p:ph type="body" idx="3" sz="quarter"/>
+            <p:ph type="body" sz="quarter" idx="3"/>
           </p:nvPr>
         </p:nvSpPr>
         <p:spPr/>
@@ -828,13 +661,7 @@
           <a:lstStyle/>
           <a:p>
             <a:r>
-              <a:t>Esto que ven aquí no es un mockup, es el prototipo real, funcionando, probado con Ana en persona. Este es el estado inicial: venta rápida, con las categorías que ella misma usa, playeras y blusas.</a:t>
-            </a:r>
-          </a:p>
-          <a:p/>
-          <a:p>
-            <a:r>
-              <a:t>Así se registra una venta. Un toque por producto. El total se arma solo, en el momento exacto de la venta, sin que Ana tenga que hacer cuentas ni pausar para anotar nada.</a:t>
+              <a:t>El reto más grande no fue técnico, fue conseguir que alguien real, fuera de Ana y de mi propio equipo, cruzara la puerta — la campaña que acaban de ver lo confirma con datos. Todo esto lo construyo con un equipo de agentes de inteligencia artificial especializados, cada uno con su propia autoridad: esta misma semana, uno de ellos rechazó una instrucción que le daba permiso para escribir fuera de su alcance, aunque venía dentro de un mensaje de tarea, porque no podía verificarla como autorización real. Ese nivel de disciplina es lo que me deja construir rápido y seguir confiando en lo que construyo. Pero ni la mejor disciplina técnica resuelve la adopción sola — ese es el aprendizaje que más me ha costado.</a:t>
             </a:r>
           </a:p>
         </p:txBody>
@@ -846,7 +673,7 @@
             <a:spLocks noGrp="1"/>
           </p:cNvSpPr>
           <p:nvPr>
-            <p:ph type="sldNum" idx="5" sz="quarter"/>
+            <p:ph type="sldNum" sz="quarter" idx="5"/>
           </p:nvPr>
         </p:nvSpPr>
         <p:spPr/>
@@ -859,8 +686,8 @@
 </p:notes>
 </file>
 
-<file path=ppt/notesSlides/notesSlide4.xml><?xml version="1.0" encoding="utf-8"?>
-<p:notes xmlns:a="http://schemas.openxmlformats.org/drawingml/2006/main" xmlns:p="http://schemas.openxmlformats.org/presentationml/2006/main" xmlns:r="http://schemas.openxmlformats.org/officeDocument/2006/relationships">
+<file path=ppt/notesSlides/notesSlide6.xml><?xml version="1.0" encoding="utf-8"?>
+<p:notes xmlns:a="http://schemas.openxmlformats.org/drawingml/2006/main" xmlns:r="http://schemas.openxmlformats.org/officeDocument/2006/relationships" xmlns:p="http://schemas.openxmlformats.org/presentationml/2006/main">
   <p:cSld>
     <p:spTree>
       <p:nvGrpSpPr>
@@ -880,7 +707,7 @@
         <p:nvSpPr>
           <p:cNvPr id="2" name="Slide Image Placeholder 1"/>
           <p:cNvSpPr>
-            <a:spLocks noGrp="1"/>
+            <a:spLocks noGrp="1" noRot="1" noChangeAspect="1"/>
           </p:cNvSpPr>
           <p:nvPr>
             <p:ph type="sldImg" idx="2"/>
@@ -895,7 +722,7 @@
             <a:spLocks noGrp="1"/>
           </p:cNvSpPr>
           <p:nvPr>
-            <p:ph type="body" idx="3" sz="quarter"/>
+            <p:ph type="body" sz="quarter" idx="3"/>
           </p:nvPr>
         </p:nvSpPr>
         <p:spPr/>
@@ -904,7 +731,7 @@
           <a:lstStyle/>
           <a:p>
             <a:r>
-              <a:t>Y aquí queda guardada. Recibo digital, venta finalizada, total confirmado. Nunca más se pierde el registro de una venta, aunque llegue el siguiente cliente sin avisar, que es exactamente lo que pasa todo el tiempo en un bazar real.</a:t>
+              <a:t>¿Qué sigue? Primero, el piloto de conversación directa que ya mencioné, para entender de verdad por qué la gente no completa el registro. Segundo, ya rediseñé la secuencia de entrada para que un comercio calificado por esa conversación llegue a su primera venta antes de configurar nada, en vez de después. Y tercero, una decisión de precio que todavía tengo abierta. Nada de esto está resuelto del todo, y está bien decirlo así. Ahí les dejo el demo, en el enlace de la presentación, y el repositorio. Gracias.</a:t>
             </a:r>
           </a:p>
         </p:txBody>
@@ -916,417 +743,7 @@
             <a:spLocks noGrp="1"/>
           </p:cNvSpPr>
           <p:nvPr>
-            <p:ph type="sldNum" idx="5" sz="quarter"/>
-          </p:nvPr>
-        </p:nvSpPr>
-        <p:spPr/>
-      </p:sp>
-    </p:spTree>
-  </p:cSld>
-  <p:clrMapOvr>
-    <a:masterClrMapping/>
-  </p:clrMapOvr>
-</p:notes>
-</file>
-
-<file path=ppt/notesSlides/notesSlide5.xml><?xml version="1.0" encoding="utf-8"?>
-<p:notes xmlns:a="http://schemas.openxmlformats.org/drawingml/2006/main" xmlns:p="http://schemas.openxmlformats.org/presentationml/2006/main" xmlns:r="http://schemas.openxmlformats.org/officeDocument/2006/relationships">
-  <p:cSld>
-    <p:spTree>
-      <p:nvGrpSpPr>
-        <p:cNvPr id="1" name=""/>
-        <p:cNvGrpSpPr/>
-        <p:nvPr/>
-      </p:nvGrpSpPr>
-      <p:grpSpPr>
-        <a:xfrm>
-          <a:off x="0" y="0"/>
-          <a:ext cx="0" cy="0"/>
-          <a:chOff x="0" y="0"/>
-          <a:chExt cx="0" cy="0"/>
-        </a:xfrm>
-      </p:grpSpPr>
-      <p:sp>
-        <p:nvSpPr>
-          <p:cNvPr id="2" name="Slide Image Placeholder 1"/>
-          <p:cNvSpPr>
-            <a:spLocks noGrp="1"/>
-          </p:cNvSpPr>
-          <p:nvPr>
-            <p:ph type="sldImg" idx="2"/>
-          </p:nvPr>
-        </p:nvSpPr>
-        <p:spPr/>
-      </p:sp>
-      <p:sp>
-        <p:nvSpPr>
-          <p:cNvPr id="3" name="Notes Placeholder 2"/>
-          <p:cNvSpPr>
-            <a:spLocks noGrp="1"/>
-          </p:cNvSpPr>
-          <p:nvPr>
-            <p:ph type="body" idx="3" sz="quarter"/>
-          </p:nvPr>
-        </p:nvSpPr>
-        <p:spPr/>
-        <p:txBody>
-          <a:bodyPr/>
-          <a:lstStyle/>
-          <a:p>
-            <a:r>
-              <a:t>Esta es la diapositiva más difícil de todas, y también la más útil.</a:t>
-            </a:r>
-          </a:p>
-          <a:p/>
-          <a:p>
-            <a:r>
-              <a:t>Corrimos una campaña real de Meta del 17 al 20 de agosto, tres días, 569 pesos gastados, 731 visitas a la página a 78 centavos cada una. El alcance funciona, y es barato.</a:t>
-            </a:r>
-          </a:p>
-          <a:p/>
-          <a:p>
-            <a:r>
-              <a:t>Pero Vercel confirmó algo distinto: 583 visitantes reales llegaron al sitio, y solo 2 de ellos dispararon algún evento del recorrido del demo, registro, verificación, cuestionario. Eso es 0.34 por ciento.</a:t>
-            </a:r>
-          </a:p>
-          <a:p/>
-          <a:p>
-            <a:r>
-              <a:t>No lo descubrimos el primer día de campaña. La instrumentación para medir esto se terminó de construir a mitad del camino. De esos 583, solamente 227 llegaron ya con el recorrido completo midiéndose. Y ni siquiera con eso, la aguja se movió. El alcance no es el problema. La adopción real, todavía no la tenemos resuelta, y la causa exacta, todavía no está confirmada.</a:t>
-            </a:r>
-          </a:p>
-        </p:txBody>
-      </p:sp>
-      <p:sp>
-        <p:nvSpPr>
-          <p:cNvPr id="4" name="Slide Number Placeholder 3"/>
-          <p:cNvSpPr>
-            <a:spLocks noGrp="1"/>
-          </p:cNvSpPr>
-          <p:nvPr>
-            <p:ph type="sldNum" idx="5" sz="quarter"/>
-          </p:nvPr>
-        </p:nvSpPr>
-        <p:spPr/>
-      </p:sp>
-    </p:spTree>
-  </p:cSld>
-  <p:clrMapOvr>
-    <a:masterClrMapping/>
-  </p:clrMapOvr>
-</p:notes>
-</file>
-
-<file path=ppt/notesSlides/notesSlide6.xml><?xml version="1.0" encoding="utf-8"?>
-<p:notes xmlns:a="http://schemas.openxmlformats.org/drawingml/2006/main" xmlns:p="http://schemas.openxmlformats.org/presentationml/2006/main" xmlns:r="http://schemas.openxmlformats.org/officeDocument/2006/relationships">
-  <p:cSld>
-    <p:spTree>
-      <p:nvGrpSpPr>
-        <p:cNvPr id="1" name=""/>
-        <p:cNvGrpSpPr/>
-        <p:nvPr/>
-      </p:nvGrpSpPr>
-      <p:grpSpPr>
-        <a:xfrm>
-          <a:off x="0" y="0"/>
-          <a:ext cx="0" cy="0"/>
-          <a:chOff x="0" y="0"/>
-          <a:chExt cx="0" cy="0"/>
-        </a:xfrm>
-      </p:grpSpPr>
-      <p:sp>
-        <p:nvSpPr>
-          <p:cNvPr id="2" name="Slide Image Placeholder 1"/>
-          <p:cNvSpPr>
-            <a:spLocks noGrp="1"/>
-          </p:cNvSpPr>
-          <p:nvPr>
-            <p:ph type="sldImg" idx="2"/>
-          </p:nvPr>
-        </p:nvSpPr>
-        <p:spPr/>
-      </p:sp>
-      <p:sp>
-        <p:nvSpPr>
-          <p:cNvPr id="3" name="Notes Placeholder 2"/>
-          <p:cNvSpPr>
-            <a:spLocks noGrp="1"/>
-          </p:cNvSpPr>
-          <p:nvPr>
-            <p:ph type="body" idx="3" sz="quarter"/>
-          </p:nvPr>
-        </p:nvSpPr>
-        <p:spPr/>
-        <p:txBody>
-          <a:bodyPr/>
-          <a:lstStyle/>
-          <a:p>
-            <a:r>
-              <a:t>Ahora quiero hablarles de algo muy concreto: cuánto cuesta esto en realidad, y qué tan lista está la base técnica.</a:t>
-            </a:r>
-          </a:p>
-          <a:p/>
-          <a:p>
-            <a:r>
-              <a:t>El modelo de dominio ya está congelado, ventas, productos, sesiones, eventos, negocio, no hay nada nuevo que inventar, solo persistirlo en una base real. La infraestructura ya está decidida: React y TypeScript en Vercel, con Supabase de backend, un solo proveedor en vez de varios, justo para esta escala de piloto. El NFC, que era mi mayor duda técnica, también quedó resuelto: en Android funciona directo dentro de la misma aplicación, y en iOS lo resolví con un shell nativo delgado, solo para esa función, no una segunda app completa. Lo que le importa a Ana, nunca tener que comprar un lector aparte, queda cubierto en los dos casos.</a:t>
-            </a:r>
-          </a:p>
-          <a:p/>
-          <a:p>
-            <a:r>
-              <a:t>Y los números que sí duelen un poco: hasta hoy he invertido, en un solo pago, unos 626 pesos. La herramienta con la que construyo junto a mi equipo de agentes cuesta 100 dólares al mes, cerca de 1,850 pesos, gasto real y recurrente. Operar esto en producción me costaría alrededor de 830 pesos al mes, todavía una cotización, no un gasto real. Y el costo por venta registrada, calculado sobre un supuesto de tres comerciantes y 180 ventas al mes, ronda los 3.90 pesos, un número que no he validado con datos reales todavía. Lo que no les puedo dar hoy es un retorno esperado, porque no tengo un precio decidido, solo principios: sin comisión por transacción, precio fijo o estacional.</a:t>
-            </a:r>
-          </a:p>
-        </p:txBody>
-      </p:sp>
-      <p:sp>
-        <p:nvSpPr>
-          <p:cNvPr id="4" name="Slide Number Placeholder 3"/>
-          <p:cNvSpPr>
-            <a:spLocks noGrp="1"/>
-          </p:cNvSpPr>
-          <p:nvPr>
-            <p:ph type="sldNum" idx="5" sz="quarter"/>
-          </p:nvPr>
-        </p:nvSpPr>
-        <p:spPr/>
-      </p:sp>
-    </p:spTree>
-  </p:cSld>
-  <p:clrMapOvr>
-    <a:masterClrMapping/>
-  </p:clrMapOvr>
-</p:notes>
-</file>
-
-<file path=ppt/notesSlides/notesSlide7.xml><?xml version="1.0" encoding="utf-8"?>
-<p:notes xmlns:a="http://schemas.openxmlformats.org/drawingml/2006/main" xmlns:p="http://schemas.openxmlformats.org/presentationml/2006/main" xmlns:r="http://schemas.openxmlformats.org/officeDocument/2006/relationships">
-  <p:cSld>
-    <p:spTree>
-      <p:nvGrpSpPr>
-        <p:cNvPr id="1" name=""/>
-        <p:cNvGrpSpPr/>
-        <p:nvPr/>
-      </p:nvGrpSpPr>
-      <p:grpSpPr>
-        <a:xfrm>
-          <a:off x="0" y="0"/>
-          <a:ext cx="0" cy="0"/>
-          <a:chOff x="0" y="0"/>
-          <a:chExt cx="0" cy="0"/>
-        </a:xfrm>
-      </p:grpSpPr>
-      <p:sp>
-        <p:nvSpPr>
-          <p:cNvPr id="2" name="Slide Image Placeholder 1"/>
-          <p:cNvSpPr>
-            <a:spLocks noGrp="1"/>
-          </p:cNvSpPr>
-          <p:nvPr>
-            <p:ph type="sldImg" idx="2"/>
-          </p:nvPr>
-        </p:nvSpPr>
-        <p:spPr/>
-      </p:sp>
-      <p:sp>
-        <p:nvSpPr>
-          <p:cNvPr id="3" name="Notes Placeholder 2"/>
-          <p:cNvSpPr>
-            <a:spLocks noGrp="1"/>
-          </p:cNvSpPr>
-          <p:nvPr>
-            <p:ph type="body" idx="3" sz="quarter"/>
-          </p:nvPr>
-        </p:nvSpPr>
-        <p:spPr/>
-        <p:txBody>
-          <a:bodyPr/>
-          <a:lstStyle/>
-          <a:p>
-            <a:r>
-              <a:t>Y ahora la pregunta que cualquier panel debería hacerme: qué puede detener esto.</a:t>
-            </a:r>
-          </a:p>
-          <a:p/>
-          <a:p>
-            <a:r>
-              <a:t>Tengo cinco riesgos identificados, y se los doy tal como los clasifiqué, sin suavizarlos. Depender de un solo proveedor de infraestructura, Supabase y Vercel, probabilidad alta, impacto alto. Exponer datos sensibles de comerciantes o de sus clientes, hoy la probabilidad es baja porque no hay datos reales en producción, pero el impacto sigue siendo alto. Que la adopción real no se confirme, y este es el que ya está pasando, alta probabilidad, alto impacto. No tener todavía un modelo de precios decidido, media a alta. Y, mirando más adelante, sesgo en las recomendaciones que Nahui algún día haga de forma proactiva, hoy es baja probabilidad porque esa función ni siquiera existe todavía, pero el impacto sería alto.</a:t>
-            </a:r>
-          </a:p>
-          <a:p/>
-          <a:p>
-            <a:r>
-              <a:t>Cada uno de estos ya tiene quién lo levanta y cómo se traduce en acción. La exposición de datos la resuelve un aviso de privacidad explícito antes de recolectar cualquier dato, con asesoría legal real. La dependencia de un solo proveedor se resuelve exportando los datos periódicamente antes de comprometerme más allá del piloto. El precio sin decidir se resuelve investigando precios comparables de otras herramientas para pequeños comerciantes en México. Y la adopción no confirmada, ese no es un bloqueo externo, me toca resolverlo a mí, y el piloto Concierge que les mencioné es justo esa respuesta, ya en marcha.</a:t>
-            </a:r>
-          </a:p>
-        </p:txBody>
-      </p:sp>
-      <p:sp>
-        <p:nvSpPr>
-          <p:cNvPr id="4" name="Slide Number Placeholder 3"/>
-          <p:cNvSpPr>
-            <a:spLocks noGrp="1"/>
-          </p:cNvSpPr>
-          <p:nvPr>
-            <p:ph type="sldNum" idx="5" sz="quarter"/>
-          </p:nvPr>
-        </p:nvSpPr>
-        <p:spPr/>
-      </p:sp>
-    </p:spTree>
-  </p:cSld>
-  <p:clrMapOvr>
-    <a:masterClrMapping/>
-  </p:clrMapOvr>
-</p:notes>
-</file>
-
-<file path=ppt/notesSlides/notesSlide8.xml><?xml version="1.0" encoding="utf-8"?>
-<p:notes xmlns:a="http://schemas.openxmlformats.org/drawingml/2006/main" xmlns:p="http://schemas.openxmlformats.org/presentationml/2006/main" xmlns:r="http://schemas.openxmlformats.org/officeDocument/2006/relationships">
-  <p:cSld>
-    <p:spTree>
-      <p:nvGrpSpPr>
-        <p:cNvPr id="1" name=""/>
-        <p:cNvGrpSpPr/>
-        <p:nvPr/>
-      </p:nvGrpSpPr>
-      <p:grpSpPr>
-        <a:xfrm>
-          <a:off x="0" y="0"/>
-          <a:ext cx="0" cy="0"/>
-          <a:chOff x="0" y="0"/>
-          <a:chExt cx="0" cy="0"/>
-        </a:xfrm>
-      </p:grpSpPr>
-      <p:sp>
-        <p:nvSpPr>
-          <p:cNvPr id="2" name="Slide Image Placeholder 1"/>
-          <p:cNvSpPr>
-            <a:spLocks noGrp="1"/>
-          </p:cNvSpPr>
-          <p:nvPr>
-            <p:ph type="sldImg" idx="2"/>
-          </p:nvPr>
-        </p:nvSpPr>
-        <p:spPr/>
-      </p:sp>
-      <p:sp>
-        <p:nvSpPr>
-          <p:cNvPr id="3" name="Notes Placeholder 2"/>
-          <p:cNvSpPr>
-            <a:spLocks noGrp="1"/>
-          </p:cNvSpPr>
-          <p:nvPr>
-            <p:ph type="body" idx="3" sz="quarter"/>
-          </p:nvPr>
-        </p:nvSpPr>
-        <p:spPr/>
-        <p:txBody>
-          <a:bodyPr/>
-          <a:lstStyle/>
-          <a:p>
-            <a:r>
-              <a:t>Nahui no la construyo yo sola escribiendo código. La construye un equipo de agentes de inteligencia artificial especializados, no una sola IA generalista.</a:t>
-            </a:r>
-          </a:p>
-          <a:p/>
-          <a:p>
-            <a:r>
-              <a:t>Cada uno tiene una sola función y su propio límite de autoridad. Architect solo lee y opina sobre el modelo del negocio. Ux-designer y ui-designer diseñan y construyen. Ux-critic y reviewer revisan antes de que algo se dé por bueno.</a:t>
-            </a:r>
-          </a:p>
-          <a:p/>
-          <a:p>
-            <a:r>
-              <a:t>Y merchant-user-tester, el más importante de todos para mí, no tiene acceso a ningún archivo del proyecto, solo puede navegar el producto como lo haría una vendedora real que nunca lo ha visto. Main coordina y persiste todo esto, pero nunca decide en lugar de los demás.</a:t>
-            </a:r>
-          </a:p>
-        </p:txBody>
-      </p:sp>
-      <p:sp>
-        <p:nvSpPr>
-          <p:cNvPr id="4" name="Slide Number Placeholder 3"/>
-          <p:cNvSpPr>
-            <a:spLocks noGrp="1"/>
-          </p:cNvSpPr>
-          <p:nvPr>
-            <p:ph type="sldNum" idx="5" sz="quarter"/>
-          </p:nvPr>
-        </p:nvSpPr>
-        <p:spPr/>
-      </p:sp>
-    </p:spTree>
-  </p:cSld>
-  <p:clrMapOvr>
-    <a:masterClrMapping/>
-  </p:clrMapOvr>
-</p:notes>
-</file>
-
-<file path=ppt/notesSlides/notesSlide9.xml><?xml version="1.0" encoding="utf-8"?>
-<p:notes xmlns:a="http://schemas.openxmlformats.org/drawingml/2006/main" xmlns:p="http://schemas.openxmlformats.org/presentationml/2006/main" xmlns:r="http://schemas.openxmlformats.org/officeDocument/2006/relationships">
-  <p:cSld>
-    <p:spTree>
-      <p:nvGrpSpPr>
-        <p:cNvPr id="1" name=""/>
-        <p:cNvGrpSpPr/>
-        <p:nvPr/>
-      </p:nvGrpSpPr>
-      <p:grpSpPr>
-        <a:xfrm>
-          <a:off x="0" y="0"/>
-          <a:ext cx="0" cy="0"/>
-          <a:chOff x="0" y="0"/>
-          <a:chExt cx="0" cy="0"/>
-        </a:xfrm>
-      </p:grpSpPr>
-      <p:sp>
-        <p:nvSpPr>
-          <p:cNvPr id="2" name="Slide Image Placeholder 1"/>
-          <p:cNvSpPr>
-            <a:spLocks noGrp="1"/>
-          </p:cNvSpPr>
-          <p:nvPr>
-            <p:ph type="sldImg" idx="2"/>
-          </p:nvPr>
-        </p:nvSpPr>
-        <p:spPr/>
-      </p:sp>
-      <p:sp>
-        <p:nvSpPr>
-          <p:cNvPr id="3" name="Notes Placeholder 2"/>
-          <p:cNvSpPr>
-            <a:spLocks noGrp="1"/>
-          </p:cNvSpPr>
-          <p:nvPr>
-            <p:ph type="body" idx="3" sz="quarter"/>
-          </p:nvPr>
-        </p:nvSpPr>
-        <p:spPr/>
-        <p:txBody>
-          <a:bodyPr/>
-          <a:lstStyle/>
-          <a:p>
-            <a:r>
-              <a:t>Nada en Nahui se da por cerrado sin comprobarlo contra el producto real. Diseñamos, revisamos, construimos, y ahí es donde entra lo que de verdad importa: el hallazgo real. No una suposición, un hallazgo real, de una prueba con Ana o de una campaña de verdad.</a:t>
-            </a:r>
-          </a:p>
-          <a:p/>
-          <a:p>
-            <a:r>
-              <a:t>Ese hallazgo dispara una corrección, y la corrección se vuelve a validar contra el producto real antes de darse por cerrada. Nunca se confía sin comprobar.</a:t>
-            </a:r>
-          </a:p>
-        </p:txBody>
-      </p:sp>
-      <p:sp>
-        <p:nvSpPr>
-          <p:cNvPr id="4" name="Slide Number Placeholder 3"/>
-          <p:cNvSpPr>
-            <a:spLocks noGrp="1"/>
-          </p:cNvSpPr>
-          <p:nvPr>
-            <p:ph type="sldNum" idx="5" sz="quarter"/>
+            <p:ph type="sldNum" sz="quarter" idx="5"/>
           </p:nvPr>
         </p:nvSpPr>
         <p:spPr/>
@@ -1377,10 +794,9 @@
           <a:lstStyle/>
           <a:p>
             <a:r>
-              <a:rPr lang="en-US" smtClean="0"/>
+              <a:rPr lang="en-US"/>
               <a:t>Click to edit Master title style</a:t>
             </a:r>
-            <a:endParaRPr lang="en-US"/>
           </a:p>
         </p:txBody>
       </p:sp>
@@ -1496,10 +912,9 @@
           </a:lstStyle>
           <a:p>
             <a:r>
-              <a:rPr lang="en-US" smtClean="0"/>
+              <a:rPr lang="en-US"/>
               <a:t>Click to edit Master subtitle style</a:t>
             </a:r>
-            <a:endParaRPr lang="en-US"/>
           </a:p>
         </p:txBody>
       </p:sp>
@@ -1520,7 +935,7 @@
           <a:p>
             <a:fld id="{5BCAD085-E8A6-8845-BD4E-CB4CCA059FC4}" type="datetimeFigureOut">
               <a:rPr lang="en-US" smtClean="0"/>
-              <a:t>1/27/13</a:t>
+              <a:t>8/27/26</a:t>
             </a:fld>
             <a:endParaRPr lang="en-US"/>
           </a:p>
@@ -1614,10 +1029,9 @@
           <a:lstStyle/>
           <a:p>
             <a:r>
-              <a:rPr lang="en-US" smtClean="0"/>
+              <a:rPr lang="en-US"/>
               <a:t>Click to edit Master title style</a:t>
             </a:r>
-            <a:endParaRPr lang="en-US"/>
           </a:p>
         </p:txBody>
       </p:sp>
@@ -1638,38 +1052,37 @@
           <a:p>
             <a:pPr lvl="0"/>
             <a:r>
-              <a:rPr lang="en-US" smtClean="0"/>
+              <a:rPr lang="en-US"/>
               <a:t>Click to edit Master text styles</a:t>
             </a:r>
           </a:p>
           <a:p>
             <a:pPr lvl="1"/>
             <a:r>
-              <a:rPr lang="en-US" smtClean="0"/>
+              <a:rPr lang="en-US"/>
               <a:t>Second level</a:t>
             </a:r>
           </a:p>
           <a:p>
             <a:pPr lvl="2"/>
             <a:r>
-              <a:rPr lang="en-US" smtClean="0"/>
+              <a:rPr lang="en-US"/>
               <a:t>Third level</a:t>
             </a:r>
           </a:p>
           <a:p>
             <a:pPr lvl="3"/>
             <a:r>
-              <a:rPr lang="en-US" smtClean="0"/>
+              <a:rPr lang="en-US"/>
               <a:t>Fourth level</a:t>
             </a:r>
           </a:p>
           <a:p>
             <a:pPr lvl="4"/>
             <a:r>
-              <a:rPr lang="en-US" smtClean="0"/>
+              <a:rPr lang="en-US"/>
               <a:t>Fifth level</a:t>
             </a:r>
-            <a:endParaRPr lang="en-US"/>
           </a:p>
         </p:txBody>
       </p:sp>
@@ -1690,7 +1103,7 @@
           <a:p>
             <a:fld id="{5BCAD085-E8A6-8845-BD4E-CB4CCA059FC4}" type="datetimeFigureOut">
               <a:rPr lang="en-US" smtClean="0"/>
-              <a:t>1/27/13</a:t>
+              <a:t>8/27/26</a:t>
             </a:fld>
             <a:endParaRPr lang="en-US"/>
           </a:p>
@@ -1789,10 +1202,9 @@
           <a:lstStyle/>
           <a:p>
             <a:r>
-              <a:rPr lang="en-US" smtClean="0"/>
+              <a:rPr lang="en-US"/>
               <a:t>Click to edit Master title style</a:t>
             </a:r>
-            <a:endParaRPr lang="en-US"/>
           </a:p>
         </p:txBody>
       </p:sp>
@@ -1818,38 +1230,37 @@
           <a:p>
             <a:pPr lvl="0"/>
             <a:r>
-              <a:rPr lang="en-US" smtClean="0"/>
+              <a:rPr lang="en-US"/>
               <a:t>Click to edit Master text styles</a:t>
             </a:r>
           </a:p>
           <a:p>
             <a:pPr lvl="1"/>
             <a:r>
-              <a:rPr lang="en-US" smtClean="0"/>
+              <a:rPr lang="en-US"/>
               <a:t>Second level</a:t>
             </a:r>
           </a:p>
           <a:p>
             <a:pPr lvl="2"/>
             <a:r>
-              <a:rPr lang="en-US" smtClean="0"/>
+              <a:rPr lang="en-US"/>
               <a:t>Third level</a:t>
             </a:r>
           </a:p>
           <a:p>
             <a:pPr lvl="3"/>
             <a:r>
-              <a:rPr lang="en-US" smtClean="0"/>
+              <a:rPr lang="en-US"/>
               <a:t>Fourth level</a:t>
             </a:r>
           </a:p>
           <a:p>
             <a:pPr lvl="4"/>
             <a:r>
-              <a:rPr lang="en-US" smtClean="0"/>
+              <a:rPr lang="en-US"/>
               <a:t>Fifth level</a:t>
             </a:r>
-            <a:endParaRPr lang="en-US"/>
           </a:p>
         </p:txBody>
       </p:sp>
@@ -1870,7 +1281,7 @@
           <a:p>
             <a:fld id="{5BCAD085-E8A6-8845-BD4E-CB4CCA059FC4}" type="datetimeFigureOut">
               <a:rPr lang="en-US" smtClean="0"/>
-              <a:t>1/27/13</a:t>
+              <a:t>8/27/26</a:t>
             </a:fld>
             <a:endParaRPr lang="en-US"/>
           </a:p>
@@ -1964,10 +1375,9 @@
           <a:lstStyle/>
           <a:p>
             <a:r>
-              <a:rPr lang="en-US" smtClean="0"/>
+              <a:rPr lang="en-US"/>
               <a:t>Click to edit Master title style</a:t>
             </a:r>
-            <a:endParaRPr lang="en-US"/>
           </a:p>
         </p:txBody>
       </p:sp>
@@ -1988,38 +1398,37 @@
           <a:p>
             <a:pPr lvl="0"/>
             <a:r>
-              <a:rPr lang="en-US" smtClean="0"/>
+              <a:rPr lang="en-US"/>
               <a:t>Click to edit Master text styles</a:t>
             </a:r>
           </a:p>
           <a:p>
             <a:pPr lvl="1"/>
             <a:r>
-              <a:rPr lang="en-US" smtClean="0"/>
+              <a:rPr lang="en-US"/>
               <a:t>Second level</a:t>
             </a:r>
           </a:p>
           <a:p>
             <a:pPr lvl="2"/>
             <a:r>
-              <a:rPr lang="en-US" smtClean="0"/>
+              <a:rPr lang="en-US"/>
               <a:t>Third level</a:t>
             </a:r>
           </a:p>
           <a:p>
             <a:pPr lvl="3"/>
             <a:r>
-              <a:rPr lang="en-US" smtClean="0"/>
+              <a:rPr lang="en-US"/>
               <a:t>Fourth level</a:t>
             </a:r>
           </a:p>
           <a:p>
             <a:pPr lvl="4"/>
             <a:r>
-              <a:rPr lang="en-US" smtClean="0"/>
+              <a:rPr lang="en-US"/>
               <a:t>Fifth level</a:t>
             </a:r>
-            <a:endParaRPr lang="en-US"/>
           </a:p>
         </p:txBody>
       </p:sp>
@@ -2040,7 +1449,7 @@
           <a:p>
             <a:fld id="{5BCAD085-E8A6-8845-BD4E-CB4CCA059FC4}" type="datetimeFigureOut">
               <a:rPr lang="en-US" smtClean="0"/>
-              <a:t>1/27/13</a:t>
+              <a:t>8/27/26</a:t>
             </a:fld>
             <a:endParaRPr lang="en-US"/>
           </a:p>
@@ -2143,10 +1552,9 @@
           </a:lstStyle>
           <a:p>
             <a:r>
-              <a:rPr lang="en-US" smtClean="0"/>
+              <a:rPr lang="en-US"/>
               <a:t>Click to edit Master title style</a:t>
             </a:r>
-            <a:endParaRPr lang="en-US"/>
           </a:p>
         </p:txBody>
       </p:sp>
@@ -2263,7 +1671,7 @@
           <a:p>
             <a:pPr lvl="0"/>
             <a:r>
-              <a:rPr lang="en-US" smtClean="0"/>
+              <a:rPr lang="en-US"/>
               <a:t>Click to edit Master text styles</a:t>
             </a:r>
           </a:p>
@@ -2286,7 +1694,7 @@
           <a:p>
             <a:fld id="{5BCAD085-E8A6-8845-BD4E-CB4CCA059FC4}" type="datetimeFigureOut">
               <a:rPr lang="en-US" smtClean="0"/>
-              <a:t>1/27/13</a:t>
+              <a:t>8/27/26</a:t>
             </a:fld>
             <a:endParaRPr lang="en-US"/>
           </a:p>
@@ -2380,10 +1788,9 @@
           <a:lstStyle/>
           <a:p>
             <a:r>
-              <a:rPr lang="en-US" smtClean="0"/>
+              <a:rPr lang="en-US"/>
               <a:t>Click to edit Master title style</a:t>
             </a:r>
-            <a:endParaRPr lang="en-US"/>
           </a:p>
         </p:txBody>
       </p:sp>
@@ -2437,38 +1844,37 @@
           <a:p>
             <a:pPr lvl="0"/>
             <a:r>
-              <a:rPr lang="en-US" smtClean="0"/>
+              <a:rPr lang="en-US"/>
               <a:t>Click to edit Master text styles</a:t>
             </a:r>
           </a:p>
           <a:p>
             <a:pPr lvl="1"/>
             <a:r>
-              <a:rPr lang="en-US" smtClean="0"/>
+              <a:rPr lang="en-US"/>
               <a:t>Second level</a:t>
             </a:r>
           </a:p>
           <a:p>
             <a:pPr lvl="2"/>
             <a:r>
-              <a:rPr lang="en-US" smtClean="0"/>
+              <a:rPr lang="en-US"/>
               <a:t>Third level</a:t>
             </a:r>
           </a:p>
           <a:p>
             <a:pPr lvl="3"/>
             <a:r>
-              <a:rPr lang="en-US" smtClean="0"/>
+              <a:rPr lang="en-US"/>
               <a:t>Fourth level</a:t>
             </a:r>
           </a:p>
           <a:p>
             <a:pPr lvl="4"/>
             <a:r>
-              <a:rPr lang="en-US" smtClean="0"/>
+              <a:rPr lang="en-US"/>
               <a:t>Fifth level</a:t>
             </a:r>
-            <a:endParaRPr lang="en-US"/>
           </a:p>
         </p:txBody>
       </p:sp>
@@ -2522,38 +1928,37 @@
           <a:p>
             <a:pPr lvl="0"/>
             <a:r>
-              <a:rPr lang="en-US" smtClean="0"/>
+              <a:rPr lang="en-US"/>
               <a:t>Click to edit Master text styles</a:t>
             </a:r>
           </a:p>
           <a:p>
             <a:pPr lvl="1"/>
             <a:r>
-              <a:rPr lang="en-US" smtClean="0"/>
+              <a:rPr lang="en-US"/>
               <a:t>Second level</a:t>
             </a:r>
           </a:p>
           <a:p>
             <a:pPr lvl="2"/>
             <a:r>
-              <a:rPr lang="en-US" smtClean="0"/>
+              <a:rPr lang="en-US"/>
               <a:t>Third level</a:t>
             </a:r>
           </a:p>
           <a:p>
             <a:pPr lvl="3"/>
             <a:r>
-              <a:rPr lang="en-US" smtClean="0"/>
+              <a:rPr lang="en-US"/>
               <a:t>Fourth level</a:t>
             </a:r>
           </a:p>
           <a:p>
             <a:pPr lvl="4"/>
             <a:r>
-              <a:rPr lang="en-US" smtClean="0"/>
+              <a:rPr lang="en-US"/>
               <a:t>Fifth level</a:t>
             </a:r>
-            <a:endParaRPr lang="en-US"/>
           </a:p>
         </p:txBody>
       </p:sp>
@@ -2574,7 +1979,7 @@
           <a:p>
             <a:fld id="{5BCAD085-E8A6-8845-BD4E-CB4CCA059FC4}" type="datetimeFigureOut">
               <a:rPr lang="en-US" smtClean="0"/>
-              <a:t>1/27/13</a:t>
+              <a:t>8/27/26</a:t>
             </a:fld>
             <a:endParaRPr lang="en-US"/>
           </a:p>
@@ -2672,10 +2077,9 @@
           </a:lstStyle>
           <a:p>
             <a:r>
-              <a:rPr lang="en-US" smtClean="0"/>
+              <a:rPr lang="en-US"/>
               <a:t>Click to edit Master title style</a:t>
             </a:r>
-            <a:endParaRPr lang="en-US"/>
           </a:p>
         </p:txBody>
       </p:sp>
@@ -2738,7 +2142,7 @@
           <a:p>
             <a:pPr lvl="0"/>
             <a:r>
-              <a:rPr lang="en-US" smtClean="0"/>
+              <a:rPr lang="en-US"/>
               <a:t>Click to edit Master text styles</a:t>
             </a:r>
           </a:p>
@@ -2794,38 +2198,37 @@
           <a:p>
             <a:pPr lvl="0"/>
             <a:r>
-              <a:rPr lang="en-US" smtClean="0"/>
+              <a:rPr lang="en-US"/>
               <a:t>Click to edit Master text styles</a:t>
             </a:r>
           </a:p>
           <a:p>
             <a:pPr lvl="1"/>
             <a:r>
-              <a:rPr lang="en-US" smtClean="0"/>
+              <a:rPr lang="en-US"/>
               <a:t>Second level</a:t>
             </a:r>
           </a:p>
           <a:p>
             <a:pPr lvl="2"/>
             <a:r>
-              <a:rPr lang="en-US" smtClean="0"/>
+              <a:rPr lang="en-US"/>
               <a:t>Third level</a:t>
             </a:r>
           </a:p>
           <a:p>
             <a:pPr lvl="3"/>
             <a:r>
-              <a:rPr lang="en-US" smtClean="0"/>
+              <a:rPr lang="en-US"/>
               <a:t>Fourth level</a:t>
             </a:r>
           </a:p>
           <a:p>
             <a:pPr lvl="4"/>
             <a:r>
-              <a:rPr lang="en-US" smtClean="0"/>
+              <a:rPr lang="en-US"/>
               <a:t>Fifth level</a:t>
             </a:r>
-            <a:endParaRPr lang="en-US"/>
           </a:p>
         </p:txBody>
       </p:sp>
@@ -2888,7 +2291,7 @@
           <a:p>
             <a:pPr lvl="0"/>
             <a:r>
-              <a:rPr lang="en-US" smtClean="0"/>
+              <a:rPr lang="en-US"/>
               <a:t>Click to edit Master text styles</a:t>
             </a:r>
           </a:p>
@@ -2944,38 +2347,37 @@
           <a:p>
             <a:pPr lvl="0"/>
             <a:r>
-              <a:rPr lang="en-US" smtClean="0"/>
+              <a:rPr lang="en-US"/>
               <a:t>Click to edit Master text styles</a:t>
             </a:r>
           </a:p>
           <a:p>
             <a:pPr lvl="1"/>
             <a:r>
-              <a:rPr lang="en-US" smtClean="0"/>
+              <a:rPr lang="en-US"/>
               <a:t>Second level</a:t>
             </a:r>
           </a:p>
           <a:p>
             <a:pPr lvl="2"/>
             <a:r>
-              <a:rPr lang="en-US" smtClean="0"/>
+              <a:rPr lang="en-US"/>
               <a:t>Third level</a:t>
             </a:r>
           </a:p>
           <a:p>
             <a:pPr lvl="3"/>
             <a:r>
-              <a:rPr lang="en-US" smtClean="0"/>
+              <a:rPr lang="en-US"/>
               <a:t>Fourth level</a:t>
             </a:r>
           </a:p>
           <a:p>
             <a:pPr lvl="4"/>
             <a:r>
-              <a:rPr lang="en-US" smtClean="0"/>
+              <a:rPr lang="en-US"/>
               <a:t>Fifth level</a:t>
             </a:r>
-            <a:endParaRPr lang="en-US"/>
           </a:p>
         </p:txBody>
       </p:sp>
@@ -2996,7 +2398,7 @@
           <a:p>
             <a:fld id="{5BCAD085-E8A6-8845-BD4E-CB4CCA059FC4}" type="datetimeFigureOut">
               <a:rPr lang="en-US" smtClean="0"/>
-              <a:t>1/27/13</a:t>
+              <a:t>8/27/26</a:t>
             </a:fld>
             <a:endParaRPr lang="en-US"/>
           </a:p>
@@ -3090,10 +2492,9 @@
           <a:lstStyle/>
           <a:p>
             <a:r>
-              <a:rPr lang="en-US" smtClean="0"/>
+              <a:rPr lang="en-US"/>
               <a:t>Click to edit Master title style</a:t>
             </a:r>
-            <a:endParaRPr lang="en-US"/>
           </a:p>
         </p:txBody>
       </p:sp>
@@ -3114,7 +2515,7 @@
           <a:p>
             <a:fld id="{5BCAD085-E8A6-8845-BD4E-CB4CCA059FC4}" type="datetimeFigureOut">
               <a:rPr lang="en-US" smtClean="0"/>
-              <a:t>1/27/13</a:t>
+              <a:t>8/27/26</a:t>
             </a:fld>
             <a:endParaRPr lang="en-US"/>
           </a:p>
@@ -3209,7 +2610,7 @@
           <a:p>
             <a:fld id="{5BCAD085-E8A6-8845-BD4E-CB4CCA059FC4}" type="datetimeFigureOut">
               <a:rPr lang="en-US" smtClean="0"/>
-              <a:t>1/27/13</a:t>
+              <a:t>8/27/26</a:t>
             </a:fld>
             <a:endParaRPr lang="en-US"/>
           </a:p>
@@ -3312,10 +2713,9 @@
           </a:lstStyle>
           <a:p>
             <a:r>
-              <a:rPr lang="en-US" smtClean="0"/>
+              <a:rPr lang="en-US"/>
               <a:t>Click to edit Master title style</a:t>
             </a:r>
-            <a:endParaRPr lang="en-US"/>
           </a:p>
         </p:txBody>
       </p:sp>
@@ -3369,38 +2769,37 @@
           <a:p>
             <a:pPr lvl="0"/>
             <a:r>
-              <a:rPr lang="en-US" smtClean="0"/>
+              <a:rPr lang="en-US"/>
               <a:t>Click to edit Master text styles</a:t>
             </a:r>
           </a:p>
           <a:p>
             <a:pPr lvl="1"/>
             <a:r>
-              <a:rPr lang="en-US" smtClean="0"/>
+              <a:rPr lang="en-US"/>
               <a:t>Second level</a:t>
             </a:r>
           </a:p>
           <a:p>
             <a:pPr lvl="2"/>
             <a:r>
-              <a:rPr lang="en-US" smtClean="0"/>
+              <a:rPr lang="en-US"/>
               <a:t>Third level</a:t>
             </a:r>
           </a:p>
           <a:p>
             <a:pPr lvl="3"/>
             <a:r>
-              <a:rPr lang="en-US" smtClean="0"/>
+              <a:rPr lang="en-US"/>
               <a:t>Fourth level</a:t>
             </a:r>
           </a:p>
           <a:p>
             <a:pPr lvl="4"/>
             <a:r>
-              <a:rPr lang="en-US" smtClean="0"/>
+              <a:rPr lang="en-US"/>
               <a:t>Fifth level</a:t>
             </a:r>
-            <a:endParaRPr lang="en-US"/>
           </a:p>
         </p:txBody>
       </p:sp>
@@ -3463,7 +2862,7 @@
           <a:p>
             <a:pPr lvl="0"/>
             <a:r>
-              <a:rPr lang="en-US" smtClean="0"/>
+              <a:rPr lang="en-US"/>
               <a:t>Click to edit Master text styles</a:t>
             </a:r>
           </a:p>
@@ -3486,7 +2885,7 @@
           <a:p>
             <a:fld id="{5BCAD085-E8A6-8845-BD4E-CB4CCA059FC4}" type="datetimeFigureOut">
               <a:rPr lang="en-US" smtClean="0"/>
-              <a:t>1/27/13</a:t>
+              <a:t>8/27/26</a:t>
             </a:fld>
             <a:endParaRPr lang="en-US"/>
           </a:p>
@@ -3589,10 +2988,9 @@
           </a:lstStyle>
           <a:p>
             <a:r>
-              <a:rPr lang="en-US" smtClean="0"/>
+              <a:rPr lang="en-US"/>
               <a:t>Click to edit Master title style</a:t>
             </a:r>
-            <a:endParaRPr lang="en-US"/>
           </a:p>
         </p:txBody>
       </p:sp>
@@ -3716,7 +3114,7 @@
           <a:p>
             <a:pPr lvl="0"/>
             <a:r>
-              <a:rPr lang="en-US" smtClean="0"/>
+              <a:rPr lang="en-US"/>
               <a:t>Click to edit Master text styles</a:t>
             </a:r>
           </a:p>
@@ -3739,7 +3137,7 @@
           <a:p>
             <a:fld id="{5BCAD085-E8A6-8845-BD4E-CB4CCA059FC4}" type="datetimeFigureOut">
               <a:rPr lang="en-US" smtClean="0"/>
-              <a:t>1/27/13</a:t>
+              <a:t>8/27/26</a:t>
             </a:fld>
             <a:endParaRPr lang="en-US"/>
           </a:p>
@@ -3848,10 +3246,9 @@
           <a:lstStyle/>
           <a:p>
             <a:r>
-              <a:rPr lang="en-US" smtClean="0"/>
+              <a:rPr lang="en-US"/>
               <a:t>Click to edit Master title style</a:t>
             </a:r>
-            <a:endParaRPr lang="en-US"/>
           </a:p>
         </p:txBody>
       </p:sp>
@@ -3882,38 +3279,37 @@
           <a:p>
             <a:pPr lvl="0"/>
             <a:r>
-              <a:rPr lang="en-US" smtClean="0"/>
+              <a:rPr lang="en-US"/>
               <a:t>Click to edit Master text styles</a:t>
             </a:r>
           </a:p>
           <a:p>
             <a:pPr lvl="1"/>
             <a:r>
-              <a:rPr lang="en-US" smtClean="0"/>
+              <a:rPr lang="en-US"/>
               <a:t>Second level</a:t>
             </a:r>
           </a:p>
           <a:p>
             <a:pPr lvl="2"/>
             <a:r>
-              <a:rPr lang="en-US" smtClean="0"/>
+              <a:rPr lang="en-US"/>
               <a:t>Third level</a:t>
             </a:r>
           </a:p>
           <a:p>
             <a:pPr lvl="3"/>
             <a:r>
-              <a:rPr lang="en-US" smtClean="0"/>
+              <a:rPr lang="en-US"/>
               <a:t>Fourth level</a:t>
             </a:r>
           </a:p>
           <a:p>
             <a:pPr lvl="4"/>
             <a:r>
-              <a:rPr lang="en-US" smtClean="0"/>
+              <a:rPr lang="en-US"/>
               <a:t>Fifth level</a:t>
             </a:r>
-            <a:endParaRPr lang="en-US"/>
           </a:p>
         </p:txBody>
       </p:sp>
@@ -3952,7 +3348,7 @@
           <a:p>
             <a:fld id="{5BCAD085-E8A6-8845-BD4E-CB4CCA059FC4}" type="datetimeFigureOut">
               <a:rPr lang="en-US" smtClean="0"/>
-              <a:t>1/27/13</a:t>
+              <a:t>8/27/26</a:t>
             </a:fld>
             <a:endParaRPr lang="en-US"/>
           </a:p>
@@ -4311,7 +3707,7 @@
 </file>
 
 <file path=ppt/slides/slide1.xml><?xml version="1.0" encoding="utf-8"?>
-<p:sld xmlns:a="http://schemas.openxmlformats.org/drawingml/2006/main" xmlns:p="http://schemas.openxmlformats.org/presentationml/2006/main" xmlns:r="http://schemas.openxmlformats.org/officeDocument/2006/relationships">
+<p:sld xmlns:a="http://schemas.openxmlformats.org/drawingml/2006/main" xmlns:r="http://schemas.openxmlformats.org/officeDocument/2006/relationships" xmlns:p="http://schemas.openxmlformats.org/presentationml/2006/main">
   <p:cSld>
     <p:spTree>
       <p:nvGrpSpPr>
@@ -4319,7 +3715,14 @@
         <p:cNvGrpSpPr/>
         <p:nvPr/>
       </p:nvGrpSpPr>
-      <p:grpSpPr/>
+      <p:grpSpPr>
+        <a:xfrm>
+          <a:off x="0" y="0"/>
+          <a:ext cx="0" cy="0"/>
+          <a:chOff x="0" y="0"/>
+          <a:chExt cx="0" cy="0"/>
+        </a:xfrm>
+      </p:grpSpPr>
       <p:sp>
         <p:nvSpPr>
           <p:cNvPr id="2" name="Rectangle 1"/>
@@ -4361,6 +3764,7 @@
           <a:lstStyle/>
           <a:p>
             <a:pPr algn="ctr"/>
+            <a:endParaRPr/>
           </a:p>
         </p:txBody>
       </p:sp>
@@ -4381,7 +3785,7 @@
           <a:noFill/>
         </p:spPr>
         <p:txBody>
-          <a:bodyPr wrap="square" anchor="t" lIns="0" rIns="0" tIns="0" bIns="0">
+          <a:bodyPr wrap="square" lIns="0" tIns="0" rIns="0" bIns="0" anchor="t">
             <a:spAutoFit/>
           </a:bodyPr>
           <a:lstStyle/>
@@ -4423,7 +3827,7 @@
           <a:noFill/>
         </p:spPr>
         <p:txBody>
-          <a:bodyPr wrap="square" anchor="t" lIns="0" rIns="0" tIns="0" bIns="0">
+          <a:bodyPr wrap="square" lIns="0" tIns="0" rIns="0" bIns="0" anchor="t">
             <a:spAutoFit/>
           </a:bodyPr>
           <a:lstStyle/>
@@ -4468,7 +3872,7 @@
           <a:noFill/>
         </p:spPr>
         <p:txBody>
-          <a:bodyPr wrap="square" anchor="t" lIns="0" rIns="0" tIns="0" bIns="0">
+          <a:bodyPr wrap="square" lIns="0" tIns="0" rIns="0" bIns="0" anchor="t">
             <a:spAutoFit/>
           </a:bodyPr>
           <a:lstStyle/>
@@ -4493,6 +3897,155 @@
           </a:p>
         </p:txBody>
       </p:sp>
+      <p:sp>
+        <p:nvSpPr>
+          <p:cNvPr id="6" name="TextBox 5"/>
+          <p:cNvSpPr txBox="1"/>
+          <p:nvPr/>
+        </p:nvSpPr>
+        <p:spPr>
+          <a:xfrm>
+            <a:off x="868680" y="4938840"/>
+            <a:ext cx="9601200" cy="640080"/>
+          </a:xfrm>
+          <a:prstGeom prst="rect">
+            <a:avLst/>
+          </a:prstGeom>
+          <a:noFill/>
+        </p:spPr>
+        <p:txBody>
+          <a:bodyPr wrap="square">
+            <a:spAutoFit/>
+          </a:bodyPr>
+          <a:lstStyle/>
+          <a:p>
+            <a:pPr algn="l"/>
+            <a:r>
+              <a:rPr sz="1500" b="1" i="0" dirty="0" err="1">
+                <a:solidFill>
+                  <a:srgbClr val="FFFFFF"/>
+                </a:solidFill>
+                <a:latin typeface="Inter"/>
+              </a:rPr>
+              <a:t>Prototipo</a:t>
+            </a:r>
+            <a:r>
+              <a:rPr sz="1500" b="1" i="0" dirty="0">
+                <a:solidFill>
+                  <a:srgbClr val="FFFFFF"/>
+                </a:solidFill>
+                <a:latin typeface="Inter"/>
+              </a:rPr>
+              <a:t> </a:t>
+            </a:r>
+            <a:r>
+              <a:rPr sz="1500" b="1" i="0" dirty="0" err="1">
+                <a:solidFill>
+                  <a:srgbClr val="FFFFFF"/>
+                </a:solidFill>
+                <a:latin typeface="Inter"/>
+              </a:rPr>
+              <a:t>en</a:t>
+            </a:r>
+            <a:r>
+              <a:rPr sz="1500" b="1" i="0" dirty="0">
+                <a:solidFill>
+                  <a:srgbClr val="FFFFFF"/>
+                </a:solidFill>
+                <a:latin typeface="Inter"/>
+              </a:rPr>
+              <a:t> vivo: </a:t>
+            </a:r>
+            <a:r>
+              <a:rPr sz="1500" b="1" dirty="0" err="1">
+                <a:solidFill>
+                  <a:srgbClr val="FFFFFF"/>
+                </a:solidFill>
+                <a:latin typeface="Inter"/>
+              </a:rPr>
+              <a:t>demo.nahui.app</a:t>
+            </a:r>
+            <a:r>
+              <a:rPr sz="1500" b="1" dirty="0">
+                <a:solidFill>
+                  <a:srgbClr val="FFFFFF"/>
+                </a:solidFill>
+                <a:latin typeface="Inter"/>
+              </a:rPr>
+              <a:t>   ·   </a:t>
+            </a:r>
+            <a:r>
+              <a:rPr sz="1500" b="1" dirty="0" err="1">
+                <a:solidFill>
+                  <a:srgbClr val="FFFFFF"/>
+                </a:solidFill>
+                <a:latin typeface="Inter"/>
+              </a:rPr>
+              <a:t>Repositorio</a:t>
+            </a:r>
+            <a:r>
+              <a:rPr sz="1500" b="1" dirty="0">
+                <a:solidFill>
+                  <a:srgbClr val="FFFFFF"/>
+                </a:solidFill>
+                <a:latin typeface="Inter"/>
+              </a:rPr>
+              <a:t>: </a:t>
+            </a:r>
+            <a:r>
+              <a:rPr sz="1500" b="1" dirty="0" err="1">
+                <a:solidFill>
+                  <a:srgbClr val="FFFFFF"/>
+                </a:solidFill>
+                <a:latin typeface="Inter"/>
+              </a:rPr>
+              <a:t>github.com</a:t>
+            </a:r>
+            <a:r>
+              <a:rPr sz="1500" b="1" dirty="0">
+                <a:solidFill>
+                  <a:srgbClr val="FFFFFF"/>
+                </a:solidFill>
+                <a:latin typeface="Inter"/>
+              </a:rPr>
+              <a:t>/</a:t>
+            </a:r>
+            <a:r>
+              <a:rPr sz="1500" b="1" dirty="0" err="1">
+                <a:solidFill>
+                  <a:srgbClr val="FFFFFF"/>
+                </a:solidFill>
+                <a:latin typeface="Inter"/>
+              </a:rPr>
+              <a:t>claudiafalcon</a:t>
+            </a:r>
+            <a:r>
+              <a:rPr sz="1500" b="1" dirty="0">
+                <a:solidFill>
+                  <a:srgbClr val="FFFFFF"/>
+                </a:solidFill>
+                <a:latin typeface="Inter"/>
+              </a:rPr>
+              <a:t>/</a:t>
+            </a:r>
+            <a:r>
+              <a:rPr sz="1500" b="1" dirty="0" err="1">
+                <a:solidFill>
+                  <a:srgbClr val="FFFFFF"/>
+                </a:solidFill>
+                <a:latin typeface="Inter"/>
+              </a:rPr>
+              <a:t>nahui</a:t>
+            </a:r>
+            <a:endParaRPr sz="1500" b="1" dirty="0">
+              <a:solidFill>
+                <a:srgbClr val="FFFFFF"/>
+              </a:solidFill>
+              <a:latin typeface="Inter"/>
+            </a:endParaRPr>
+          </a:p>
+        </p:txBody>
+      </p:sp>
     </p:spTree>
   </p:cSld>
   <p:clrMapOvr>
@@ -4501,8 +4054,8 @@
 </p:sld>
 </file>
 
-<file path=ppt/slides/slide10.xml><?xml version="1.0" encoding="utf-8"?>
-<p:sld xmlns:a="http://schemas.openxmlformats.org/drawingml/2006/main" xmlns:p="http://schemas.openxmlformats.org/presentationml/2006/main" xmlns:r="http://schemas.openxmlformats.org/officeDocument/2006/relationships">
+<file path=ppt/slides/slide2.xml><?xml version="1.0" encoding="utf-8"?>
+<p:sld xmlns:a="http://schemas.openxmlformats.org/drawingml/2006/main" xmlns:r="http://schemas.openxmlformats.org/officeDocument/2006/relationships" xmlns:p="http://schemas.openxmlformats.org/presentationml/2006/main">
   <p:cSld>
     <p:spTree>
       <p:nvGrpSpPr>
@@ -4510,7 +4063,14 @@
         <p:cNvGrpSpPr/>
         <p:nvPr/>
       </p:nvGrpSpPr>
-      <p:grpSpPr/>
+      <p:grpSpPr>
+        <a:xfrm>
+          <a:off x="0" y="0"/>
+          <a:ext cx="0" cy="0"/>
+          <a:chOff x="0" y="0"/>
+          <a:chExt cx="0" cy="0"/>
+        </a:xfrm>
+      </p:grpSpPr>
       <p:sp>
         <p:nvSpPr>
           <p:cNvPr id="2" name="Rectangle 1"/>
@@ -4526,7 +4086,7 @@
             <a:avLst/>
           </a:prstGeom>
           <a:solidFill>
-            <a:srgbClr val="FAF9F5"/>
+            <a:srgbClr val="141413"/>
           </a:solidFill>
           <a:ln>
             <a:noFill/>
@@ -4552,33 +4112,157 @@
           <a:lstStyle/>
           <a:p>
             <a:pPr algn="ctr"/>
-          </a:p>
-        </p:txBody>
-      </p:sp>
-      <p:pic>
-        <p:nvPicPr>
-          <p:cNvPr id="3" name="Picture 2" descr="timeline-v2.png"/>
-          <p:cNvPicPr>
-            <a:picLocks noChangeAspect="1"/>
-          </p:cNvPicPr>
+            <a:endParaRPr/>
+          </a:p>
+        </p:txBody>
+      </p:sp>
+      <p:sp>
+        <p:nvSpPr>
+          <p:cNvPr id="22" name="TextBox Eyebrow (El Problema)"/>
+          <p:cNvSpPr txBox="1"/>
           <p:nvPr/>
-        </p:nvPicPr>
-        <p:blipFill>
-          <a:blip r:embed="rId2"/>
-          <a:stretch>
-            <a:fillRect/>
-          </a:stretch>
-        </p:blipFill>
-        <p:spPr>
-          <a:xfrm>
-            <a:off x="109728" y="61722"/>
-            <a:ext cx="11972544" cy="6734556"/>
+        </p:nvSpPr>
+        <p:spPr>
+          <a:xfrm>
+            <a:off x="822960" y="640080"/>
+            <a:ext cx="6000000" cy="320000"/>
           </a:xfrm>
           <a:prstGeom prst="rect">
             <a:avLst/>
           </a:prstGeom>
-        </p:spPr>
-      </p:pic>
+          <a:noFill/>
+        </p:spPr>
+        <p:txBody>
+          <a:bodyPr wrap="square">
+            <a:spAutoFit/>
+          </a:bodyPr>
+          <a:lstStyle/>
+          <a:p>
+            <a:pPr algn="l"/>
+            <a:r>
+              <a:rPr sz="1300" b="1" i="0">
+                <a:solidFill>
+                  <a:srgbClr val="C13F26"/>
+                </a:solidFill>
+                <a:latin typeface="Inter"/>
+              </a:rPr>
+              <a:t>EL PROBLEMA</a:t>
+            </a:r>
+          </a:p>
+        </p:txBody>
+      </p:sp>
+      <p:sp>
+        <p:nvSpPr>
+          <p:cNvPr id="3" name="TextBox 2"/>
+          <p:cNvSpPr txBox="1"/>
+          <p:nvPr/>
+        </p:nvSpPr>
+        <p:spPr>
+          <a:xfrm>
+            <a:off x="822960" y="1005840"/>
+            <a:ext cx="10500000" cy="2194560"/>
+          </a:xfrm>
+          <a:prstGeom prst="rect">
+            <a:avLst/>
+          </a:prstGeom>
+          <a:noFill/>
+        </p:spPr>
+        <p:txBody>
+          <a:bodyPr wrap="square" lIns="0" tIns="0" rIns="0" bIns="0" anchor="t">
+            <a:spAutoFit/>
+          </a:bodyPr>
+          <a:lstStyle/>
+          <a:p>
+            <a:pPr algn="l">
+              <a:lnSpc>
+                <a:spcPct val="102000"/>
+              </a:lnSpc>
+              <a:spcBef>
+                <a:spcPts val="0"/>
+              </a:spcBef>
+              <a:spcAft>
+                <a:spcPts val="0"/>
+              </a:spcAft>
+            </a:pPr>
+            <a:r>
+              <a:rPr sz="6000" b="1" i="0">
+                <a:solidFill>
+                  <a:srgbClr val="FFFFFF"/>
+                </a:solidFill>
+                <a:latin typeface="Fredoka"/>
+              </a:rPr>
+              <a:t>El registro le cuesta la</a:t>
+            </a:r>
+          </a:p>
+          <a:p>
+            <a:pPr algn="l">
+              <a:lnSpc>
+                <a:spcPct val="102000"/>
+              </a:lnSpc>
+              <a:spcBef>
+                <a:spcPts val="0"/>
+              </a:spcBef>
+              <a:spcAft>
+                <a:spcPts val="0"/>
+              </a:spcAft>
+            </a:pPr>
+            <a:r>
+              <a:rPr sz="6000" b="1" i="0">
+                <a:solidFill>
+                  <a:srgbClr val="FFFFFF"/>
+                </a:solidFill>
+                <a:latin typeface="Fredoka"/>
+              </a:rPr>
+              <a:t>siguiente venta.</a:t>
+            </a:r>
+          </a:p>
+        </p:txBody>
+      </p:sp>
+      <p:sp>
+        <p:nvSpPr>
+          <p:cNvPr id="4" name="TextBox 3"/>
+          <p:cNvSpPr txBox="1"/>
+          <p:nvPr/>
+        </p:nvSpPr>
+        <p:spPr>
+          <a:xfrm>
+            <a:off x="868680" y="3931920"/>
+            <a:ext cx="9000000" cy="1280160"/>
+          </a:xfrm>
+          <a:prstGeom prst="rect">
+            <a:avLst/>
+          </a:prstGeom>
+          <a:noFill/>
+        </p:spPr>
+        <p:txBody>
+          <a:bodyPr wrap="square" lIns="0" tIns="0" rIns="0" bIns="0" anchor="t">
+            <a:spAutoFit/>
+          </a:bodyPr>
+          <a:lstStyle/>
+          <a:p>
+            <a:pPr algn="l">
+              <a:lnSpc>
+                <a:spcPct val="125000"/>
+              </a:lnSpc>
+              <a:spcBef>
+                <a:spcPts val="0"/>
+              </a:spcBef>
+              <a:spcAft>
+                <a:spcPts val="0"/>
+              </a:spcAft>
+            </a:pPr>
+            <a:r>
+              <a:rPr sz="2000" b="0" i="0">
+                <a:solidFill>
+                  <a:srgbClr val="C7C5C0"/>
+                </a:solidFill>
+                <a:latin typeface="Inter"/>
+              </a:rPr>
+              <a:t>Flujo de clientes impredecible. Un registro de más de unos segundos compite directamente con atender a quien llega después, y siempre gana la siguiente venta.</a:t>
+            </a:r>
+          </a:p>
+        </p:txBody>
+      </p:sp>
     </p:spTree>
   </p:cSld>
   <p:clrMapOvr>
@@ -4587,8 +4271,8 @@
 </p:sld>
 </file>
 
-<file path=ppt/slides/slide11.xml><?xml version="1.0" encoding="utf-8"?>
-<p:sld xmlns:a="http://schemas.openxmlformats.org/drawingml/2006/main" xmlns:p="http://schemas.openxmlformats.org/presentationml/2006/main" xmlns:r="http://schemas.openxmlformats.org/officeDocument/2006/relationships">
+<file path=ppt/slides/slide3.xml><?xml version="1.0" encoding="utf-8"?>
+<p:sld xmlns:a="http://schemas.openxmlformats.org/drawingml/2006/main" xmlns:r="http://schemas.openxmlformats.org/officeDocument/2006/relationships" xmlns:p="http://schemas.openxmlformats.org/presentationml/2006/main">
   <p:cSld>
     <p:spTree>
       <p:nvGrpSpPr>
@@ -4596,7 +4280,14 @@
         <p:cNvGrpSpPr/>
         <p:nvPr/>
       </p:nvGrpSpPr>
-      <p:grpSpPr/>
+      <p:grpSpPr>
+        <a:xfrm>
+          <a:off x="0" y="0"/>
+          <a:ext cx="0" cy="0"/>
+          <a:chOff x="0" y="0"/>
+          <a:chExt cx="0" cy="0"/>
+        </a:xfrm>
+      </p:grpSpPr>
       <p:sp>
         <p:nvSpPr>
           <p:cNvPr id="2" name="Rectangle 1"/>
@@ -4612,7 +4303,7 @@
             <a:avLst/>
           </a:prstGeom>
           <a:solidFill>
-            <a:srgbClr val="141413"/>
+            <a:srgbClr val="FAF9F5"/>
           </a:solidFill>
           <a:ln>
             <a:noFill/>
@@ -4638,6 +4329,7 @@
           <a:lstStyle/>
           <a:p>
             <a:pPr algn="ctr"/>
+            <a:endParaRPr/>
           </a:p>
         </p:txBody>
       </p:sp>
@@ -4649,8 +4341,8 @@
         </p:nvSpPr>
         <p:spPr>
           <a:xfrm>
-            <a:off x="1981200" y="2788920"/>
-            <a:ext cx="8229600" cy="1280160"/>
+            <a:off x="822960" y="822960"/>
+            <a:ext cx="6000000" cy="320000"/>
           </a:xfrm>
           <a:prstGeom prst="rect">
             <a:avLst/>
@@ -4658,68 +4350,82 @@
           <a:noFill/>
         </p:spPr>
         <p:txBody>
-          <a:bodyPr wrap="square" anchor="t" lIns="0" rIns="0" tIns="0" bIns="0">
+          <a:bodyPr wrap="square">
             <a:spAutoFit/>
           </a:bodyPr>
           <a:lstStyle/>
           <a:p>
-            <a:pPr algn="ctr">
-              <a:spcBef>
-                <a:spcPts val="0"/>
-              </a:spcBef>
-              <a:spcAft>
-                <a:spcPts val="0"/>
-              </a:spcAft>
-            </a:pPr>
-            <a:r>
-              <a:rPr sz="7200" b="1" i="0">
-                <a:solidFill>
-                  <a:srgbClr val="FFFFFF"/>
-                </a:solidFill>
-                <a:latin typeface="Fredoka"/>
+            <a:pPr algn="l"/>
+            <a:r>
+              <a:rPr sz="1300" b="1" i="0">
+                <a:solidFill>
+                  <a:srgbClr val="C13F26"/>
+                </a:solidFill>
+                <a:latin typeface="Inter"/>
               </a:rPr>
-              <a:t>Gracias.</a:t>
-            </a:r>
-          </a:p>
-        </p:txBody>
-      </p:sp>
-    </p:spTree>
-  </p:cSld>
-  <p:clrMapOvr>
-    <a:masterClrMapping/>
-  </p:clrMapOvr>
-</p:sld>
-</file>
-
-<file path=ppt/slides/slide2.xml><?xml version="1.0" encoding="utf-8"?>
-<p:sld xmlns:a="http://schemas.openxmlformats.org/drawingml/2006/main" xmlns:p="http://schemas.openxmlformats.org/presentationml/2006/main" xmlns:r="http://schemas.openxmlformats.org/officeDocument/2006/relationships">
-  <p:cSld>
-    <p:spTree>
-      <p:nvGrpSpPr>
-        <p:cNvPr id="1" name=""/>
-        <p:cNvGrpSpPr/>
-        <p:nvPr/>
-      </p:nvGrpSpPr>
-      <p:grpSpPr/>
-      <p:sp>
-        <p:nvSpPr>
-          <p:cNvPr id="2" name="Rectangle 1"/>
-          <p:cNvSpPr/>
+              <a:t>LA SOLUCIÓN</a:t>
+            </a:r>
+          </a:p>
+        </p:txBody>
+      </p:sp>
+      <p:sp>
+        <p:nvSpPr>
+          <p:cNvPr id="4" name="TextBox 3"/>
+          <p:cNvSpPr txBox="1"/>
           <p:nvPr/>
         </p:nvSpPr>
         <p:spPr>
           <a:xfrm>
-            <a:off x="0" y="0"/>
-            <a:ext cx="12192000" cy="6858000"/>
+            <a:off x="822960" y="1188720"/>
+            <a:ext cx="10546080" cy="1097280"/>
           </a:xfrm>
           <a:prstGeom prst="rect">
             <a:avLst/>
           </a:prstGeom>
+          <a:noFill/>
+        </p:spPr>
+        <p:txBody>
+          <a:bodyPr wrap="square">
+            <a:spAutoFit/>
+          </a:bodyPr>
+          <a:lstStyle/>
+          <a:p>
+            <a:pPr algn="l"/>
+            <a:r>
+              <a:rPr sz="4400" b="1" i="0">
+                <a:solidFill>
+                  <a:srgbClr val="141413"/>
+                </a:solidFill>
+                <a:latin typeface="Fredoka"/>
+              </a:rPr>
+              <a:t>La vas a ver funcionar, en vivo.</a:t>
+            </a:r>
+          </a:p>
+        </p:txBody>
+      </p:sp>
+      <p:sp>
+        <p:nvSpPr>
+          <p:cNvPr id="5" name="Rounded Rectangle 4"/>
+          <p:cNvSpPr/>
+          <p:nvPr/>
+        </p:nvSpPr>
+        <p:spPr>
+          <a:xfrm>
+            <a:off x="1188720" y="2834640"/>
+            <a:ext cx="9814560" cy="1097280"/>
+          </a:xfrm>
+          <a:prstGeom prst="roundRect">
+            <a:avLst>
+              <a:gd name="adj" fmla="val 18000"/>
+            </a:avLst>
+          </a:prstGeom>
           <a:solidFill>
-            <a:srgbClr val="141413"/>
+            <a:srgbClr val="FFFFFF"/>
           </a:solidFill>
-          <a:ln>
-            <a:noFill/>
+          <a:ln w="12700">
+            <a:solidFill>
+              <a:srgbClr val="E0DCD3"/>
+            </a:solidFill>
           </a:ln>
           <a:effectLst/>
         </p:spPr>
@@ -4742,155 +4448,26 @@
           <a:lstStyle/>
           <a:p>
             <a:pPr algn="ctr"/>
-          </a:p>
-        </p:txBody>
-      </p:sp>
-      <p:sp>
-        <p:nvSpPr>
-          <p:cNvPr id="3" name="TextBox 2"/>
-          <p:cNvSpPr txBox="1"/>
-          <p:nvPr/>
-        </p:nvSpPr>
-        <p:spPr>
-          <a:xfrm>
-            <a:off x="822960" y="1005840"/>
-            <a:ext cx="10500000" cy="2194560"/>
-          </a:xfrm>
-          <a:prstGeom prst="rect">
-            <a:avLst/>
-          </a:prstGeom>
-          <a:noFill/>
-        </p:spPr>
-        <p:txBody>
-          <a:bodyPr wrap="square" anchor="t" lIns="0" rIns="0" tIns="0" bIns="0">
-            <a:spAutoFit/>
-          </a:bodyPr>
-          <a:lstStyle/>
-          <a:p>
-            <a:pPr algn="l">
-              <a:lnSpc>
-                <a:spcPct val="102000"/>
-              </a:lnSpc>
-              <a:spcBef>
-                <a:spcPts val="0"/>
-              </a:spcBef>
-              <a:spcAft>
-                <a:spcPts val="0"/>
-              </a:spcAft>
-            </a:pPr>
-            <a:r>
-              <a:rPr sz="6000" b="1" i="0">
-                <a:solidFill>
-                  <a:srgbClr val="FFFFFF"/>
-                </a:solidFill>
-                <a:latin typeface="Fredoka"/>
-              </a:rPr>
-              <a:t>El registro le cuesta la</a:t>
-            </a:r>
-          </a:p>
-          <a:p>
-            <a:pPr algn="l">
-              <a:lnSpc>
-                <a:spcPct val="102000"/>
-              </a:lnSpc>
-              <a:spcBef>
-                <a:spcPts val="0"/>
-              </a:spcBef>
-              <a:spcAft>
-                <a:spcPts val="0"/>
-              </a:spcAft>
-            </a:pPr>
-            <a:r>
-              <a:rPr sz="6000" b="1" i="0">
-                <a:solidFill>
-                  <a:srgbClr val="FFFFFF"/>
-                </a:solidFill>
-                <a:latin typeface="Fredoka"/>
-              </a:rPr>
-              <a:t>siguiente venta.</a:t>
-            </a:r>
-          </a:p>
-        </p:txBody>
-      </p:sp>
-      <p:sp>
-        <p:nvSpPr>
-          <p:cNvPr id="4" name="TextBox 3"/>
-          <p:cNvSpPr txBox="1"/>
-          <p:nvPr/>
-        </p:nvSpPr>
-        <p:spPr>
-          <a:xfrm>
-            <a:off x="868680" y="3931920"/>
-            <a:ext cx="9000000" cy="1280160"/>
-          </a:xfrm>
-          <a:prstGeom prst="rect">
-            <a:avLst/>
-          </a:prstGeom>
-          <a:noFill/>
-        </p:spPr>
-        <p:txBody>
-          <a:bodyPr wrap="square" anchor="t" lIns="0" rIns="0" tIns="0" bIns="0">
-            <a:spAutoFit/>
-          </a:bodyPr>
-          <a:lstStyle/>
-          <a:p>
-            <a:pPr algn="l">
-              <a:lnSpc>
-                <a:spcPct val="125000"/>
-              </a:lnSpc>
-              <a:spcBef>
-                <a:spcPts val="0"/>
-              </a:spcBef>
-              <a:spcAft>
-                <a:spcPts val="0"/>
-              </a:spcAft>
-            </a:pPr>
-            <a:r>
-              <a:rPr sz="2000" b="0" i="0">
-                <a:solidFill>
-                  <a:srgbClr val="C7C5C0"/>
-                </a:solidFill>
-                <a:latin typeface="Inter"/>
-              </a:rPr>
-              <a:t>Flujo de clientes impredecible. Un registro de más de unos segundos compite directamente con atender a quien llega después, y siempre gana la siguiente venta.</a:t>
-            </a:r>
-          </a:p>
-        </p:txBody>
-      </p:sp>
-    </p:spTree>
-  </p:cSld>
-  <p:clrMapOvr>
-    <a:masterClrMapping/>
-  </p:clrMapOvr>
-</p:sld>
-</file>
-
-<file path=ppt/slides/slide3.xml><?xml version="1.0" encoding="utf-8"?>
-<p:sld xmlns:a="http://schemas.openxmlformats.org/drawingml/2006/main" xmlns:p="http://schemas.openxmlformats.org/presentationml/2006/main" xmlns:r="http://schemas.openxmlformats.org/officeDocument/2006/relationships">
-  <p:cSld>
-    <p:spTree>
-      <p:nvGrpSpPr>
-        <p:cNvPr id="1" name=""/>
-        <p:cNvGrpSpPr/>
-        <p:nvPr/>
-      </p:nvGrpSpPr>
-      <p:grpSpPr/>
-      <p:sp>
-        <p:nvSpPr>
-          <p:cNvPr id="2" name="Rectangle 1"/>
+            <a:endParaRPr/>
+          </a:p>
+        </p:txBody>
+      </p:sp>
+      <p:sp>
+        <p:nvSpPr>
+          <p:cNvPr id="6" name="Oval 5"/>
           <p:cNvSpPr/>
           <p:nvPr/>
         </p:nvSpPr>
         <p:spPr>
           <a:xfrm>
-            <a:off x="0" y="0"/>
-            <a:ext cx="12192000" cy="6858000"/>
-          </a:xfrm>
-          <a:prstGeom prst="rect">
+            <a:off x="1462680" y="3162300"/>
+            <a:ext cx="137160" cy="137160"/>
+          </a:xfrm>
+          <a:prstGeom prst="ellipse">
             <a:avLst/>
           </a:prstGeom>
           <a:solidFill>
-            <a:srgbClr val="FAF9F5"/>
+            <a:srgbClr val="E05A47"/>
           </a:solidFill>
           <a:ln>
             <a:noFill/>
@@ -4916,388 +4493,26 @@
           <a:lstStyle/>
           <a:p>
             <a:pPr algn="ctr"/>
-          </a:p>
-        </p:txBody>
-      </p:sp>
-      <p:sp>
-        <p:nvSpPr>
-          <p:cNvPr id="3" name="TextBox 2"/>
-          <p:cNvSpPr txBox="1"/>
-          <p:nvPr/>
-        </p:nvSpPr>
-        <p:spPr>
-          <a:xfrm>
-            <a:off x="822960" y="411480"/>
-            <a:ext cx="10546080" cy="1400000"/>
-          </a:xfrm>
-          <a:prstGeom prst="rect">
-            <a:avLst/>
-          </a:prstGeom>
-          <a:noFill/>
-        </p:spPr>
-        <p:txBody>
-          <a:bodyPr wrap="square" anchor="t" lIns="0" rIns="0" tIns="0" bIns="0">
-            <a:spAutoFit/>
-          </a:bodyPr>
-          <a:lstStyle/>
-          <a:p>
-            <a:pPr algn="l">
-              <a:lnSpc>
-                <a:spcPct val="104000"/>
-              </a:lnSpc>
-              <a:spcBef>
-                <a:spcPts val="0"/>
-              </a:spcBef>
-              <a:spcAft>
-                <a:spcPts val="0"/>
-              </a:spcAft>
-            </a:pPr>
-            <a:r>
-              <a:rPr sz="4400" b="1" i="0">
-                <a:solidFill>
-                  <a:srgbClr val="141413"/>
-                </a:solidFill>
-                <a:latin typeface="Fredoka"/>
-              </a:rPr>
-              <a:t>Así se ve hoy,</a:t>
-            </a:r>
-          </a:p>
-          <a:p>
-            <a:pPr algn="l">
-              <a:lnSpc>
-                <a:spcPct val="104000"/>
-              </a:lnSpc>
-              <a:spcBef>
-                <a:spcPts val="0"/>
-              </a:spcBef>
-              <a:spcAft>
-                <a:spcPts val="0"/>
-              </a:spcAft>
-            </a:pPr>
-            <a:r>
-              <a:rPr sz="4400" b="1" i="0">
-                <a:solidFill>
-                  <a:srgbClr val="141413"/>
-                </a:solidFill>
-                <a:latin typeface="Fredoka"/>
-              </a:rPr>
-              <a:t>y en menos de 3 segundos.</a:t>
-            </a:r>
-          </a:p>
-        </p:txBody>
-      </p:sp>
-      <p:sp>
-        <p:nvSpPr>
-          <p:cNvPr id="4" name="TextBox 3"/>
-          <p:cNvSpPr txBox="1"/>
-          <p:nvPr/>
-        </p:nvSpPr>
-        <p:spPr>
-          <a:xfrm>
-            <a:off x="868680" y="1800000"/>
-            <a:ext cx="10230000" cy="500000"/>
-          </a:xfrm>
-          <a:prstGeom prst="rect">
-            <a:avLst/>
-          </a:prstGeom>
-          <a:noFill/>
-        </p:spPr>
-        <p:txBody>
-          <a:bodyPr wrap="square" anchor="t" lIns="0" rIns="0" tIns="0" bIns="0">
-            <a:spAutoFit/>
-          </a:bodyPr>
-          <a:lstStyle/>
-          <a:p>
-            <a:pPr algn="l">
-              <a:lnSpc>
-                <a:spcPct val="120000"/>
-              </a:lnSpc>
-              <a:spcBef>
-                <a:spcPts val="0"/>
-              </a:spcBef>
-              <a:spcAft>
-                <a:spcPts val="0"/>
-              </a:spcAft>
-            </a:pPr>
-            <a:r>
-              <a:rPr sz="1600" b="0" i="0">
-                <a:solidFill>
-                  <a:srgbClr val="6B6B67"/>
-                </a:solidFill>
-                <a:latin typeface="Inter"/>
-              </a:rPr>
-              <a:t>Prototipo real, funcional, probado con Ana. Un toque por producto: el total se arma solo, en el momento exacto de la venta.</a:t>
-            </a:r>
-          </a:p>
-        </p:txBody>
-      </p:sp>
-      <p:sp>
-        <p:nvSpPr>
-          <p:cNvPr id="5" name="TextBox 4"/>
-          <p:cNvSpPr txBox="1"/>
-          <p:nvPr/>
-        </p:nvSpPr>
-        <p:spPr>
-          <a:xfrm>
-            <a:off x="822960" y="2540000"/>
-            <a:ext cx="4498217" cy="280000"/>
-          </a:xfrm>
-          <a:prstGeom prst="rect">
-            <a:avLst/>
-          </a:prstGeom>
-          <a:noFill/>
-        </p:spPr>
-        <p:txBody>
-          <a:bodyPr wrap="square" anchor="t" lIns="0" rIns="0" tIns="0" bIns="0">
-            <a:spAutoFit/>
-          </a:bodyPr>
-          <a:lstStyle/>
-          <a:p>
-            <a:pPr algn="ctr">
-              <a:spcBef>
-                <a:spcPts val="0"/>
-              </a:spcBef>
-              <a:spcAft>
-                <a:spcPts val="0"/>
-              </a:spcAft>
-            </a:pPr>
-            <a:r>
-              <a:rPr sz="1300" b="1" i="0">
-                <a:solidFill>
-                  <a:srgbClr val="C13F26"/>
-                </a:solidFill>
-                <a:latin typeface="Inter"/>
-              </a:rPr>
-              <a:t>A N T E S</a:t>
-            </a:r>
-          </a:p>
-        </p:txBody>
-      </p:sp>
-      <p:sp>
-        <p:nvSpPr>
-          <p:cNvPr id="6" name="TextBox 5"/>
-          <p:cNvSpPr txBox="1"/>
-          <p:nvPr/>
-        </p:nvSpPr>
-        <p:spPr>
-          <a:xfrm>
-            <a:off x="5971177" y="2540000"/>
-            <a:ext cx="5397860" cy="280000"/>
-          </a:xfrm>
-          <a:prstGeom prst="rect">
-            <a:avLst/>
-          </a:prstGeom>
-          <a:noFill/>
-        </p:spPr>
-        <p:txBody>
-          <a:bodyPr wrap="square" anchor="t" lIns="0" rIns="0" tIns="0" bIns="0">
-            <a:spAutoFit/>
-          </a:bodyPr>
-          <a:lstStyle/>
-          <a:p>
-            <a:pPr algn="ctr">
-              <a:spcBef>
-                <a:spcPts val="0"/>
-              </a:spcBef>
-              <a:spcAft>
-                <a:spcPts val="0"/>
-              </a:spcAft>
-            </a:pPr>
-            <a:r>
-              <a:rPr sz="1300" b="1" i="0">
-                <a:solidFill>
-                  <a:srgbClr val="C13F26"/>
-                </a:solidFill>
-                <a:latin typeface="Inter"/>
-              </a:rPr>
-              <a:t>D E S P U É S</a:t>
-            </a:r>
-          </a:p>
-        </p:txBody>
-      </p:sp>
-      <p:pic>
-        <p:nvPicPr>
-          <p:cNvPr id="7" name="Picture 6" descr="slide3-home-crop.png"/>
-          <p:cNvPicPr>
-            <a:picLocks noChangeAspect="1"/>
-          </p:cNvPicPr>
-          <p:nvPr/>
-        </p:nvPicPr>
-        <p:blipFill>
-          <a:blip r:embed="rId2"/>
-          <a:stretch>
-            <a:fillRect/>
-          </a:stretch>
-        </p:blipFill>
-        <p:spPr>
-          <a:xfrm>
-            <a:off x="822960" y="2860000"/>
-            <a:ext cx="4498217" cy="3138291"/>
-          </a:xfrm>
-          <a:prstGeom prst="rect">
-            <a:avLst/>
-          </a:prstGeom>
-          <a:effectLst>
-            <a:outerShdw blurRad="90000" dist="30000" dir="5400000" rotWithShape="0">
-              <a:srgbClr val="000000">
-                <a:alpha val="68000"/>
-              </a:srgbClr>
-            </a:outerShdw>
-          </a:effectLst>
-        </p:spPr>
-      </p:pic>
-      <p:pic>
-        <p:nvPicPr>
-          <p:cNvPr id="8" name="Picture 7" descr="slide4-selling-zoom.png"/>
-          <p:cNvPicPr>
-            <a:picLocks noChangeAspect="1"/>
-          </p:cNvPicPr>
-          <p:nvPr/>
-        </p:nvPicPr>
-        <p:blipFill>
-          <a:blip r:embed="rId3"/>
-          <a:stretch>
-            <a:fillRect/>
-          </a:stretch>
-        </p:blipFill>
-        <p:spPr>
-          <a:xfrm>
-            <a:off x="5971177" y="2860000"/>
-            <a:ext cx="5397860" cy="3138291"/>
-          </a:xfrm>
-          <a:prstGeom prst="rect">
-            <a:avLst/>
-          </a:prstGeom>
-          <a:effectLst>
-            <a:outerShdw blurRad="90000" dist="30000" dir="5400000" rotWithShape="0">
-              <a:srgbClr val="000000">
-                <a:alpha val="68000"/>
-              </a:srgbClr>
-            </a:outerShdw>
-          </a:effectLst>
-        </p:spPr>
-      </p:pic>
-      <p:sp>
-        <p:nvSpPr>
-          <p:cNvPr id="9" name="TextBox 8"/>
-          <p:cNvSpPr txBox="1"/>
-          <p:nvPr/>
-        </p:nvSpPr>
-        <p:spPr>
-          <a:xfrm>
-            <a:off x="5346177" y="4169145"/>
-            <a:ext cx="600000" cy="420000"/>
-          </a:xfrm>
-          <a:prstGeom prst="rect">
-            <a:avLst/>
-          </a:prstGeom>
-          <a:noFill/>
-        </p:spPr>
-        <p:txBody>
-          <a:bodyPr wrap="square" anchor="t" lIns="0" rIns="0" tIns="0" bIns="0">
-            <a:spAutoFit/>
-          </a:bodyPr>
-          <a:lstStyle/>
-          <a:p>
-            <a:pPr algn="ctr">
-              <a:spcBef>
-                <a:spcPts val="0"/>
-              </a:spcBef>
-              <a:spcAft>
-                <a:spcPts val="0"/>
-              </a:spcAft>
-            </a:pPr>
-            <a:r>
-              <a:rPr sz="4000" b="1" i="0">
-                <a:solidFill>
-                  <a:srgbClr val="C13F26"/>
-                </a:solidFill>
-                <a:latin typeface="Fredoka"/>
-              </a:rPr>
-              <a:t>→</a:t>
-            </a:r>
-          </a:p>
-        </p:txBody>
-      </p:sp>
-      <p:sp>
-        <p:nvSpPr>
-          <p:cNvPr id="10" name="TextBox 9"/>
-          <p:cNvSpPr txBox="1"/>
-          <p:nvPr/>
-        </p:nvSpPr>
-        <p:spPr>
-          <a:xfrm>
-            <a:off x="5246177" y="4599145"/>
-            <a:ext cx="800000" cy="280000"/>
-          </a:xfrm>
-          <a:prstGeom prst="rect">
-            <a:avLst/>
-          </a:prstGeom>
-          <a:noFill/>
-        </p:spPr>
-        <p:txBody>
-          <a:bodyPr wrap="square" anchor="t" lIns="0" rIns="0" tIns="0" bIns="0">
-            <a:spAutoFit/>
-          </a:bodyPr>
-          <a:lstStyle/>
-          <a:p>
-            <a:pPr algn="ctr">
-              <a:spcBef>
-                <a:spcPts val="0"/>
-              </a:spcBef>
-              <a:spcAft>
-                <a:spcPts val="0"/>
-              </a:spcAft>
-            </a:pPr>
-            <a:r>
-              <a:rPr sz="1200" b="1" i="0">
-                <a:solidFill>
-                  <a:srgbClr val="6B6B67"/>
-                </a:solidFill>
-                <a:latin typeface="Inter"/>
-              </a:rPr>
-              <a:t>1 toque</a:t>
-            </a:r>
-          </a:p>
-        </p:txBody>
-      </p:sp>
-    </p:spTree>
-  </p:cSld>
-  <p:clrMapOvr>
-    <a:masterClrMapping/>
-  </p:clrMapOvr>
-  <p:transition spd="med">
-    <p:fade/>
-  </p:transition>
-</p:sld>
-</file>
-
-<file path=ppt/slides/slide4.xml><?xml version="1.0" encoding="utf-8"?>
-<p:sld xmlns:a="http://schemas.openxmlformats.org/drawingml/2006/main" xmlns:p="http://schemas.openxmlformats.org/presentationml/2006/main" xmlns:r="http://schemas.openxmlformats.org/officeDocument/2006/relationships">
-  <p:cSld>
-    <p:spTree>
-      <p:nvGrpSpPr>
-        <p:cNvPr id="1" name=""/>
-        <p:cNvGrpSpPr/>
-        <p:nvPr/>
-      </p:nvGrpSpPr>
-      <p:grpSpPr/>
-      <p:sp>
-        <p:nvSpPr>
-          <p:cNvPr id="2" name="Rectangle 1"/>
+            <a:endParaRPr/>
+          </a:p>
+        </p:txBody>
+      </p:sp>
+      <p:sp>
+        <p:nvSpPr>
+          <p:cNvPr id="7" name="Oval 6"/>
           <p:cNvSpPr/>
           <p:nvPr/>
         </p:nvSpPr>
         <p:spPr>
           <a:xfrm>
-            <a:off x="0" y="0"/>
-            <a:ext cx="12192000" cy="6858000"/>
-          </a:xfrm>
-          <a:prstGeom prst="rect">
+            <a:off x="1737000" y="3162300"/>
+            <a:ext cx="137160" cy="137160"/>
+          </a:xfrm>
+          <a:prstGeom prst="ellipse">
             <a:avLst/>
           </a:prstGeom>
           <a:solidFill>
-            <a:srgbClr val="141413"/>
+            <a:srgbClr val="E8B44A"/>
           </a:solidFill>
           <a:ln>
             <a:noFill/>
@@ -5323,335 +4538,26 @@
           <a:lstStyle/>
           <a:p>
             <a:pPr algn="ctr"/>
-          </a:p>
-        </p:txBody>
-      </p:sp>
-      <p:sp>
-        <p:nvSpPr>
-          <p:cNvPr id="3" name="TextBox 2"/>
-          <p:cNvSpPr txBox="1"/>
-          <p:nvPr/>
-        </p:nvSpPr>
-        <p:spPr>
-          <a:xfrm>
-            <a:off x="868680" y="502920"/>
-            <a:ext cx="6500000" cy="640080"/>
-          </a:xfrm>
-          <a:prstGeom prst="rect">
-            <a:avLst/>
-          </a:prstGeom>
-          <a:noFill/>
-        </p:spPr>
-        <p:txBody>
-          <a:bodyPr wrap="square" anchor="t" lIns="0" rIns="0" tIns="0" bIns="0">
-            <a:spAutoFit/>
-          </a:bodyPr>
-          <a:lstStyle/>
-          <a:p>
-            <a:pPr algn="l">
-              <a:spcBef>
-                <a:spcPts val="0"/>
-              </a:spcBef>
-              <a:spcAft>
-                <a:spcPts val="0"/>
-              </a:spcAft>
-            </a:pPr>
-            <a:r>
-              <a:rPr sz="3000" b="1" i="0">
-                <a:solidFill>
-                  <a:srgbClr val="FFFFFF"/>
-                </a:solidFill>
-                <a:latin typeface="Fredoka"/>
-              </a:rPr>
-              <a:t>Y queda guardada.</a:t>
-            </a:r>
-          </a:p>
-        </p:txBody>
-      </p:sp>
-      <p:sp>
-        <p:nvSpPr>
-          <p:cNvPr id="4" name="TextBox 3"/>
-          <p:cNvSpPr txBox="1"/>
-          <p:nvPr/>
-        </p:nvSpPr>
-        <p:spPr>
-          <a:xfrm>
-            <a:off x="868680" y="1097280"/>
-            <a:ext cx="6200000" cy="548640"/>
-          </a:xfrm>
-          <a:prstGeom prst="rect">
-            <a:avLst/>
-          </a:prstGeom>
-          <a:noFill/>
-        </p:spPr>
-        <p:txBody>
-          <a:bodyPr wrap="square" anchor="t" lIns="0" rIns="0" tIns="0" bIns="0">
-            <a:spAutoFit/>
-          </a:bodyPr>
-          <a:lstStyle/>
-          <a:p>
-            <a:pPr algn="l">
-              <a:lnSpc>
-                <a:spcPct val="120000"/>
-              </a:lnSpc>
-              <a:spcBef>
-                <a:spcPts val="0"/>
-              </a:spcBef>
-              <a:spcAft>
-                <a:spcPts val="0"/>
-              </a:spcAft>
-            </a:pPr>
-            <a:r>
-              <a:rPr sz="1400" b="0" i="0">
-                <a:solidFill>
-                  <a:srgbClr val="C7C5C0"/>
-                </a:solidFill>
-                <a:latin typeface="Inter"/>
-              </a:rPr>
-              <a:t>Nunca más se pierde el registro de una venta, aunque llegue el siguiente cliente sin avisar.</a:t>
-            </a:r>
-          </a:p>
-        </p:txBody>
-      </p:sp>
-      <p:sp>
-        <p:nvSpPr>
-          <p:cNvPr id="5" name="TextBox 4"/>
-          <p:cNvSpPr txBox="1"/>
-          <p:nvPr/>
-        </p:nvSpPr>
-        <p:spPr>
-          <a:xfrm>
-            <a:off x="0" y="2331720"/>
-            <a:ext cx="12192000" cy="502920"/>
-          </a:xfrm>
-          <a:prstGeom prst="rect">
-            <a:avLst/>
-          </a:prstGeom>
-          <a:noFill/>
-        </p:spPr>
-        <p:txBody>
-          <a:bodyPr wrap="square" anchor="t" lIns="0" rIns="0" tIns="0" bIns="0">
-            <a:spAutoFit/>
-          </a:bodyPr>
-          <a:lstStyle/>
-          <a:p>
-            <a:pPr algn="ctr">
-              <a:spcBef>
-                <a:spcPts val="0"/>
-              </a:spcBef>
-              <a:spcAft>
-                <a:spcPts val="0"/>
-              </a:spcAft>
-            </a:pPr>
-            <a:r>
-              <a:rPr sz="2400" b="1" i="0">
-                <a:solidFill>
-                  <a:srgbClr val="FFFFFF"/>
-                </a:solidFill>
-                <a:latin typeface="Inter"/>
-              </a:rPr>
-              <a:t>Venta finalizada  ✓</a:t>
-            </a:r>
-          </a:p>
-        </p:txBody>
-      </p:sp>
-      <p:sp>
-        <p:nvSpPr>
-          <p:cNvPr id="6" name="TextBox 5"/>
-          <p:cNvSpPr txBox="1"/>
-          <p:nvPr/>
-        </p:nvSpPr>
-        <p:spPr>
-          <a:xfrm>
-            <a:off x="0" y="2907792"/>
-            <a:ext cx="12192000" cy="365760"/>
-          </a:xfrm>
-          <a:prstGeom prst="rect">
-            <a:avLst/>
-          </a:prstGeom>
-          <a:noFill/>
-        </p:spPr>
-        <p:txBody>
-          <a:bodyPr wrap="square" anchor="t" lIns="0" rIns="0" tIns="0" bIns="0">
-            <a:spAutoFit/>
-          </a:bodyPr>
-          <a:lstStyle/>
-          <a:p>
-            <a:pPr algn="ctr">
-              <a:spcBef>
-                <a:spcPts val="0"/>
-              </a:spcBef>
-              <a:spcAft>
-                <a:spcPts val="0"/>
-              </a:spcAft>
-            </a:pPr>
-            <a:r>
-              <a:rPr sz="1500" b="1" i="0">
-                <a:solidFill>
-                  <a:srgbClr val="F3D9D1"/>
-                </a:solidFill>
-                <a:latin typeface="Inter"/>
-              </a:rPr>
-              <a:t>T O T A L</a:t>
-            </a:r>
-          </a:p>
-        </p:txBody>
-      </p:sp>
-      <p:sp>
-        <p:nvSpPr>
-          <p:cNvPr id="7" name="TextBox 6"/>
-          <p:cNvSpPr txBox="1"/>
-          <p:nvPr/>
-        </p:nvSpPr>
-        <p:spPr>
-          <a:xfrm>
-            <a:off x="0" y="3246120"/>
-            <a:ext cx="12192000" cy="1828800"/>
-          </a:xfrm>
-          <a:prstGeom prst="rect">
-            <a:avLst/>
-          </a:prstGeom>
-          <a:noFill/>
-        </p:spPr>
-        <p:txBody>
-          <a:bodyPr wrap="square" anchor="t" lIns="0" rIns="0" tIns="0" bIns="0">
-            <a:spAutoFit/>
-          </a:bodyPr>
-          <a:lstStyle/>
-          <a:p>
-            <a:pPr algn="ctr">
-              <a:spcBef>
-                <a:spcPts val="0"/>
-              </a:spcBef>
-              <a:spcAft>
-                <a:spcPts val="0"/>
-              </a:spcAft>
-            </a:pPr>
-            <a:r>
-              <a:rPr sz="15000" b="1" i="0">
-                <a:solidFill>
-                  <a:srgbClr val="C13F26"/>
-                </a:solidFill>
-                <a:latin typeface="Fredoka"/>
-              </a:rPr>
-              <a:t>$540</a:t>
-            </a:r>
-          </a:p>
-        </p:txBody>
-      </p:sp>
-      <p:cxnSp>
-        <p:nvCxnSpPr>
-          <p:cNvPr id="8" name="Connector 7"/>
-          <p:cNvCxnSpPr/>
-          <p:nvPr/>
-        </p:nvCxnSpPr>
-        <p:spPr>
-          <a:xfrm>
-            <a:off x="5184648" y="5349240"/>
-            <a:ext cx="1828800" cy="0"/>
-          </a:xfrm>
-          <a:prstGeom prst="line">
-            <a:avLst/>
-          </a:prstGeom>
-          <a:ln w="15875">
-            <a:solidFill>
-              <a:srgbClr val="CBC7C0"/>
-            </a:solidFill>
-            <a:prstDash val="sysDot"/>
-          </a:ln>
-          <a:effectLst/>
-        </p:spPr>
-        <p:style>
-          <a:lnRef idx="2">
-            <a:schemeClr val="accent1"/>
-          </a:lnRef>
-          <a:fillRef idx="0">
-            <a:schemeClr val="accent1"/>
-          </a:fillRef>
-          <a:effectRef idx="1">
-            <a:schemeClr val="accent1"/>
-          </a:effectRef>
-          <a:fontRef idx="minor">
-            <a:schemeClr val="tx1"/>
-          </a:fontRef>
-        </p:style>
-      </p:cxnSp>
-      <p:sp>
-        <p:nvSpPr>
-          <p:cNvPr id="9" name="TextBox 8"/>
-          <p:cNvSpPr txBox="1"/>
-          <p:nvPr/>
-        </p:nvSpPr>
-        <p:spPr>
-          <a:xfrm>
-            <a:off x="0" y="5532120"/>
-            <a:ext cx="12192000" cy="502920"/>
-          </a:xfrm>
-          <a:prstGeom prst="rect">
-            <a:avLst/>
-          </a:prstGeom>
-          <a:noFill/>
-        </p:spPr>
-        <p:txBody>
-          <a:bodyPr wrap="square" anchor="t" lIns="0" rIns="0" tIns="0" bIns="0">
-            <a:spAutoFit/>
-          </a:bodyPr>
-          <a:lstStyle/>
-          <a:p>
-            <a:pPr algn="ctr">
-              <a:spcBef>
-                <a:spcPts val="0"/>
-              </a:spcBef>
-              <a:spcAft>
-                <a:spcPts val="0"/>
-              </a:spcAft>
-            </a:pPr>
-            <a:r>
-              <a:rPr sz="2600" b="1" i="0">
-                <a:solidFill>
-                  <a:srgbClr val="FFFFFF"/>
-                </a:solidFill>
-                <a:latin typeface="Fredoka"/>
-              </a:rPr>
-              <a:t>Ropa Aurora</a:t>
-            </a:r>
-          </a:p>
-        </p:txBody>
-      </p:sp>
-    </p:spTree>
-  </p:cSld>
-  <p:clrMapOvr>
-    <a:masterClrMapping/>
-  </p:clrMapOvr>
-</p:sld>
-</file>
-
-<file path=ppt/slides/slide5.xml><?xml version="1.0" encoding="utf-8"?>
-<p:sld xmlns:a="http://schemas.openxmlformats.org/drawingml/2006/main" xmlns:p="http://schemas.openxmlformats.org/presentationml/2006/main" xmlns:r="http://schemas.openxmlformats.org/officeDocument/2006/relationships">
-  <p:cSld>
-    <p:spTree>
-      <p:nvGrpSpPr>
-        <p:cNvPr id="1" name=""/>
-        <p:cNvGrpSpPr/>
-        <p:nvPr/>
-      </p:nvGrpSpPr>
-      <p:grpSpPr/>
-      <p:sp>
-        <p:nvSpPr>
-          <p:cNvPr id="2" name="Rectangle 1"/>
+            <a:endParaRPr/>
+          </a:p>
+        </p:txBody>
+      </p:sp>
+      <p:sp>
+        <p:nvSpPr>
+          <p:cNvPr id="8" name="Oval 7"/>
           <p:cNvSpPr/>
           <p:nvPr/>
         </p:nvSpPr>
         <p:spPr>
           <a:xfrm>
-            <a:off x="0" y="0"/>
-            <a:ext cx="12192000" cy="6858000"/>
-          </a:xfrm>
-          <a:prstGeom prst="rect">
+            <a:off x="2011320" y="3162300"/>
+            <a:ext cx="137160" cy="137160"/>
+          </a:xfrm>
+          <a:prstGeom prst="ellipse">
             <a:avLst/>
           </a:prstGeom>
           <a:solidFill>
-            <a:srgbClr val="C13F26"/>
+            <a:srgbClr val="6FA86B"/>
           </a:solidFill>
           <a:ln>
             <a:noFill/>
@@ -5677,19 +4583,20 @@
           <a:lstStyle/>
           <a:p>
             <a:pPr algn="ctr"/>
-          </a:p>
-        </p:txBody>
-      </p:sp>
-      <p:sp>
-        <p:nvSpPr>
-          <p:cNvPr id="3" name="TextBox 2"/>
+            <a:endParaRPr/>
+          </a:p>
+        </p:txBody>
+      </p:sp>
+      <p:sp>
+        <p:nvSpPr>
+          <p:cNvPr id="9" name="TextBox 8"/>
           <p:cNvSpPr txBox="1"/>
           <p:nvPr/>
         </p:nvSpPr>
         <p:spPr>
           <a:xfrm>
-            <a:off x="822960" y="411480"/>
-            <a:ext cx="6583680" cy="2286000"/>
+            <a:off x="2377440" y="3017520"/>
+            <a:ext cx="8351520" cy="731520"/>
           </a:xfrm>
           <a:prstGeom prst="rect">
             <a:avLst/>
@@ -5697,41 +4604,34 @@
           <a:noFill/>
         </p:spPr>
         <p:txBody>
-          <a:bodyPr wrap="square" anchor="t" lIns="0" rIns="0" tIns="0" bIns="0">
+          <a:bodyPr wrap="square" anchor="ctr">
             <a:spAutoFit/>
           </a:bodyPr>
           <a:lstStyle/>
           <a:p>
-            <a:pPr algn="l">
-              <a:spcBef>
-                <a:spcPts val="0"/>
-              </a:spcBef>
-              <a:spcAft>
-                <a:spcPts val="0"/>
-              </a:spcAft>
-            </a:pPr>
-            <a:r>
-              <a:rPr sz="14000" b="1" i="0">
-                <a:solidFill>
-                  <a:srgbClr val="FFFFFF"/>
+            <a:pPr algn="l"/>
+            <a:r>
+              <a:rPr sz="3600" b="1" i="0">
+                <a:solidFill>
+                  <a:srgbClr val="C13F26"/>
                 </a:solidFill>
                 <a:latin typeface="Fredoka"/>
               </a:rPr>
-              <a:t>0.34%</a:t>
-            </a:r>
-          </a:p>
-        </p:txBody>
-      </p:sp>
-      <p:sp>
-        <p:nvSpPr>
-          <p:cNvPr id="4" name="TextBox 3"/>
+              <a:t>demo.nahui.app</a:t>
+            </a:r>
+          </a:p>
+        </p:txBody>
+      </p:sp>
+      <p:sp>
+        <p:nvSpPr>
+          <p:cNvPr id="10" name="TextBox 9"/>
           <p:cNvSpPr txBox="1"/>
           <p:nvPr/>
         </p:nvSpPr>
         <p:spPr>
           <a:xfrm>
-            <a:off x="868680" y="2999232"/>
-            <a:ext cx="6583680" cy="457200"/>
+            <a:off x="822960" y="4297680"/>
+            <a:ext cx="10546080" cy="411480"/>
           </a:xfrm>
           <a:prstGeom prst="rect">
             <a:avLst/>
@@ -5739,41 +4639,34 @@
           <a:noFill/>
         </p:spPr>
         <p:txBody>
-          <a:bodyPr wrap="square" anchor="t" lIns="0" rIns="0" tIns="0" bIns="0">
+          <a:bodyPr wrap="square">
             <a:spAutoFit/>
           </a:bodyPr>
           <a:lstStyle/>
           <a:p>
-            <a:pPr algn="l">
-              <a:spcBef>
-                <a:spcPts val="0"/>
-              </a:spcBef>
-              <a:spcAft>
-                <a:spcPts val="0"/>
-              </a:spcAft>
-            </a:pPr>
-            <a:r>
-              <a:rPr sz="2200" b="0" i="0">
-                <a:solidFill>
-                  <a:srgbClr val="F3D9D1"/>
+            <a:pPr algn="l"/>
+            <a:r>
+              <a:rPr sz="1800" b="0" i="0">
+                <a:solidFill>
+                  <a:srgbClr val="6B6B6B"/>
                 </a:solidFill>
                 <a:latin typeface="Inter"/>
               </a:rPr>
-              <a:t>2 de 583 visitantes probaron el demo</a:t>
-            </a:r>
-          </a:p>
-        </p:txBody>
-      </p:sp>
-      <p:sp>
-        <p:nvSpPr>
-          <p:cNvPr id="5" name="TextBox 4"/>
+              <a:t>Demo en vivo — nada pregrabado.</a:t>
+            </a:r>
+          </a:p>
+        </p:txBody>
+      </p:sp>
+      <p:sp>
+        <p:nvSpPr>
+          <p:cNvPr id="11" name="TextBox 10"/>
           <p:cNvSpPr txBox="1"/>
           <p:nvPr/>
         </p:nvSpPr>
         <p:spPr>
           <a:xfrm>
-            <a:off x="8549640" y="594360"/>
-            <a:ext cx="2834640" cy="457200"/>
+            <a:off x="822960" y="4800600"/>
+            <a:ext cx="10546080" cy="640080"/>
           </a:xfrm>
           <a:prstGeom prst="rect">
             <a:avLst/>
@@ -5781,184 +4674,94 @@
           <a:noFill/>
         </p:spPr>
         <p:txBody>
-          <a:bodyPr wrap="square" anchor="t" lIns="0" rIns="0" tIns="0" bIns="0">
+          <a:bodyPr wrap="square">
             <a:spAutoFit/>
           </a:bodyPr>
           <a:lstStyle/>
           <a:p>
-            <a:pPr algn="l">
-              <a:spcBef>
-                <a:spcPts val="0"/>
-              </a:spcBef>
-              <a:spcAft>
-                <a:spcPts val="0"/>
-              </a:spcAft>
-            </a:pPr>
-            <a:r>
-              <a:rPr sz="3200" b="1" i="0">
-                <a:solidFill>
-                  <a:srgbClr val="FFFFFF"/>
-                </a:solidFill>
-                <a:latin typeface="Fredoka"/>
+            <a:pPr algn="l"/>
+            <a:r>
+              <a:rPr sz="1500" b="0" i="0">
+                <a:solidFill>
+                  <a:srgbClr val="6B6B6B"/>
+                </a:solidFill>
+                <a:latin typeface="Inter"/>
               </a:rPr>
-              <a:t>583</a:t>
-            </a:r>
-          </a:p>
-        </p:txBody>
-      </p:sp>
-      <p:sp>
-        <p:nvSpPr>
-          <p:cNvPr id="6" name="TextBox 5"/>
-          <p:cNvSpPr txBox="1"/>
+              <a:t>Cada toque que van a ver ocurre en este momento, en el prototipo real, probado en persona con Ana.</a:t>
+            </a:r>
+          </a:p>
+        </p:txBody>
+      </p:sp>
+    </p:spTree>
+  </p:cSld>
+  <p:clrMapOvr>
+    <a:masterClrMapping/>
+  </p:clrMapOvr>
+</p:sld>
+</file>
+
+<file path=ppt/slides/slide4.xml><?xml version="1.0" encoding="utf-8"?>
+<p:sld xmlns:a="http://schemas.openxmlformats.org/drawingml/2006/main" xmlns:r="http://schemas.openxmlformats.org/officeDocument/2006/relationships" xmlns:p="http://schemas.openxmlformats.org/presentationml/2006/main">
+  <p:cSld>
+    <p:spTree>
+      <p:nvGrpSpPr>
+        <p:cNvPr id="1" name=""/>
+        <p:cNvGrpSpPr/>
+        <p:nvPr/>
+      </p:nvGrpSpPr>
+      <p:grpSpPr>
+        <a:xfrm>
+          <a:off x="0" y="0"/>
+          <a:ext cx="0" cy="0"/>
+          <a:chOff x="0" y="0"/>
+          <a:chExt cx="0" cy="0"/>
+        </a:xfrm>
+      </p:grpSpPr>
+      <p:sp>
+        <p:nvSpPr>
+          <p:cNvPr id="2" name="Rectangle 1"/>
+          <p:cNvSpPr/>
           <p:nvPr/>
         </p:nvSpPr>
         <p:spPr>
           <a:xfrm>
-            <a:off x="8549640" y="1097280"/>
-            <a:ext cx="2834640" cy="365760"/>
+            <a:off x="0" y="0"/>
+            <a:ext cx="12192000" cy="6858000"/>
           </a:xfrm>
           <a:prstGeom prst="rect">
             <a:avLst/>
           </a:prstGeom>
-          <a:noFill/>
-        </p:spPr>
-        <p:txBody>
-          <a:bodyPr wrap="square" anchor="t" lIns="0" rIns="0" tIns="0" bIns="0">
-            <a:spAutoFit/>
-          </a:bodyPr>
-          <a:lstStyle/>
-          <a:p>
-            <a:pPr algn="l">
-              <a:spcBef>
-                <a:spcPts val="0"/>
-              </a:spcBef>
-              <a:spcAft>
-                <a:spcPts val="0"/>
-              </a:spcAft>
-            </a:pPr>
-            <a:r>
-              <a:rPr sz="1300" b="0" i="0">
-                <a:solidFill>
-                  <a:srgbClr val="F3D9D1"/>
-                </a:solidFill>
-                <a:latin typeface="Inter"/>
-              </a:rPr>
-              <a:t>visitantes reales</a:t>
-            </a:r>
-          </a:p>
-        </p:txBody>
-      </p:sp>
-      <p:sp>
-        <p:nvSpPr>
-          <p:cNvPr id="7" name="TextBox 6"/>
-          <p:cNvSpPr txBox="1"/>
-          <p:nvPr/>
-        </p:nvSpPr>
-        <p:spPr>
-          <a:xfrm>
-            <a:off x="8549640" y="1691640"/>
-            <a:ext cx="2834640" cy="457200"/>
-          </a:xfrm>
-          <a:prstGeom prst="rect">
-            <a:avLst/>
-          </a:prstGeom>
-          <a:noFill/>
-        </p:spPr>
-        <p:txBody>
-          <a:bodyPr wrap="square" anchor="t" lIns="0" rIns="0" tIns="0" bIns="0">
-            <a:spAutoFit/>
-          </a:bodyPr>
-          <a:lstStyle/>
-          <a:p>
-            <a:pPr algn="l">
-              <a:spcBef>
-                <a:spcPts val="0"/>
-              </a:spcBef>
-              <a:spcAft>
-                <a:spcPts val="0"/>
-              </a:spcAft>
-            </a:pPr>
-            <a:r>
-              <a:rPr sz="2600" b="1" i="0">
-                <a:solidFill>
-                  <a:srgbClr val="FFFFFF"/>
-                </a:solidFill>
-                <a:latin typeface="Fredoka"/>
-              </a:rPr>
-              <a:t>$569.24 · 731</a:t>
-            </a:r>
-          </a:p>
-        </p:txBody>
-      </p:sp>
-      <p:sp>
-        <p:nvSpPr>
-          <p:cNvPr id="8" name="TextBox 7"/>
-          <p:cNvSpPr txBox="1"/>
-          <p:nvPr/>
-        </p:nvSpPr>
-        <p:spPr>
-          <a:xfrm>
-            <a:off x="8549640" y="2148840"/>
-            <a:ext cx="2834640" cy="548640"/>
-          </a:xfrm>
-          <a:prstGeom prst="rect">
-            <a:avLst/>
-          </a:prstGeom>
-          <a:noFill/>
-        </p:spPr>
-        <p:txBody>
-          <a:bodyPr wrap="square" anchor="t" lIns="0" rIns="0" tIns="0" bIns="0">
-            <a:spAutoFit/>
-          </a:bodyPr>
-          <a:lstStyle/>
-          <a:p>
-            <a:pPr algn="l">
-              <a:lnSpc>
-                <a:spcPct val="115000"/>
-              </a:lnSpc>
-              <a:spcBef>
-                <a:spcPts val="0"/>
-              </a:spcBef>
-              <a:spcAft>
-                <a:spcPts val="0"/>
-              </a:spcAft>
-            </a:pPr>
-            <a:r>
-              <a:rPr sz="1300" b="0" i="0">
-                <a:solidFill>
-                  <a:srgbClr val="F3D9D1"/>
-                </a:solidFill>
-                <a:latin typeface="Inter"/>
-              </a:rPr>
-              <a:t>resultados de la campaña Meta</a:t>
-            </a:r>
-          </a:p>
-        </p:txBody>
-      </p:sp>
-      <p:pic>
-        <p:nvPicPr>
-          <p:cNvPr id="9" name="Picture 8" descr="vercel1-chart.png"/>
-          <p:cNvPicPr>
-            <a:picLocks noChangeAspect="1"/>
-          </p:cNvPicPr>
-          <p:nvPr/>
-        </p:nvPicPr>
-        <p:blipFill>
-          <a:blip r:embed="rId2"/>
-          <a:stretch>
-            <a:fillRect/>
-          </a:stretch>
-        </p:blipFill>
-        <p:spPr>
-          <a:xfrm>
-            <a:off x="1093960" y="3310128"/>
-            <a:ext cx="5040588" cy="1620000"/>
-          </a:xfrm>
-          <a:prstGeom prst="rect">
-            <a:avLst/>
-          </a:prstGeom>
-        </p:spPr>
-      </p:pic>
+          <a:solidFill>
+            <a:srgbClr val="141413"/>
+          </a:solidFill>
+          <a:ln>
+            <a:noFill/>
+          </a:ln>
+          <a:effectLst/>
+        </p:spPr>
+        <p:style>
+          <a:lnRef idx="1">
+            <a:schemeClr val="accent1"/>
+          </a:lnRef>
+          <a:fillRef idx="3">
+            <a:schemeClr val="accent1"/>
+          </a:fillRef>
+          <a:effectRef idx="2">
+            <a:schemeClr val="accent1"/>
+          </a:effectRef>
+          <a:fontRef idx="minor">
+            <a:schemeClr val="lt1"/>
+          </a:fontRef>
+        </p:style>
+        <p:txBody>
+          <a:bodyPr rtlCol="0" anchor="ctr"/>
+          <a:lstStyle/>
+          <a:p>
+            <a:pPr algn="ctr"/>
+            <a:endParaRPr/>
+          </a:p>
+        </p:txBody>
+      </p:sp>
       <p:pic>
         <p:nvPicPr>
           <p:cNvPr id="10" name="Picture 9" descr="vercel2-events.png"/>
@@ -5991,8 +4794,8 @@
         </p:nvSpPr>
         <p:spPr>
           <a:xfrm>
-            <a:off x="868680" y="5138928"/>
-            <a:ext cx="9601200" cy="777240"/>
+            <a:off x="822960" y="411480"/>
+            <a:ext cx="6800000" cy="320000"/>
           </a:xfrm>
           <a:prstGeom prst="rect">
             <a:avLst/>
@@ -6000,30 +4803,20 @@
           <a:noFill/>
         </p:spPr>
         <p:txBody>
-          <a:bodyPr wrap="square" anchor="t" lIns="0" rIns="0" tIns="0" bIns="0">
+          <a:bodyPr wrap="square">
             <a:spAutoFit/>
           </a:bodyPr>
           <a:lstStyle/>
           <a:p>
-            <a:pPr algn="l">
-              <a:lnSpc>
-                <a:spcPct val="108000"/>
-              </a:lnSpc>
-              <a:spcBef>
-                <a:spcPts val="0"/>
-              </a:spcBef>
-              <a:spcAft>
-                <a:spcPts val="0"/>
-              </a:spcAft>
-            </a:pPr>
-            <a:r>
-              <a:rPr sz="2000" b="1" i="0">
-                <a:solidFill>
-                  <a:srgbClr val="FFFFFF"/>
-                </a:solidFill>
-                <a:latin typeface="Fredoka"/>
+            <a:pPr algn="l"/>
+            <a:r>
+              <a:rPr sz="1300" b="1" i="0">
+                <a:solidFill>
+                  <a:srgbClr val="F3D9D1"/>
+                </a:solidFill>
+                <a:latin typeface="Inter"/>
               </a:rPr>
-              <a:t>El alcance funciona. La adopción real todavía no, y no lo descubrí el día 1, sino a mitad de campaña.</a:t>
+              <a:t>LO QUE YA ESTÁ PASANDO</a:t>
             </a:r>
           </a:p>
         </p:txBody>
@@ -6036,8 +4829,8 @@
         </p:nvSpPr>
         <p:spPr>
           <a:xfrm>
-            <a:off x="868680" y="5870448"/>
-            <a:ext cx="9601200" cy="502920"/>
+            <a:off x="822960" y="731520"/>
+            <a:ext cx="6583680" cy="1600200"/>
           </a:xfrm>
           <a:prstGeom prst="rect">
             <a:avLst/>
@@ -6045,30 +4838,347 @@
           <a:noFill/>
         </p:spPr>
         <p:txBody>
-          <a:bodyPr wrap="square" anchor="t" lIns="0" rIns="0" tIns="0" bIns="0">
+          <a:bodyPr wrap="square">
             <a:spAutoFit/>
           </a:bodyPr>
           <a:lstStyle/>
           <a:p>
-            <a:pPr algn="l">
-              <a:lnSpc>
-                <a:spcPct val="110000"/>
-              </a:lnSpc>
-              <a:spcBef>
-                <a:spcPts val="0"/>
-              </a:spcBef>
-              <a:spcAft>
-                <a:spcPts val="0"/>
-              </a:spcAft>
-            </a:pPr>
-            <a:r>
-              <a:rPr sz="1400" b="0" i="0">
-                <a:solidFill>
-                  <a:srgbClr val="FAEEEA"/>
+            <a:pPr algn="l"/>
+            <a:r>
+              <a:rPr sz="9600" b="1" i="0">
+                <a:solidFill>
+                  <a:srgbClr val="FFFFFF"/>
+                </a:solidFill>
+                <a:latin typeface="Fredoka"/>
+              </a:rPr>
+              <a:t>2 de 227</a:t>
+            </a:r>
+          </a:p>
+        </p:txBody>
+      </p:sp>
+      <p:sp>
+        <p:nvSpPr>
+          <p:cNvPr id="13" name="TextBox 12"/>
+          <p:cNvSpPr txBox="1"/>
+          <p:nvPr/>
+        </p:nvSpPr>
+        <p:spPr>
+          <a:xfrm>
+            <a:off x="868680" y="2286000"/>
+            <a:ext cx="6583680" cy="731520"/>
+          </a:xfrm>
+          <a:prstGeom prst="rect">
+            <a:avLst/>
+          </a:prstGeom>
+          <a:noFill/>
+        </p:spPr>
+        <p:txBody>
+          <a:bodyPr wrap="square">
+            <a:spAutoFit/>
+          </a:bodyPr>
+          <a:lstStyle/>
+          <a:p>
+            <a:pPr algn="l"/>
+            <a:r>
+              <a:rPr sz="1500" b="0" i="0">
+                <a:solidFill>
+                  <a:srgbClr val="F3D9D1"/>
                 </a:solidFill>
                 <a:latin typeface="Inter"/>
               </a:rPr>
-              <a:t>De esos 583, solamente 227 llegaron con el recorrido completo midiéndose. Y ni siquiera con eso, la aguja se movió.</a:t>
+              <a:t>llegaron a verificación.</a:t>
+            </a:r>
+          </a:p>
+          <a:p>
+            <a:pPr algn="l"/>
+            <a:r>
+              <a:rPr sz="1500" b="0" i="0">
+                <a:solidFill>
+                  <a:srgbClr val="F3D9D1"/>
+                </a:solidFill>
+                <a:latin typeface="Inter"/>
+              </a:rPr>
+              <a:t>Cero comerciantes externos.</a:t>
+            </a:r>
+          </a:p>
+        </p:txBody>
+      </p:sp>
+      <p:sp>
+        <p:nvSpPr>
+          <p:cNvPr id="14" name="TextBox 13"/>
+          <p:cNvSpPr txBox="1"/>
+          <p:nvPr/>
+        </p:nvSpPr>
+        <p:spPr>
+          <a:xfrm>
+            <a:off x="8549640" y="411480"/>
+            <a:ext cx="2834640" cy="365760"/>
+          </a:xfrm>
+          <a:prstGeom prst="rect">
+            <a:avLst/>
+          </a:prstGeom>
+          <a:noFill/>
+        </p:spPr>
+        <p:txBody>
+          <a:bodyPr wrap="square">
+            <a:spAutoFit/>
+          </a:bodyPr>
+          <a:lstStyle/>
+          <a:p>
+            <a:pPr algn="l"/>
+            <a:r>
+              <a:rPr sz="2400" b="1" i="0">
+                <a:solidFill>
+                  <a:srgbClr val="FFFFFF"/>
+                </a:solidFill>
+                <a:latin typeface="Fredoka"/>
+              </a:rPr>
+              <a:t>~20 mil</a:t>
+            </a:r>
+          </a:p>
+        </p:txBody>
+      </p:sp>
+      <p:sp>
+        <p:nvSpPr>
+          <p:cNvPr id="15" name="TextBox 14"/>
+          <p:cNvSpPr txBox="1"/>
+          <p:nvPr/>
+        </p:nvSpPr>
+        <p:spPr>
+          <a:xfrm>
+            <a:off x="8549640" y="777240"/>
+            <a:ext cx="2834640" cy="594360"/>
+          </a:xfrm>
+          <a:prstGeom prst="rect">
+            <a:avLst/>
+          </a:prstGeom>
+          <a:noFill/>
+        </p:spPr>
+        <p:txBody>
+          <a:bodyPr wrap="square">
+            <a:spAutoFit/>
+          </a:bodyPr>
+          <a:lstStyle/>
+          <a:p>
+            <a:pPr algn="l"/>
+            <a:r>
+              <a:rPr sz="1300" b="0" i="0">
+                <a:solidFill>
+                  <a:srgbClr val="F3D9D1"/>
+                </a:solidFill>
+                <a:latin typeface="Inter"/>
+              </a:rPr>
+              <a:t>personas de alcance</a:t>
+            </a:r>
+          </a:p>
+        </p:txBody>
+      </p:sp>
+      <p:sp>
+        <p:nvSpPr>
+          <p:cNvPr id="16" name="TextBox 15"/>
+          <p:cNvSpPr txBox="1"/>
+          <p:nvPr/>
+        </p:nvSpPr>
+        <p:spPr>
+          <a:xfrm>
+            <a:off x="8549640" y="1417320"/>
+            <a:ext cx="2834640" cy="365760"/>
+          </a:xfrm>
+          <a:prstGeom prst="rect">
+            <a:avLst/>
+          </a:prstGeom>
+          <a:noFill/>
+        </p:spPr>
+        <p:txBody>
+          <a:bodyPr wrap="square">
+            <a:spAutoFit/>
+          </a:bodyPr>
+          <a:lstStyle/>
+          <a:p>
+            <a:pPr algn="l"/>
+            <a:r>
+              <a:rPr sz="2400" b="1" i="0">
+                <a:solidFill>
+                  <a:srgbClr val="FFFFFF"/>
+                </a:solidFill>
+                <a:latin typeface="Fredoka"/>
+              </a:rPr>
+              <a:t>227</a:t>
+            </a:r>
+          </a:p>
+        </p:txBody>
+      </p:sp>
+      <p:sp>
+        <p:nvSpPr>
+          <p:cNvPr id="17" name="TextBox 16"/>
+          <p:cNvSpPr txBox="1"/>
+          <p:nvPr/>
+        </p:nvSpPr>
+        <p:spPr>
+          <a:xfrm>
+            <a:off x="8549640" y="1783080"/>
+            <a:ext cx="2834640" cy="594360"/>
+          </a:xfrm>
+          <a:prstGeom prst="rect">
+            <a:avLst/>
+          </a:prstGeom>
+          <a:noFill/>
+        </p:spPr>
+        <p:txBody>
+          <a:bodyPr wrap="square">
+            <a:spAutoFit/>
+          </a:bodyPr>
+          <a:lstStyle/>
+          <a:p>
+            <a:pPr algn="l"/>
+            <a:r>
+              <a:rPr sz="1300" b="0" i="0">
+                <a:solidFill>
+                  <a:srgbClr val="F3D9D1"/>
+                </a:solidFill>
+                <a:latin typeface="Inter"/>
+              </a:rPr>
+              <a:t>visitantes confirmados (embudo medido desde el 19 ago)</a:t>
+            </a:r>
+          </a:p>
+        </p:txBody>
+      </p:sp>
+      <p:sp>
+        <p:nvSpPr>
+          <p:cNvPr id="18" name="TextBox 17"/>
+          <p:cNvSpPr txBox="1"/>
+          <p:nvPr/>
+        </p:nvSpPr>
+        <p:spPr>
+          <a:xfrm>
+            <a:off x="8549640" y="2423160"/>
+            <a:ext cx="2834640" cy="365760"/>
+          </a:xfrm>
+          <a:prstGeom prst="rect">
+            <a:avLst/>
+          </a:prstGeom>
+          <a:noFill/>
+        </p:spPr>
+        <p:txBody>
+          <a:bodyPr wrap="square">
+            <a:spAutoFit/>
+          </a:bodyPr>
+          <a:lstStyle/>
+          <a:p>
+            <a:pPr algn="l"/>
+            <a:r>
+              <a:rPr sz="2400" b="1" i="0">
+                <a:solidFill>
+                  <a:srgbClr val="FFFFFF"/>
+                </a:solidFill>
+                <a:latin typeface="Fredoka"/>
+              </a:rPr>
+              <a:t>$569 · 731</a:t>
+            </a:r>
+          </a:p>
+        </p:txBody>
+      </p:sp>
+      <p:sp>
+        <p:nvSpPr>
+          <p:cNvPr id="19" name="TextBox 18"/>
+          <p:cNvSpPr txBox="1"/>
+          <p:nvPr/>
+        </p:nvSpPr>
+        <p:spPr>
+          <a:xfrm>
+            <a:off x="8549640" y="2788920"/>
+            <a:ext cx="2834640" cy="594360"/>
+          </a:xfrm>
+          <a:prstGeom prst="rect">
+            <a:avLst/>
+          </a:prstGeom>
+          <a:noFill/>
+        </p:spPr>
+        <p:txBody>
+          <a:bodyPr wrap="square">
+            <a:spAutoFit/>
+          </a:bodyPr>
+          <a:lstStyle/>
+          <a:p>
+            <a:pPr algn="l"/>
+            <a:r>
+              <a:rPr sz="1300" b="0" i="0">
+                <a:solidFill>
+                  <a:srgbClr val="F3D9D1"/>
+                </a:solidFill>
+                <a:latin typeface="Inter"/>
+              </a:rPr>
+              <a:t>gastado · resultados de la campaña Meta</a:t>
+            </a:r>
+          </a:p>
+        </p:txBody>
+      </p:sp>
+      <p:sp>
+        <p:nvSpPr>
+          <p:cNvPr id="20" name="TextBox 19"/>
+          <p:cNvSpPr txBox="1"/>
+          <p:nvPr/>
+        </p:nvSpPr>
+        <p:spPr>
+          <a:xfrm>
+            <a:off x="868680" y="5138928"/>
+            <a:ext cx="10454640" cy="502920"/>
+          </a:xfrm>
+          <a:prstGeom prst="rect">
+            <a:avLst/>
+          </a:prstGeom>
+          <a:noFill/>
+        </p:spPr>
+        <p:txBody>
+          <a:bodyPr wrap="square">
+            <a:spAutoFit/>
+          </a:bodyPr>
+          <a:lstStyle/>
+          <a:p>
+            <a:pPr algn="l"/>
+            <a:r>
+              <a:rPr sz="2000" b="1" i="0">
+                <a:solidFill>
+                  <a:srgbClr val="FFFFFF"/>
+                </a:solidFill>
+                <a:latin typeface="Fredoka"/>
+              </a:rPr>
+              <a:t>El alcance funciona, y es barato.</a:t>
+            </a:r>
+          </a:p>
+        </p:txBody>
+      </p:sp>
+      <p:sp>
+        <p:nvSpPr>
+          <p:cNvPr id="21" name="TextBox 20"/>
+          <p:cNvSpPr txBox="1"/>
+          <p:nvPr/>
+        </p:nvSpPr>
+        <p:spPr>
+          <a:xfrm>
+            <a:off x="868680" y="5641848"/>
+            <a:ext cx="10454640" cy="731520"/>
+          </a:xfrm>
+          <a:prstGeom prst="rect">
+            <a:avLst/>
+          </a:prstGeom>
+          <a:noFill/>
+        </p:spPr>
+        <p:txBody>
+          <a:bodyPr wrap="square">
+            <a:spAutoFit/>
+          </a:bodyPr>
+          <a:lstStyle/>
+          <a:p>
+            <a:pPr algn="l"/>
+            <a:r>
+              <a:rPr sz="1400" b="0" i="0">
+                <a:solidFill>
+                  <a:srgbClr val="FAEEEA"/>
+                </a:solidFill>
+                <a:latin typeface="Inter"/>
+              </a:rPr>
+              <a:t>Cero comerciantes externos completaron el recorrido. La causa exacta todavía no está confirmada — piloto de conversación directa en marcha para averiguarlo.</a:t>
             </a:r>
           </a:p>
         </p:txBody>
@@ -6081,8 +5191,8 @@
 </p:sld>
 </file>
 
-<file path=ppt/slides/slide6.xml><?xml version="1.0" encoding="utf-8"?>
-<p:sld xmlns:a="http://schemas.openxmlformats.org/drawingml/2006/main" xmlns:p="http://schemas.openxmlformats.org/presentationml/2006/main" xmlns:r="http://schemas.openxmlformats.org/officeDocument/2006/relationships">
+<file path=ppt/slides/slide5.xml><?xml version="1.0" encoding="utf-8"?>
+<p:sld xmlns:a="http://schemas.openxmlformats.org/drawingml/2006/main" xmlns:r="http://schemas.openxmlformats.org/officeDocument/2006/relationships" xmlns:p="http://schemas.openxmlformats.org/presentationml/2006/main">
   <p:cSld>
     <p:spTree>
       <p:nvGrpSpPr>
@@ -6090,7 +5200,14 @@
         <p:cNvGrpSpPr/>
         <p:nvPr/>
       </p:nvGrpSpPr>
-      <p:grpSpPr/>
+      <p:grpSpPr>
+        <a:xfrm>
+          <a:off x="0" y="0"/>
+          <a:ext cx="0" cy="0"/>
+          <a:chOff x="0" y="0"/>
+          <a:chExt cx="0" cy="0"/>
+        </a:xfrm>
+      </p:grpSpPr>
       <p:sp>
         <p:nvSpPr>
           <p:cNvPr id="2" name="Rectangle 1"/>
@@ -6132,6 +5249,7 @@
           <a:lstStyle/>
           <a:p>
             <a:pPr algn="ctr"/>
+            <a:endParaRPr/>
           </a:p>
         </p:txBody>
       </p:sp>
@@ -6143,8 +5261,8 @@
         </p:nvSpPr>
         <p:spPr>
           <a:xfrm>
-            <a:off x="822960" y="411480"/>
-            <a:ext cx="8000000" cy="700000"/>
+            <a:off x="822960" y="640080"/>
+            <a:ext cx="8000000" cy="320000"/>
           </a:xfrm>
           <a:prstGeom prst="rect">
             <a:avLst/>
@@ -6152,27 +5270,20 @@
           <a:noFill/>
         </p:spPr>
         <p:txBody>
-          <a:bodyPr wrap="square" anchor="t" lIns="0" rIns="0" tIns="0" bIns="0">
+          <a:bodyPr wrap="square">
             <a:spAutoFit/>
           </a:bodyPr>
           <a:lstStyle/>
           <a:p>
-            <a:pPr algn="l">
-              <a:spcBef>
-                <a:spcPts val="0"/>
-              </a:spcBef>
-              <a:spcAft>
-                <a:spcPts val="0"/>
-              </a:spcAft>
-            </a:pPr>
-            <a:r>
-              <a:rPr sz="4400" b="1" i="0">
-                <a:solidFill>
-                  <a:srgbClr val="141413"/>
-                </a:solidFill>
-                <a:latin typeface="Fredoka"/>
+            <a:pPr algn="l"/>
+            <a:r>
+              <a:rPr sz="1300" b="1" i="0">
+                <a:solidFill>
+                  <a:srgbClr val="C13F26"/>
+                </a:solidFill>
+                <a:latin typeface="Inter"/>
               </a:rPr>
-              <a:t>Viabilidad.</a:t>
+              <a:t>EL CAMINO RECORRIDO</a:t>
             </a:r>
           </a:p>
         </p:txBody>
@@ -6185,8 +5296,8 @@
         </p:nvSpPr>
         <p:spPr>
           <a:xfrm>
-            <a:off x="868680" y="1080000"/>
-            <a:ext cx="10230000" cy="450000"/>
+            <a:off x="822960" y="1005840"/>
+            <a:ext cx="10546080" cy="914400"/>
           </a:xfrm>
           <a:prstGeom prst="rect">
             <a:avLst/>
@@ -6194,44 +5305,54 @@
           <a:noFill/>
         </p:spPr>
         <p:txBody>
-          <a:bodyPr wrap="square" anchor="t" lIns="0" rIns="0" tIns="0" bIns="0">
+          <a:bodyPr wrap="square">
             <a:spAutoFit/>
           </a:bodyPr>
           <a:lstStyle/>
           <a:p>
             <a:pPr algn="l">
               <a:lnSpc>
-                <a:spcPct val="120000"/>
+                <a:spcPct val="105000"/>
               </a:lnSpc>
-              <a:spcBef>
-                <a:spcPts val="0"/>
-              </a:spcBef>
-              <a:spcAft>
-                <a:spcPts val="0"/>
-              </a:spcAft>
             </a:pPr>
             <a:r>
-              <a:rPr sz="1600" b="0" i="0">
-                <a:solidFill>
-                  <a:srgbClr val="6B6B67"/>
-                </a:solidFill>
-                <a:latin typeface="Inter"/>
+              <a:rPr sz="3400" b="1" i="0">
+                <a:solidFill>
+                  <a:srgbClr val="141413"/>
+                </a:solidFill>
+                <a:latin typeface="Fredoka"/>
               </a:rPr>
-              <a:t>Cuánto cuesta esto en realidad, y qué tan lista está la base técnica.</a:t>
-            </a:r>
-          </a:p>
-        </p:txBody>
-      </p:sp>
-      <p:sp>
-        <p:nvSpPr>
-          <p:cNvPr id="5" name="TextBox 4"/>
+              <a:t>El reto más grande no fue técnico,</a:t>
+            </a:r>
+          </a:p>
+          <a:p>
+            <a:pPr algn="l">
+              <a:lnSpc>
+                <a:spcPct val="105000"/>
+              </a:lnSpc>
+            </a:pPr>
+            <a:r>
+              <a:rPr sz="3400" b="1" i="0">
+                <a:solidFill>
+                  <a:srgbClr val="141413"/>
+                </a:solidFill>
+                <a:latin typeface="Fredoka"/>
+              </a:rPr>
+              <a:t>fue conseguir que alguien real cruzara la puerta.</a:t>
+            </a:r>
+          </a:p>
+        </p:txBody>
+      </p:sp>
+      <p:sp>
+        <p:nvSpPr>
+          <p:cNvPr id="11" name="TextBox 10"/>
           <p:cNvSpPr txBox="1"/>
           <p:nvPr/>
         </p:nvSpPr>
         <p:spPr>
           <a:xfrm>
-            <a:off x="822960" y="1780000"/>
-            <a:ext cx="4550000" cy="320000"/>
+            <a:off x="822960" y="5440680"/>
+            <a:ext cx="10546080" cy="640080"/>
           </a:xfrm>
           <a:prstGeom prst="rect">
             <a:avLst/>
@@ -6239,931 +5360,58 @@
           <a:noFill/>
         </p:spPr>
         <p:txBody>
-          <a:bodyPr wrap="square" anchor="t" lIns="0" rIns="0" tIns="0" bIns="0">
+          <a:bodyPr wrap="square">
             <a:spAutoFit/>
           </a:bodyPr>
           <a:lstStyle/>
           <a:p>
-            <a:pPr algn="l">
-              <a:spcBef>
-                <a:spcPts val="0"/>
-              </a:spcBef>
-              <a:spcAft>
-                <a:spcPts val="0"/>
-              </a:spcAft>
-            </a:pPr>
-            <a:r>
-              <a:rPr sz="1200" b="1" i="0">
-                <a:solidFill>
-                  <a:srgbClr val="C13F26"/>
+            <a:pPr algn="l"/>
+            <a:r>
+              <a:rPr sz="1400" b="0" i="1">
+                <a:solidFill>
+                  <a:srgbClr val="6B6B6B"/>
                 </a:solidFill>
                 <a:latin typeface="Inter"/>
               </a:rPr>
-              <a:t>B A S E   T É C N I C A</a:t>
-            </a:r>
-          </a:p>
-        </p:txBody>
-      </p:sp>
-      <p:sp>
-        <p:nvSpPr>
-          <p:cNvPr id="6" name="TextBox 5"/>
-          <p:cNvSpPr txBox="1"/>
+              <a:t>Cada agente tiene autoridad propia y sus límites — pero ni la mejor disciplina técnica resuelve la adopción sola.</a:t>
+            </a:r>
+          </a:p>
+        </p:txBody>
+      </p:sp>
+      <p:pic>
+        <p:nvPicPr>
+          <p:cNvPr id="12" name="Diagrama Equipo de Agentes" descr="equipo-diagram-crop.png"/>
+          <p:cNvPicPr>
+            <a:picLocks noChangeAspect="1"/>
+          </p:cNvPicPr>
           <p:nvPr/>
-        </p:nvSpPr>
-        <p:spPr>
-          <a:xfrm>
-            <a:off x="822960" y="2200000"/>
-            <a:ext cx="4550000" cy="940000"/>
+        </p:nvPicPr>
+        <p:blipFill>
+          <a:blip r:embed="rId3"/>
+          <a:stretch>
+            <a:fillRect/>
+          </a:stretch>
+        </p:blipFill>
+        <p:spPr>
+          <a:xfrm>
+            <a:off x="1342295" y="2150000"/>
+            <a:ext cx="9507410" cy="3010680"/>
           </a:xfrm>
           <a:prstGeom prst="rect">
             <a:avLst/>
           </a:prstGeom>
-          <a:noFill/>
-        </p:spPr>
-        <p:txBody>
-          <a:bodyPr wrap="square" anchor="t" lIns="0" rIns="0" tIns="0" bIns="0">
-            <a:spAutoFit/>
-          </a:bodyPr>
-          <a:lstStyle/>
-          <a:p>
-            <a:pPr algn="l">
-              <a:lnSpc>
-                <a:spcPct val="110000"/>
-              </a:lnSpc>
-              <a:spcBef>
-                <a:spcPts val="0"/>
-              </a:spcBef>
-              <a:spcAft>
-                <a:spcPts val="0"/>
-              </a:spcAft>
-            </a:pPr>
-            <a:r>
-              <a:rPr sz="1500" b="1" i="0">
-                <a:solidFill>
-                  <a:srgbClr val="141413"/>
-                </a:solidFill>
-                <a:latin typeface="Fredoka"/>
-              </a:rPr>
-              <a:t>Datos</a:t>
-            </a:r>
-          </a:p>
-          <a:p>
-            <a:pPr algn="l">
-              <a:lnSpc>
-                <a:spcPct val="118000"/>
-              </a:lnSpc>
-              <a:spcBef>
-                <a:spcPts val="200"/>
-              </a:spcBef>
-              <a:spcAft>
-                <a:spcPts val="0"/>
-              </a:spcAft>
-            </a:pPr>
-            <a:r>
-              <a:rPr sz="1250" b="0" i="0">
-                <a:solidFill>
-                  <a:srgbClr val="6B6B67"/>
-                </a:solidFill>
-                <a:latin typeface="Inter"/>
-              </a:rPr>
-              <a:t>Modelo de dominio ya congelado: Sale, SaleItem, Session, Event, Product, Business. Solo falta persistirlo.</a:t>
-            </a:r>
-          </a:p>
-        </p:txBody>
-      </p:sp>
-      <p:sp>
-        <p:nvSpPr>
-          <p:cNvPr id="7" name="TextBox 6"/>
-          <p:cNvSpPr txBox="1"/>
-          <p:nvPr/>
-        </p:nvSpPr>
-        <p:spPr>
-          <a:xfrm>
-            <a:off x="822960" y="3140000"/>
-            <a:ext cx="4550000" cy="940000"/>
-          </a:xfrm>
-          <a:prstGeom prst="rect">
-            <a:avLst/>
-          </a:prstGeom>
-          <a:noFill/>
-        </p:spPr>
-        <p:txBody>
-          <a:bodyPr wrap="square" anchor="t" lIns="0" rIns="0" tIns="0" bIns="0">
-            <a:spAutoFit/>
-          </a:bodyPr>
-          <a:lstStyle/>
-          <a:p>
-            <a:pPr algn="l">
-              <a:lnSpc>
-                <a:spcPct val="110000"/>
-              </a:lnSpc>
-              <a:spcBef>
-                <a:spcPts val="0"/>
-              </a:spcBef>
-              <a:spcAft>
-                <a:spcPts val="0"/>
-              </a:spcAft>
-            </a:pPr>
-            <a:r>
-              <a:rPr sz="1500" b="1" i="0">
-                <a:solidFill>
-                  <a:srgbClr val="141413"/>
-                </a:solidFill>
-                <a:latin typeface="Fredoka"/>
-              </a:rPr>
-              <a:t>Infraestructura</a:t>
-            </a:r>
-          </a:p>
-          <a:p>
-            <a:pPr algn="l">
-              <a:lnSpc>
-                <a:spcPct val="118000"/>
-              </a:lnSpc>
-              <a:spcBef>
-                <a:spcPts val="200"/>
-              </a:spcBef>
-              <a:spcAft>
-                <a:spcPts val="0"/>
-              </a:spcAft>
-            </a:pPr>
-            <a:r>
-              <a:rPr sz="1250" b="0" i="0">
-                <a:solidFill>
-                  <a:srgbClr val="6B6B67"/>
-                </a:solidFill>
-                <a:latin typeface="Inter"/>
-              </a:rPr>
-              <a:t>React + TypeScript en Vercel. Backend en Supabase, un solo proveedor a esta escala piloto.</a:t>
-            </a:r>
-          </a:p>
-        </p:txBody>
-      </p:sp>
-      <p:sp>
-        <p:nvSpPr>
-          <p:cNvPr id="8" name="TextBox 7"/>
-          <p:cNvSpPr txBox="1"/>
-          <p:nvPr/>
-        </p:nvSpPr>
-        <p:spPr>
-          <a:xfrm>
-            <a:off x="822960" y="4080000"/>
-            <a:ext cx="4550000" cy="940000"/>
-          </a:xfrm>
-          <a:prstGeom prst="rect">
-            <a:avLst/>
-          </a:prstGeom>
-          <a:noFill/>
-        </p:spPr>
-        <p:txBody>
-          <a:bodyPr wrap="square" anchor="t" lIns="0" rIns="0" tIns="0" bIns="0">
-            <a:spAutoFit/>
-          </a:bodyPr>
-          <a:lstStyle/>
-          <a:p>
-            <a:pPr algn="l">
-              <a:lnSpc>
-                <a:spcPct val="110000"/>
-              </a:lnSpc>
-              <a:spcBef>
-                <a:spcPts val="0"/>
-              </a:spcBef>
-              <a:spcAft>
-                <a:spcPts val="0"/>
-              </a:spcAft>
-            </a:pPr>
-            <a:r>
-              <a:rPr sz="1500" b="1" i="0">
-                <a:solidFill>
-                  <a:srgbClr val="141413"/>
-                </a:solidFill>
-                <a:latin typeface="Fredoka"/>
-              </a:rPr>
-              <a:t>NFC</a:t>
-            </a:r>
-          </a:p>
-          <a:p>
-            <a:pPr algn="l">
-              <a:lnSpc>
-                <a:spcPct val="118000"/>
-              </a:lnSpc>
-              <a:spcBef>
-                <a:spcPts val="200"/>
-              </a:spcBef>
-              <a:spcAft>
-                <a:spcPts val="0"/>
-              </a:spcAft>
-            </a:pPr>
-            <a:r>
-              <a:rPr sz="1250" b="0" i="0">
-                <a:solidFill>
-                  <a:srgbClr val="6B6B67"/>
-                </a:solidFill>
-                <a:latin typeface="Inter"/>
-              </a:rPr>
-              <a:t>Android: Web NFC, sin cambios. iOS: shell nativo delgado con Core NFC. Ana nunca compra un lector aparte.</a:t>
-            </a:r>
-          </a:p>
-        </p:txBody>
-      </p:sp>
-      <p:sp>
-        <p:nvSpPr>
-          <p:cNvPr id="9" name="TextBox 8"/>
-          <p:cNvSpPr txBox="1"/>
-          <p:nvPr/>
-        </p:nvSpPr>
-        <p:spPr>
-          <a:xfrm>
-            <a:off x="822960" y="5020000"/>
-            <a:ext cx="4550000" cy="940000"/>
-          </a:xfrm>
-          <a:prstGeom prst="rect">
-            <a:avLst/>
-          </a:prstGeom>
-          <a:noFill/>
-        </p:spPr>
-        <p:txBody>
-          <a:bodyPr wrap="square" anchor="t" lIns="0" rIns="0" tIns="0" bIns="0">
-            <a:spAutoFit/>
-          </a:bodyPr>
-          <a:lstStyle/>
-          <a:p>
-            <a:pPr algn="l">
-              <a:lnSpc>
-                <a:spcPct val="110000"/>
-              </a:lnSpc>
-              <a:spcBef>
-                <a:spcPts val="0"/>
-              </a:spcBef>
-              <a:spcAft>
-                <a:spcPts val="0"/>
-              </a:spcAft>
-            </a:pPr>
-            <a:r>
-              <a:rPr sz="1500" b="1" i="0">
-                <a:solidFill>
-                  <a:srgbClr val="141413"/>
-                </a:solidFill>
-                <a:latin typeface="Fredoka"/>
-              </a:rPr>
-              <a:t>Equipo humano</a:t>
-            </a:r>
-          </a:p>
-          <a:p>
-            <a:pPr algn="l">
-              <a:lnSpc>
-                <a:spcPct val="118000"/>
-              </a:lnSpc>
-              <a:spcBef>
-                <a:spcPts val="200"/>
-              </a:spcBef>
-              <a:spcAft>
-                <a:spcPts val="0"/>
-              </a:spcAft>
-            </a:pPr>
-            <a:r>
-              <a:rPr sz="1250" b="0" i="0">
-                <a:solidFill>
-                  <a:srgbClr val="6B6B67"/>
-                </a:solidFill>
-                <a:latin typeface="Inter"/>
-              </a:rPr>
-              <a:t>Una persona con dominio de React/TypeScript. Arquitectura completamente gestionada, sin operador adicional.</a:t>
-            </a:r>
-          </a:p>
-        </p:txBody>
-      </p:sp>
-      <p:sp>
-        <p:nvSpPr>
-          <p:cNvPr id="10" name="TextBox 9"/>
-          <p:cNvSpPr txBox="1"/>
-          <p:nvPr/>
-        </p:nvSpPr>
-        <p:spPr>
-          <a:xfrm>
-            <a:off x="5872960" y="1780000"/>
-            <a:ext cx="5496080" cy="320000"/>
-          </a:xfrm>
-          <a:prstGeom prst="rect">
-            <a:avLst/>
-          </a:prstGeom>
-          <a:noFill/>
-        </p:spPr>
-        <p:txBody>
-          <a:bodyPr wrap="square" anchor="t" lIns="0" rIns="0" tIns="0" bIns="0">
-            <a:spAutoFit/>
-          </a:bodyPr>
-          <a:lstStyle/>
-          <a:p>
-            <a:pPr algn="l">
-              <a:spcBef>
-                <a:spcPts val="0"/>
-              </a:spcBef>
-              <a:spcAft>
-                <a:spcPts val="0"/>
-              </a:spcAft>
-            </a:pPr>
-            <a:r>
-              <a:rPr sz="1200" b="1" i="0">
-                <a:solidFill>
-                  <a:srgbClr val="C13F26"/>
-                </a:solidFill>
-                <a:latin typeface="Inter"/>
-              </a:rPr>
-              <a:t>B U S I N E S S   C A S E</a:t>
-            </a:r>
-          </a:p>
-        </p:txBody>
-      </p:sp>
-      <p:graphicFrame>
-        <p:nvGraphicFramePr>
-          <p:cNvPr id="11" name="Table 10"/>
-          <p:cNvGraphicFramePr>
-            <a:graphicFrameLocks noGrp="1"/>
-          </p:cNvGraphicFramePr>
-          <p:nvPr/>
-        </p:nvGraphicFramePr>
-        <p:xfrm>
-          <a:off x="5872960" y="2200000"/>
-          <a:ext cx="5496079" cy="3020000"/>
-        </p:xfrm>
-        <a:graphic>
-          <a:graphicData uri="http://schemas.openxmlformats.org/drawingml/2006/table">
-            <a:tbl>
-              <a:tblPr>
-                <a:tableStyleId>{5C22544A-7EE6-4342-B048-85BDC9FD1C3A}</a:tableStyleId>
-              </a:tblPr>
-              <a:tblGrid>
-                <a:gridCol w="2308353"/>
-                <a:gridCol w="1718667"/>
-                <a:gridCol w="1469059"/>
-              </a:tblGrid>
-              <a:tr h="460000">
-                <a:tc>
-                  <a:txBody>
-                    <a:bodyPr wrap="square"/>
-                    <a:lstStyle/>
-                    <a:p>
-                      <a:pPr algn="l">
-                        <a:lnSpc>
-                          <a:spcPct val="105000"/>
-                        </a:lnSpc>
-                        <a:spcBef>
-                          <a:spcPts val="0"/>
-                        </a:spcBef>
-                        <a:spcAft>
-                          <a:spcPts val="0"/>
-                        </a:spcAft>
-                      </a:pPr>
-                      <a:r>
-                        <a:rPr sz="1400" b="1" i="0">
-                          <a:solidFill>
-                            <a:srgbClr val="FFFFFF"/>
-                          </a:solidFill>
-                          <a:latin typeface="Inter"/>
-                        </a:rPr>
-                        <a:t>Concepto</a:t>
-                      </a:r>
-                    </a:p>
-                  </a:txBody>
-                  <a:tcPr anchor="ctr" marL="76200" marR="76200" marT="50800" marB="50800">
-                    <a:solidFill>
-                      <a:srgbClr val="C13F26"/>
-                    </a:solidFill>
-                  </a:tcPr>
-                </a:tc>
-                <a:tc>
-                  <a:txBody>
-                    <a:bodyPr wrap="square"/>
-                    <a:lstStyle/>
-                    <a:p>
-                      <a:pPr algn="l">
-                        <a:lnSpc>
-                          <a:spcPct val="105000"/>
-                        </a:lnSpc>
-                        <a:spcBef>
-                          <a:spcPts val="0"/>
-                        </a:spcBef>
-                        <a:spcAft>
-                          <a:spcPts val="0"/>
-                        </a:spcAft>
-                      </a:pPr>
-                      <a:r>
-                        <a:rPr sz="1400" b="1" i="0">
-                          <a:solidFill>
-                            <a:srgbClr val="FFFFFF"/>
-                          </a:solidFill>
-                          <a:latin typeface="Inter"/>
-                        </a:rPr>
-                        <a:t>Cifra</a:t>
-                      </a:r>
-                    </a:p>
-                  </a:txBody>
-                  <a:tcPr anchor="ctr" marL="76200" marR="76200" marT="50800" marB="50800">
-                    <a:solidFill>
-                      <a:srgbClr val="C13F26"/>
-                    </a:solidFill>
-                  </a:tcPr>
-                </a:tc>
-                <a:tc>
-                  <a:txBody>
-                    <a:bodyPr wrap="square"/>
-                    <a:lstStyle/>
-                    <a:p>
-                      <a:pPr algn="l">
-                        <a:lnSpc>
-                          <a:spcPct val="105000"/>
-                        </a:lnSpc>
-                        <a:spcBef>
-                          <a:spcPts val="0"/>
-                        </a:spcBef>
-                        <a:spcAft>
-                          <a:spcPts val="0"/>
-                        </a:spcAft>
-                      </a:pPr>
-                      <a:r>
-                        <a:rPr sz="1400" b="1" i="0">
-                          <a:solidFill>
-                            <a:srgbClr val="FFFFFF"/>
-                          </a:solidFill>
-                          <a:latin typeface="Inter"/>
-                        </a:rPr>
-                        <a:t>Tipo</a:t>
-                      </a:r>
-                    </a:p>
-                  </a:txBody>
-                  <a:tcPr anchor="ctr" marL="76200" marR="76200" marT="50800" marB="50800">
-                    <a:solidFill>
-                      <a:srgbClr val="C13F26"/>
-                    </a:solidFill>
-                  </a:tcPr>
-                </a:tc>
-              </a:tr>
-              <a:tr h="640000">
-                <a:tc>
-                  <a:txBody>
-                    <a:bodyPr wrap="square"/>
-                    <a:lstStyle/>
-                    <a:p>
-                      <a:pPr algn="l">
-                        <a:lnSpc>
-                          <a:spcPct val="105000"/>
-                        </a:lnSpc>
-                        <a:spcBef>
-                          <a:spcPts val="0"/>
-                        </a:spcBef>
-                        <a:spcAft>
-                          <a:spcPts val="0"/>
-                        </a:spcAft>
-                      </a:pPr>
-                      <a:r>
-                        <a:rPr sz="1400" b="0" i="0">
-                          <a:solidFill>
-                            <a:srgbClr val="141413"/>
-                          </a:solidFill>
-                          <a:latin typeface="Inter"/>
-                        </a:rPr>
-                        <a:t>Inversión inicial de un solo pago</a:t>
-                      </a:r>
-                    </a:p>
-                  </a:txBody>
-                  <a:tcPr anchor="ctr" marL="76200" marR="76200" marT="50800" marB="50800">
-                    <a:solidFill>
-                      <a:srgbClr val="FFFFFF"/>
-                    </a:solidFill>
-                  </a:tcPr>
-                </a:tc>
-                <a:tc>
-                  <a:txBody>
-                    <a:bodyPr wrap="square"/>
-                    <a:lstStyle/>
-                    <a:p>
-                      <a:pPr algn="l">
-                        <a:lnSpc>
-                          <a:spcPct val="105000"/>
-                        </a:lnSpc>
-                        <a:spcBef>
-                          <a:spcPts val="0"/>
-                        </a:spcBef>
-                        <a:spcAft>
-                          <a:spcPts val="0"/>
-                        </a:spcAft>
-                      </a:pPr>
-                      <a:r>
-                        <a:rPr sz="1400" b="1" i="0">
-                          <a:solidFill>
-                            <a:srgbClr val="C13F26"/>
-                          </a:solidFill>
-                          <a:latin typeface="Inter"/>
-                        </a:rPr>
-                        <a:t>aprox. $626 MXN</a:t>
-                      </a:r>
-                    </a:p>
-                  </a:txBody>
-                  <a:tcPr anchor="ctr" marL="76200" marR="76200" marT="50800" marB="50800">
-                    <a:solidFill>
-                      <a:srgbClr val="FFFFFF"/>
-                    </a:solidFill>
-                  </a:tcPr>
-                </a:tc>
-                <a:tc>
-                  <a:txBody>
-                    <a:bodyPr wrap="square"/>
-                    <a:lstStyle/>
-                    <a:p>
-                      <a:pPr algn="l">
-                        <a:lnSpc>
-                          <a:spcPct val="105000"/>
-                        </a:lnSpc>
-                        <a:spcBef>
-                          <a:spcPts val="0"/>
-                        </a:spcBef>
-                        <a:spcAft>
-                          <a:spcPts val="0"/>
-                        </a:spcAft>
-                      </a:pPr>
-                      <a:r>
-                        <a:rPr sz="1400" b="0" i="0">
-                          <a:solidFill>
-                            <a:srgbClr val="6B6B67"/>
-                          </a:solidFill>
-                          <a:latin typeface="Inter"/>
-                        </a:rPr>
-                        <a:t>Real, ya pagado</a:t>
-                      </a:r>
-                    </a:p>
-                  </a:txBody>
-                  <a:tcPr anchor="ctr" marL="76200" marR="76200" marT="50800" marB="50800">
-                    <a:solidFill>
-                      <a:srgbClr val="FFFFFF"/>
-                    </a:solidFill>
-                  </a:tcPr>
-                </a:tc>
-              </a:tr>
-              <a:tr h="640000">
-                <a:tc>
-                  <a:txBody>
-                    <a:bodyPr wrap="square"/>
-                    <a:lstStyle/>
-                    <a:p>
-                      <a:pPr algn="l">
-                        <a:lnSpc>
-                          <a:spcPct val="105000"/>
-                        </a:lnSpc>
-                        <a:spcBef>
-                          <a:spcPts val="0"/>
-                        </a:spcBef>
-                        <a:spcAft>
-                          <a:spcPts val="0"/>
-                        </a:spcAft>
-                      </a:pPr>
-                      <a:r>
-                        <a:rPr sz="1400" b="0" i="0">
-                          <a:solidFill>
-                            <a:srgbClr val="141413"/>
-                          </a:solidFill>
-                          <a:latin typeface="Inter"/>
-                        </a:rPr>
-                        <a:t>Herramienta de desarrollo (Claude Code Max)</a:t>
-                      </a:r>
-                    </a:p>
-                  </a:txBody>
-                  <a:tcPr anchor="ctr" marL="76200" marR="76200" marT="50800" marB="50800">
-                    <a:solidFill>
-                      <a:srgbClr val="F0EEE8"/>
-                    </a:solidFill>
-                  </a:tcPr>
-                </a:tc>
-                <a:tc>
-                  <a:txBody>
-                    <a:bodyPr wrap="square"/>
-                    <a:lstStyle/>
-                    <a:p>
-                      <a:pPr algn="l">
-                        <a:lnSpc>
-                          <a:spcPct val="105000"/>
-                        </a:lnSpc>
-                        <a:spcBef>
-                          <a:spcPts val="0"/>
-                        </a:spcBef>
-                        <a:spcAft>
-                          <a:spcPts val="0"/>
-                        </a:spcAft>
-                      </a:pPr>
-                      <a:r>
-                        <a:rPr sz="1400" b="1" i="0">
-                          <a:solidFill>
-                            <a:srgbClr val="C13F26"/>
-                          </a:solidFill>
-                          <a:latin typeface="Inter"/>
-                        </a:rPr>
-                        <a:t>$100 USD/mes (aprox. $1,850 MXN/mes)</a:t>
-                      </a:r>
-                    </a:p>
-                  </a:txBody>
-                  <a:tcPr anchor="ctr" marL="76200" marR="76200" marT="50800" marB="50800">
-                    <a:solidFill>
-                      <a:srgbClr val="F0EEE8"/>
-                    </a:solidFill>
-                  </a:tcPr>
-                </a:tc>
-                <a:tc>
-                  <a:txBody>
-                    <a:bodyPr wrap="square"/>
-                    <a:lstStyle/>
-                    <a:p>
-                      <a:pPr algn="l">
-                        <a:lnSpc>
-                          <a:spcPct val="105000"/>
-                        </a:lnSpc>
-                        <a:spcBef>
-                          <a:spcPts val="0"/>
-                        </a:spcBef>
-                        <a:spcAft>
-                          <a:spcPts val="0"/>
-                        </a:spcAft>
-                      </a:pPr>
-                      <a:r>
-                        <a:rPr sz="1400" b="0" i="0">
-                          <a:solidFill>
-                            <a:srgbClr val="6B6B67"/>
-                          </a:solidFill>
-                          <a:latin typeface="Inter"/>
-                        </a:rPr>
-                        <a:t>Real, recurrente</a:t>
-                      </a:r>
-                    </a:p>
-                  </a:txBody>
-                  <a:tcPr anchor="ctr" marL="76200" marR="76200" marT="50800" marB="50800">
-                    <a:solidFill>
-                      <a:srgbClr val="F0EEE8"/>
-                    </a:solidFill>
-                  </a:tcPr>
-                </a:tc>
-              </a:tr>
-              <a:tr h="640000">
-                <a:tc>
-                  <a:txBody>
-                    <a:bodyPr wrap="square"/>
-                    <a:lstStyle/>
-                    <a:p>
-                      <a:pPr algn="l">
-                        <a:lnSpc>
-                          <a:spcPct val="105000"/>
-                        </a:lnSpc>
-                        <a:spcBef>
-                          <a:spcPts val="0"/>
-                        </a:spcBef>
-                        <a:spcAft>
-                          <a:spcPts val="0"/>
-                        </a:spcAft>
-                      </a:pPr>
-                      <a:r>
-                        <a:rPr sz="1400" b="0" i="0">
-                          <a:solidFill>
-                            <a:srgbClr val="141413"/>
-                          </a:solidFill>
-                          <a:latin typeface="Inter"/>
-                        </a:rPr>
-                        <a:t>Operación mensual (Supabase + Vercel)</a:t>
-                      </a:r>
-                    </a:p>
-                  </a:txBody>
-                  <a:tcPr anchor="ctr" marL="76200" marR="76200" marT="50800" marB="50800">
-                    <a:solidFill>
-                      <a:srgbClr val="FFFFFF"/>
-                    </a:solidFill>
-                  </a:tcPr>
-                </a:tc>
-                <a:tc>
-                  <a:txBody>
-                    <a:bodyPr wrap="square"/>
-                    <a:lstStyle/>
-                    <a:p>
-                      <a:pPr algn="l">
-                        <a:lnSpc>
-                          <a:spcPct val="105000"/>
-                        </a:lnSpc>
-                        <a:spcBef>
-                          <a:spcPts val="0"/>
-                        </a:spcBef>
-                        <a:spcAft>
-                          <a:spcPts val="0"/>
-                        </a:spcAft>
-                      </a:pPr>
-                      <a:r>
-                        <a:rPr sz="1400" b="1" i="0">
-                          <a:solidFill>
-                            <a:srgbClr val="C13F26"/>
-                          </a:solidFill>
-                          <a:latin typeface="Inter"/>
-                        </a:rPr>
-                        <a:t>aprox. $830 MXN/mes</a:t>
-                      </a:r>
-                    </a:p>
-                  </a:txBody>
-                  <a:tcPr anchor="ctr" marL="76200" marR="76200" marT="50800" marB="50800">
-                    <a:solidFill>
-                      <a:srgbClr val="FFFFFF"/>
-                    </a:solidFill>
-                  </a:tcPr>
-                </a:tc>
-                <a:tc>
-                  <a:txBody>
-                    <a:bodyPr wrap="square"/>
-                    <a:lstStyle/>
-                    <a:p>
-                      <a:pPr algn="l">
-                        <a:lnSpc>
-                          <a:spcPct val="105000"/>
-                        </a:lnSpc>
-                        <a:spcBef>
-                          <a:spcPts val="0"/>
-                        </a:spcBef>
-                        <a:spcAft>
-                          <a:spcPts val="0"/>
-                        </a:spcAft>
-                      </a:pPr>
-                      <a:r>
-                        <a:rPr sz="1400" b="0" i="0">
-                          <a:solidFill>
-                            <a:srgbClr val="6B6B67"/>
-                          </a:solidFill>
-                          <a:latin typeface="Inter"/>
-                        </a:rPr>
-                        <a:t>Proyectado · ago. 2026</a:t>
-                      </a:r>
-                    </a:p>
-                  </a:txBody>
-                  <a:tcPr anchor="ctr" marL="76200" marR="76200" marT="50800" marB="50800">
-                    <a:solidFill>
-                      <a:srgbClr val="FFFFFF"/>
-                    </a:solidFill>
-                  </a:tcPr>
-                </a:tc>
-              </a:tr>
-              <a:tr h="640000">
-                <a:tc>
-                  <a:txBody>
-                    <a:bodyPr wrap="square"/>
-                    <a:lstStyle/>
-                    <a:p>
-                      <a:pPr algn="l">
-                        <a:lnSpc>
-                          <a:spcPct val="105000"/>
-                        </a:lnSpc>
-                        <a:spcBef>
-                          <a:spcPts val="0"/>
-                        </a:spcBef>
-                        <a:spcAft>
-                          <a:spcPts val="0"/>
-                        </a:spcAft>
-                      </a:pPr>
-                      <a:r>
-                        <a:rPr sz="1400" b="0" i="0">
-                          <a:solidFill>
-                            <a:srgbClr val="141413"/>
-                          </a:solidFill>
-                          <a:latin typeface="Inter"/>
-                        </a:rPr>
-                        <a:t>Costo por venta</a:t>
-                      </a:r>
-                    </a:p>
-                  </a:txBody>
-                  <a:tcPr anchor="ctr" marL="76200" marR="76200" marT="50800" marB="50800">
-                    <a:solidFill>
-                      <a:srgbClr val="F0EEE8"/>
-                    </a:solidFill>
-                  </a:tcPr>
-                </a:tc>
-                <a:tc>
-                  <a:txBody>
-                    <a:bodyPr wrap="square"/>
-                    <a:lstStyle/>
-                    <a:p>
-                      <a:pPr algn="l">
-                        <a:lnSpc>
-                          <a:spcPct val="105000"/>
-                        </a:lnSpc>
-                        <a:spcBef>
-                          <a:spcPts val="0"/>
-                        </a:spcBef>
-                        <a:spcAft>
-                          <a:spcPts val="0"/>
-                        </a:spcAft>
-                      </a:pPr>
-                      <a:r>
-                        <a:rPr sz="1400" b="1" i="0">
-                          <a:solidFill>
-                            <a:srgbClr val="C13F26"/>
-                          </a:solidFill>
-                          <a:latin typeface="Inter"/>
-                        </a:rPr>
-                        <a:t>aprox. $3.90 MXN por venta</a:t>
-                      </a:r>
-                    </a:p>
-                  </a:txBody>
-                  <a:tcPr anchor="ctr" marL="76200" marR="76200" marT="50800" marB="50800">
-                    <a:solidFill>
-                      <a:srgbClr val="F0EEE8"/>
-                    </a:solidFill>
-                  </a:tcPr>
-                </a:tc>
-                <a:tc>
-                  <a:txBody>
-                    <a:bodyPr wrap="square"/>
-                    <a:lstStyle/>
-                    <a:p>
-                      <a:pPr algn="l">
-                        <a:lnSpc>
-                          <a:spcPct val="105000"/>
-                        </a:lnSpc>
-                        <a:spcBef>
-                          <a:spcPts val="0"/>
-                        </a:spcBef>
-                        <a:spcAft>
-                          <a:spcPts val="0"/>
-                        </a:spcAft>
-                      </a:pPr>
-                      <a:r>
-                        <a:rPr sz="1400" b="0" i="0">
-                          <a:solidFill>
-                            <a:srgbClr val="6B6B67"/>
-                          </a:solidFill>
-                          <a:latin typeface="Inter"/>
-                        </a:rPr>
-                        <a:t>Calculado · supuesto de volumen</a:t>
-                      </a:r>
-                    </a:p>
-                  </a:txBody>
-                  <a:tcPr anchor="ctr" marL="76200" marR="76200" marT="50800" marB="50800">
-                    <a:solidFill>
-                      <a:srgbClr val="F0EEE8"/>
-                    </a:solidFill>
-                  </a:tcPr>
-                </a:tc>
-              </a:tr>
-            </a:tbl>
-          </a:graphicData>
-        </a:graphic>
-      </p:graphicFrame>
-      <p:sp>
-        <p:nvSpPr>
-          <p:cNvPr id="12" name="TextBox 11"/>
-          <p:cNvSpPr txBox="1"/>
-          <p:nvPr/>
-        </p:nvSpPr>
-        <p:spPr>
-          <a:xfrm>
-            <a:off x="5872960" y="5700000"/>
-            <a:ext cx="5496080" cy="700000"/>
-          </a:xfrm>
-          <a:prstGeom prst="rect">
-            <a:avLst/>
-          </a:prstGeom>
-          <a:noFill/>
-        </p:spPr>
-        <p:txBody>
-          <a:bodyPr wrap="square" anchor="t" lIns="0" rIns="0" tIns="0" bIns="0">
-            <a:spAutoFit/>
-          </a:bodyPr>
-          <a:lstStyle/>
-          <a:p>
-            <a:pPr algn="l">
-              <a:lnSpc>
-                <a:spcPct val="120000"/>
-              </a:lnSpc>
-              <a:spcBef>
-                <a:spcPts val="0"/>
-              </a:spcBef>
-              <a:spcAft>
-                <a:spcPts val="0"/>
-              </a:spcAft>
-            </a:pPr>
-            <a:r>
-              <a:rPr sz="1150" b="0" i="1">
-                <a:solidFill>
-                  <a:srgbClr val="6B6B67"/>
-                </a:solidFill>
-                <a:latin typeface="Inter"/>
-              </a:rPr>
-              <a:t>Retorno esperado: todavía no calculable de forma defendible. Sin precio decidido, solo principios: sin comisión por transacción, precio fijo o estacional.</a:t>
-            </a:r>
-          </a:p>
-        </p:txBody>
-      </p:sp>
+        </p:spPr>
+      </p:pic>
     </p:spTree>
   </p:cSld>
   <p:clrMapOvr>
     <a:masterClrMapping/>
   </p:clrMapOvr>
-  <p:transition spd="med">
-    <p:wipe dir="l"/>
-  </p:transition>
 </p:sld>
 </file>
 
-<file path=ppt/slides/slide7.xml><?xml version="1.0" encoding="utf-8"?>
-<p:sld xmlns:a="http://schemas.openxmlformats.org/drawingml/2006/main" xmlns:p="http://schemas.openxmlformats.org/presentationml/2006/main" xmlns:r="http://schemas.openxmlformats.org/officeDocument/2006/relationships">
+<file path=ppt/slides/slide6.xml><?xml version="1.0" encoding="utf-8"?>
+<p:sld xmlns:a="http://schemas.openxmlformats.org/drawingml/2006/main" xmlns:r="http://schemas.openxmlformats.org/officeDocument/2006/relationships" xmlns:p="http://schemas.openxmlformats.org/presentationml/2006/main">
   <p:cSld>
     <p:spTree>
       <p:nvGrpSpPr>
@@ -7171,7 +5419,14 @@
         <p:cNvGrpSpPr/>
         <p:nvPr/>
       </p:nvGrpSpPr>
-      <p:grpSpPr/>
+      <p:grpSpPr>
+        <a:xfrm>
+          <a:off x="0" y="0"/>
+          <a:ext cx="0" cy="0"/>
+          <a:chOff x="0" y="0"/>
+          <a:chExt cx="0" cy="0"/>
+        </a:xfrm>
+      </p:grpSpPr>
       <p:sp>
         <p:nvSpPr>
           <p:cNvPr id="2" name="Rectangle 1"/>
@@ -7187,7 +5442,7 @@
             <a:avLst/>
           </a:prstGeom>
           <a:solidFill>
-            <a:srgbClr val="141413"/>
+            <a:srgbClr val="C13F26"/>
           </a:solidFill>
           <a:ln>
             <a:noFill/>
@@ -7213,6 +5468,7 @@
           <a:lstStyle/>
           <a:p>
             <a:pPr algn="ctr"/>
+            <a:endParaRPr/>
           </a:p>
         </p:txBody>
       </p:sp>
@@ -7224,8 +5480,8 @@
         </p:nvSpPr>
         <p:spPr>
           <a:xfrm>
-            <a:off x="822960" y="411480"/>
-            <a:ext cx="8000000" cy="700000"/>
+            <a:off x="822960" y="548640"/>
+            <a:ext cx="8000000" cy="320000"/>
           </a:xfrm>
           <a:prstGeom prst="rect">
             <a:avLst/>
@@ -7233,27 +5489,20 @@
           <a:noFill/>
         </p:spPr>
         <p:txBody>
-          <a:bodyPr wrap="square" anchor="t" lIns="0" rIns="0" tIns="0" bIns="0">
+          <a:bodyPr wrap="square">
             <a:spAutoFit/>
           </a:bodyPr>
           <a:lstStyle/>
           <a:p>
-            <a:pPr algn="l">
-              <a:spcBef>
-                <a:spcPts val="0"/>
-              </a:spcBef>
-              <a:spcAft>
-                <a:spcPts val="0"/>
-              </a:spcAft>
-            </a:pPr>
-            <a:r>
-              <a:rPr sz="4400" b="1" i="0">
-                <a:solidFill>
-                  <a:srgbClr val="FFFFFF"/>
-                </a:solidFill>
-                <a:latin typeface="Fredoka"/>
+            <a:pPr algn="l"/>
+            <a:r>
+              <a:rPr sz="1300" b="1" i="0">
+                <a:solidFill>
+                  <a:srgbClr val="F3D9D1"/>
+                </a:solidFill>
+                <a:latin typeface="Inter"/>
               </a:rPr>
-              <a:t>Riesgos y bloqueos.</a:t>
+              <a:t>LO QUE SIGUE</a:t>
             </a:r>
           </a:p>
         </p:txBody>
@@ -7266,8 +5515,8 @@
         </p:nvSpPr>
         <p:spPr>
           <a:xfrm>
-            <a:off x="868680" y="1080000"/>
-            <a:ext cx="10230000" cy="450000"/>
+            <a:off x="822960" y="868680"/>
+            <a:ext cx="10546080" cy="545919"/>
           </a:xfrm>
           <a:prstGeom prst="rect">
             <a:avLst/>
@@ -7275,30 +5524,96 @@
           <a:noFill/>
         </p:spPr>
         <p:txBody>
-          <a:bodyPr wrap="square" anchor="t" lIns="0" rIns="0" tIns="0" bIns="0">
+          <a:bodyPr wrap="square">
             <a:spAutoFit/>
           </a:bodyPr>
           <a:lstStyle/>
           <a:p>
             <a:pPr algn="l">
               <a:lnSpc>
-                <a:spcPct val="120000"/>
+                <a:spcPct val="105000"/>
               </a:lnSpc>
-              <a:spcBef>
-                <a:spcPts val="0"/>
-              </a:spcBef>
-              <a:spcAft>
-                <a:spcPts val="0"/>
-              </a:spcAft>
             </a:pPr>
             <a:r>
-              <a:rPr sz="1600" b="0" i="0">
-                <a:solidFill>
-                  <a:srgbClr val="C7C5C0"/>
-                </a:solidFill>
-                <a:latin typeface="Inter"/>
+              <a:rPr sz="3000" b="1" i="0" dirty="0">
+                <a:solidFill>
+                  <a:srgbClr val="FFFFFF"/>
+                </a:solidFill>
+                <a:latin typeface="Fredoka"/>
               </a:rPr>
-              <a:t>Qué puede detener esto, y quién lo resuelve.</a:t>
+              <a:t>Nada de </a:t>
+            </a:r>
+            <a:r>
+              <a:rPr sz="3000" b="1" i="0" dirty="0" err="1">
+                <a:solidFill>
+                  <a:srgbClr val="FFFFFF"/>
+                </a:solidFill>
+                <a:latin typeface="Fredoka"/>
+              </a:rPr>
+              <a:t>esto</a:t>
+            </a:r>
+            <a:r>
+              <a:rPr sz="3000" b="1" i="0" dirty="0">
+                <a:solidFill>
+                  <a:srgbClr val="FFFFFF"/>
+                </a:solidFill>
+                <a:latin typeface="Fredoka"/>
+              </a:rPr>
+              <a:t> </a:t>
+            </a:r>
+            <a:r>
+              <a:rPr sz="3000" b="1" i="0" dirty="0" err="1">
+                <a:solidFill>
+                  <a:srgbClr val="FFFFFF"/>
+                </a:solidFill>
+                <a:latin typeface="Fredoka"/>
+              </a:rPr>
+              <a:t>está</a:t>
+            </a:r>
+            <a:r>
+              <a:rPr sz="3000" b="1" i="0" dirty="0">
+                <a:solidFill>
+                  <a:srgbClr val="FFFFFF"/>
+                </a:solidFill>
+                <a:latin typeface="Fredoka"/>
+              </a:rPr>
+              <a:t> </a:t>
+            </a:r>
+            <a:r>
+              <a:rPr sz="3000" b="1" i="0" dirty="0" err="1">
+                <a:solidFill>
+                  <a:srgbClr val="FFFFFF"/>
+                </a:solidFill>
+                <a:latin typeface="Fredoka"/>
+              </a:rPr>
+              <a:t>resuelto</a:t>
+            </a:r>
+            <a:r>
+              <a:rPr sz="3000" b="1" i="0" dirty="0">
+                <a:solidFill>
+                  <a:srgbClr val="FFFFFF"/>
+                </a:solidFill>
+                <a:latin typeface="Fredoka"/>
+              </a:rPr>
+              <a:t> del </a:t>
+            </a:r>
+            <a:r>
+              <a:rPr sz="3000" b="1" i="0" dirty="0" err="1">
+                <a:solidFill>
+                  <a:srgbClr val="FFFFFF"/>
+                </a:solidFill>
+                <a:latin typeface="Fredoka"/>
+              </a:rPr>
+              <a:t>todo</a:t>
+            </a:r>
+            <a:r>
+              <a:rPr sz="3000" b="1" i="0" dirty="0">
+                <a:solidFill>
+                  <a:srgbClr val="FFFFFF"/>
+                </a:solidFill>
+                <a:latin typeface="Fredoka"/>
+              </a:rPr>
+              <a:t>.</a:t>
             </a:r>
           </a:p>
         </p:txBody>
@@ -7311,8 +5626,8 @@
         </p:nvSpPr>
         <p:spPr>
           <a:xfrm>
-            <a:off x="822960" y="1780000"/>
-            <a:ext cx="6900000" cy="320000"/>
+            <a:off x="822960" y="2377440"/>
+            <a:ext cx="457200" cy="457200"/>
           </a:xfrm>
           <a:prstGeom prst="rect">
             <a:avLst/>
@@ -7320,719 +5635,34 @@
           <a:noFill/>
         </p:spPr>
         <p:txBody>
-          <a:bodyPr wrap="square" anchor="t" lIns="0" rIns="0" tIns="0" bIns="0">
+          <a:bodyPr wrap="square">
             <a:spAutoFit/>
           </a:bodyPr>
           <a:lstStyle/>
           <a:p>
-            <a:pPr algn="l">
-              <a:spcBef>
-                <a:spcPts val="0"/>
-              </a:spcBef>
-              <a:spcAft>
-                <a:spcPts val="0"/>
-              </a:spcAft>
-            </a:pPr>
-            <a:r>
-              <a:rPr sz="1200" b="1" i="0">
-                <a:solidFill>
-                  <a:srgbClr val="C13F26"/>
-                </a:solidFill>
-                <a:latin typeface="Inter"/>
+            <a:pPr algn="l"/>
+            <a:r>
+              <a:rPr sz="2200" b="1" i="0">
+                <a:solidFill>
+                  <a:srgbClr val="F3D9D1"/>
+                </a:solidFill>
+                <a:latin typeface="Fredoka"/>
               </a:rPr>
-              <a:t>C I N C O   R I E S G O S</a:t>
-            </a:r>
-          </a:p>
-        </p:txBody>
-      </p:sp>
-      <p:graphicFrame>
-        <p:nvGraphicFramePr>
-          <p:cNvPr id="6" name="Table 5"/>
-          <p:cNvGraphicFramePr>
-            <a:graphicFrameLocks noGrp="1"/>
-          </p:cNvGraphicFramePr>
-          <p:nvPr/>
-        </p:nvGraphicFramePr>
-        <p:xfrm>
-          <a:off x="822960" y="2200000"/>
-          <a:ext cx="6900000" cy="4420000"/>
-        </p:xfrm>
-        <a:graphic>
-          <a:graphicData uri="http://schemas.openxmlformats.org/drawingml/2006/table">
-            <a:tbl>
-              <a:tblPr>
-                <a:tableStyleId>{5C22544A-7EE6-4342-B048-85BDC9FD1C3A}</a:tableStyleId>
-              </a:tblPr>
-              <a:tblGrid>
-                <a:gridCol w="3564000"/>
-                <a:gridCol w="1668000"/>
-                <a:gridCol w="1668000"/>
-              </a:tblGrid>
-              <a:tr h="520000">
-                <a:tc>
-                  <a:txBody>
-                    <a:bodyPr wrap="square"/>
-                    <a:lstStyle/>
-                    <a:p>
-                      <a:pPr algn="l">
-                        <a:lnSpc>
-                          <a:spcPct val="105000"/>
-                        </a:lnSpc>
-                        <a:spcBef>
-                          <a:spcPts val="0"/>
-                        </a:spcBef>
-                        <a:spcAft>
-                          <a:spcPts val="0"/>
-                        </a:spcAft>
-                      </a:pPr>
-                      <a:r>
-                        <a:rPr sz="1400" b="1" i="0">
-                          <a:solidFill>
-                            <a:srgbClr val="C7C5C0"/>
-                          </a:solidFill>
-                          <a:latin typeface="Inter"/>
-                        </a:rPr>
-                        <a:t>Riesgo</a:t>
-                      </a:r>
-                    </a:p>
-                  </a:txBody>
-                  <a:tcPr anchor="ctr" marL="76200" marR="76200" marT="50800" marB="50800">
-                    <a:solidFill>
-                      <a:srgbClr val="1D1D1B"/>
-                    </a:solidFill>
-                  </a:tcPr>
-                </a:tc>
-                <a:tc>
-                  <a:txBody>
-                    <a:bodyPr wrap="square"/>
-                    <a:lstStyle/>
-                    <a:p>
-                      <a:pPr algn="l">
-                        <a:lnSpc>
-                          <a:spcPct val="105000"/>
-                        </a:lnSpc>
-                        <a:spcBef>
-                          <a:spcPts val="0"/>
-                        </a:spcBef>
-                        <a:spcAft>
-                          <a:spcPts val="0"/>
-                        </a:spcAft>
-                      </a:pPr>
-                      <a:r>
-                        <a:rPr sz="1400" b="1" i="0">
-                          <a:solidFill>
-                            <a:srgbClr val="C7C5C0"/>
-                          </a:solidFill>
-                          <a:latin typeface="Inter"/>
-                        </a:rPr>
-                        <a:t>Probabilidad</a:t>
-                      </a:r>
-                    </a:p>
-                  </a:txBody>
-                  <a:tcPr anchor="ctr" marL="76200" marR="76200" marT="50800" marB="50800">
-                    <a:solidFill>
-                      <a:srgbClr val="1D1D1B"/>
-                    </a:solidFill>
-                  </a:tcPr>
-                </a:tc>
-                <a:tc>
-                  <a:txBody>
-                    <a:bodyPr wrap="square"/>
-                    <a:lstStyle/>
-                    <a:p>
-                      <a:pPr algn="l">
-                        <a:lnSpc>
-                          <a:spcPct val="105000"/>
-                        </a:lnSpc>
-                        <a:spcBef>
-                          <a:spcPts val="0"/>
-                        </a:spcBef>
-                        <a:spcAft>
-                          <a:spcPts val="0"/>
-                        </a:spcAft>
-                      </a:pPr>
-                      <a:r>
-                        <a:rPr sz="1400" b="1" i="0">
-                          <a:solidFill>
-                            <a:srgbClr val="C7C5C0"/>
-                          </a:solidFill>
-                          <a:latin typeface="Inter"/>
-                        </a:rPr>
-                        <a:t>Impacto</a:t>
-                      </a:r>
-                    </a:p>
-                  </a:txBody>
-                  <a:tcPr anchor="ctr" marL="76200" marR="76200" marT="50800" marB="50800">
-                    <a:solidFill>
-                      <a:srgbClr val="1D1D1B"/>
-                    </a:solidFill>
-                  </a:tcPr>
-                </a:tc>
-              </a:tr>
-              <a:tr h="780000">
-                <a:tc>
-                  <a:txBody>
-                    <a:bodyPr wrap="square"/>
-                    <a:lstStyle/>
-                    <a:p>
-                      <a:pPr algn="l">
-                        <a:lnSpc>
-                          <a:spcPct val="110000"/>
-                        </a:lnSpc>
-                        <a:spcBef>
-                          <a:spcPts val="0"/>
-                        </a:spcBef>
-                        <a:spcAft>
-                          <a:spcPts val="0"/>
-                        </a:spcAft>
-                      </a:pPr>
-                      <a:r>
-                        <a:rPr sz="1400" b="1" i="0">
-                          <a:solidFill>
-                            <a:srgbClr val="C13F26"/>
-                          </a:solidFill>
-                          <a:latin typeface="Fredoka"/>
-                        </a:rPr>
-                        <a:t>A  </a:t>
-                      </a:r>
-                      <a:r>
-                        <a:rPr sz="1400" b="0" i="0">
-                          <a:solidFill>
-                            <a:srgbClr val="FFFFFF"/>
-                          </a:solidFill>
-                          <a:latin typeface="Inter"/>
-                        </a:rPr>
-                        <a:t>Dependencia de un solo proveedor de infraestructura (Supabase + Vercel)</a:t>
-                      </a:r>
-                    </a:p>
-                  </a:txBody>
-                  <a:tcPr anchor="ctr" marL="76200" marR="76200" marT="50800" marB="50800">
-                    <a:solidFill>
-                      <a:srgbClr val="141413"/>
-                    </a:solidFill>
-                  </a:tcPr>
-                </a:tc>
-                <a:tc>
-                  <a:txBody>
-                    <a:bodyPr wrap="square"/>
-                    <a:lstStyle/>
-                    <a:p>
-                      <a:pPr algn="ctr">
-                        <a:lnSpc>
-                          <a:spcPct val="105000"/>
-                        </a:lnSpc>
-                        <a:spcBef>
-                          <a:spcPts val="0"/>
-                        </a:spcBef>
-                        <a:spcAft>
-                          <a:spcPts val="0"/>
-                        </a:spcAft>
-                      </a:pPr>
-                      <a:r>
-                        <a:rPr sz="1400" b="1" i="0">
-                          <a:solidFill>
-                            <a:srgbClr val="FFFFFF"/>
-                          </a:solidFill>
-                          <a:latin typeface="Inter"/>
-                        </a:rPr>
-                        <a:t>Alta</a:t>
-                      </a:r>
-                    </a:p>
-                  </a:txBody>
-                  <a:tcPr anchor="ctr" marL="76200" marR="76200" marT="50800" marB="50800">
-                    <a:solidFill>
-                      <a:srgbClr val="A72C2C"/>
-                    </a:solidFill>
-                  </a:tcPr>
-                </a:tc>
-                <a:tc>
-                  <a:txBody>
-                    <a:bodyPr wrap="square"/>
-                    <a:lstStyle/>
-                    <a:p>
-                      <a:pPr algn="ctr">
-                        <a:lnSpc>
-                          <a:spcPct val="105000"/>
-                        </a:lnSpc>
-                        <a:spcBef>
-                          <a:spcPts val="0"/>
-                        </a:spcBef>
-                        <a:spcAft>
-                          <a:spcPts val="0"/>
-                        </a:spcAft>
-                      </a:pPr>
-                      <a:r>
-                        <a:rPr sz="1400" b="1" i="0">
-                          <a:solidFill>
-                            <a:srgbClr val="FFFFFF"/>
-                          </a:solidFill>
-                          <a:latin typeface="Inter"/>
-                        </a:rPr>
-                        <a:t>Alta</a:t>
-                      </a:r>
-                    </a:p>
-                  </a:txBody>
-                  <a:tcPr anchor="ctr" marL="76200" marR="76200" marT="50800" marB="50800">
-                    <a:solidFill>
-                      <a:srgbClr val="A72C2C"/>
-                    </a:solidFill>
-                  </a:tcPr>
-                </a:tc>
-              </a:tr>
-              <a:tr h="780000">
-                <a:tc>
-                  <a:txBody>
-                    <a:bodyPr wrap="square"/>
-                    <a:lstStyle/>
-                    <a:p>
-                      <a:pPr algn="l">
-                        <a:lnSpc>
-                          <a:spcPct val="110000"/>
-                        </a:lnSpc>
-                        <a:spcBef>
-                          <a:spcPts val="0"/>
-                        </a:spcBef>
-                        <a:spcAft>
-                          <a:spcPts val="0"/>
-                        </a:spcAft>
-                      </a:pPr>
-                      <a:r>
-                        <a:rPr sz="1400" b="1" i="0">
-                          <a:solidFill>
-                            <a:srgbClr val="C13F26"/>
-                          </a:solidFill>
-                          <a:latin typeface="Fredoka"/>
-                        </a:rPr>
-                        <a:t>B  </a:t>
-                      </a:r>
-                      <a:r>
-                        <a:rPr sz="1400" b="0" i="0">
-                          <a:solidFill>
-                            <a:srgbClr val="FFFFFF"/>
-                          </a:solidFill>
-                          <a:latin typeface="Inter"/>
-                        </a:rPr>
-                        <a:t>Datos sensibles de comerciantes y clientes expuestos</a:t>
-                      </a:r>
-                    </a:p>
-                  </a:txBody>
-                  <a:tcPr anchor="ctr" marL="76200" marR="76200" marT="50800" marB="50800">
-                    <a:solidFill>
-                      <a:srgbClr val="1D1D1B"/>
-                    </a:solidFill>
-                  </a:tcPr>
-                </a:tc>
-                <a:tc>
-                  <a:txBody>
-                    <a:bodyPr wrap="square"/>
-                    <a:lstStyle/>
-                    <a:p>
-                      <a:pPr algn="ctr">
-                        <a:lnSpc>
-                          <a:spcPct val="105000"/>
-                        </a:lnSpc>
-                        <a:spcBef>
-                          <a:spcPts val="0"/>
-                        </a:spcBef>
-                        <a:spcAft>
-                          <a:spcPts val="0"/>
-                        </a:spcAft>
-                      </a:pPr>
-                      <a:r>
-                        <a:rPr sz="1400" b="1" i="0">
-                          <a:solidFill>
-                            <a:srgbClr val="FFFFFF"/>
-                          </a:solidFill>
-                          <a:latin typeface="Inter"/>
-                        </a:rPr>
-                        <a:t>Baja hoy</a:t>
-                      </a:r>
-                    </a:p>
-                  </a:txBody>
-                  <a:tcPr anchor="ctr" marL="76200" marR="76200" marT="50800" marB="50800">
-                    <a:solidFill>
-                      <a:srgbClr val="2E7D46"/>
-                    </a:solidFill>
-                  </a:tcPr>
-                </a:tc>
-                <a:tc>
-                  <a:txBody>
-                    <a:bodyPr wrap="square"/>
-                    <a:lstStyle/>
-                    <a:p>
-                      <a:pPr algn="ctr">
-                        <a:lnSpc>
-                          <a:spcPct val="105000"/>
-                        </a:lnSpc>
-                        <a:spcBef>
-                          <a:spcPts val="0"/>
-                        </a:spcBef>
-                        <a:spcAft>
-                          <a:spcPts val="0"/>
-                        </a:spcAft>
-                      </a:pPr>
-                      <a:r>
-                        <a:rPr sz="1400" b="1" i="0">
-                          <a:solidFill>
-                            <a:srgbClr val="FFFFFF"/>
-                          </a:solidFill>
-                          <a:latin typeface="Inter"/>
-                        </a:rPr>
-                        <a:t>Alta</a:t>
-                      </a:r>
-                    </a:p>
-                  </a:txBody>
-                  <a:tcPr anchor="ctr" marL="76200" marR="76200" marT="50800" marB="50800">
-                    <a:solidFill>
-                      <a:srgbClr val="A72C2C"/>
-                    </a:solidFill>
-                  </a:tcPr>
-                </a:tc>
-              </a:tr>
-              <a:tr h="780000">
-                <a:tc>
-                  <a:txBody>
-                    <a:bodyPr wrap="square"/>
-                    <a:lstStyle/>
-                    <a:p>
-                      <a:pPr algn="l">
-                        <a:lnSpc>
-                          <a:spcPct val="110000"/>
-                        </a:lnSpc>
-                        <a:spcBef>
-                          <a:spcPts val="0"/>
-                        </a:spcBef>
-                        <a:spcAft>
-                          <a:spcPts val="0"/>
-                        </a:spcAft>
-                      </a:pPr>
-                      <a:r>
-                        <a:rPr sz="1400" b="1" i="0">
-                          <a:solidFill>
-                            <a:srgbClr val="C13F26"/>
-                          </a:solidFill>
-                          <a:latin typeface="Fredoka"/>
-                        </a:rPr>
-                        <a:t>C  </a:t>
-                      </a:r>
-                      <a:r>
-                        <a:rPr sz="1400" b="0" i="0">
-                          <a:solidFill>
-                            <a:srgbClr val="FFFFFF"/>
-                          </a:solidFill>
-                          <a:latin typeface="Inter"/>
-                        </a:rPr>
-                        <a:t>Adopción real no confirmada, el embudo de validación no está resuelto</a:t>
-                      </a:r>
-                    </a:p>
-                  </a:txBody>
-                  <a:tcPr anchor="ctr" marL="76200" marR="76200" marT="50800" marB="50800">
-                    <a:solidFill>
-                      <a:srgbClr val="141413"/>
-                    </a:solidFill>
-                  </a:tcPr>
-                </a:tc>
-                <a:tc>
-                  <a:txBody>
-                    <a:bodyPr wrap="square"/>
-                    <a:lstStyle/>
-                    <a:p>
-                      <a:pPr algn="ctr">
-                        <a:lnSpc>
-                          <a:spcPct val="105000"/>
-                        </a:lnSpc>
-                        <a:spcBef>
-                          <a:spcPts val="0"/>
-                        </a:spcBef>
-                        <a:spcAft>
-                          <a:spcPts val="0"/>
-                        </a:spcAft>
-                      </a:pPr>
-                      <a:r>
-                        <a:rPr sz="1400" b="1" i="0">
-                          <a:solidFill>
-                            <a:srgbClr val="FFFFFF"/>
-                          </a:solidFill>
-                          <a:latin typeface="Inter"/>
-                        </a:rPr>
-                        <a:t>Alta (ya está ocurriendo)</a:t>
-                      </a:r>
-                    </a:p>
-                  </a:txBody>
-                  <a:tcPr anchor="ctr" marL="76200" marR="76200" marT="50800" marB="50800">
-                    <a:solidFill>
-                      <a:srgbClr val="A72C2C"/>
-                    </a:solidFill>
-                  </a:tcPr>
-                </a:tc>
-                <a:tc>
-                  <a:txBody>
-                    <a:bodyPr wrap="square"/>
-                    <a:lstStyle/>
-                    <a:p>
-                      <a:pPr algn="ctr">
-                        <a:lnSpc>
-                          <a:spcPct val="105000"/>
-                        </a:lnSpc>
-                        <a:spcBef>
-                          <a:spcPts val="0"/>
-                        </a:spcBef>
-                        <a:spcAft>
-                          <a:spcPts val="0"/>
-                        </a:spcAft>
-                      </a:pPr>
-                      <a:r>
-                        <a:rPr sz="1400" b="1" i="0">
-                          <a:solidFill>
-                            <a:srgbClr val="FFFFFF"/>
-                          </a:solidFill>
-                          <a:latin typeface="Inter"/>
-                        </a:rPr>
-                        <a:t>Alta</a:t>
-                      </a:r>
-                    </a:p>
-                  </a:txBody>
-                  <a:tcPr anchor="ctr" marL="76200" marR="76200" marT="50800" marB="50800">
-                    <a:solidFill>
-                      <a:srgbClr val="A72C2C"/>
-                    </a:solidFill>
-                  </a:tcPr>
-                </a:tc>
-              </a:tr>
-              <a:tr h="780000">
-                <a:tc>
-                  <a:txBody>
-                    <a:bodyPr wrap="square"/>
-                    <a:lstStyle/>
-                    <a:p>
-                      <a:pPr algn="l">
-                        <a:lnSpc>
-                          <a:spcPct val="110000"/>
-                        </a:lnSpc>
-                        <a:spcBef>
-                          <a:spcPts val="0"/>
-                        </a:spcBef>
-                        <a:spcAft>
-                          <a:spcPts val="0"/>
-                        </a:spcAft>
-                      </a:pPr>
-                      <a:r>
-                        <a:rPr sz="1400" b="1" i="0">
-                          <a:solidFill>
-                            <a:srgbClr val="C13F26"/>
-                          </a:solidFill>
-                          <a:latin typeface="Fredoka"/>
-                        </a:rPr>
-                        <a:t>D  </a:t>
-                      </a:r>
-                      <a:r>
-                        <a:rPr sz="1400" b="0" i="0">
-                          <a:solidFill>
-                            <a:srgbClr val="FFFFFF"/>
-                          </a:solidFill>
-                          <a:latin typeface="Inter"/>
-                        </a:rPr>
-                        <a:t>Modelo de precios todavía no decidido</a:t>
-                      </a:r>
-                    </a:p>
-                  </a:txBody>
-                  <a:tcPr anchor="ctr" marL="76200" marR="76200" marT="50800" marB="50800">
-                    <a:solidFill>
-                      <a:srgbClr val="1D1D1B"/>
-                    </a:solidFill>
-                  </a:tcPr>
-                </a:tc>
-                <a:tc>
-                  <a:txBody>
-                    <a:bodyPr wrap="square"/>
-                    <a:lstStyle/>
-                    <a:p>
-                      <a:pPr algn="ctr">
-                        <a:lnSpc>
-                          <a:spcPct val="105000"/>
-                        </a:lnSpc>
-                        <a:spcBef>
-                          <a:spcPts val="0"/>
-                        </a:spcBef>
-                        <a:spcAft>
-                          <a:spcPts val="0"/>
-                        </a:spcAft>
-                      </a:pPr>
-                      <a:r>
-                        <a:rPr sz="1400" b="1" i="0">
-                          <a:solidFill>
-                            <a:srgbClr val="FFFFFF"/>
-                          </a:solidFill>
-                          <a:latin typeface="Inter"/>
-                        </a:rPr>
-                        <a:t>Media</a:t>
-                      </a:r>
-                    </a:p>
-                  </a:txBody>
-                  <a:tcPr anchor="ctr" marL="76200" marR="76200" marT="50800" marB="50800">
-                    <a:solidFill>
-                      <a:srgbClr val="C8811A"/>
-                    </a:solidFill>
-                  </a:tcPr>
-                </a:tc>
-                <a:tc>
-                  <a:txBody>
-                    <a:bodyPr wrap="square"/>
-                    <a:lstStyle/>
-                    <a:p>
-                      <a:pPr algn="ctr">
-                        <a:lnSpc>
-                          <a:spcPct val="105000"/>
-                        </a:lnSpc>
-                        <a:spcBef>
-                          <a:spcPts val="0"/>
-                        </a:spcBef>
-                        <a:spcAft>
-                          <a:spcPts val="0"/>
-                        </a:spcAft>
-                      </a:pPr>
-                      <a:r>
-                        <a:rPr sz="1400" b="1" i="0">
-                          <a:solidFill>
-                            <a:srgbClr val="FFFFFF"/>
-                          </a:solidFill>
-                          <a:latin typeface="Inter"/>
-                        </a:rPr>
-                        <a:t>Media a Alta</a:t>
-                      </a:r>
-                    </a:p>
-                  </a:txBody>
-                  <a:tcPr anchor="ctr" marL="76200" marR="76200" marT="50800" marB="50800">
-                    <a:solidFill>
-                      <a:srgbClr val="C8811A"/>
-                    </a:solidFill>
-                  </a:tcPr>
-                </a:tc>
-              </a:tr>
-              <a:tr h="780000">
-                <a:tc>
-                  <a:txBody>
-                    <a:bodyPr wrap="square"/>
-                    <a:lstStyle/>
-                    <a:p>
-                      <a:pPr algn="l">
-                        <a:lnSpc>
-                          <a:spcPct val="110000"/>
-                        </a:lnSpc>
-                        <a:spcBef>
-                          <a:spcPts val="0"/>
-                        </a:spcBef>
-                        <a:spcAft>
-                          <a:spcPts val="0"/>
-                        </a:spcAft>
-                      </a:pPr>
-                      <a:r>
-                        <a:rPr sz="1400" b="1" i="0">
-                          <a:solidFill>
-                            <a:srgbClr val="C13F26"/>
-                          </a:solidFill>
-                          <a:latin typeface="Fredoka"/>
-                        </a:rPr>
-                        <a:t>E  </a:t>
-                      </a:r>
-                      <a:r>
-                        <a:rPr sz="1400" b="0" i="0">
-                          <a:solidFill>
-                            <a:srgbClr val="FFFFFF"/>
-                          </a:solidFill>
-                          <a:latin typeface="Inter"/>
-                        </a:rPr>
-                        <a:t>Sesgo en futuras recomendaciones proactivas (visión de largo plazo, aún no construida)</a:t>
-                      </a:r>
-                    </a:p>
-                  </a:txBody>
-                  <a:tcPr anchor="ctr" marL="76200" marR="76200" marT="50800" marB="50800">
-                    <a:solidFill>
-                      <a:srgbClr val="141413"/>
-                    </a:solidFill>
-                  </a:tcPr>
-                </a:tc>
-                <a:tc>
-                  <a:txBody>
-                    <a:bodyPr wrap="square"/>
-                    <a:lstStyle/>
-                    <a:p>
-                      <a:pPr algn="ctr">
-                        <a:lnSpc>
-                          <a:spcPct val="105000"/>
-                        </a:lnSpc>
-                        <a:spcBef>
-                          <a:spcPts val="0"/>
-                        </a:spcBef>
-                        <a:spcAft>
-                          <a:spcPts val="0"/>
-                        </a:spcAft>
-                      </a:pPr>
-                      <a:r>
-                        <a:rPr sz="1400" b="1" i="0">
-                          <a:solidFill>
-                            <a:srgbClr val="FFFFFF"/>
-                          </a:solidFill>
-                          <a:latin typeface="Inter"/>
-                        </a:rPr>
-                        <a:t>Baja (aún no existe)</a:t>
-                      </a:r>
-                    </a:p>
-                  </a:txBody>
-                  <a:tcPr anchor="ctr" marL="76200" marR="76200" marT="50800" marB="50800">
-                    <a:solidFill>
-                      <a:srgbClr val="2E7D46"/>
-                    </a:solidFill>
-                  </a:tcPr>
-                </a:tc>
-                <a:tc>
-                  <a:txBody>
-                    <a:bodyPr wrap="square"/>
-                    <a:lstStyle/>
-                    <a:p>
-                      <a:pPr algn="ctr">
-                        <a:lnSpc>
-                          <a:spcPct val="105000"/>
-                        </a:lnSpc>
-                        <a:spcBef>
-                          <a:spcPts val="0"/>
-                        </a:spcBef>
-                        <a:spcAft>
-                          <a:spcPts val="0"/>
-                        </a:spcAft>
-                      </a:pPr>
-                      <a:r>
-                        <a:rPr sz="1400" b="1" i="0">
-                          <a:solidFill>
-                            <a:srgbClr val="FFFFFF"/>
-                          </a:solidFill>
-                          <a:latin typeface="Inter"/>
-                        </a:rPr>
-                        <a:t>Alta</a:t>
-                      </a:r>
-                    </a:p>
-                  </a:txBody>
-                  <a:tcPr anchor="ctr" marL="76200" marR="76200" marT="50800" marB="50800">
-                    <a:solidFill>
-                      <a:srgbClr val="A72C2C"/>
-                    </a:solidFill>
-                  </a:tcPr>
-                </a:tc>
-              </a:tr>
-            </a:tbl>
-          </a:graphicData>
-        </a:graphic>
-      </p:graphicFrame>
-      <p:sp>
-        <p:nvSpPr>
-          <p:cNvPr id="7" name="TextBox 6"/>
+              <a:t>1</a:t>
+            </a:r>
+          </a:p>
+        </p:txBody>
+      </p:sp>
+      <p:sp>
+        <p:nvSpPr>
+          <p:cNvPr id="6" name="TextBox 5"/>
           <p:cNvSpPr txBox="1"/>
           <p:nvPr/>
         </p:nvSpPr>
         <p:spPr>
           <a:xfrm>
-            <a:off x="8172960" y="1780000"/>
-            <a:ext cx="3196080" cy="320000"/>
+            <a:off x="1371600" y="2377440"/>
+            <a:ext cx="9800000" cy="320000"/>
           </a:xfrm>
           <a:prstGeom prst="rect">
             <a:avLst/>
@@ -8040,41 +5670,34 @@
           <a:noFill/>
         </p:spPr>
         <p:txBody>
-          <a:bodyPr wrap="square" anchor="t" lIns="0" rIns="0" tIns="0" bIns="0">
+          <a:bodyPr wrap="square">
             <a:spAutoFit/>
           </a:bodyPr>
           <a:lstStyle/>
           <a:p>
-            <a:pPr algn="l">
-              <a:spcBef>
-                <a:spcPts val="0"/>
-              </a:spcBef>
-              <a:spcAft>
-                <a:spcPts val="0"/>
-              </a:spcAft>
-            </a:pPr>
-            <a:r>
-              <a:rPr sz="1200" b="1" i="0">
-                <a:solidFill>
-                  <a:srgbClr val="C13F26"/>
-                </a:solidFill>
-                <a:latin typeface="Inter"/>
+            <a:pPr algn="l"/>
+            <a:r>
+              <a:rPr sz="1700" b="1" i="0">
+                <a:solidFill>
+                  <a:srgbClr val="FFFFFF"/>
+                </a:solidFill>
+                <a:latin typeface="Fredoka"/>
               </a:rPr>
-              <a:t>B L O Q U E O S</a:t>
-            </a:r>
-          </a:p>
-        </p:txBody>
-      </p:sp>
-      <p:sp>
-        <p:nvSpPr>
-          <p:cNvPr id="8" name="TextBox 7"/>
+              <a:t>Piloto de conversación directa</a:t>
+            </a:r>
+          </a:p>
+        </p:txBody>
+      </p:sp>
+      <p:sp>
+        <p:nvSpPr>
+          <p:cNvPr id="7" name="TextBox 6"/>
           <p:cNvSpPr txBox="1"/>
           <p:nvPr/>
         </p:nvSpPr>
         <p:spPr>
           <a:xfrm>
-            <a:off x="8172960" y="2200000"/>
-            <a:ext cx="3196080" cy="900000"/>
+            <a:off x="1371600" y="2697480"/>
+            <a:ext cx="9800000" cy="320000"/>
           </a:xfrm>
           <a:prstGeom prst="rect">
             <a:avLst/>
@@ -8082,75 +5705,34 @@
           <a:noFill/>
         </p:spPr>
         <p:txBody>
-          <a:bodyPr wrap="square" anchor="t" lIns="0" rIns="0" tIns="0" bIns="0">
+          <a:bodyPr wrap="square">
             <a:spAutoFit/>
           </a:bodyPr>
           <a:lstStyle/>
           <a:p>
-            <a:pPr algn="l">
-              <a:lnSpc>
-                <a:spcPct val="115000"/>
-              </a:lnSpc>
-              <a:spcBef>
-                <a:spcPts val="0"/>
-              </a:spcBef>
-              <a:spcAft>
-                <a:spcPts val="0"/>
-              </a:spcAft>
-            </a:pPr>
-            <a:r>
-              <a:rPr sz="1400" b="1" i="0">
-                <a:solidFill>
-                  <a:srgbClr val="C13F26"/>
-                </a:solidFill>
-                <a:latin typeface="Fredoka"/>
-              </a:rPr>
-              <a:t>(B) </a:t>
-            </a:r>
-            <a:r>
-              <a:rPr sz="1400" b="1" i="0">
-                <a:solidFill>
-                  <a:srgbClr val="FFFFFF"/>
-                </a:solidFill>
-                <a:latin typeface="Fredoka"/>
-              </a:rPr>
-              <a:t>Legal y cumplimiento</a:t>
-            </a:r>
-          </a:p>
-          <a:p>
-            <a:pPr algn="l">
-              <a:lnSpc>
-                <a:spcPct val="120000"/>
-              </a:lnSpc>
-              <a:spcBef>
-                <a:spcPts val="200"/>
-              </a:spcBef>
-              <a:spcAft>
-                <a:spcPts val="0"/>
-              </a:spcAft>
-            </a:pPr>
-            <a:r>
-              <a:rPr sz="1400" b="0" i="0">
-                <a:solidFill>
-                  <a:srgbClr val="C7C5C0"/>
+            <a:pPr algn="l"/>
+            <a:r>
+              <a:rPr sz="1300" b="0" i="0">
+                <a:solidFill>
+                  <a:srgbClr val="F3D9D1"/>
                 </a:solidFill>
                 <a:latin typeface="Inter"/>
               </a:rPr>
-              <a:t>Aviso de privacidad explícito antes de recolectar cualquier dato de clientes.</a:t>
-            </a:r>
-          </a:p>
-        </p:txBody>
-      </p:sp>
-      <p:sp>
-        <p:nvSpPr>
-          <p:cNvPr id="9" name="TextBox 8"/>
+              <a:t>Para entender de verdad por qué la gente no completa el registro.</a:t>
+            </a:r>
+          </a:p>
+        </p:txBody>
+      </p:sp>
+      <p:sp>
+        <p:nvSpPr>
+          <p:cNvPr id="8" name="TextBox 7"/>
           <p:cNvSpPr txBox="1"/>
           <p:nvPr/>
         </p:nvSpPr>
         <p:spPr>
           <a:xfrm>
-            <a:off x="8172960" y="3280000"/>
-            <a:ext cx="3196080" cy="900000"/>
+            <a:off x="822960" y="3108960"/>
+            <a:ext cx="457200" cy="457200"/>
           </a:xfrm>
           <a:prstGeom prst="rect">
             <a:avLst/>
@@ -8158,75 +5740,34 @@
           <a:noFill/>
         </p:spPr>
         <p:txBody>
-          <a:bodyPr wrap="square" anchor="t" lIns="0" rIns="0" tIns="0" bIns="0">
+          <a:bodyPr wrap="square">
             <a:spAutoFit/>
           </a:bodyPr>
           <a:lstStyle/>
           <a:p>
-            <a:pPr algn="l">
-              <a:lnSpc>
-                <a:spcPct val="115000"/>
-              </a:lnSpc>
-              <a:spcBef>
-                <a:spcPts val="0"/>
-              </a:spcBef>
-              <a:spcAft>
-                <a:spcPts val="0"/>
-              </a:spcAft>
-            </a:pPr>
-            <a:r>
-              <a:rPr sz="1400" b="1" i="0">
-                <a:solidFill>
-                  <a:srgbClr val="C13F26"/>
+            <a:pPr algn="l"/>
+            <a:r>
+              <a:rPr sz="2200" b="1" i="0">
+                <a:solidFill>
+                  <a:srgbClr val="F3D9D1"/>
                 </a:solidFill>
                 <a:latin typeface="Fredoka"/>
               </a:rPr>
-              <a:t>(A) </a:t>
-            </a:r>
-            <a:r>
-              <a:rPr sz="1400" b="1" i="0">
-                <a:solidFill>
-                  <a:srgbClr val="FFFFFF"/>
-                </a:solidFill>
-                <a:latin typeface="Fredoka"/>
-              </a:rPr>
-              <a:t>TI y seguridad</a:t>
-            </a:r>
-          </a:p>
-          <a:p>
-            <a:pPr algn="l">
-              <a:lnSpc>
-                <a:spcPct val="120000"/>
-              </a:lnSpc>
-              <a:spcBef>
-                <a:spcPts val="200"/>
-              </a:spcBef>
-              <a:spcAft>
-                <a:spcPts val="0"/>
-              </a:spcAft>
-            </a:pPr>
-            <a:r>
-              <a:rPr sz="1400" b="0" i="0">
-                <a:solidFill>
-                  <a:srgbClr val="C7C5C0"/>
-                </a:solidFill>
-                <a:latin typeface="Inter"/>
-              </a:rPr>
-              <a:t>Exportación periódica de datos fuera de Supabase, antes de comprometerme más allá del piloto.</a:t>
-            </a:r>
-          </a:p>
-        </p:txBody>
-      </p:sp>
-      <p:sp>
-        <p:nvSpPr>
-          <p:cNvPr id="10" name="TextBox 9"/>
+              <a:t>2</a:t>
+            </a:r>
+          </a:p>
+        </p:txBody>
+      </p:sp>
+      <p:sp>
+        <p:nvSpPr>
+          <p:cNvPr id="9" name="TextBox 8"/>
           <p:cNvSpPr txBox="1"/>
           <p:nvPr/>
         </p:nvSpPr>
         <p:spPr>
           <a:xfrm>
-            <a:off x="8172960" y="4360000"/>
-            <a:ext cx="3196080" cy="900000"/>
+            <a:off x="1371600" y="3108960"/>
+            <a:ext cx="9800000" cy="320000"/>
           </a:xfrm>
           <a:prstGeom prst="rect">
             <a:avLst/>
@@ -8234,75 +5775,34 @@
           <a:noFill/>
         </p:spPr>
         <p:txBody>
-          <a:bodyPr wrap="square" anchor="t" lIns="0" rIns="0" tIns="0" bIns="0">
+          <a:bodyPr wrap="square">
             <a:spAutoFit/>
           </a:bodyPr>
           <a:lstStyle/>
           <a:p>
-            <a:pPr algn="l">
-              <a:lnSpc>
-                <a:spcPct val="115000"/>
-              </a:lnSpc>
-              <a:spcBef>
-                <a:spcPts val="0"/>
-              </a:spcBef>
-              <a:spcAft>
-                <a:spcPts val="0"/>
-              </a:spcAft>
-            </a:pPr>
-            <a:r>
-              <a:rPr sz="1400" b="1" i="0">
-                <a:solidFill>
-                  <a:srgbClr val="C13F26"/>
+            <a:pPr algn="l"/>
+            <a:r>
+              <a:rPr sz="1700" b="1" i="0">
+                <a:solidFill>
+                  <a:srgbClr val="FFFFFF"/>
                 </a:solidFill>
                 <a:latin typeface="Fredoka"/>
               </a:rPr>
-              <a:t>(D) </a:t>
-            </a:r>
-            <a:r>
-              <a:rPr sz="1400" b="1" i="0">
-                <a:solidFill>
-                  <a:srgbClr val="FFFFFF"/>
-                </a:solidFill>
-                <a:latin typeface="Fredoka"/>
-              </a:rPr>
-              <a:t>Finanzas</a:t>
-            </a:r>
-          </a:p>
-          <a:p>
-            <a:pPr algn="l">
-              <a:lnSpc>
-                <a:spcPct val="120000"/>
-              </a:lnSpc>
-              <a:spcBef>
-                <a:spcPts val="200"/>
-              </a:spcBef>
-              <a:spcAft>
-                <a:spcPts val="0"/>
-              </a:spcAft>
-            </a:pPr>
-            <a:r>
-              <a:rPr sz="1400" b="0" i="0">
-                <a:solidFill>
-                  <a:srgbClr val="C7C5C0"/>
-                </a:solidFill>
-                <a:latin typeface="Inter"/>
-              </a:rPr>
-              <a:t>Investigación de precios comparables de SaaS para pequeños comerciantes en México.</a:t>
-            </a:r>
-          </a:p>
-        </p:txBody>
-      </p:sp>
-      <p:sp>
-        <p:nvSpPr>
-          <p:cNvPr id="11" name="TextBox 10"/>
+              <a:t>Secuencia de entrada rediseñada</a:t>
+            </a:r>
+          </a:p>
+        </p:txBody>
+      </p:sp>
+      <p:sp>
+        <p:nvSpPr>
+          <p:cNvPr id="10" name="TextBox 9"/>
           <p:cNvSpPr txBox="1"/>
           <p:nvPr/>
         </p:nvSpPr>
         <p:spPr>
           <a:xfrm>
-            <a:off x="8172960" y="5440000"/>
-            <a:ext cx="3196080" cy="900000"/>
+            <a:off x="1371600" y="3429000"/>
+            <a:ext cx="9800000" cy="320000"/>
           </a:xfrm>
           <a:prstGeom prst="rect">
             <a:avLst/>
@@ -8310,62 +5810,221 @@
           <a:noFill/>
         </p:spPr>
         <p:txBody>
-          <a:bodyPr wrap="square" anchor="t" lIns="0" rIns="0" tIns="0" bIns="0">
+          <a:bodyPr wrap="square">
             <a:spAutoFit/>
           </a:bodyPr>
           <a:lstStyle/>
           <a:p>
-            <a:pPr algn="l">
-              <a:lnSpc>
-                <a:spcPct val="115000"/>
-              </a:lnSpc>
-              <a:spcBef>
-                <a:spcPts val="0"/>
-              </a:spcBef>
-              <a:spcAft>
-                <a:spcPts val="0"/>
-              </a:spcAft>
-            </a:pPr>
-            <a:r>
-              <a:rPr sz="1400" b="1" i="0">
-                <a:solidFill>
-                  <a:srgbClr val="C13F26"/>
+            <a:pPr algn="l"/>
+            <a:r>
+              <a:rPr sz="1300" b="0" i="0">
+                <a:solidFill>
+                  <a:srgbClr val="F3D9D1"/>
+                </a:solidFill>
+                <a:latin typeface="Inter"/>
+              </a:rPr>
+              <a:t>Un comercio calificado llega a su primera venta antes de configurar nada.</a:t>
+            </a:r>
+          </a:p>
+        </p:txBody>
+      </p:sp>
+      <p:sp>
+        <p:nvSpPr>
+          <p:cNvPr id="11" name="TextBox 10"/>
+          <p:cNvSpPr txBox="1"/>
+          <p:nvPr/>
+        </p:nvSpPr>
+        <p:spPr>
+          <a:xfrm>
+            <a:off x="822960" y="3840480"/>
+            <a:ext cx="457200" cy="457200"/>
+          </a:xfrm>
+          <a:prstGeom prst="rect">
+            <a:avLst/>
+          </a:prstGeom>
+          <a:noFill/>
+        </p:spPr>
+        <p:txBody>
+          <a:bodyPr wrap="square">
+            <a:spAutoFit/>
+          </a:bodyPr>
+          <a:lstStyle/>
+          <a:p>
+            <a:pPr algn="l"/>
+            <a:r>
+              <a:rPr sz="2200" b="1" i="0">
+                <a:solidFill>
+                  <a:srgbClr val="F3D9D1"/>
                 </a:solidFill>
                 <a:latin typeface="Fredoka"/>
               </a:rPr>
-              <a:t>(C) </a:t>
-            </a:r>
-            <a:r>
-              <a:rPr sz="1400" b="1" i="0">
+              <a:t>3</a:t>
+            </a:r>
+          </a:p>
+        </p:txBody>
+      </p:sp>
+      <p:sp>
+        <p:nvSpPr>
+          <p:cNvPr id="12" name="TextBox 11"/>
+          <p:cNvSpPr txBox="1"/>
+          <p:nvPr/>
+        </p:nvSpPr>
+        <p:spPr>
+          <a:xfrm>
+            <a:off x="1371600" y="3840480"/>
+            <a:ext cx="9800000" cy="320000"/>
+          </a:xfrm>
+          <a:prstGeom prst="rect">
+            <a:avLst/>
+          </a:prstGeom>
+          <a:noFill/>
+        </p:spPr>
+        <p:txBody>
+          <a:bodyPr wrap="square">
+            <a:spAutoFit/>
+          </a:bodyPr>
+          <a:lstStyle/>
+          <a:p>
+            <a:pPr algn="l"/>
+            <a:r>
+              <a:rPr sz="1700" b="1" i="0">
                 <a:solidFill>
                   <a:srgbClr val="FFFFFF"/>
                 </a:solidFill>
                 <a:latin typeface="Fredoka"/>
               </a:rPr>
-              <a:t>No es un bloqueo externo</a:t>
-            </a:r>
-          </a:p>
-          <a:p>
-            <a:pPr algn="l">
-              <a:lnSpc>
-                <a:spcPct val="120000"/>
-              </a:lnSpc>
-              <a:spcBef>
-                <a:spcPts val="200"/>
-              </a:spcBef>
-              <a:spcAft>
-                <a:spcPts val="0"/>
-              </a:spcAft>
-            </a:pPr>
-            <a:r>
-              <a:rPr sz="1400" b="0" i="0">
-                <a:solidFill>
-                  <a:srgbClr val="C7C5C0"/>
+              <a:t>Precio, todavía abierto</a:t>
+            </a:r>
+          </a:p>
+        </p:txBody>
+      </p:sp>
+      <p:sp>
+        <p:nvSpPr>
+          <p:cNvPr id="13" name="TextBox 12"/>
+          <p:cNvSpPr txBox="1"/>
+          <p:nvPr/>
+        </p:nvSpPr>
+        <p:spPr>
+          <a:xfrm>
+            <a:off x="1371600" y="4160520"/>
+            <a:ext cx="9800000" cy="320000"/>
+          </a:xfrm>
+          <a:prstGeom prst="rect">
+            <a:avLst/>
+          </a:prstGeom>
+          <a:noFill/>
+        </p:spPr>
+        <p:txBody>
+          <a:bodyPr wrap="square">
+            <a:spAutoFit/>
+          </a:bodyPr>
+          <a:lstStyle/>
+          <a:p>
+            <a:pPr algn="l"/>
+            <a:r>
+              <a:rPr sz="1300" b="0" i="0">
+                <a:solidFill>
+                  <a:srgbClr val="F3D9D1"/>
                 </a:solidFill>
                 <a:latin typeface="Inter"/>
               </a:rPr>
-              <a:t>Me corresponde a mí resolverlo. El piloto Concierge/DM ya está en marcha.</a:t>
-            </a:r>
+              <a:t>Sin comisión por transacción. El resto sigue en discusión.</a:t>
+            </a:r>
+          </a:p>
+        </p:txBody>
+      </p:sp>
+      <p:sp>
+        <p:nvSpPr>
+          <p:cNvPr id="15" name="TextBox 14"/>
+          <p:cNvSpPr txBox="1"/>
+          <p:nvPr/>
+        </p:nvSpPr>
+        <p:spPr>
+          <a:xfrm>
+            <a:off x="822960" y="5166360"/>
+            <a:ext cx="10546080" cy="323165"/>
+          </a:xfrm>
+          <a:prstGeom prst="rect">
+            <a:avLst/>
+          </a:prstGeom>
+          <a:noFill/>
+        </p:spPr>
+        <p:txBody>
+          <a:bodyPr wrap="square">
+            <a:spAutoFit/>
+          </a:bodyPr>
+          <a:lstStyle/>
+          <a:p>
+            <a:pPr algn="l"/>
+            <a:r>
+              <a:rPr sz="1500" b="1" dirty="0" err="1">
+                <a:solidFill>
+                  <a:srgbClr val="FFFFFF"/>
+                </a:solidFill>
+                <a:latin typeface="Inter"/>
+              </a:rPr>
+              <a:t>demo.nahui.app</a:t>
+            </a:r>
+            <a:r>
+              <a:rPr sz="1500" b="1" dirty="0">
+                <a:solidFill>
+                  <a:srgbClr val="FFFFFF"/>
+                </a:solidFill>
+                <a:latin typeface="Inter"/>
+              </a:rPr>
+              <a:t>   ·   </a:t>
+            </a:r>
+            <a:r>
+              <a:rPr sz="1500" b="1" dirty="0" err="1">
+                <a:solidFill>
+                  <a:srgbClr val="FFFFFF"/>
+                </a:solidFill>
+                <a:latin typeface="Inter"/>
+              </a:rPr>
+              <a:t>github.com</a:t>
+            </a:r>
+            <a:r>
+              <a:rPr sz="1500" b="1" dirty="0">
+                <a:solidFill>
+                  <a:srgbClr val="FFFFFF"/>
+                </a:solidFill>
+                <a:latin typeface="Inter"/>
+              </a:rPr>
+              <a:t>/</a:t>
+            </a:r>
+            <a:r>
+              <a:rPr sz="1500" b="1" dirty="0" err="1">
+                <a:solidFill>
+                  <a:srgbClr val="FFFFFF"/>
+                </a:solidFill>
+                <a:latin typeface="Inter"/>
+              </a:rPr>
+              <a:t>claudiafalcon</a:t>
+            </a:r>
+            <a:r>
+              <a:rPr sz="1500" b="1" dirty="0">
+                <a:solidFill>
+                  <a:srgbClr val="FFFFFF"/>
+                </a:solidFill>
+                <a:latin typeface="Inter"/>
+              </a:rPr>
+              <a:t>/</a:t>
+            </a:r>
+            <a:r>
+              <a:rPr sz="1500" b="1" dirty="0" err="1">
+                <a:solidFill>
+                  <a:srgbClr val="FFFFFF"/>
+                </a:solidFill>
+                <a:latin typeface="Inter"/>
+              </a:rPr>
+              <a:t>nhui</a:t>
+            </a:r>
+            <a:endParaRPr sz="1500" b="1" dirty="0">
+              <a:solidFill>
+                <a:srgbClr val="FFFFFF"/>
+              </a:solidFill>
+              <a:latin typeface="Inter"/>
+            </a:endParaRPr>
           </a:p>
         </p:txBody>
       </p:sp>
@@ -8374,187 +6033,6 @@
   <p:clrMapOvr>
     <a:masterClrMapping/>
   </p:clrMapOvr>
-  <p:transition spd="med">
-    <p:cut/>
-  </p:transition>
-</p:sld>
-</file>
-
-<file path=ppt/slides/slide8.xml><?xml version="1.0" encoding="utf-8"?>
-<p:sld xmlns:a="http://schemas.openxmlformats.org/drawingml/2006/main" xmlns:p="http://schemas.openxmlformats.org/presentationml/2006/main" xmlns:r="http://schemas.openxmlformats.org/officeDocument/2006/relationships">
-  <p:cSld>
-    <p:spTree>
-      <p:nvGrpSpPr>
-        <p:cNvPr id="1" name=""/>
-        <p:cNvGrpSpPr/>
-        <p:nvPr/>
-      </p:nvGrpSpPr>
-      <p:grpSpPr/>
-      <p:sp>
-        <p:nvSpPr>
-          <p:cNvPr id="2" name="Rectangle 1"/>
-          <p:cNvSpPr/>
-          <p:nvPr/>
-        </p:nvSpPr>
-        <p:spPr>
-          <a:xfrm>
-            <a:off x="0" y="0"/>
-            <a:ext cx="12192000" cy="6858000"/>
-          </a:xfrm>
-          <a:prstGeom prst="rect">
-            <a:avLst/>
-          </a:prstGeom>
-          <a:solidFill>
-            <a:srgbClr val="FAF9F5"/>
-          </a:solidFill>
-          <a:ln>
-            <a:noFill/>
-          </a:ln>
-          <a:effectLst/>
-        </p:spPr>
-        <p:style>
-          <a:lnRef idx="1">
-            <a:schemeClr val="accent1"/>
-          </a:lnRef>
-          <a:fillRef idx="3">
-            <a:schemeClr val="accent1"/>
-          </a:fillRef>
-          <a:effectRef idx="2">
-            <a:schemeClr val="accent1"/>
-          </a:effectRef>
-          <a:fontRef idx="minor">
-            <a:schemeClr val="lt1"/>
-          </a:fontRef>
-        </p:style>
-        <p:txBody>
-          <a:bodyPr rtlCol="0" anchor="ctr"/>
-          <a:lstStyle/>
-          <a:p>
-            <a:pPr algn="ctr"/>
-          </a:p>
-        </p:txBody>
-      </p:sp>
-      <p:pic>
-        <p:nvPicPr>
-          <p:cNvPr id="3" name="Picture 2" descr="equipo-v2.png"/>
-          <p:cNvPicPr>
-            <a:picLocks noChangeAspect="1"/>
-          </p:cNvPicPr>
-          <p:nvPr/>
-        </p:nvPicPr>
-        <p:blipFill>
-          <a:blip r:embed="rId2"/>
-          <a:stretch>
-            <a:fillRect/>
-          </a:stretch>
-        </p:blipFill>
-        <p:spPr>
-          <a:xfrm>
-            <a:off x="0" y="0"/>
-            <a:ext cx="12192000" cy="6858000"/>
-          </a:xfrm>
-          <a:prstGeom prst="rect">
-            <a:avLst/>
-          </a:prstGeom>
-        </p:spPr>
-      </p:pic>
-    </p:spTree>
-  </p:cSld>
-  <p:clrMapOvr>
-    <a:masterClrMapping/>
-  </p:clrMapOvr>
-  <p:transition spd="slow">
-    <p:fade thruBlk="1"/>
-  </p:transition>
-</p:sld>
-</file>
-
-<file path=ppt/slides/slide9.xml><?xml version="1.0" encoding="utf-8"?>
-<p:sld xmlns:a="http://schemas.openxmlformats.org/drawingml/2006/main" xmlns:p="http://schemas.openxmlformats.org/presentationml/2006/main" xmlns:r="http://schemas.openxmlformats.org/officeDocument/2006/relationships">
-  <p:cSld>
-    <p:spTree>
-      <p:nvGrpSpPr>
-        <p:cNvPr id="1" name=""/>
-        <p:cNvGrpSpPr/>
-        <p:nvPr/>
-      </p:nvGrpSpPr>
-      <p:grpSpPr/>
-      <p:sp>
-        <p:nvSpPr>
-          <p:cNvPr id="2" name="Rectangle 1"/>
-          <p:cNvSpPr/>
-          <p:nvPr/>
-        </p:nvSpPr>
-        <p:spPr>
-          <a:xfrm>
-            <a:off x="0" y="0"/>
-            <a:ext cx="12192000" cy="6858000"/>
-          </a:xfrm>
-          <a:prstGeom prst="rect">
-            <a:avLst/>
-          </a:prstGeom>
-          <a:solidFill>
-            <a:srgbClr val="141413"/>
-          </a:solidFill>
-          <a:ln>
-            <a:noFill/>
-          </a:ln>
-          <a:effectLst/>
-        </p:spPr>
-        <p:style>
-          <a:lnRef idx="1">
-            <a:schemeClr val="accent1"/>
-          </a:lnRef>
-          <a:fillRef idx="3">
-            <a:schemeClr val="accent1"/>
-          </a:fillRef>
-          <a:effectRef idx="2">
-            <a:schemeClr val="accent1"/>
-          </a:effectRef>
-          <a:fontRef idx="minor">
-            <a:schemeClr val="lt1"/>
-          </a:fontRef>
-        </p:style>
-        <p:txBody>
-          <a:bodyPr rtlCol="0" anchor="ctr"/>
-          <a:lstStyle/>
-          <a:p>
-            <a:pPr algn="ctr"/>
-          </a:p>
-        </p:txBody>
-      </p:sp>
-      <p:pic>
-        <p:nvPicPr>
-          <p:cNvPr id="3" name="Picture 2" descr="ciclo-v2.png"/>
-          <p:cNvPicPr>
-            <a:picLocks noChangeAspect="1"/>
-          </p:cNvPicPr>
-          <p:nvPr/>
-        </p:nvPicPr>
-        <p:blipFill>
-          <a:blip r:embed="rId2"/>
-          <a:stretch>
-            <a:fillRect/>
-          </a:stretch>
-        </p:blipFill>
-        <p:spPr>
-          <a:xfrm>
-            <a:off x="0" y="0"/>
-            <a:ext cx="12192000" cy="6858000"/>
-          </a:xfrm>
-          <a:prstGeom prst="rect">
-            <a:avLst/>
-          </a:prstGeom>
-        </p:spPr>
-      </p:pic>
-    </p:spTree>
-  </p:cSld>
-  <p:clrMapOvr>
-    <a:masterClrMapping/>
-  </p:clrMapOvr>
-  <p:transition spd="med">
-    <p:push dir="u"/>
-  </p:transition>
 </p:sld>
 </file>
 
@@ -8889,44 +6367,44 @@
         <a:sysClr val="window" lastClr="FFFFFF"/>
       </a:lt1>
       <a:dk2>
-        <a:srgbClr val="1F497D"/>
+        <a:srgbClr val="0E2841"/>
       </a:dk2>
       <a:lt2>
-        <a:srgbClr val="EEECE1"/>
+        <a:srgbClr val="E8E8E8"/>
       </a:lt2>
       <a:accent1>
-        <a:srgbClr val="4F81BD"/>
+        <a:srgbClr val="156082"/>
       </a:accent1>
       <a:accent2>
-        <a:srgbClr val="C0504D"/>
+        <a:srgbClr val="E97132"/>
       </a:accent2>
       <a:accent3>
-        <a:srgbClr val="9BBB59"/>
+        <a:srgbClr val="196B24"/>
       </a:accent3>
       <a:accent4>
-        <a:srgbClr val="8064A2"/>
+        <a:srgbClr val="0F9ED5"/>
       </a:accent4>
       <a:accent5>
-        <a:srgbClr val="4BACC6"/>
+        <a:srgbClr val="A02B93"/>
       </a:accent5>
       <a:accent6>
-        <a:srgbClr val="F79646"/>
+        <a:srgbClr val="4EA72E"/>
       </a:accent6>
       <a:hlink>
-        <a:srgbClr val="0000FF"/>
+        <a:srgbClr val="467886"/>
       </a:hlink>
       <a:folHlink>
-        <a:srgbClr val="800080"/>
+        <a:srgbClr val="96607D"/>
       </a:folHlink>
     </a:clrScheme>
     <a:fontScheme name="Office">
       <a:majorFont>
-        <a:latin typeface="Calibri"/>
+        <a:latin typeface="Aptos Display" panose="02110004020202020204"/>
         <a:ea typeface=""/>
         <a:cs typeface=""/>
-        <a:font script="Jpan" typeface="ＭＳ Ｐゴシック"/>
+        <a:font script="Jpan" typeface="游ゴシック Light"/>
         <a:font script="Hang" typeface="맑은 고딕"/>
-        <a:font script="Hans" typeface="宋体"/>
+        <a:font script="Hans" typeface="等线 Light"/>
         <a:font script="Hant" typeface="新細明體"/>
         <a:font script="Arab" typeface="Times New Roman"/>
         <a:font script="Hebr" typeface="Times New Roman"/>
@@ -8954,14 +6432,31 @@
         <a:font script="Viet" typeface="Times New Roman"/>
         <a:font script="Uigh" typeface="Microsoft Uighur"/>
         <a:font script="Geor" typeface="Sylfaen"/>
+        <a:font script="Armn" typeface="Arial"/>
+        <a:font script="Bugi" typeface="Leelawadee UI"/>
+        <a:font script="Bopo" typeface="Microsoft JhengHei"/>
+        <a:font script="Java" typeface="Javanese Text"/>
+        <a:font script="Lisu" typeface="Segoe UI"/>
+        <a:font script="Mymr" typeface="Myanmar Text"/>
+        <a:font script="Nkoo" typeface="Ebrima"/>
+        <a:font script="Olck" typeface="Nirmala UI"/>
+        <a:font script="Osma" typeface="Ebrima"/>
+        <a:font script="Phag" typeface="Phagspa"/>
+        <a:font script="Syrn" typeface="Estrangelo Edessa"/>
+        <a:font script="Syrj" typeface="Estrangelo Edessa"/>
+        <a:font script="Syre" typeface="Estrangelo Edessa"/>
+        <a:font script="Sora" typeface="Nirmala UI"/>
+        <a:font script="Tale" typeface="Microsoft Tai Le"/>
+        <a:font script="Talu" typeface="Microsoft New Tai Lue"/>
+        <a:font script="Tfng" typeface="Ebrima"/>
       </a:majorFont>
       <a:minorFont>
-        <a:latin typeface="Calibri"/>
+        <a:latin typeface="Aptos" panose="02110004020202020204"/>
         <a:ea typeface=""/>
         <a:cs typeface=""/>
-        <a:font script="Jpan" typeface="ＭＳ Ｐゴシック"/>
+        <a:font script="Jpan" typeface="游ゴシック"/>
         <a:font script="Hang" typeface="맑은 고딕"/>
-        <a:font script="Hans" typeface="宋体"/>
+        <a:font script="Hans" typeface="等线"/>
         <a:font script="Hant" typeface="新細明體"/>
         <a:font script="Arab" typeface="Arial"/>
         <a:font script="Hebr" typeface="Arial"/>
@@ -8989,6 +6484,23 @@
         <a:font script="Viet" typeface="Arial"/>
         <a:font script="Uigh" typeface="Microsoft Uighur"/>
         <a:font script="Geor" typeface="Sylfaen"/>
+        <a:font script="Armn" typeface="Arial"/>
+        <a:font script="Bugi" typeface="Leelawadee UI"/>
+        <a:font script="Bopo" typeface="Microsoft JhengHei"/>
+        <a:font script="Java" typeface="Javanese Text"/>
+        <a:font script="Lisu" typeface="Segoe UI"/>
+        <a:font script="Mymr" typeface="Myanmar Text"/>
+        <a:font script="Nkoo" typeface="Ebrima"/>
+        <a:font script="Olck" typeface="Nirmala UI"/>
+        <a:font script="Osma" typeface="Ebrima"/>
+        <a:font script="Phag" typeface="Phagspa"/>
+        <a:font script="Syrn" typeface="Estrangelo Edessa"/>
+        <a:font script="Syrj" typeface="Estrangelo Edessa"/>
+        <a:font script="Syre" typeface="Estrangelo Edessa"/>
+        <a:font script="Sora" typeface="Nirmala UI"/>
+        <a:font script="Tale" typeface="Microsoft Tai Le"/>
+        <a:font script="Talu" typeface="Microsoft New Tai Lue"/>
+        <a:font script="Tfng" typeface="Ebrima"/>
       </a:minorFont>
     </a:fontScheme>
     <a:fmtScheme name="Office">
@@ -9000,180 +6512,136 @@
           <a:gsLst>
             <a:gs pos="0">
               <a:schemeClr val="phClr">
-                <a:tint val="50000"/>
-                <a:satMod val="300000"/>
+                <a:lumMod val="110000"/>
+                <a:satMod val="105000"/>
+                <a:tint val="67000"/>
               </a:schemeClr>
             </a:gs>
-            <a:gs pos="35000">
+            <a:gs pos="50000">
               <a:schemeClr val="phClr">
-                <a:tint val="37000"/>
-                <a:satMod val="300000"/>
+                <a:lumMod val="105000"/>
+                <a:satMod val="103000"/>
+                <a:tint val="73000"/>
               </a:schemeClr>
             </a:gs>
             <a:gs pos="100000">
               <a:schemeClr val="phClr">
-                <a:tint val="15000"/>
-                <a:satMod val="350000"/>
+                <a:lumMod val="105000"/>
+                <a:satMod val="109000"/>
+                <a:tint val="81000"/>
               </a:schemeClr>
             </a:gs>
           </a:gsLst>
-          <a:lin ang="16200000" scaled="1"/>
+          <a:lin ang="5400000" scaled="0"/>
         </a:gradFill>
         <a:gradFill rotWithShape="1">
           <a:gsLst>
             <a:gs pos="0">
               <a:schemeClr val="phClr">
-                <a:tint val="100000"/>
+                <a:satMod val="103000"/>
+                <a:lumMod val="102000"/>
+                <a:tint val="94000"/>
+              </a:schemeClr>
+            </a:gs>
+            <a:gs pos="50000">
+              <a:schemeClr val="phClr">
+                <a:satMod val="110000"/>
+                <a:lumMod val="100000"/>
                 <a:shade val="100000"/>
-                <a:satMod val="130000"/>
               </a:schemeClr>
             </a:gs>
             <a:gs pos="100000">
               <a:schemeClr val="phClr">
-                <a:tint val="50000"/>
-                <a:shade val="100000"/>
-                <a:satMod val="350000"/>
+                <a:lumMod val="99000"/>
+                <a:satMod val="120000"/>
+                <a:shade val="78000"/>
               </a:schemeClr>
             </a:gs>
           </a:gsLst>
-          <a:lin ang="16200000" scaled="0"/>
+          <a:lin ang="5400000" scaled="0"/>
         </a:gradFill>
       </a:fillStyleLst>
       <a:lnStyleLst>
-        <a:ln w="9525" cap="flat" cmpd="sng" algn="ctr">
+        <a:ln w="12700" cap="flat" cmpd="sng" algn="ctr">
           <a:solidFill>
-            <a:schemeClr val="phClr">
-              <a:shade val="95000"/>
-              <a:satMod val="105000"/>
-            </a:schemeClr>
+            <a:schemeClr val="phClr"/>
           </a:solidFill>
           <a:prstDash val="solid"/>
+          <a:miter lim="800000"/>
+        </a:ln>
+        <a:ln w="19050" cap="flat" cmpd="sng" algn="ctr">
+          <a:solidFill>
+            <a:schemeClr val="phClr"/>
+          </a:solidFill>
+          <a:prstDash val="solid"/>
+          <a:miter lim="800000"/>
         </a:ln>
         <a:ln w="25400" cap="flat" cmpd="sng" algn="ctr">
           <a:solidFill>
             <a:schemeClr val="phClr"/>
           </a:solidFill>
           <a:prstDash val="solid"/>
-        </a:ln>
-        <a:ln w="38100" cap="flat" cmpd="sng" algn="ctr">
-          <a:solidFill>
-            <a:schemeClr val="phClr"/>
-          </a:solidFill>
-          <a:prstDash val="solid"/>
+          <a:miter lim="800000"/>
         </a:ln>
       </a:lnStyleLst>
       <a:effectStyleLst>
         <a:effectStyle>
+          <a:effectLst/>
+        </a:effectStyle>
+        <a:effectStyle>
+          <a:effectLst/>
+        </a:effectStyle>
+        <a:effectStyle>
           <a:effectLst>
-            <a:outerShdw blurRad="40000" dist="20000" dir="5400000" rotWithShape="0">
+            <a:outerShdw blurRad="57150" dist="19050" dir="5400000" algn="ctr" rotWithShape="0">
               <a:srgbClr val="000000">
-                <a:alpha val="38000"/>
+                <a:alpha val="63000"/>
               </a:srgbClr>
             </a:outerShdw>
           </a:effectLst>
-        </a:effectStyle>
-        <a:effectStyle>
-          <a:effectLst>
-            <a:outerShdw blurRad="40000" dist="23000" dir="5400000" rotWithShape="0">
-              <a:srgbClr val="000000">
-                <a:alpha val="35000"/>
-              </a:srgbClr>
-            </a:outerShdw>
-          </a:effectLst>
-        </a:effectStyle>
-        <a:effectStyle>
-          <a:effectLst>
-            <a:outerShdw blurRad="40000" dist="23000" dir="5400000" rotWithShape="0">
-              <a:srgbClr val="000000">
-                <a:alpha val="35000"/>
-              </a:srgbClr>
-            </a:outerShdw>
-          </a:effectLst>
-          <a:scene3d>
-            <a:camera prst="orthographicFront">
-              <a:rot lat="0" lon="0" rev="0"/>
-            </a:camera>
-            <a:lightRig rig="threePt" dir="t">
-              <a:rot lat="0" lon="0" rev="1200000"/>
-            </a:lightRig>
-          </a:scene3d>
-          <a:sp3d>
-            <a:bevelT w="63500" h="25400"/>
-          </a:sp3d>
         </a:effectStyle>
       </a:effectStyleLst>
       <a:bgFillStyleLst>
         <a:solidFill>
           <a:schemeClr val="phClr"/>
         </a:solidFill>
+        <a:solidFill>
+          <a:schemeClr val="phClr">
+            <a:tint val="95000"/>
+            <a:satMod val="170000"/>
+          </a:schemeClr>
+        </a:solidFill>
         <a:gradFill rotWithShape="1">
           <a:gsLst>
             <a:gs pos="0">
               <a:schemeClr val="phClr">
-                <a:tint val="40000"/>
-                <a:satMod val="350000"/>
+                <a:tint val="93000"/>
+                <a:satMod val="150000"/>
+                <a:shade val="98000"/>
+                <a:lumMod val="102000"/>
               </a:schemeClr>
             </a:gs>
-            <a:gs pos="40000">
+            <a:gs pos="50000">
               <a:schemeClr val="phClr">
-                <a:tint val="45000"/>
-                <a:shade val="99000"/>
-                <a:satMod val="350000"/>
+                <a:tint val="98000"/>
+                <a:satMod val="130000"/>
+                <a:shade val="90000"/>
+                <a:lumMod val="103000"/>
               </a:schemeClr>
             </a:gs>
             <a:gs pos="100000">
               <a:schemeClr val="phClr">
-                <a:shade val="20000"/>
-                <a:satMod val="255000"/>
+                <a:shade val="63000"/>
+                <a:satMod val="120000"/>
               </a:schemeClr>
             </a:gs>
           </a:gsLst>
-          <a:path path="circle">
-            <a:fillToRect l="50000" t="-80000" r="50000" b="180000"/>
-          </a:path>
-        </a:gradFill>
-        <a:gradFill rotWithShape="1">
-          <a:gsLst>
-            <a:gs pos="0">
-              <a:schemeClr val="phClr">
-                <a:tint val="80000"/>
-                <a:satMod val="300000"/>
-              </a:schemeClr>
-            </a:gs>
-            <a:gs pos="100000">
-              <a:schemeClr val="phClr">
-                <a:shade val="30000"/>
-                <a:satMod val="200000"/>
-              </a:schemeClr>
-            </a:gs>
-          </a:gsLst>
-          <a:path path="circle">
-            <a:fillToRect l="50000" t="50000" r="50000" b="50000"/>
-          </a:path>
+          <a:lin ang="5400000" scaled="0"/>
         </a:gradFill>
       </a:bgFillStyleLst>
     </a:fmtScheme>
   </a:themeElements>
   <a:objectDefaults>
-    <a:spDef>
-      <a:spPr/>
-      <a:bodyPr/>
-      <a:lstStyle/>
-      <a:style>
-        <a:lnRef idx="1">
-          <a:schemeClr val="accent1"/>
-        </a:lnRef>
-        <a:fillRef idx="3">
-          <a:schemeClr val="accent1"/>
-        </a:fillRef>
-        <a:effectRef idx="2">
-          <a:schemeClr val="accent1"/>
-        </a:effectRef>
-        <a:fontRef idx="minor">
-          <a:schemeClr val="lt1"/>
-        </a:fontRef>
-      </a:style>
-    </a:spDef>
     <a:lnDef>
       <a:spPr/>
       <a:bodyPr/>
@@ -9195,5 +6663,10 @@
     </a:lnDef>
   </a:objectDefaults>
   <a:extraClrSchemeLst/>
+  <a:extLst>
+    <a:ext uri="{05A4C25C-085E-4340-85A3-A5531E510DB2}">
+      <thm15:themeFamily xmlns:thm15="http://schemas.microsoft.com/office/thememl/2012/main" name="Office Theme" id="{2E142A2C-CD16-42D6-873A-C26D2A0506FA}" vid="{1BDDFF52-6CD6-40A5-AB3C-68EB2F1E4D0A}"/>
+    </a:ext>
+  </a:extLst>
 </a:theme>
 </file>